--- a/Analysis/AP1_fibroblast_lab_meeting.pptx
+++ b/Analysis/AP1_fibroblast_lab_meeting.pptx
@@ -2425,8 +2425,8 @@
         </p:nvSpPr>
         <p:spPr>
           <a:xfrm>
-            <a:off x="502920" y="987552"/>
-            <a:ext cx="11155680" cy="292608"/>
+            <a:off x="502920" y="969264"/>
+            <a:ext cx="11155680" cy="310896"/>
           </a:xfrm>
           <a:prstGeom prst="rect">
             <a:avLst/>
@@ -2442,20 +2442,20 @@
               <a:buNone/>
             </a:pPr>
             <a:r>
-              <a:rPr lang="en-US" sz="1300" i="1" dirty="0">
+              <a:rPr lang="en-US" sz="1250" i="1" dirty="0">
                 <a:solidFill>
                   <a:srgbClr val="595959"/>
                 </a:solidFill>
               </a:rPr>
-              <a:t>Each element moved into 20 closed backgrounds, against the same sequence shuffled. 50 Stable and 200 Dynamic donors, whole-peak width.</a:t>
-            </a:r>
-            <a:endParaRPr lang="en-US" sz="1300" dirty="0"/>
+              <a:t>Each element moved into 20 closed backgrounds and scored against the same sequence shuffled; one point per donor, whole-peak width. Black, median with a bootstrap 95% CI; Mann–Whitney.</a:t>
+            </a:r>
+            <a:endParaRPr lang="en-US" sz="1250" dirty="0"/>
           </a:p>
         </p:txBody>
       </p:sp>
       <p:pic>
         <p:nvPicPr>
-          <p:cNvPr id="4" name="Image 0" descr="/Users/z5162865/WongLab/AlphaGenome_Ap1/Analysis/slide_figures/s_fb_transplant.png">    </p:cNvPr>
+          <p:cNvPr id="4" name="Image 0" descr="/Users/z5162865/WongLab/AlphaGenome_Ap1/Analysis/slide_figures/r_fb_transplant.png">    </p:cNvPr>
           <p:cNvPicPr>
             <a:picLocks noChangeAspect="1"/>
           </p:cNvPicPr>
@@ -2469,8 +2469,8 @@
         </p:blipFill>
         <p:spPr>
           <a:xfrm>
-            <a:off x="2093800" y="1371600"/>
-            <a:ext cx="7973920" cy="3749040"/>
+            <a:off x="3343940" y="1335024"/>
+            <a:ext cx="5473641" cy="3566160"/>
           </a:xfrm>
           <a:prstGeom prst="rect">
             <a:avLst/>
@@ -2485,8 +2485,8 @@
         </p:nvSpPr>
         <p:spPr>
           <a:xfrm>
-            <a:off x="502920" y="5321808"/>
-            <a:ext cx="50292" cy="868680"/>
+            <a:off x="502920" y="5047488"/>
+            <a:ext cx="50292" cy="731520"/>
           </a:xfrm>
           <a:prstGeom prst="rect">
             <a:avLst/>
@@ -2510,8 +2510,8 @@
         </p:nvSpPr>
         <p:spPr>
           <a:xfrm>
-            <a:off x="749808" y="5321808"/>
-            <a:ext cx="10881360" cy="868680"/>
+            <a:off x="749808" y="5047488"/>
+            <a:ext cx="10881360" cy="731520"/>
           </a:xfrm>
           <a:prstGeom prst="rect">
             <a:avLst/>
@@ -2535,6 +2535,42 @@
               <a:t>Stable AP-1 elements carry enough sequence to build their own accessible site. Dynamic ones do not — they need the neighbourhood they came from. That is "context, not sequence autonomy", shown by moving the sequence.</a:t>
             </a:r>
             <a:endParaRPr lang="en-US" sz="1700" dirty="0"/>
+          </a:p>
+        </p:txBody>
+      </p:sp>
+      <p:sp>
+        <p:nvSpPr>
+          <p:cNvPr id="7" name="Text 4"/>
+          <p:cNvSpPr txBox="1"/>
+          <p:nvPr/>
+        </p:nvSpPr>
+        <p:spPr>
+          <a:xfrm>
+            <a:off x="749808" y="5852160"/>
+            <a:ext cx="10881360" cy="603504"/>
+          </a:xfrm>
+          <a:prstGeom prst="rect">
+            <a:avLst/>
+          </a:prstGeom>
+          <a:noFill/>
+          <a:ln/>
+        </p:spPr>
+        <p:txBody>
+          <a:bodyPr wrap="square" lIns="0" tIns="0" rIns="0" bIns="0" rtlCol="0" anchor="t"/>
+          <a:lstStyle/>
+          <a:p>
+            <a:pPr indent="0" marL="0">
+              <a:buNone/>
+            </a:pPr>
+            <a:r>
+              <a:rPr lang="en-US" sz="1300" dirty="0">
+                <a:solidFill>
+                  <a:srgbClr val="595959"/>
+                </a:solidFill>
+              </a:rPr>
+              <a:t>Stable donors also come from more accessible loci. Holding that constant (measured ATAC, 224 donors) a Stable element still gains 1.8× more than a Dynamic one, P = 0.005 — the direction holds, but about a third of the gap above is accessibility rather than sequence.</a:t>
+            </a:r>
+            <a:endParaRPr lang="en-US" sz="1300" dirty="0"/>
           </a:p>
         </p:txBody>
       </p:sp>
@@ -2654,8 +2690,8 @@
         </p:nvSpPr>
         <p:spPr>
           <a:xfrm>
-            <a:off x="502920" y="987552"/>
-            <a:ext cx="11155680" cy="292608"/>
+            <a:off x="502920" y="969264"/>
+            <a:ext cx="11155680" cy="310896"/>
           </a:xfrm>
           <a:prstGeom prst="rect">
             <a:avLst/>
@@ -2671,20 +2707,20 @@
               <a:buNone/>
             </a:pPr>
             <a:r>
-              <a:rPr lang="en-US" sz="1300" i="1" dirty="0">
+              <a:rPr lang="en-US" sz="1250" i="1" dirty="0">
                 <a:solidFill>
                   <a:srgbClr val="595959"/>
                 </a:solidFill>
               </a:rPr>
-              <a:t>Every element swapped into every other site's location: regression of the swapped site's accessibility on the donor element and on the recipient location.</a:t>
-            </a:r>
-            <a:endParaRPr lang="en-US" sz="1300" dirty="0"/>
+              <a:t>Every element swapped into every other site's location: the swapped site's accessibility regressed on the donor element and on the recipient location. 62,250 swaps; 95% CI from a cluster bootstrap over the 250 donors.</a:t>
+            </a:r>
+            <a:endParaRPr lang="en-US" sz="1250" dirty="0"/>
           </a:p>
         </p:txBody>
       </p:sp>
       <p:pic>
         <p:nvPicPr>
-          <p:cNvPr id="4" name="Image 0" descr="/Users/z5162865/WongLab/AlphaGenome_Ap1/Analysis/slide_figures/s_fb_scale.png">    </p:cNvPr>
+          <p:cNvPr id="4" name="Image 0" descr="/Users/z5162865/WongLab/AlphaGenome_Ap1/Analysis/slide_figures/r_fb_scale.png">    </p:cNvPr>
           <p:cNvPicPr>
             <a:picLocks noChangeAspect="1"/>
           </p:cNvPicPr>
@@ -2698,8 +2734,8 @@
         </p:blipFill>
         <p:spPr>
           <a:xfrm>
-            <a:off x="2869860" y="1371600"/>
-            <a:ext cx="6421801" cy="3749040"/>
+            <a:off x="2939902" y="1335024"/>
+            <a:ext cx="6281715" cy="3858768"/>
           </a:xfrm>
           <a:prstGeom prst="rect">
             <a:avLst/>
@@ -2714,7 +2750,7 @@
         </p:nvSpPr>
         <p:spPr>
           <a:xfrm>
-            <a:off x="502920" y="5321808"/>
+            <a:off x="502920" y="5303520"/>
             <a:ext cx="50292" cy="868680"/>
           </a:xfrm>
           <a:prstGeom prst="rect">
@@ -2739,7 +2775,7 @@
         </p:nvSpPr>
         <p:spPr>
           <a:xfrm>
-            <a:off x="749808" y="5321808"/>
+            <a:off x="749808" y="5303520"/>
             <a:ext cx="10881360" cy="868680"/>
           </a:xfrm>
           <a:prstGeom prst="rect">
@@ -2883,8 +2919,8 @@
         </p:nvSpPr>
         <p:spPr>
           <a:xfrm>
-            <a:off x="502920" y="987552"/>
-            <a:ext cx="11155680" cy="292608"/>
+            <a:off x="502920" y="969264"/>
+            <a:ext cx="11155680" cy="310896"/>
           </a:xfrm>
           <a:prstGeom prst="rect">
             <a:avLst/>
@@ -2900,20 +2936,20 @@
               <a:buNone/>
             </a:pPr>
             <a:r>
-              <a:rPr lang="en-US" sz="1300" i="1" dirty="0">
+              <a:rPr lang="en-US" sz="1250" i="1" dirty="0">
                 <a:solidFill>
                   <a:srgbClr val="595959"/>
                 </a:solidFill>
               </a:rPr>
-              <a:t>The site's own AP-1 motif and each partner motif shuffled separately inside the same window; partners net of a width- and distance-matched footprint-free control.</a:t>
-            </a:r>
-            <a:endParaRPr lang="en-US" sz="1300" dirty="0"/>
+              <a:t>The site's own AP-1 motif and each partner motif shuffled separately inside the same window; partners net of a width- and distance-matched footprint-free control. Violin, all 2,352 sites; point, median with a bootstrap 95% CI; Mann–Whitney.</a:t>
+            </a:r>
+            <a:endParaRPr lang="en-US" sz="1250" dirty="0"/>
           </a:p>
         </p:txBody>
       </p:sp>
       <p:pic>
         <p:nvPicPr>
-          <p:cNvPr id="4" name="Image 0" descr="/Users/z5162865/WongLab/AlphaGenome_Ap1/Analysis/slide_figures/s_fb_specificity.png">    </p:cNvPr>
+          <p:cNvPr id="4" name="Image 0" descr="/Users/z5162865/WongLab/AlphaGenome_Ap1/Analysis/slide_figures/r_fb_specificity.png">    </p:cNvPr>
           <p:cNvPicPr>
             <a:picLocks noChangeAspect="1"/>
           </p:cNvPicPr>
@@ -2927,8 +2963,8 @@
         </p:blipFill>
         <p:spPr>
           <a:xfrm>
-            <a:off x="3196777" y="1371600"/>
-            <a:ext cx="5767965" cy="3749040"/>
+            <a:off x="2479243" y="1335024"/>
+            <a:ext cx="7203034" cy="3858768"/>
           </a:xfrm>
           <a:prstGeom prst="rect">
             <a:avLst/>
@@ -2943,7 +2979,7 @@
         </p:nvSpPr>
         <p:spPr>
           <a:xfrm>
-            <a:off x="502920" y="5321808"/>
+            <a:off x="502920" y="5303520"/>
             <a:ext cx="50292" cy="868680"/>
           </a:xfrm>
           <a:prstGeom prst="rect">
@@ -2968,7 +3004,7 @@
         </p:nvSpPr>
         <p:spPr>
           <a:xfrm>
-            <a:off x="749808" y="5321808"/>
+            <a:off x="749808" y="5303520"/>
             <a:ext cx="10881360" cy="868680"/>
           </a:xfrm>
           <a:prstGeom prst="rect">
@@ -3112,8 +3148,8 @@
         </p:nvSpPr>
         <p:spPr>
           <a:xfrm>
-            <a:off x="502920" y="987552"/>
-            <a:ext cx="11155680" cy="292608"/>
+            <a:off x="502920" y="969264"/>
+            <a:ext cx="11155680" cy="310896"/>
           </a:xfrm>
           <a:prstGeom prst="rect">
             <a:avLst/>
@@ -3129,20 +3165,20 @@
               <a:buNone/>
             </a:pPr>
             <a:r>
-              <a:rPr lang="en-US" sz="1300" i="1" dirty="0">
+              <a:rPr lang="en-US" sz="1250" i="1" dirty="0">
                 <a:solidFill>
                   <a:srgbClr val="595959"/>
                 </a:solidFill>
               </a:rPr>
-              <a:t>Per site: |own AP-1| / (|own AP-1| + |partner motifs|). Both terms are AlphaGenome shuffle effects measured inside the same window, so accessibility cannot drive the comparison.</a:t>
-            </a:r>
-            <a:endParaRPr lang="en-US" sz="1300" dirty="0"/>
+              <a:t>Per site: |own AP-1| / (|own AP-1| + |partner motifs|). Both terms are AlphaGenome shuffle effects measured inside the same window, so accessibility cannot drive the comparison. Violin with box (median, IQR); Mann–Whitney.</a:t>
+            </a:r>
+            <a:endParaRPr lang="en-US" sz="1250" dirty="0"/>
           </a:p>
         </p:txBody>
       </p:sp>
       <p:pic>
         <p:nvPicPr>
-          <p:cNvPr id="4" name="Image 0" descr="/Users/z5162865/WongLab/AlphaGenome_Ap1/Analysis/slide_figures/s_fb_share.png">    </p:cNvPr>
+          <p:cNvPr id="4" name="Image 0" descr="/Users/z5162865/WongLab/AlphaGenome_Ap1/Analysis/slide_figures/r_fb_share.png">    </p:cNvPr>
           <p:cNvPicPr>
             <a:picLocks noChangeAspect="1"/>
           </p:cNvPicPr>
@@ -3156,8 +3192,8 @@
         </p:blipFill>
         <p:spPr>
           <a:xfrm>
-            <a:off x="2987316" y="1371600"/>
-            <a:ext cx="6186887" cy="3749040"/>
+            <a:off x="3250997" y="1335024"/>
+            <a:ext cx="5659526" cy="3858768"/>
           </a:xfrm>
           <a:prstGeom prst="rect">
             <a:avLst/>
@@ -3172,7 +3208,7 @@
         </p:nvSpPr>
         <p:spPr>
           <a:xfrm>
-            <a:off x="502920" y="5321808"/>
+            <a:off x="502920" y="5303520"/>
             <a:ext cx="50292" cy="868680"/>
           </a:xfrm>
           <a:prstGeom prst="rect">
@@ -3197,7 +3233,7 @@
         </p:nvSpPr>
         <p:spPr>
           <a:xfrm>
-            <a:off x="749808" y="5321808"/>
+            <a:off x="749808" y="5303520"/>
             <a:ext cx="10881360" cy="868680"/>
           </a:xfrm>
           <a:prstGeom prst="rect">

--- a/Analysis/AP1_fibroblast_lab_meeting.pptx
+++ b/Analysis/AP1_fibroblast_lab_meeting.pptx
@@ -13,9 +13,10 @@
     <p:sldId id="261" r:id="rId7"/>
     <p:sldId id="262" r:id="rId8"/>
     <p:sldId id="263" r:id="rId9"/>
+    <p:sldId id="264" r:id="rId10"/>
   </p:sldIdLst>
   <p:notesMasterIdLst>
-    <p:notesMasterId r:id="rId10"/>
+    <p:notesMasterId r:id="rId11"/>
   </p:notesMasterIdLst>
   <p:sldSz cx="12192000" cy="6858000"/>
   <p:notesSz cx="6858000" cy="12192000"/>
@@ -685,8 +686,8 @@
           <a:p>
             <a:r>
               <a:rPr lang="en-US" dirty="0"/>
-              <a:t>Per-donor medians over 20 hosts: Stable +4.65 log2 (25x), Dynamic +2.35 (5.1x), p = 4e-5.
-By class: Age Down +2.62, Age Up +2.66, Exercise Down +2.20, Exercise Up +2.14, Stable +4.65.
+              <a:t>Per-donor medians over 20 hosts: Stable +4.65 log2 (25x), Dynamic pooled +2.35 (5.1x), p = 1.5e-5.
+By class, as plotted: Stable 25x, Age Up 6.3x, Age Down 6.1x, Exercise Down 4.6x, Exercise Up 4.4x. Every Dynamic class sits well below Stable and they are close to each other, which is why pooling them is fair here.
 IMPORTANT CAVEAT, be ready for this question: the donors are not matched on accessibility - Stable donors come from loci about 1.8x more accessible (measured ATAC: 32.2 vs 18.0 CPM/kb). Matching on MEASURED fibroblast ATAC (model-independent), the residual Stable advantage is +0.84 +- 0.30 log2, i.e. about 1.8x, p = 0.005 (covariance adjustment, 224 donors). The 47 matched pairs point the same way (+0.99) but are underpowered (p = 0.13). So: direction solid, magnitude about a third to a half of the raw gap. Do not defend 25x vs 5x as a sequence effect.
 Also worth knowing: 0 of 50 Stable donors lack a measured ATAC peak, against 5-8 per Dynamic class.</a:t>
             </a:r>
@@ -866,8 +867,8 @@
           <a:p>
             <a:r>
               <a:rPr lang="en-US" dirty="0"/>
-              <a:t>2,352 sites. Own AP-1 motif: Stable -1.21 (n=1179), AP-1 gained -1.19 (n=605, p = 0.93 vs Stable), AP-1 lost -0.78 (n=209, p = 2.3e-5 vs Stable).
-Partner motifs, net of control: Stable -0.20, gained -0.25, lost -0.22 - no class difference (lost vs Stable p = 0.66). So the deficit is AP-1-specific, not general weakness. No single partner family takes over: nothing survives FDR in the per-family split.
+              <a:t>2,352 sites. Own AP-1 motif: Stable -1.21 (n=1179), AP-1 gained -1.19 (n=605, p = 0.93 vs Stable), Dynamic but not age-driven -1.10 (n=347, p = 0.055), AP-1 lost -0.78 (n=209, p = 2.3e-5).
+Partner motifs, net of control: Stable -0.20, gained -0.25, not age-driven -0.27, lost -0.22 - no class difference (vs Stable: p = 0.13, 0.23, 0.66). So the deficit is AP-1-specific, not general weakness. No single partner family takes over: nothing survives FDR in the per-family split.
 Agreement: pooled Stable vs Dynamic at the motif is a null, which matches the manuscript's core-scramble result (no class difference). Age-gained being on par with Stable is the sequence-level version of 'age-gained reporter activity on par with stable'.
 Caveat: the own-AP-1 bar has no matched control, because one at distance 0 would overlap the motif. That inflates AP-1 relative to the partners in every class equally, so the class comparison is unaffected.</a:t>
             </a:r>
@@ -957,10 +958,10 @@
           <a:p>
             <a:r>
               <a:rPr lang="en-US" dirty="0"/>
-              <a:t>Stable 0.804 (n=1176) vs Dynamic 0.745 (n=1156), p = 7.5e-11. Every Dynamic class sits below Stable: AP-1 gained 0.754 (p = 6e-5), AP-1 lost 0.736 (p = 6e-6), other Dynamic 0.727 (p = 1.5e-8). Kruskal across the four, p = 1.7e-10.
-Detection check, in case it is asked: footprint calling needs signal, so Stable sites carry more detected partners (5.89 vs 5.01 per site, p = 2e-82). Restricting to the 1,808 sites that hit the cap of 6 detected partners, the gap is unchanged: 0.806 vs 0.736, p = 2.1e-13. Not a detection artefact.
-Note this is a DIFFERENT statement from the previous slide. There, only the AP-1-losing class drops in absolute AP-1 dependence. Here, all Dynamic classes are modestly less AP-1-centric in relative terms.
-The equivalent tile-scan measure (motif share vs a 10-50 bp collar) does NOT survive accessibility matching (p = 0.11); the collar is mostly noise at low-accessibility sites. This version is better powered because it only scores footprinted motifs.</a:t>
+              <a:t>2,359 sites, 60 tiles each, fine-tuned FB head, readout atac_170. Top tile on the AP-1 core: Stable 55.7%, AP-1 gained 53.3%, AP-1 lost 50.5%, other Dynamic 50.1%. Stable vs Dynamic Fisher p = 0.063; chi-square across the four p = 0.14.
+Accessibility-matched (860 pairs, caliper 0.1 log10): 56.3% vs 53.3%, McNemar on the 398 discordant pairs p = 0.21. The core tile's median rank is 1 of 60 in BOTH classes.
+Why this was run: the ratio measures (motif share vs a collar) scale with a site's signal and the scan version does not survive matching (p = 0.11). A rank is invariant to that, so it is the honest version of the question - and the answer is no difference. Say that out loud rather than hiding the slide; it makes the next one credible.
+Good question to expect: why is 56% not higher? Each of the two core tiles covers only 5-6 bp of the 11 bp motif, so a site whose dependence is spread over the full core can have a flanking tile win.</a:t>
             </a:r>
             <a:endParaRPr lang="en-US" dirty="0"/>
           </a:p>
@@ -1048,8 +1049,11 @@
           <a:p>
             <a:r>
               <a:rPr lang="en-US" dirty="0"/>
-              <a:t>From the fibroblast titration, 2,359 sites, 860 accessibility-matched pairs (caliper 0.1 log10). This slide is the argument for why the matched analysis is worth doing - two of the five largest raw class differences in the titration were entirely explained by the accessibility gap.
-Age Down is the outlier again, consistently with the other arms: one base of the core changed -0.62 vs Stable -0.83; motif gone -0.72 vs -1.07.</a:t>
+              <a:t>Stable 0.804 (n=1179) vs Dynamic pooled 0.745 (n=1161), p = 7.2e-11. By class: AP-1 gained 0.755, AP-1 lost 0.734, Dynamic not age-driven 0.727. Kruskal across the four, p = 1.7e-10.
+The 40%: partner share 19.6% for Stable against 24.5 / 26.6 / 27.3% for the Dynamic classes, so 27.3/19.6 = 1.39x. It is the same number as 80 vs 73, read from the other end - say it whichever way, but do not say both as if they were two results.
+Detection check, in case it is asked: footprint calling needs signal, so Stable sites carry more detected partners (5.89 vs 5.01 per site, p = 2e-82). Restricting to the 1,808 sites that hit the cap of 6 detected partners, the gap is unchanged: 0.806 vs 0.736, p = 2.1e-13. Not a detection artefact.
+Note this is a DIFFERENT statement from slide 5. There, only the AP-1-losing class drops in absolute AP-1 dependence. Here, all Dynamic classes are modestly less AP-1-centric in relative terms.
+The equivalent tile-scan measure (motif share vs a 10-50 bp collar) does NOT survive accessibility matching (p = 0.11); the collar is mostly noise at low-accessibility sites. This version is better powered because it only scores footprinted motifs.</a:t>
             </a:r>
             <a:endParaRPr lang="en-US" dirty="0"/>
           </a:p>
@@ -1137,8 +1141,8 @@
           <a:p>
             <a:r>
               <a:rPr lang="en-US" dirty="0"/>
-              <a:t>If the flank question comes up: the MPRA destroys the flanks of a 170 bp fragment on a plasmid and reads transcription; we move an intact ~0.8 kb element into closed chromatin and read accessibility. There is no chromatin to open in the MPRA. The honest shared conclusion is that neither assay finds much class information in 170 bp.
-Everything here is predicted accessibility from a model fine-tuned on our own fibroblast ATAC, not a measurement, and not the MPRA-trained probe used in the manuscript.</a:t>
+              <a:t>From the fibroblast titration, 2,359 sites, 860 accessibility-matched pairs (caliper 0.1 log10). This slide is the argument for why the matched analysis is worth doing - two of the five largest raw class differences in the titration were entirely explained by the accessibility gap.
+Age Down is the outlier again, consistently with the other arms: one base of the core changed -0.62 vs Stable -0.83; motif gone -0.72 vs -1.07.</a:t>
             </a:r>
             <a:endParaRPr lang="en-US" dirty="0"/>
           </a:p>
@@ -1162,6 +1166,95 @@
             <a:fld id="{F7021451-1387-4CA6-816F-3879F97B5CBC}" type="slidenum">
               <a:rPr lang="en-US"/>
               <a:t>8</a:t>
+            </a:fld>
+            <a:endParaRPr lang="en-US"/>
+          </a:p>
+        </p:txBody>
+      </p:sp>
+    </p:spTree>
+    <p:extLst>
+      <p:ext uri="{BB962C8B-B14F-4D97-AF65-F5344CB8AC3E}">
+        <p14:creationId xmlns:p14="http://schemas.microsoft.com/office/powerpoint/2010/main" val="1024086991"/>
+      </p:ext>
+    </p:extLst>
+  </p:cSld>
+  <p:clrMapOvr>
+    <a:masterClrMapping/>
+  </p:clrMapOvr>
+</p:notes>
+</file>
+
+<file path=ppt/notesSlides/notesSlide9.xml><?xml version="1.0" encoding="utf-8"?>
+<p:notes xmlns:a="http://schemas.openxmlformats.org/drawingml/2006/main" xmlns:r="http://schemas.openxmlformats.org/officeDocument/2006/relationships" xmlns:p="http://schemas.openxmlformats.org/presentationml/2006/main">
+  <p:cSld>
+    <p:spTree>
+      <p:nvGrpSpPr>
+        <p:cNvPr id="1" name=""/>
+        <p:cNvGrpSpPr/>
+        <p:nvPr/>
+      </p:nvGrpSpPr>
+      <p:grpSpPr>
+        <a:xfrm>
+          <a:off x="0" y="0"/>
+          <a:ext cx="0" cy="0"/>
+          <a:chOff x="0" y="0"/>
+          <a:chExt cx="0" cy="0"/>
+        </a:xfrm>
+      </p:grpSpPr>
+      <p:sp>
+        <p:nvSpPr>
+          <p:cNvPr id="2" name="Slide Image Placeholder 1"/>
+          <p:cNvSpPr>
+            <a:spLocks noGrp="1" noRot="1" noChangeAspect="1"/>
+          </p:cNvSpPr>
+          <p:nvPr>
+            <p:ph type="sldImg"/>
+          </p:nvPr>
+        </p:nvSpPr>
+        <p:spPr/>
+      </p:sp>
+      <p:sp>
+        <p:nvSpPr>
+          <p:cNvPr id="3" name="Notes Placeholder 2"/>
+          <p:cNvSpPr>
+            <a:spLocks noGrp="1"/>
+          </p:cNvSpPr>
+          <p:nvPr>
+            <p:ph type="body" idx="1"/>
+          </p:nvPr>
+        </p:nvSpPr>
+        <p:spPr/>
+        <p:txBody>
+          <a:bodyPr/>
+          <a:lstStyle/>
+          <a:p>
+            <a:r>
+              <a:rPr lang="en-US" dirty="0"/>
+              <a:t>If the flank question comes up: the MPRA destroys the flanks of a 170 bp fragment on a plasmid and reads transcription; we move an intact ~0.8 kb element into closed chromatin and read accessibility. There is no chromatin to open in the MPRA. The honest shared conclusion is that neither assay finds much class information in 170 bp.
+Everything here is predicted accessibility from a model fine-tuned on our own fibroblast ATAC, not a measurement, and not the MPRA-trained probe used in the manuscript.</a:t>
+            </a:r>
+            <a:endParaRPr lang="en-US" dirty="0"/>
+          </a:p>
+        </p:txBody>
+      </p:sp>
+      <p:sp>
+        <p:nvSpPr>
+          <p:cNvPr id="4" name="Slide Number Placeholder 3"/>
+          <p:cNvSpPr>
+            <a:spLocks noGrp="1"/>
+          </p:cNvSpPr>
+          <p:nvPr>
+            <p:ph type="sldNum" sz="quarter" idx="10"/>
+          </p:nvPr>
+        </p:nvSpPr>
+        <p:spPr/>
+        <p:txBody>
+          <a:bodyPr/>
+          <a:lstStyle/>
+          <a:p>
+            <a:fld id="{F7021451-1387-4CA6-816F-3879F97B5CBC}" type="slidenum">
+              <a:rPr lang="en-US"/>
+              <a:t>9</a:t>
             </a:fld>
             <a:endParaRPr lang="en-US"/>
           </a:p>
@@ -2447,7 +2540,7 @@
                   <a:srgbClr val="595959"/>
                 </a:solidFill>
               </a:rPr>
-              <a:t>Each element moved into 20 closed backgrounds and scored against the same sequence shuffled; one point per donor, whole-peak width. Black, median with a bootstrap 95% CI; Mann–Whitney.</a:t>
+              <a:t>Each element moved into 20 closed backgrounds and scored against the same sequence shuffled; one point per donor, whole-peak width. Box, median and IQR, whiskers 1.5 × IQR; 50 donors per class; Mann–Whitney, Stable against the four Dynamic classes pooled.</a:t>
             </a:r>
             <a:endParaRPr lang="en-US" sz="1250" dirty="0"/>
           </a:p>
@@ -2469,8 +2562,8 @@
         </p:blipFill>
         <p:spPr>
           <a:xfrm>
-            <a:off x="3343940" y="1335024"/>
-            <a:ext cx="5473641" cy="3566160"/>
+            <a:off x="1171501" y="1335024"/>
+            <a:ext cx="9818518" cy="3566160"/>
           </a:xfrm>
           <a:prstGeom prst="rect">
             <a:avLst/>
@@ -2492,7 +2585,7 @@
             <a:avLst/>
           </a:prstGeom>
           <a:solidFill>
-            <a:srgbClr val="C2551C"/>
+            <a:srgbClr val="3F3F3F"/>
           </a:solidFill>
           <a:ln w="12700">
             <a:solidFill>
@@ -2712,7 +2805,7 @@
                   <a:srgbClr val="595959"/>
                 </a:solidFill>
               </a:rPr>
-              <a:t>Every element swapped into every other site's location: the swapped site's accessibility regressed on the donor element and on the recipient location. 62,250 swaps; 95% CI from a cluster bootstrap over the 250 donors.</a:t>
+              <a:t>Every element swapped into every other site's location: the swapped site's accessibility regressed on the donor element and on the recipient location. The two weights are drawn pulling against each other from a common zero. 62,250 swaps; 95% CI from a cluster bootstrap over the 250 donors.</a:t>
             </a:r>
             <a:endParaRPr lang="en-US" sz="1250" dirty="0"/>
           </a:p>
@@ -2734,8 +2827,8 @@
         </p:blipFill>
         <p:spPr>
           <a:xfrm>
-            <a:off x="2939902" y="1335024"/>
-            <a:ext cx="6281715" cy="3858768"/>
+            <a:off x="1064362" y="1335024"/>
+            <a:ext cx="10032797" cy="3858768"/>
           </a:xfrm>
           <a:prstGeom prst="rect">
             <a:avLst/>
@@ -2757,7 +2850,7 @@
             <a:avLst/>
           </a:prstGeom>
           <a:solidFill>
-            <a:srgbClr val="C2551C"/>
+            <a:srgbClr val="3F3F3F"/>
           </a:solidFill>
           <a:ln w="12700">
             <a:solidFill>
@@ -2941,7 +3034,7 @@
                   <a:srgbClr val="595959"/>
                 </a:solidFill>
               </a:rPr>
-              <a:t>The site's own AP-1 motif and each partner motif shuffled separately inside the same window; partners net of a width- and distance-matched footprint-free control. Violin, all 2,352 sites; point, median with a bootstrap 95% CI; Mann–Whitney.</a:t>
+              <a:t>The site's own AP-1 motif and each partner motif shuffled separately inside the same window; partners net of a width- and distance-matched footprint-free control. Box, median and IQR, whiskers 5th–95th centile; the notch is a 95% interval on the median. Dynamic split into the age classes as given. Mann–Whitney against Stable.</a:t>
             </a:r>
             <a:endParaRPr lang="en-US" sz="1250" dirty="0"/>
           </a:p>
@@ -2963,8 +3056,8 @@
         </p:blipFill>
         <p:spPr>
           <a:xfrm>
-            <a:off x="2479243" y="1335024"/>
-            <a:ext cx="7203034" cy="3858768"/>
+            <a:off x="1064362" y="1335024"/>
+            <a:ext cx="10032797" cy="3858768"/>
           </a:xfrm>
           <a:prstGeom prst="rect">
             <a:avLst/>
@@ -2986,7 +3079,7 @@
             <a:avLst/>
           </a:prstGeom>
           <a:solidFill>
-            <a:srgbClr val="C2551C"/>
+            <a:srgbClr val="3F3F3F"/>
           </a:solidFill>
           <a:ln w="12700">
             <a:solidFill>
@@ -3026,7 +3119,7 @@
                   <a:srgbClr val="111111"/>
                 </a:solidFill>
               </a:rPr>
-              <a:t>Sites that lose AP-1 binding with age were never strongly AP-1-driven: they depend 36% less on their own motif while using every other motif exactly as much. Sites that gain AP-1 with age are indistinguishable from Stable.</a:t>
+              <a:t>Sites that lose AP-1 binding with age were never strongly AP-1-driven: they depend 36% less on their own motif while using every other motif exactly as much. Sites that gain AP-1 with age are indistinguishable from Stable — so "Dynamic" is not one thing, and splitting it is what shows that.</a:t>
             </a:r>
             <a:endParaRPr lang="en-US" sz="1700" dirty="0"/>
           </a:p>
@@ -3134,7 +3227,7 @@
                   <a:schemeClr val="tx1"/>
                 </a:solidFill>
               </a:rPr>
-              <a:t>Stable sites are more AP-1-centric; Dynamic sites spread it around</a:t>
+              <a:t>AlphaGenome puts the motif first — at every class equally</a:t>
             </a:r>
             <a:endParaRPr lang="en-US" sz="2800" dirty="0"/>
           </a:p>
@@ -3170,7 +3263,7 @@
                   <a:srgbClr val="595959"/>
                 </a:solidFill>
               </a:rPr>
-              <a:t>Per site: |own AP-1| / (|own AP-1| + |partner motifs|). Both terms are AlphaGenome shuffle effects measured inside the same window, so accessibility cannot drive the comparison. Violin with box (median, IQR); Mann–Whitney.</a:t>
+              <a:t>Each site's 600 bp scanned with 60 replaced 10 bp tiles; for each site, where does the single most costly tile fall? Two of the 60 tiles overlap the AP-1 core, so chance is 3.3% (dashed line). Fisher exact, Stable against Dynamic.</a:t>
             </a:r>
             <a:endParaRPr lang="en-US" sz="1250" dirty="0"/>
           </a:p>
@@ -3178,7 +3271,7 @@
       </p:sp>
       <p:pic>
         <p:nvPicPr>
-          <p:cNvPr id="4" name="Image 0" descr="/Users/z5162865/WongLab/AlphaGenome_Ap1/Analysis/slide_figures/r_fb_share.png">    </p:cNvPr>
+          <p:cNvPr id="4" name="Image 0" descr="/Users/z5162865/WongLab/AlphaGenome_Ap1/Analysis/slide_figures/r_fb_top_tile.png">    </p:cNvPr>
           <p:cNvPicPr>
             <a:picLocks noChangeAspect="1"/>
           </p:cNvPicPr>
@@ -3192,8 +3285,8 @@
         </p:blipFill>
         <p:spPr>
           <a:xfrm>
-            <a:off x="3250997" y="1335024"/>
-            <a:ext cx="5659526" cy="3858768"/>
+            <a:off x="1381001" y="1335024"/>
+            <a:ext cx="9399519" cy="3566160"/>
           </a:xfrm>
           <a:prstGeom prst="rect">
             <a:avLst/>
@@ -3208,14 +3301,14 @@
         </p:nvSpPr>
         <p:spPr>
           <a:xfrm>
-            <a:off x="502920" y="5303520"/>
-            <a:ext cx="50292" cy="868680"/>
+            <a:off x="502920" y="5047488"/>
+            <a:ext cx="50292" cy="731520"/>
           </a:xfrm>
           <a:prstGeom prst="rect">
             <a:avLst/>
           </a:prstGeom>
           <a:solidFill>
-            <a:srgbClr val="C2551C"/>
+            <a:srgbClr val="3F3F3F"/>
           </a:solidFill>
           <a:ln w="12700">
             <a:solidFill>
@@ -3233,8 +3326,8 @@
         </p:nvSpPr>
         <p:spPr>
           <a:xfrm>
-            <a:off x="749808" y="5303520"/>
-            <a:ext cx="10881360" cy="868680"/>
+            <a:off x="749808" y="5047488"/>
+            <a:ext cx="10881360" cy="731520"/>
           </a:xfrm>
           <a:prstGeom prst="rect">
             <a:avLst/>
@@ -3255,9 +3348,45 @@
                   <a:srgbClr val="111111"/>
                 </a:solidFill>
               </a:rPr>
-              <a:t>A Stable site puts 80% of its motif dependence on AP-1 itself; a Dynamic site 74%, with the rest spread across partner motifs. Modest, but it is the AP-1-centric vs distributed picture, measured rather than inferred.</a:t>
+              <a:t>In over half of all sites the most important 10 bp of the whole window is the AP-1 core itself — about 16× chance, and nobody told the model where the motif was. But this is the same in every class: whether AP-1 is the dominant element is not what separates Stable from Dynamic.</a:t>
             </a:r>
             <a:endParaRPr lang="en-US" sz="1700" dirty="0"/>
+          </a:p>
+        </p:txBody>
+      </p:sp>
+      <p:sp>
+        <p:nvSpPr>
+          <p:cNvPr id="7" name="Text 4"/>
+          <p:cNvSpPr txBox="1"/>
+          <p:nvPr/>
+        </p:nvSpPr>
+        <p:spPr>
+          <a:xfrm>
+            <a:off x="749808" y="5852160"/>
+            <a:ext cx="10881360" cy="603504"/>
+          </a:xfrm>
+          <a:prstGeom prst="rect">
+            <a:avLst/>
+          </a:prstGeom>
+          <a:noFill/>
+          <a:ln/>
+        </p:spPr>
+        <p:txBody>
+          <a:bodyPr wrap="square" lIns="0" tIns="0" rIns="0" bIns="0" rtlCol="0" anchor="t"/>
+          <a:lstStyle/>
+          <a:p>
+            <a:pPr indent="0" marL="0">
+              <a:buNone/>
+            </a:pPr>
+            <a:r>
+              <a:rPr lang="en-US" sz="1300" dirty="0">
+                <a:solidFill>
+                  <a:srgbClr val="595959"/>
+                </a:solidFill>
+              </a:rPr>
+              <a:t>A deliberate negative. A rank cannot be moved by the accessibility gap, so this is the measure most likely to be a real class difference — and it is not one (matched: 56.3% vs 53.3%, P = 0.21). What does differ is the next slide: not whether AP-1 leads, but by how much.</a:t>
+            </a:r>
+            <a:endParaRPr lang="en-US" sz="1300" dirty="0"/>
           </a:p>
         </p:txBody>
       </p:sp>
@@ -3363,7 +3492,7 @@
                   <a:schemeClr val="tx1"/>
                 </a:solidFill>
               </a:rPr>
-              <a:t>Two differences that turned out to be accessibility</a:t>
+              <a:t>Dynamic sites hand more of the load to the partner motifs</a:t>
             </a:r>
             <a:endParaRPr lang="en-US" sz="2800" dirty="0"/>
           </a:p>
@@ -3371,16 +3500,14 @@
       </p:sp>
       <p:sp>
         <p:nvSpPr>
-          <p:cNvPr id="3" name="Text 0"/>
-          <p:cNvSpPr/>
-          <p:nvPr>
-            <p:ph idx="101" type="body" hasCustomPrompt="1"/>
-          </p:nvPr>
-        </p:nvSpPr>
-        <p:spPr>
-          <a:xfrm>
-            <a:off x="502920" y="1234440"/>
-            <a:ext cx="11155680" cy="5029200"/>
+          <p:cNvPr id="3" name="Text 1"/>
+          <p:cNvSpPr txBox="1"/>
+          <p:nvPr/>
+        </p:nvSpPr>
+        <p:spPr>
+          <a:xfrm>
+            <a:off x="502920" y="969264"/>
+            <a:ext cx="11155680" cy="310896"/>
           </a:xfrm>
           <a:prstGeom prst="rect">
             <a:avLst/>
@@ -3389,179 +3516,104 @@
           <a:ln/>
         </p:spPr>
         <p:txBody>
-          <a:bodyPr wrap="square" rtlCol="0" anchor="t"/>
+          <a:bodyPr wrap="square" lIns="0" tIns="0" rIns="0" bIns="0" rtlCol="0" anchor="ctr"/>
           <a:lstStyle/>
           <a:p>
-            <a:pPr algn="l" marL="342900" indent="-342900">
-              <a:spcBef>
-                <a:spcPts val="1100"/>
-              </a:spcBef>
-              <a:spcAft>
-                <a:spcPts val="300"/>
-              </a:spcAft>
-              <a:buSzPct val="100000"/>
-              <a:buChar char="•"/>
-            </a:pPr>
-            <a:r>
-              <a:rPr lang="en-US" sz="1700" b="1" dirty="0">
+            <a:pPr indent="0" marL="0">
+              <a:buNone/>
+            </a:pPr>
+            <a:r>
+              <a:rPr lang="en-US" sz="1250" i="1" dirty="0">
+                <a:solidFill>
+                  <a:srgbClr val="595959"/>
+                </a:solidFill>
+              </a:rPr>
+              <a:t>Per site: |own AP-1| / (|own AP-1| + |partner motifs|), the share of its motif dependence that sits inside the AP-1 motif rather than outside it. Both terms are AlphaGenome shuffle effects measured inside the same window, so accessibility cannot drive the comparison. Median per site; error bar, bootstrap 95% CI; Mann–Whitney.</a:t>
+            </a:r>
+            <a:endParaRPr lang="en-US" sz="1250" dirty="0"/>
+          </a:p>
+        </p:txBody>
+      </p:sp>
+      <p:pic>
+        <p:nvPicPr>
+          <p:cNvPr id="4" name="Image 0" descr="/Users/z5162865/WongLab/AlphaGenome_Ap1/Analysis/slide_figures/r_fb_share.png">    </p:cNvPr>
+          <p:cNvPicPr>
+            <a:picLocks noChangeAspect="1"/>
+          </p:cNvPicPr>
+          <p:nvPr/>
+        </p:nvPicPr>
+        <p:blipFill>
+          <a:blip r:embed="rId1"/>
+          <a:stretch>
+            <a:fillRect/>
+          </a:stretch>
+        </p:blipFill>
+        <p:spPr>
+          <a:xfrm>
+            <a:off x="1064362" y="1335024"/>
+            <a:ext cx="10032797" cy="3858768"/>
+          </a:xfrm>
+          <a:prstGeom prst="rect">
+            <a:avLst/>
+          </a:prstGeom>
+        </p:spPr>
+      </p:pic>
+      <p:sp>
+        <p:nvSpPr>
+          <p:cNvPr id="5" name="Shape 2"/>
+          <p:cNvSpPr/>
+          <p:nvPr/>
+        </p:nvSpPr>
+        <p:spPr>
+          <a:xfrm>
+            <a:off x="502920" y="5303520"/>
+            <a:ext cx="50292" cy="868680"/>
+          </a:xfrm>
+          <a:prstGeom prst="rect">
+            <a:avLst/>
+          </a:prstGeom>
+          <a:solidFill>
+            <a:srgbClr val="3F3F3F"/>
+          </a:solidFill>
+          <a:ln w="12700">
+            <a:solidFill>
+              <a:srgbClr val="333333"/>
+            </a:solidFill>
+            <a:prstDash val="solid"/>
+          </a:ln>
+        </p:spPr>
+      </p:sp>
+      <p:sp>
+        <p:nvSpPr>
+          <p:cNvPr id="6" name="Text 3"/>
+          <p:cNvSpPr txBox="1"/>
+          <p:nvPr/>
+        </p:nvSpPr>
+        <p:spPr>
+          <a:xfrm>
+            <a:off x="749808" y="5303520"/>
+            <a:ext cx="10881360" cy="868680"/>
+          </a:xfrm>
+          <a:prstGeom prst="rect">
+            <a:avLst/>
+          </a:prstGeom>
+          <a:noFill/>
+          <a:ln/>
+        </p:spPr>
+        <p:txBody>
+          <a:bodyPr wrap="square" lIns="0" tIns="0" rIns="0" bIns="0" rtlCol="0" anchor="ctr"/>
+          <a:lstStyle/>
+          <a:p>
+            <a:pPr indent="0" marL="0">
+              <a:buNone/>
+            </a:pPr>
+            <a:r>
+              <a:rPr lang="en-US" sz="1700" dirty="0">
                 <a:solidFill>
                   <a:srgbClr val="111111"/>
                 </a:solidFill>
               </a:rPr>
-              <a:t>A second AP-1 copy looked worth more to Dynamic sites</a:t>
-            </a:r>
-            <a:endParaRPr lang="en-US" sz="1700" dirty="0"/>
-          </a:p>
-          <a:p>
-            <a:pPr algn="l" lvl="1" marL="685800" indent="-342900">
-              <a:spcAft>
-                <a:spcPts val="400"/>
-              </a:spcAft>
-              <a:buSzPct val="100000"/>
-              <a:buChar char="▪"/>
-            </a:pPr>
-            <a:r>
-              <a:rPr lang="en-US" sz="1450" dirty="0">
-                <a:solidFill>
-                  <a:srgbClr val="595959"/>
-                </a:solidFill>
-              </a:rPr>
-              <a:t>+0.72 vs +0.60 log2, p &lt; 1e-4 — matched on accessibility, p = 0.93. Gone.</a:t>
-            </a:r>
-            <a:endParaRPr lang="en-US" sz="1700" dirty="0"/>
-          </a:p>
-          <a:p>
-            <a:pPr algn="l" marL="342900" indent="-342900">
-              <a:spcBef>
-                <a:spcPts val="1100"/>
-              </a:spcBef>
-              <a:spcAft>
-                <a:spcPts val="300"/>
-              </a:spcAft>
-              <a:buSzPct val="100000"/>
-              <a:buChar char="•"/>
-            </a:pPr>
-            <a:r>
-              <a:rPr lang="en-US" sz="1700" b="1" dirty="0">
-                <a:solidFill>
-                  <a:srgbClr val="111111"/>
-                </a:solidFill>
-              </a:rPr>
-              <a:t>Upgrading an imperfect core to a perfect TGAGTCA looked worth more to Dynamic sites</a:t>
-            </a:r>
-            <a:endParaRPr lang="en-US" sz="1700" dirty="0"/>
-          </a:p>
-          <a:p>
-            <a:pPr algn="l" lvl="1" marL="685800" indent="-342900">
-              <a:spcAft>
-                <a:spcPts val="400"/>
-              </a:spcAft>
-              <a:buSzPct val="100000"/>
-              <a:buChar char="▪"/>
-            </a:pPr>
-            <a:r>
-              <a:rPr lang="en-US" sz="1450" dirty="0">
-                <a:solidFill>
-                  <a:srgbClr val="595959"/>
-                </a:solidFill>
-              </a:rPr>
-              <a:t>+0.66 vs +0.52, p &lt; 1e-4 — matched, p = 0.94. Gone.</a:t>
-            </a:r>
-            <a:endParaRPr lang="en-US" sz="1700" dirty="0"/>
-          </a:p>
-          <a:p>
-            <a:pPr algn="l" marL="342900" indent="-342900">
-              <a:spcBef>
-                <a:spcPts val="1100"/>
-              </a:spcBef>
-              <a:spcAft>
-                <a:spcPts val="300"/>
-              </a:spcAft>
-              <a:buSzPct val="100000"/>
-              <a:buChar char="•"/>
-            </a:pPr>
-            <a:r>
-              <a:rPr lang="en-US" sz="1700" b="1" dirty="0">
-                <a:solidFill>
-                  <a:srgbClr val="111111"/>
-                </a:solidFill>
-              </a:rPr>
-              <a:t>What did survive matching</a:t>
-            </a:r>
-            <a:endParaRPr lang="en-US" sz="1700" dirty="0"/>
-          </a:p>
-          <a:p>
-            <a:pPr algn="l" lvl="1" marL="685800" indent="-342900">
-              <a:spcAft>
-                <a:spcPts val="400"/>
-              </a:spcAft>
-              <a:buSzPct val="100000"/>
-              <a:buChar char="▪"/>
-            </a:pPr>
-            <a:r>
-              <a:rPr lang="en-US" sz="1450" dirty="0">
-                <a:solidFill>
-                  <a:srgbClr val="595959"/>
-                </a:solidFill>
-              </a:rPr>
-              <a:t>Destroying the motif costs Dynamic sites less (+0.16, p = 4e-4); the dose-response is shallower; relocating the motif helps them less.</a:t>
-            </a:r>
-            <a:endParaRPr lang="en-US" sz="1700" dirty="0"/>
-          </a:p>
-          <a:p>
-            <a:pPr algn="l" marL="342900" indent="-342900">
-              <a:spcBef>
-                <a:spcPts val="1100"/>
-              </a:spcBef>
-              <a:spcAft>
-                <a:spcPts val="300"/>
-              </a:spcAft>
-              <a:buSzPct val="100000"/>
-              <a:buChar char="•"/>
-            </a:pPr>
-            <a:r>
-              <a:rPr lang="en-US" sz="1700" b="1" dirty="0">
-                <a:solidFill>
-                  <a:srgbClr val="111111"/>
-                </a:solidFill>
-              </a:rPr>
-              <a:t>Two clean negatives worth having</a:t>
-            </a:r>
-            <a:endParaRPr lang="en-US" sz="1700" dirty="0"/>
-          </a:p>
-          <a:p>
-            <a:pPr algn="l" lvl="1" marL="685800" indent="-342900">
-              <a:spcAft>
-                <a:spcPts val="400"/>
-              </a:spcAft>
-              <a:buSzPct val="100000"/>
-              <a:buChar char="▪"/>
-            </a:pPr>
-            <a:r>
-              <a:rPr lang="en-US" sz="1450" dirty="0">
-                <a:solidFill>
-                  <a:srgbClr val="595959"/>
-                </a:solidFill>
-              </a:rPr>
-              <a:t>Reverse-complementing the whole motif costs nothing in either class (-0.03 log2, p = 0.89) — expected for a palindromic TRE, and a sanity check on the head.</a:t>
-            </a:r>
-            <a:endParaRPr lang="en-US" sz="1700" dirty="0"/>
-          </a:p>
-          <a:p>
-            <a:pPr algn="l" lvl="1" marL="685800" indent="-342900">
-              <a:spcAft>
-                <a:spcPts val="400"/>
-              </a:spcAft>
-              <a:buSzPct val="100000"/>
-              <a:buChar char="▪"/>
-            </a:pPr>
-            <a:r>
-              <a:rPr lang="en-US" sz="1450" dirty="0">
-                <a:solidFill>
-                  <a:srgbClr val="595959"/>
-                </a:solidFill>
-              </a:rPr>
-              <a:t>The spacing preference for a second copy is identical: best at ±20–40 bp, decaying by ±150 bp, with no class difference at any distance (all FDR &gt; 0.58).</a:t>
+              <a:t>Outside the motif is where the classes differ: a Stable site leaves 20% of its motif dependence to partners, a Dynamic site 25–27% — about 40% more — and every Dynamic class sits on the same side. AP-1 still leads everywhere; it just carries less of the load.</a:t>
             </a:r>
             <a:endParaRPr lang="en-US" sz="1700" dirty="0"/>
           </a:p>
@@ -3669,7 +3721,7 @@
                   <a:schemeClr val="tx1"/>
                 </a:solidFill>
               </a:rPr>
-              <a:t>How this sits with the MPRA work</a:t>
+              <a:t>Two differences that turned out to be accessibility</a:t>
             </a:r>
             <a:endParaRPr lang="en-US" sz="2800" dirty="0"/>
           </a:p>
@@ -3714,7 +3766,7 @@
                   <a:srgbClr val="111111"/>
                 </a:solidFill>
               </a:rPr>
-              <a:t>Agrees</a:t>
+              <a:t>A second AP-1 copy looked worth more to Dynamic sites</a:t>
             </a:r>
             <a:endParaRPr lang="en-US" sz="1700" dirty="0"/>
           </a:p>
@@ -3732,61 +3784,7 @@
                   <a:srgbClr val="595959"/>
                 </a:solidFill>
               </a:rPr>
-              <a:t>Dynamic elements have weaker endogenous chromatin, and depend on context rather than being sequence-autonomous.</a:t>
-            </a:r>
-            <a:endParaRPr lang="en-US" sz="1700" dirty="0"/>
-          </a:p>
-          <a:p>
-            <a:pPr algn="l" lvl="1" marL="685800" indent="-342900">
-              <a:spcAft>
-                <a:spcPts val="400"/>
-              </a:spcAft>
-              <a:buSzPct val="100000"/>
-              <a:buChar char="▪"/>
-            </a:pPr>
-            <a:r>
-              <a:rPr lang="en-US" sz="1450" dirty="0">
-                <a:solidFill>
-                  <a:srgbClr val="595959"/>
-                </a:solidFill>
-              </a:rPr>
-              <a:t>Shuffling the AP-1 core alone does not separate pooled Stable from pooled Dynamic.</a:t>
-            </a:r>
-            <a:endParaRPr lang="en-US" sz="1700" dirty="0"/>
-          </a:p>
-          <a:p>
-            <a:pPr algn="l" lvl="1" marL="685800" indent="-342900">
-              <a:spcAft>
-                <a:spcPts val="400"/>
-              </a:spcAft>
-              <a:buSzPct val="100000"/>
-              <a:buChar char="▪"/>
-            </a:pPr>
-            <a:r>
-              <a:rPr lang="en-US" sz="1450" dirty="0">
-                <a:solidFill>
-                  <a:srgbClr val="595959"/>
-                </a:solidFill>
-              </a:rPr>
-              <a:t>Age-gained elements behave like Stable ones — here, at their own AP-1 motif.</a:t>
-            </a:r>
-            <a:endParaRPr lang="en-US" sz="1700" dirty="0"/>
-          </a:p>
-          <a:p>
-            <a:pPr algn="l" lvl="1" marL="685800" indent="-342900">
-              <a:spcAft>
-                <a:spcPts val="400"/>
-              </a:spcAft>
-              <a:buSzPct val="100000"/>
-              <a:buChar char="▪"/>
-            </a:pPr>
-            <a:r>
-              <a:rPr lang="en-US" sz="1450" dirty="0">
-                <a:solidFill>
-                  <a:srgbClr val="595959"/>
-                </a:solidFill>
-              </a:rPr>
-              <a:t>C/EBP is the strongest partner motif at fibroblast AP-1 sites (net −0.71 log2, ahead of MEF2 and NFI).</a:t>
+              <a:t>+0.72 vs +0.60 log2, p &lt; 1e-4 — matched on accessibility, p = 0.93. Gone.</a:t>
             </a:r>
             <a:endParaRPr lang="en-US" sz="1700" dirty="0"/>
           </a:p>
@@ -3807,7 +3805,7 @@
                   <a:srgbClr val="111111"/>
                 </a:solidFill>
               </a:rPr>
-              <a:t>Adds</a:t>
+              <a:t>Upgrading an imperfect core to a perfect TGAGTCA looked worth more to Dynamic sites</a:t>
             </a:r>
             <a:endParaRPr lang="en-US" sz="1700" dirty="0"/>
           </a:p>
@@ -3825,25 +3823,7 @@
                   <a:srgbClr val="595959"/>
                 </a:solidFill>
               </a:rPr>
-              <a:t>The class difference is a whole-peak property, not a 170 bp one.</a:t>
-            </a:r>
-            <a:endParaRPr lang="en-US" sz="1700" dirty="0"/>
-          </a:p>
-          <a:p>
-            <a:pPr algn="l" lvl="1" marL="685800" indent="-342900">
-              <a:spcAft>
-                <a:spcPts val="400"/>
-              </a:spcAft>
-              <a:buSzPct val="100000"/>
-              <a:buChar char="▪"/>
-            </a:pPr>
-            <a:r>
-              <a:rPr lang="en-US" sz="1450" dirty="0">
-                <a:solidFill>
-                  <a:srgbClr val="595959"/>
-                </a:solidFill>
-              </a:rPr>
-              <a:t>Within Dynamic, the AP-1-losing sites are the ones that are sequence-different; the gaining ones are not.</a:t>
+              <a:t>+0.66 vs +0.52, p &lt; 1e-4 — matched, p = 0.94. Gone.</a:t>
             </a:r>
             <a:endParaRPr lang="en-US" sz="1700" dirty="0"/>
           </a:p>
@@ -3864,7 +3844,7 @@
                   <a:srgbClr val="111111"/>
                 </a:solidFill>
               </a:rPr>
-              <a:t>Keep off the slides</a:t>
+              <a:t>What did survive matching</a:t>
             </a:r>
             <a:endParaRPr lang="en-US" sz="1700" dirty="0"/>
           </a:p>
@@ -3882,7 +3862,64 @@
                   <a:srgbClr val="595959"/>
                 </a:solidFill>
               </a:rPr>
-              <a:t>Our in-situ 170 bp shuffle costs Stable sites more (−2.51 vs −1.96, p = 4e-40), the opposite of the MPRA flank result. Different assay — episomal activity vs chromatin accessibility — but it reads as a contradiction.</a:t>
+              <a:t>Destroying the motif costs Dynamic sites less (+0.16, p = 4e-4); the dose-response is shallower; relocating the motif helps them less.</a:t>
+            </a:r>
+            <a:endParaRPr lang="en-US" sz="1700" dirty="0"/>
+          </a:p>
+          <a:p>
+            <a:pPr algn="l" marL="342900" indent="-342900">
+              <a:spcBef>
+                <a:spcPts val="1100"/>
+              </a:spcBef>
+              <a:spcAft>
+                <a:spcPts val="300"/>
+              </a:spcAft>
+              <a:buSzPct val="100000"/>
+              <a:buChar char="•"/>
+            </a:pPr>
+            <a:r>
+              <a:rPr lang="en-US" sz="1700" b="1" dirty="0">
+                <a:solidFill>
+                  <a:srgbClr val="111111"/>
+                </a:solidFill>
+              </a:rPr>
+              <a:t>Two clean negatives worth having</a:t>
+            </a:r>
+            <a:endParaRPr lang="en-US" sz="1700" dirty="0"/>
+          </a:p>
+          <a:p>
+            <a:pPr algn="l" lvl="1" marL="685800" indent="-342900">
+              <a:spcAft>
+                <a:spcPts val="400"/>
+              </a:spcAft>
+              <a:buSzPct val="100000"/>
+              <a:buChar char="▪"/>
+            </a:pPr>
+            <a:r>
+              <a:rPr lang="en-US" sz="1450" dirty="0">
+                <a:solidFill>
+                  <a:srgbClr val="595959"/>
+                </a:solidFill>
+              </a:rPr>
+              <a:t>Reverse-complementing the whole motif costs nothing in either class (-0.03 log2, p = 0.89) — expected for a palindromic TRE, and a sanity check on the head.</a:t>
+            </a:r>
+            <a:endParaRPr lang="en-US" sz="1700" dirty="0"/>
+          </a:p>
+          <a:p>
+            <a:pPr algn="l" lvl="1" marL="685800" indent="-342900">
+              <a:spcAft>
+                <a:spcPts val="400"/>
+              </a:spcAft>
+              <a:buSzPct val="100000"/>
+              <a:buChar char="▪"/>
+            </a:pPr>
+            <a:r>
+              <a:rPr lang="en-US" sz="1450" dirty="0">
+                <a:solidFill>
+                  <a:srgbClr val="595959"/>
+                </a:solidFill>
+              </a:rPr>
+              <a:t>The spacing preference for a second copy is identical: best at ±20–40 bp, decaying by ±150 bp, with no class difference at any distance (all FDR &gt; 0.58).</a:t>
             </a:r>
             <a:endParaRPr lang="en-US" sz="1700" dirty="0"/>
           </a:p>
@@ -3928,6 +3965,345 @@
             <a:fld id="{F7021451-1387-4CA6-816F-3879F97B5CBC}" type="slidenum">
               <a:rPr b="0" lang="en-US"/>
               <a:t>8</a:t>
+            </a:fld>
+            <a:endParaRPr lang="en-US"/>
+          </a:p>
+        </p:txBody>
+      </p:sp>
+    </p:spTree>
+  </p:cSld>
+  <p:clrMapOvr>
+    <a:masterClrMapping/>
+  </p:clrMapOvr>
+</p:sld>
+</file>
+
+<file path=ppt/slides/slide9.xml><?xml version="1.0" encoding="utf-8"?>
+<p:sld xmlns:a="http://schemas.openxmlformats.org/drawingml/2006/main" xmlns:r="http://schemas.openxmlformats.org/officeDocument/2006/relationships" xmlns:p="http://schemas.openxmlformats.org/presentationml/2006/main">
+  <p:cSld name="Slide 9">
+    <p:spTree>
+      <p:nvGrpSpPr>
+        <p:cNvPr id="1" name=""/>
+        <p:cNvGrpSpPr/>
+        <p:nvPr/>
+      </p:nvGrpSpPr>
+      <p:grpSpPr>
+        <a:xfrm>
+          <a:off x="0" y="0"/>
+          <a:ext cx="0" cy="0"/>
+          <a:chOff x="0" y="0"/>
+          <a:chExt cx="0" cy="0"/>
+        </a:xfrm>
+      </p:grpSpPr>
+      <p:sp>
+        <p:nvSpPr>
+          <p:cNvPr id="2" name="Text 0"/>
+          <p:cNvSpPr/>
+          <p:nvPr>
+            <p:ph idx="100" type="title" hasCustomPrompt="1"/>
+          </p:nvPr>
+        </p:nvSpPr>
+        <p:spPr>
+          <a:xfrm>
+            <a:off x="502920" y="274320"/>
+            <a:ext cx="11155680" cy="731520"/>
+          </a:xfrm>
+          <a:prstGeom prst="rect">
+            <a:avLst/>
+          </a:prstGeom>
+          <a:noFill/>
+          <a:ln/>
+        </p:spPr>
+        <p:txBody>
+          <a:bodyPr wrap="square" rtlCol="0" anchor="ctr"/>
+          <a:lstStyle/>
+          <a:p>
+            <a:pPr algn="l" indent="0" marL="0">
+              <a:buNone/>
+            </a:pPr>
+            <a:r>
+              <a:rPr lang="en-US" sz="2800" b="1" dirty="0">
+                <a:solidFill>
+                  <a:schemeClr val="tx1"/>
+                </a:solidFill>
+              </a:rPr>
+              <a:t>How this sits with the MPRA work</a:t>
+            </a:r>
+            <a:endParaRPr lang="en-US" sz="2800" dirty="0"/>
+          </a:p>
+        </p:txBody>
+      </p:sp>
+      <p:sp>
+        <p:nvSpPr>
+          <p:cNvPr id="3" name="Text 0"/>
+          <p:cNvSpPr/>
+          <p:nvPr>
+            <p:ph idx="101" type="body" hasCustomPrompt="1"/>
+          </p:nvPr>
+        </p:nvSpPr>
+        <p:spPr>
+          <a:xfrm>
+            <a:off x="502920" y="1234440"/>
+            <a:ext cx="11155680" cy="5029200"/>
+          </a:xfrm>
+          <a:prstGeom prst="rect">
+            <a:avLst/>
+          </a:prstGeom>
+          <a:noFill/>
+          <a:ln/>
+        </p:spPr>
+        <p:txBody>
+          <a:bodyPr wrap="square" rtlCol="0" anchor="t"/>
+          <a:lstStyle/>
+          <a:p>
+            <a:pPr algn="l" marL="342900" indent="-342900">
+              <a:spcBef>
+                <a:spcPts val="1100"/>
+              </a:spcBef>
+              <a:spcAft>
+                <a:spcPts val="300"/>
+              </a:spcAft>
+              <a:buSzPct val="100000"/>
+              <a:buChar char="•"/>
+            </a:pPr>
+            <a:r>
+              <a:rPr lang="en-US" sz="1700" b="1" dirty="0">
+                <a:solidFill>
+                  <a:srgbClr val="111111"/>
+                </a:solidFill>
+              </a:rPr>
+              <a:t>Agrees</a:t>
+            </a:r>
+            <a:endParaRPr lang="en-US" sz="1700" dirty="0"/>
+          </a:p>
+          <a:p>
+            <a:pPr algn="l" lvl="1" marL="685800" indent="-342900">
+              <a:spcAft>
+                <a:spcPts val="400"/>
+              </a:spcAft>
+              <a:buSzPct val="100000"/>
+              <a:buChar char="▪"/>
+            </a:pPr>
+            <a:r>
+              <a:rPr lang="en-US" sz="1450" dirty="0">
+                <a:solidFill>
+                  <a:srgbClr val="595959"/>
+                </a:solidFill>
+              </a:rPr>
+              <a:t>Dynamic elements have weaker endogenous chromatin, and depend on context rather than being sequence-autonomous.</a:t>
+            </a:r>
+            <a:endParaRPr lang="en-US" sz="1700" dirty="0"/>
+          </a:p>
+          <a:p>
+            <a:pPr algn="l" lvl="1" marL="685800" indent="-342900">
+              <a:spcAft>
+                <a:spcPts val="400"/>
+              </a:spcAft>
+              <a:buSzPct val="100000"/>
+              <a:buChar char="▪"/>
+            </a:pPr>
+            <a:r>
+              <a:rPr lang="en-US" sz="1450" dirty="0">
+                <a:solidFill>
+                  <a:srgbClr val="595959"/>
+                </a:solidFill>
+              </a:rPr>
+              <a:t>Shuffling the AP-1 core alone does not separate pooled Stable from pooled Dynamic.</a:t>
+            </a:r>
+            <a:endParaRPr lang="en-US" sz="1700" dirty="0"/>
+          </a:p>
+          <a:p>
+            <a:pPr algn="l" lvl="1" marL="685800" indent="-342900">
+              <a:spcAft>
+                <a:spcPts val="400"/>
+              </a:spcAft>
+              <a:buSzPct val="100000"/>
+              <a:buChar char="▪"/>
+            </a:pPr>
+            <a:r>
+              <a:rPr lang="en-US" sz="1450" dirty="0">
+                <a:solidFill>
+                  <a:srgbClr val="595959"/>
+                </a:solidFill>
+              </a:rPr>
+              <a:t>Age-gained elements behave like Stable ones — here, at their own AP-1 motif.</a:t>
+            </a:r>
+            <a:endParaRPr lang="en-US" sz="1700" dirty="0"/>
+          </a:p>
+          <a:p>
+            <a:pPr algn="l" lvl="1" marL="685800" indent="-342900">
+              <a:spcAft>
+                <a:spcPts val="400"/>
+              </a:spcAft>
+              <a:buSzPct val="100000"/>
+              <a:buChar char="▪"/>
+            </a:pPr>
+            <a:r>
+              <a:rPr lang="en-US" sz="1450" dirty="0">
+                <a:solidFill>
+                  <a:srgbClr val="595959"/>
+                </a:solidFill>
+              </a:rPr>
+              <a:t>C/EBP is the strongest partner motif at fibroblast AP-1 sites (net −0.71 log2, ahead of MEF2 and NFI).</a:t>
+            </a:r>
+            <a:endParaRPr lang="en-US" sz="1700" dirty="0"/>
+          </a:p>
+          <a:p>
+            <a:pPr algn="l" marL="342900" indent="-342900">
+              <a:spcBef>
+                <a:spcPts val="1100"/>
+              </a:spcBef>
+              <a:spcAft>
+                <a:spcPts val="300"/>
+              </a:spcAft>
+              <a:buSzPct val="100000"/>
+              <a:buChar char="•"/>
+            </a:pPr>
+            <a:r>
+              <a:rPr lang="en-US" sz="1700" b="1" dirty="0">
+                <a:solidFill>
+                  <a:srgbClr val="111111"/>
+                </a:solidFill>
+              </a:rPr>
+              <a:t>Adds</a:t>
+            </a:r>
+            <a:endParaRPr lang="en-US" sz="1700" dirty="0"/>
+          </a:p>
+          <a:p>
+            <a:pPr algn="l" lvl="1" marL="685800" indent="-342900">
+              <a:spcAft>
+                <a:spcPts val="400"/>
+              </a:spcAft>
+              <a:buSzPct val="100000"/>
+              <a:buChar char="▪"/>
+            </a:pPr>
+            <a:r>
+              <a:rPr lang="en-US" sz="1450" dirty="0">
+                <a:solidFill>
+                  <a:srgbClr val="595959"/>
+                </a:solidFill>
+              </a:rPr>
+              <a:t>The class difference is a whole-peak property, not a 170 bp one.</a:t>
+            </a:r>
+            <a:endParaRPr lang="en-US" sz="1700" dirty="0"/>
+          </a:p>
+          <a:p>
+            <a:pPr algn="l" lvl="1" marL="685800" indent="-342900">
+              <a:spcAft>
+                <a:spcPts val="400"/>
+              </a:spcAft>
+              <a:buSzPct val="100000"/>
+              <a:buChar char="▪"/>
+            </a:pPr>
+            <a:r>
+              <a:rPr lang="en-US" sz="1450" dirty="0">
+                <a:solidFill>
+                  <a:srgbClr val="595959"/>
+                </a:solidFill>
+              </a:rPr>
+              <a:t>Within Dynamic, the AP-1-losing sites are the ones that are sequence-different; the gaining ones are not.</a:t>
+            </a:r>
+            <a:endParaRPr lang="en-US" sz="1700" dirty="0"/>
+          </a:p>
+          <a:p>
+            <a:pPr algn="l" lvl="1" marL="685800" indent="-342900">
+              <a:spcAft>
+                <a:spcPts val="400"/>
+              </a:spcAft>
+              <a:buSzPct val="100000"/>
+              <a:buChar char="▪"/>
+            </a:pPr>
+            <a:r>
+              <a:rPr lang="en-US" sz="1450" dirty="0">
+                <a:solidFill>
+                  <a:srgbClr val="595959"/>
+                </a:solidFill>
+              </a:rPr>
+              <a:t>AlphaGenome makes the AP-1 core the single most important 10 bp in over half of all sites, unprompted — equally in both classes. The classes differ in how much of the dependence AP-1 carries, not in whether it leads.</a:t>
+            </a:r>
+            <a:endParaRPr lang="en-US" sz="1700" dirty="0"/>
+          </a:p>
+          <a:p>
+            <a:pPr algn="l" marL="342900" indent="-342900">
+              <a:spcBef>
+                <a:spcPts val="1100"/>
+              </a:spcBef>
+              <a:spcAft>
+                <a:spcPts val="300"/>
+              </a:spcAft>
+              <a:buSzPct val="100000"/>
+              <a:buChar char="•"/>
+            </a:pPr>
+            <a:r>
+              <a:rPr lang="en-US" sz="1700" b="1" dirty="0">
+                <a:solidFill>
+                  <a:srgbClr val="111111"/>
+                </a:solidFill>
+              </a:rPr>
+              <a:t>Keep off the slides</a:t>
+            </a:r>
+            <a:endParaRPr lang="en-US" sz="1700" dirty="0"/>
+          </a:p>
+          <a:p>
+            <a:pPr algn="l" lvl="1" marL="685800" indent="-342900">
+              <a:spcAft>
+                <a:spcPts val="400"/>
+              </a:spcAft>
+              <a:buSzPct val="100000"/>
+              <a:buChar char="▪"/>
+            </a:pPr>
+            <a:r>
+              <a:rPr lang="en-US" sz="1450" dirty="0">
+                <a:solidFill>
+                  <a:srgbClr val="595959"/>
+                </a:solidFill>
+              </a:rPr>
+              <a:t>Our in-situ 170 bp shuffle costs Stable sites more (−2.51 vs −1.96, p = 4e-40), the opposite of the MPRA flank result. Different assay — episomal activity vs chromatin accessibility — but it reads as a contradiction.</a:t>
+            </a:r>
+            <a:endParaRPr lang="en-US" sz="1700" dirty="0"/>
+          </a:p>
+        </p:txBody>
+      </p:sp>
+      <p:sp>
+        <p:nvSpPr>
+          <p:cNvPr id="25" name="Slide Number Placeholder 0"/>
+          <p:cNvSpPr>
+            <a:spLocks noGrp="1"/>
+          </p:cNvSpPr>
+          <p:nvPr>
+            <p:ph type="sldNum" sz="quarter" idx="4294967295"/>
+          </p:nvPr>
+        </p:nvSpPr>
+        <p:spPr>
+          <a:xfrm>
+            <a:off x="11658600" y="6446520"/>
+            <a:ext cx="800000" cy="300000"/>
+          </a:xfrm>
+          <a:prstGeom prst="rect">
+            <a:avLst/>
+          </a:prstGeom>
+          <a:extLst>
+            <a:ext uri="{C572A759-6A51-4108-AA02-DFA0A04FC94B}">
+              <ma14:wrappingTextBoxFlag xmlns:ma14="http://schemas.microsoft.com/office/mac/drawingml/2011/main" val="0"/>
+            </a:ext>
+          </a:extLst>
+        </p:spPr>
+        <p:txBody>
+          <a:bodyPr/>
+          <a:lstStyle>
+            <a:lvl1pPr>
+              <a:defRPr sz="1000">
+                <a:solidFill>
+                  <a:srgbClr val="A6A6A6"/>
+                </a:solidFill>
+              </a:defRPr>
+            </a:lvl1pPr>
+          </a:lstStyle>
+          <a:p>
+            <a:pPr algn="l"/>
+            <a:fld id="{F7021451-1387-4CA6-816F-3879F97B5CBC}" type="slidenum">
+              <a:rPr b="0" lang="en-US"/>
+              <a:t>9</a:t>
             </a:fld>
             <a:endParaRPr lang="en-US"/>
           </a:p>

--- a/Analysis/AP1_fibroblast_lab_meeting.pptx
+++ b/Analysis/AP1_fibroblast_lab_meeting.pptx
@@ -958,10 +958,16 @@
           <a:p>
             <a:r>
               <a:rPr lang="en-US" dirty="0"/>
-              <a:t>2,359 sites, 60 tiles each, fine-tuned FB head, readout atac_170. Top tile on the AP-1 core: Stable 55.7%, AP-1 gained 53.3%, AP-1 lost 50.5%, other Dynamic 50.1%. Stable vs Dynamic Fisher p = 0.063; chi-square across the four p = 0.14.
-Accessibility-matched (860 pairs, caliper 0.1 log10): 56.3% vs 53.3%, McNemar on the 398 discordant pairs p = 0.21. The core tile's median rank is 1 of 60 in BOTH classes.
-Why this was run: the ratio measures (motif share vs a collar) scale with a site's signal and the scan version does not survive matching (p = 0.11). A rank is invariant to that, so it is the honest version of the question - and the answer is no difference. Say that out loud rather than hiding the slide; it makes the next one credible.
-Good question to expect: why is 56% not higher? Each of the two core tiles covers only 5-6 bp of the 11 bp motif, so a site whose dependence is spread over the full core can have a flanking tile win.</a:t>
+              <a:t>NUMBERS TO ANNOTATE WITH, strongest first:
+  - the peak tile carries 10.8% (Stable) / 9.9% (Dynamic) of a site's importance, against 1.7% for an average tile - about 6x enrichment
+  - within +-25 bp (5 of 60 tiles, 8% of the sequence): Stable 33.8% vs Dynamic 30.7%, p = 2.0e-6
+  - accessibility-matched, 860 pairs: 33.1% vs 31.3%, paired difference +1.5 points, Wilcoxon p = 0.006
+  - only 2 of 60 positions differ at FDR &lt; 0.05, and they are the two tiles over the core (FDR = 0.001). Every other position FDR &gt; 0.8
+  - in 56% of Stable and 52% of Dynamic sites the single most important tile IS a core tile, against a chance of 3.3% - 16x. That one does NOT differ by class (Fisher p = 0.063; matched McNemar p = 0.21), so quote it as the shared fact, not as a difference. Figure for it is on disk as r_fb_top_tile.png if anyone wants to see it.
+2,359 sites, 60 tiles of 10 bp from -300 to +290, fine-tuned FB head, readout atac_170.
+Why the floor subtraction matters, if asked: Dynamic sites are about half as accessible, so their log2 ratios are noisier, and noise is flat across position. Without removing each site's own floor (median |effect| beyond +-200 bp: 0.047 Dynamic, 0.037 Stable) a Dynamic profile looks more distributed whether or not it is. That is exactly the artefact this corrects for.
+Agreement: this is the AlphaGenome version of 'attention is more distributed at dynamic enhancers'. Same direction, different model and different readout.
+Honest size: the matched difference is 1.5 percentage points on a base of about a third. Real, repeatedly so, but small - do not oversell it as two different architectures.</a:t>
             </a:r>
             <a:endParaRPr lang="en-US" dirty="0"/>
           </a:p>
@@ -3227,7 +3233,7 @@
                   <a:schemeClr val="tx1"/>
                 </a:solidFill>
               </a:rPr>
-              <a:t>AlphaGenome puts the motif first — at every class equally</a:t>
+              <a:t>Where the dependence sits: on the motif, and more so if Stable</a:t>
             </a:r>
             <a:endParaRPr lang="en-US" sz="2800" dirty="0"/>
           </a:p>
@@ -3263,7 +3269,7 @@
                   <a:srgbClr val="595959"/>
                 </a:solidFill>
               </a:rPr>
-              <a:t>Each site's 600 bp scanned with 60 replaced 10 bp tiles; for each site, where does the single most costly tile fall? Two of the 60 tiles overlap the AP-1 core, so chance is 3.3% (dashed line). Fisher exact, Stable against Dynamic.</a:t>
+              <a:t>Each 10 bp tile replaced in turn; each site's own noise floor removed, then normalised to its own total, so the curve is where the dependence sits, not how much there is. Median per site, band a bootstrap 95% CI; Mann–Whitney per position, BH-FDR across the 60. Cropped to ±150 bp.</a:t>
             </a:r>
             <a:endParaRPr lang="en-US" sz="1250" dirty="0"/>
           </a:p>
@@ -3271,7 +3277,7 @@
       </p:sp>
       <p:pic>
         <p:nvPicPr>
-          <p:cNvPr id="4" name="Image 0" descr="/Users/z5162865/WongLab/AlphaGenome_Ap1/Analysis/slide_figures/r_fb_top_tile.png">    </p:cNvPr>
+          <p:cNvPr id="4" name="Image 0" descr="/Users/z5162865/WongLab/AlphaGenome_Ap1/Analysis/slide_figures/r_fb_density.png">    </p:cNvPr>
           <p:cNvPicPr>
             <a:picLocks noChangeAspect="1"/>
           </p:cNvPicPr>
@@ -3285,8 +3291,8 @@
         </p:blipFill>
         <p:spPr>
           <a:xfrm>
-            <a:off x="1381001" y="1335024"/>
-            <a:ext cx="9399519" cy="3566160"/>
+            <a:off x="1115221" y="1335024"/>
+            <a:ext cx="9931078" cy="3566160"/>
           </a:xfrm>
           <a:prstGeom prst="rect">
             <a:avLst/>
@@ -3348,7 +3354,7 @@
                   <a:srgbClr val="111111"/>
                 </a:solidFill>
               </a:rPr>
-              <a:t>In over half of all sites the most important 10 bp of the whole window is the AP-1 core itself — about 16× chance, and nobody told the model where the motif was. But this is the same in every class: whether AP-1 is the dominant element is not what separates Stable from Dynamic.</a:t>
+              <a:t>A spike on the AP-1 core sitting on a shallow shoulder that reaches ±100 bp — and the model was never told where the motif was. The spike is taller for Stable sites, and the two tiles covering the core are the only positions in the whole window where the classes differ at all.</a:t>
             </a:r>
             <a:endParaRPr lang="en-US" sz="1700" dirty="0"/>
           </a:p>
@@ -3384,7 +3390,7 @@
                   <a:srgbClr val="595959"/>
                 </a:solidFill>
               </a:rPr>
-              <a:t>A deliberate negative. A rank cannot be moved by the accessibility gap, so this is the measure most likely to be a real class difference — and it is not one (matched: 56.3% vs 53.3%, P = 0.21). What does differ is the next slide: not whether AP-1 leads, but by how much.</a:t>
+              <a:t>Holding accessibility constant the gap halves but holds: 33.1% vs 31.3% of importance within ±25 bp, P = 0.006 over 860 matched pairs. The older ratio version of this measure did not survive that check (P = 0.11); this one does, because the noise floor is removed per site first.</a:t>
             </a:r>
             <a:endParaRPr lang="en-US" sz="1300" dirty="0"/>
           </a:p>
@@ -4219,7 +4225,25 @@
                   <a:srgbClr val="595959"/>
                 </a:solidFill>
               </a:rPr>
-              <a:t>AlphaGenome makes the AP-1 core the single most important 10 bp in over half of all sites, unprompted — equally in both classes. The classes differ in how much of the dependence AP-1 carries, not in whether it leads.</a:t>
+              <a:t>Unprompted, AlphaGenome makes the AP-1 core the most important 10 bp in over half of all sites — equally in both classes. The classes differ in how much of the dependence sits there, not in whether AP-1 leads.</a:t>
+            </a:r>
+            <a:endParaRPr lang="en-US" sz="1700" dirty="0"/>
+          </a:p>
+          <a:p>
+            <a:pPr algn="l" lvl="1" marL="685800" indent="-342900">
+              <a:spcAft>
+                <a:spcPts val="400"/>
+              </a:spcAft>
+              <a:buSzPct val="100000"/>
+              <a:buChar char="▪"/>
+            </a:pPr>
+            <a:r>
+              <a:rPr lang="en-US" sz="1450" dirty="0">
+                <a:solidFill>
+                  <a:srgbClr val="595959"/>
+                </a:solidFill>
+              </a:rPr>
+              <a:t>Dynamic sites spread their dependence slightly wider, and it survives accessibility matching (33.1% vs 31.3% within ±25 bp, P = 0.006) — the sequence-model version of “attention is more distributed at dynamic enhancers”.</a:t>
             </a:r>
             <a:endParaRPr lang="en-US" sz="1700" dirty="0"/>
           </a:p>

--- a/Analysis/AP1_fibroblast_lab_meeting.pptx
+++ b/Analysis/AP1_fibroblast_lab_meeting.pptx
@@ -14,9 +14,12 @@
     <p:sldId id="262" r:id="rId8"/>
     <p:sldId id="263" r:id="rId9"/>
     <p:sldId id="264" r:id="rId10"/>
+    <p:sldId id="265" r:id="rId11"/>
+    <p:sldId id="266" r:id="rId12"/>
+    <p:sldId id="267" r:id="rId13"/>
   </p:sldIdLst>
   <p:notesMasterIdLst>
-    <p:notesMasterId r:id="rId11"/>
+    <p:notesMasterId r:id="rId14"/>
   </p:notesMasterIdLst>
   <p:sldSz cx="12192000" cy="6858000"/>
   <p:notesSz cx="6858000" cy="12192000"/>
@@ -552,6 +555,277 @@
 </p:notes>
 </file>
 
+<file path=ppt/notesSlides/notesSlide10.xml><?xml version="1.0" encoding="utf-8"?>
+<p:notes xmlns:a="http://schemas.openxmlformats.org/drawingml/2006/main" xmlns:r="http://schemas.openxmlformats.org/officeDocument/2006/relationships" xmlns:p="http://schemas.openxmlformats.org/presentationml/2006/main">
+  <p:cSld>
+    <p:spTree>
+      <p:nvGrpSpPr>
+        <p:cNvPr id="1" name=""/>
+        <p:cNvGrpSpPr/>
+        <p:nvPr/>
+      </p:nvGrpSpPr>
+      <p:grpSpPr>
+        <a:xfrm>
+          <a:off x="0" y="0"/>
+          <a:ext cx="0" cy="0"/>
+          <a:chOff x="0" y="0"/>
+          <a:chExt cx="0" cy="0"/>
+        </a:xfrm>
+      </p:grpSpPr>
+      <p:sp>
+        <p:nvSpPr>
+          <p:cNvPr id="2" name="Slide Image Placeholder 1"/>
+          <p:cNvSpPr>
+            <a:spLocks noGrp="1" noRot="1" noChangeAspect="1"/>
+          </p:cNvSpPr>
+          <p:nvPr>
+            <p:ph type="sldImg"/>
+          </p:nvPr>
+        </p:nvSpPr>
+        <p:spPr/>
+      </p:sp>
+      <p:sp>
+        <p:nvSpPr>
+          <p:cNvPr id="3" name="Notes Placeholder 2"/>
+          <p:cNvSpPr>
+            <a:spLocks noGrp="1"/>
+          </p:cNvSpPr>
+          <p:nvPr>
+            <p:ph type="body" idx="1"/>
+          </p:nvPr>
+        </p:nvSpPr>
+        <p:spPr/>
+        <p:txBody>
+          <a:bodyPr/>
+          <a:lstStyle/>
+          <a:p>
+            <a:r>
+              <a:rPr lang="en-US" dirty="0"/>
+              <a:t>This is where the next slide's numbers come from. 2,359 sites; 860 accessibility-matched pairs at caliper 0.1 log10.
+The ladder (1 to 7 bases of the core) is what gives a dose-response rather than a single on/off contrast - it is how we can say the Dynamic curve is SHALLOWER rather than just lower.
+Two controls worth naming if asked:
+  - the second copy is paired with a scrambled insert of the same width at the same distance, so the comparison is 'a motif there' against 'that much sequence there'
+  - moving the motif is paired with moving it to a spot that has no footprint
+The reverse complement is the sanity check on the head: a TRE is a near-palindrome, only 5 of the 11 bases actually move, and the predicted cost is -0.03 log2 (p = 0.89). If that had come out large, nothing else here would be trustworthy.</a:t>
+            </a:r>
+            <a:endParaRPr lang="en-US" dirty="0"/>
+          </a:p>
+        </p:txBody>
+      </p:sp>
+      <p:sp>
+        <p:nvSpPr>
+          <p:cNvPr id="4" name="Slide Number Placeholder 3"/>
+          <p:cNvSpPr>
+            <a:spLocks noGrp="1"/>
+          </p:cNvSpPr>
+          <p:nvPr>
+            <p:ph type="sldNum" sz="quarter" idx="10"/>
+          </p:nvPr>
+        </p:nvSpPr>
+        <p:spPr/>
+        <p:txBody>
+          <a:bodyPr/>
+          <a:lstStyle/>
+          <a:p>
+            <a:fld id="{F7021451-1387-4CA6-816F-3879F97B5CBC}" type="slidenum">
+              <a:rPr lang="en-US"/>
+              <a:t>10</a:t>
+            </a:fld>
+            <a:endParaRPr lang="en-US"/>
+          </a:p>
+        </p:txBody>
+      </p:sp>
+    </p:spTree>
+    <p:extLst>
+      <p:ext uri="{BB962C8B-B14F-4D97-AF65-F5344CB8AC3E}">
+        <p14:creationId xmlns:p14="http://schemas.microsoft.com/office/powerpoint/2010/main" val="1024086991"/>
+      </p:ext>
+    </p:extLst>
+  </p:cSld>
+  <p:clrMapOvr>
+    <a:masterClrMapping/>
+  </p:clrMapOvr>
+</p:notes>
+</file>
+
+<file path=ppt/notesSlides/notesSlide11.xml><?xml version="1.0" encoding="utf-8"?>
+<p:notes xmlns:a="http://schemas.openxmlformats.org/drawingml/2006/main" xmlns:r="http://schemas.openxmlformats.org/officeDocument/2006/relationships" xmlns:p="http://schemas.openxmlformats.org/presentationml/2006/main">
+  <p:cSld>
+    <p:spTree>
+      <p:nvGrpSpPr>
+        <p:cNvPr id="1" name=""/>
+        <p:cNvGrpSpPr/>
+        <p:nvPr/>
+      </p:nvGrpSpPr>
+      <p:grpSpPr>
+        <a:xfrm>
+          <a:off x="0" y="0"/>
+          <a:ext cx="0" cy="0"/>
+          <a:chOff x="0" y="0"/>
+          <a:chExt cx="0" cy="0"/>
+        </a:xfrm>
+      </p:grpSpPr>
+      <p:sp>
+        <p:nvSpPr>
+          <p:cNvPr id="2" name="Slide Image Placeholder 1"/>
+          <p:cNvSpPr>
+            <a:spLocks noGrp="1" noRot="1" noChangeAspect="1"/>
+          </p:cNvSpPr>
+          <p:nvPr>
+            <p:ph type="sldImg"/>
+          </p:nvPr>
+        </p:nvSpPr>
+        <p:spPr/>
+      </p:sp>
+      <p:sp>
+        <p:nvSpPr>
+          <p:cNvPr id="3" name="Notes Placeholder 2"/>
+          <p:cNvSpPr>
+            <a:spLocks noGrp="1"/>
+          </p:cNvSpPr>
+          <p:nvPr>
+            <p:ph type="body" idx="1"/>
+          </p:nvPr>
+        </p:nvSpPr>
+        <p:spPr/>
+        <p:txBody>
+          <a:bodyPr/>
+          <a:lstStyle/>
+          <a:p>
+            <a:r>
+              <a:rPr lang="en-US" dirty="0"/>
+              <a:t>From the fibroblast titration, 2,359 sites, 860 accessibility-matched pairs (caliper 0.1 log10). This slide is the argument for why the matched analysis is worth doing - two of the five largest raw class differences in the titration were entirely explained by the accessibility gap.
+Age Down is the outlier again, consistently with the other arms: one base of the core changed -0.62 vs Stable -0.83; motif gone -0.72 vs -1.07.</a:t>
+            </a:r>
+            <a:endParaRPr lang="en-US" dirty="0"/>
+          </a:p>
+        </p:txBody>
+      </p:sp>
+      <p:sp>
+        <p:nvSpPr>
+          <p:cNvPr id="4" name="Slide Number Placeholder 3"/>
+          <p:cNvSpPr>
+            <a:spLocks noGrp="1"/>
+          </p:cNvSpPr>
+          <p:nvPr>
+            <p:ph type="sldNum" sz="quarter" idx="10"/>
+          </p:nvPr>
+        </p:nvSpPr>
+        <p:spPr/>
+        <p:txBody>
+          <a:bodyPr/>
+          <a:lstStyle/>
+          <a:p>
+            <a:fld id="{F7021451-1387-4CA6-816F-3879F97B5CBC}" type="slidenum">
+              <a:rPr lang="en-US"/>
+              <a:t>11</a:t>
+            </a:fld>
+            <a:endParaRPr lang="en-US"/>
+          </a:p>
+        </p:txBody>
+      </p:sp>
+    </p:spTree>
+    <p:extLst>
+      <p:ext uri="{BB962C8B-B14F-4D97-AF65-F5344CB8AC3E}">
+        <p14:creationId xmlns:p14="http://schemas.microsoft.com/office/powerpoint/2010/main" val="1024086991"/>
+      </p:ext>
+    </p:extLst>
+  </p:cSld>
+  <p:clrMapOvr>
+    <a:masterClrMapping/>
+  </p:clrMapOvr>
+</p:notes>
+</file>
+
+<file path=ppt/notesSlides/notesSlide12.xml><?xml version="1.0" encoding="utf-8"?>
+<p:notes xmlns:a="http://schemas.openxmlformats.org/drawingml/2006/main" xmlns:r="http://schemas.openxmlformats.org/officeDocument/2006/relationships" xmlns:p="http://schemas.openxmlformats.org/presentationml/2006/main">
+  <p:cSld>
+    <p:spTree>
+      <p:nvGrpSpPr>
+        <p:cNvPr id="1" name=""/>
+        <p:cNvGrpSpPr/>
+        <p:nvPr/>
+      </p:nvGrpSpPr>
+      <p:grpSpPr>
+        <a:xfrm>
+          <a:off x="0" y="0"/>
+          <a:ext cx="0" cy="0"/>
+          <a:chOff x="0" y="0"/>
+          <a:chExt cx="0" cy="0"/>
+        </a:xfrm>
+      </p:grpSpPr>
+      <p:sp>
+        <p:nvSpPr>
+          <p:cNvPr id="2" name="Slide Image Placeholder 1"/>
+          <p:cNvSpPr>
+            <a:spLocks noGrp="1" noRot="1" noChangeAspect="1"/>
+          </p:cNvSpPr>
+          <p:nvPr>
+            <p:ph type="sldImg"/>
+          </p:nvPr>
+        </p:nvSpPr>
+        <p:spPr/>
+      </p:sp>
+      <p:sp>
+        <p:nvSpPr>
+          <p:cNvPr id="3" name="Notes Placeholder 2"/>
+          <p:cNvSpPr>
+            <a:spLocks noGrp="1"/>
+          </p:cNvSpPr>
+          <p:nvPr>
+            <p:ph type="body" idx="1"/>
+          </p:nvPr>
+        </p:nvSpPr>
+        <p:spPr/>
+        <p:txBody>
+          <a:bodyPr/>
+          <a:lstStyle/>
+          <a:p>
+            <a:r>
+              <a:rPr lang="en-US" dirty="0"/>
+              <a:t>If the flank question comes up: the MPRA destroys the flanks of a 170 bp fragment on a plasmid and reads transcription; we move an intact ~0.8 kb element into closed chromatin and read accessibility. There is no chromatin to open in the MPRA. The honest shared conclusion is that neither assay finds much class information in 170 bp.
+Everything here is predicted accessibility from a model fine-tuned on our own fibroblast ATAC, not a measurement, and not the MPRA-trained probe used in the manuscript.</a:t>
+            </a:r>
+            <a:endParaRPr lang="en-US" dirty="0"/>
+          </a:p>
+        </p:txBody>
+      </p:sp>
+      <p:sp>
+        <p:nvSpPr>
+          <p:cNvPr id="4" name="Slide Number Placeholder 3"/>
+          <p:cNvSpPr>
+            <a:spLocks noGrp="1"/>
+          </p:cNvSpPr>
+          <p:nvPr>
+            <p:ph type="sldNum" sz="quarter" idx="10"/>
+          </p:nvPr>
+        </p:nvSpPr>
+        <p:spPr/>
+        <p:txBody>
+          <a:bodyPr/>
+          <a:lstStyle/>
+          <a:p>
+            <a:fld id="{F7021451-1387-4CA6-816F-3879F97B5CBC}" type="slidenum">
+              <a:rPr lang="en-US"/>
+              <a:t>12</a:t>
+            </a:fld>
+            <a:endParaRPr lang="en-US"/>
+          </a:p>
+        </p:txBody>
+      </p:sp>
+    </p:spTree>
+    <p:extLst>
+      <p:ext uri="{BB962C8B-B14F-4D97-AF65-F5344CB8AC3E}">
+        <p14:creationId xmlns:p14="http://schemas.microsoft.com/office/powerpoint/2010/main" val="1024086991"/>
+      </p:ext>
+    </p:extLst>
+  </p:cSld>
+  <p:clrMapOvr>
+    <a:masterClrMapping/>
+  </p:clrMapOvr>
+</p:notes>
+</file>
+
 <file path=ppt/notesSlides/notesSlide2.xml><?xml version="1.0" encoding="utf-8"?>
 <p:notes xmlns:a="http://schemas.openxmlformats.org/drawingml/2006/main" xmlns:r="http://schemas.openxmlformats.org/officeDocument/2006/relationships" xmlns:p="http://schemas.openxmlformats.org/presentationml/2006/main">
   <p:cSld>
@@ -598,7 +872,10 @@
           <a:p>
             <a:r>
               <a:rPr lang="en-US" dirty="0"/>
-              <a:t>TOBIAS is used only to say where the partner footprints are and which family each belongs to. No footprint score enters any calculation; every number on these slides is an AlphaGenome effect.</a:t>
+              <a:t>Worth saying out loud at the start, because it is what makes the rest defensible: the comparison is always within one window, and the model never sees a label.
+The head is ours - fine-tuned on our own 1 bp fibroblast Tn5 insertions with Borzoi fold-3 region-based splits, so 0.68 is on held-out regions. The built-in AlphaGenome ATAC head manages 0.27 on the same data, which is why none of this was run on it.
+FB is the mean of the four conditions (young/old x sedentary/exercise), not a single track.
+TOBIAS is used only to say WHERE a footprint is and which family it belongs to. No footprint score enters any calculation on these slides.</a:t>
             </a:r>
             <a:endParaRPr lang="en-US" dirty="0"/>
           </a:p>
@@ -686,10 +963,9 @@
           <a:p>
             <a:r>
               <a:rPr lang="en-US" dirty="0"/>
-              <a:t>Per-donor medians over 20 hosts: Stable +4.65 log2 (25x), Dynamic pooled +2.35 (5.1x), p = 1.5e-5.
-By class, as plotted: Stable 25x, Age Up 6.3x, Age Down 6.1x, Exercise Down 4.6x, Exercise Up 4.4x. Every Dynamic class sits well below Stable and they are close to each other, which is why pooling them is fair here.
-IMPORTANT CAVEAT, be ready for this question: the donors are not matched on accessibility - Stable donors come from loci about 1.8x more accessible (measured ATAC: 32.2 vs 18.0 CPM/kb). Matching on MEASURED fibroblast ATAC (model-independent), the residual Stable advantage is +0.84 +- 0.30 log2, i.e. about 1.8x, p = 0.005 (covariance adjustment, 224 donors). The 47 matched pairs point the same way (+0.99) but are underpowered (p = 0.13). So: direction solid, magnitude about a third to a half of the raw gap. Do not defend 25x vs 5x as a sequence effect.
-Also worth knowing: 0 of 50 Stable donors lack a measured ATAC peak, against 5-8 per Dynamic class.</a:t>
+              <a:t>Reading order: the three shuffles ask how much sequence you have to destroy; the tile scan and the saturation ask where in the sequence the dependence lives; the partner shuffle asks which other motifs matter.
+The partner control is the part to dwell on. Dynamic sites are about half as accessible as Stable ones, so any measure that compares a Dynamic number against a Stable number is open to that confound. Scoring a shuffled partner against a matched footprint-free window at the mirrored distance keeps the whole comparison inside one site, so accessibility cannot reach it.
+Every shuffle is repeated 10 times per site and averaged, so a single lucky permutation cannot carry a result.</a:t>
             </a:r>
             <a:endParaRPr lang="en-US" dirty="0"/>
           </a:p>
@@ -777,9 +1053,9 @@
           <a:p>
             <a:r>
               <a:rPr lang="en-US" dirty="0"/>
-              <a:t>62,250 swaps. 170 bp: beta(element) 0.24 vs beta(location) 0.61, R2 = 0.20. Whole peak: 0.71 vs 0.20, R2 = 0.46. Transfer fraction 0.29 at 170 bp, 0.83 at peak.
-Link to the MPRA, if asked: the MPRA library is 170 bp, and its class difference there is tiny (flank shuffle 0.128 vs 0.016 log2, d = 0.14). Both assays agree that 170 bp is a poor window for this question. They are NOT the same measurement - the MPRA is episomal activity, this is chromatin accessibility in genomic context.
-AVOID on a slide: our in-situ 170 bp shuffle has Stable sites losing more (-2.51 vs -1.96, p = 4e-40), which is the opposite direction to the MPRA flank result. Different assay, but it reads as a contradiction. Keep it off unless someone asks.</a:t>
+              <a:t>Transplant: the control is the SAME sequence shuffled, dropped into the SAME host, so the host's own contribution cancels in the ratio. 20 hosts per element, 50 donors per class. Hosts are genomic windows with no called ATAC peak.
+Swap: every donor element written into every recipient location, both at 170 bp and at the whole peak, 62,250 combinations. Self-swaps are excluded. Because each donor appears in about 250 of those rows, the confidence intervals come from a cluster bootstrap over donors - an OLS standard error on 62,250 rows would be far too small.
+Caveat to have ready for the transplant slide: the donors are NOT matched on accessibility. That is handled separately and the slide carries the matched number.</a:t>
             </a:r>
             <a:endParaRPr lang="en-US" dirty="0"/>
           </a:p>
@@ -867,10 +1143,10 @@
           <a:p>
             <a:r>
               <a:rPr lang="en-US" dirty="0"/>
-              <a:t>2,352 sites. Own AP-1 motif: Stable -1.21 (n=1179), AP-1 gained -1.19 (n=605, p = 0.93 vs Stable), Dynamic but not age-driven -1.10 (n=347, p = 0.055), AP-1 lost -0.78 (n=209, p = 2.3e-5).
-Partner motifs, net of control: Stable -0.20, gained -0.25, not age-driven -0.27, lost -0.22 - no class difference (vs Stable: p = 0.13, 0.23, 0.66). So the deficit is AP-1-specific, not general weakness. No single partner family takes over: nothing survives FDR in the per-family split.
-Agreement: pooled Stable vs Dynamic at the motif is a null, which matches the manuscript's core-scramble result (no class difference). Age-gained being on par with Stable is the sequence-level version of 'age-gained reporter activity on par with stable'.
-Caveat: the own-AP-1 bar has no matched control, because one at distance 0 would overlap the motif. That inflates AP-1 relative to the partners in every class equally, so the class comparison is unaffected.</a:t>
+              <a:t>Per-donor medians over 20 hosts: Stable +4.65 log2 (25x), Dynamic pooled +2.35 (5.1x), p = 1.5e-5.
+By class, as plotted: Stable 25x, Age Up 6.3x, Age Down 6.1x, Exercise Down 4.6x, Exercise Up 4.4x. Every Dynamic class sits well below Stable and they are close to each other, which is why pooling them is fair here.
+IMPORTANT CAVEAT, be ready for this question: the donors are not matched on accessibility - Stable donors come from loci about 1.8x more accessible (measured ATAC: 32.2 vs 18.0 CPM/kb). Matching on MEASURED fibroblast ATAC (model-independent), the residual Stable advantage is +0.84 +- 0.30 log2, i.e. about 1.8x, p = 0.005 (covariance adjustment, 224 donors). The 47 matched pairs point the same way (+0.99) but are underpowered (p = 0.13). So: direction solid, magnitude about a third to a half of the raw gap. Do not defend 25x vs 5x as a sequence effect.
+Also worth knowing: 0 of 50 Stable donors lack a measured ATAC peak, against 5-8 per Dynamic class.</a:t>
             </a:r>
             <a:endParaRPr lang="en-US" dirty="0"/>
           </a:p>
@@ -958,16 +1234,9 @@
           <a:p>
             <a:r>
               <a:rPr lang="en-US" dirty="0"/>
-              <a:t>NUMBERS TO ANNOTATE WITH, strongest first:
-  - the peak tile carries 10.8% (Stable) / 9.9% (Dynamic) of a site's importance, against 1.7% for an average tile - about 6x enrichment
-  - within +-25 bp (5 of 60 tiles, 8% of the sequence): Stable 33.8% vs Dynamic 30.7%, p = 2.0e-6
-  - accessibility-matched, 860 pairs: 33.1% vs 31.3%, paired difference +1.5 points, Wilcoxon p = 0.006
-  - only 2 of 60 positions differ at FDR &lt; 0.05, and they are the two tiles over the core (FDR = 0.001). Every other position FDR &gt; 0.8
-  - in 56% of Stable and 52% of Dynamic sites the single most important tile IS a core tile, against a chance of 3.3% - 16x. That one does NOT differ by class (Fisher p = 0.063; matched McNemar p = 0.21), so quote it as the shared fact, not as a difference. Figure for it is on disk as r_fb_top_tile.png if anyone wants to see it.
-2,359 sites, 60 tiles of 10 bp from -300 to +290, fine-tuned FB head, readout atac_170.
-Why the floor subtraction matters, if asked: Dynamic sites are about half as accessible, so their log2 ratios are noisier, and noise is flat across position. Without removing each site's own floor (median |effect| beyond +-200 bp: 0.047 Dynamic, 0.037 Stable) a Dynamic profile looks more distributed whether or not it is. That is exactly the artefact this corrects for.
-Agreement: this is the AlphaGenome version of 'attention is more distributed at dynamic enhancers'. Same direction, different model and different readout.
-Honest size: the matched difference is 1.5 percentage points on a base of about a third. Real, repeatedly so, but small - do not oversell it as two different architectures.</a:t>
+              <a:t>62,250 swaps. 170 bp: beta(element) 0.24 vs beta(location) 0.61, R2 = 0.20. Whole peak: 0.71 vs 0.20, R2 = 0.46. Transfer fraction 0.29 at 170 bp, 0.83 at peak.
+Link to the MPRA, if asked: the MPRA library is 170 bp, and its class difference there is tiny (flank shuffle 0.128 vs 0.016 log2, d = 0.14). Both assays agree that 170 bp is a poor window for this question. They are NOT the same measurement - the MPRA is episomal activity, this is chromatin accessibility in genomic context.
+AVOID on a slide: our in-situ 170 bp shuffle has Stable sites losing more (-2.51 vs -1.96, p = 4e-40), which is the opposite direction to the MPRA flank result. Different assay, but it reads as a contradiction. Keep it off unless someone asks.</a:t>
             </a:r>
             <a:endParaRPr lang="en-US" dirty="0"/>
           </a:p>
@@ -1055,11 +1324,10 @@
           <a:p>
             <a:r>
               <a:rPr lang="en-US" dirty="0"/>
-              <a:t>Stable 0.804 (n=1179) vs Dynamic pooled 0.745 (n=1161), p = 7.2e-11. By class: AP-1 gained 0.755, AP-1 lost 0.734, Dynamic not age-driven 0.727. Kruskal across the four, p = 1.7e-10.
-The 40%: partner share 19.6% for Stable against 24.5 / 26.6 / 27.3% for the Dynamic classes, so 27.3/19.6 = 1.39x. It is the same number as 80 vs 73, read from the other end - say it whichever way, but do not say both as if they were two results.
-Detection check, in case it is asked: footprint calling needs signal, so Stable sites carry more detected partners (5.89 vs 5.01 per site, p = 2e-82). Restricting to the 1,808 sites that hit the cap of 6 detected partners, the gap is unchanged: 0.806 vs 0.736, p = 2.1e-13. Not a detection artefact.
-Note this is a DIFFERENT statement from slide 5. There, only the AP-1-losing class drops in absolute AP-1 dependence. Here, all Dynamic classes are modestly less AP-1-centric in relative terms.
-The equivalent tile-scan measure (motif share vs a 10-50 bp collar) does NOT survive accessibility matching (p = 0.11); the collar is mostly noise at low-accessibility sites. This version is better powered because it only scores footprinted motifs.</a:t>
+              <a:t>2,352 sites. Own AP-1 motif: Stable -1.21 (n=1179), AP-1 gained -1.19 (n=605, p = 0.93 vs Stable), Dynamic but not age-driven -1.10 (n=347, p = 0.055), AP-1 lost -0.78 (n=209, p = 2.3e-5).
+Partner motifs, net of control: Stable -0.20, gained -0.25, not age-driven -0.27, lost -0.22 - no class difference (vs Stable: p = 0.13, 0.23, 0.66). So the deficit is AP-1-specific, not general weakness. No single partner family takes over: nothing survives FDR in the per-family split.
+Agreement: pooled Stable vs Dynamic at the motif is a null, which matches the manuscript's core-scramble result (no class difference). Age-gained being on par with Stable is the sequence-level version of 'age-gained reporter activity on par with stable'.
+Caveat: the own-AP-1 bar has no matched control, because one at distance 0 would overlap the motif. That inflates AP-1 relative to the partners in every class equally, so the class comparison is unaffected.</a:t>
             </a:r>
             <a:endParaRPr lang="en-US" dirty="0"/>
           </a:p>
@@ -1147,8 +1415,16 @@
           <a:p>
             <a:r>
               <a:rPr lang="en-US" dirty="0"/>
-              <a:t>From the fibroblast titration, 2,359 sites, 860 accessibility-matched pairs (caliper 0.1 log10). This slide is the argument for why the matched analysis is worth doing - two of the five largest raw class differences in the titration were entirely explained by the accessibility gap.
-Age Down is the outlier again, consistently with the other arms: one base of the core changed -0.62 vs Stable -0.83; motif gone -0.72 vs -1.07.</a:t>
+              <a:t>NUMBERS TO ANNOTATE WITH, strongest first:
+  - the peak tile carries 10.8% (Stable) / 9.9% (Dynamic) of a site's importance, against 1.7% for an average tile - about 6x enrichment
+  - within +-25 bp (5 of 60 tiles, 8% of the sequence): Stable 33.8% vs Dynamic 30.7%, p = 2.0e-6
+  - accessibility-matched, 860 pairs: 33.1% vs 31.3%, paired difference +1.5 points, Wilcoxon p = 0.006
+  - only 2 of 60 positions differ at FDR &lt; 0.05, and they are the two tiles over the core (FDR = 0.001). Every other position FDR &gt; 0.8
+  - in 56% of Stable and 52% of Dynamic sites the single most important tile IS a core tile, against a chance of 3.3% - 16x. That one does NOT differ by class (Fisher p = 0.063; matched McNemar p = 0.21), so quote it as the shared fact, not as a difference. Figure for it is on disk as r_fb_top_tile.png if anyone wants to see it.
+2,359 sites, 60 tiles of 10 bp from -300 to +290, fine-tuned FB head, readout atac_170.
+Why the floor subtraction matters, if asked: Dynamic sites are about half as accessible, so their log2 ratios are noisier, and noise is flat across position. Without removing each site's own floor (median |effect| beyond +-200 bp: 0.047 Dynamic, 0.037 Stable) a Dynamic profile looks more distributed whether or not it is. That is exactly the artefact this corrects for.
+Agreement: this is the AlphaGenome version of 'attention is more distributed at dynamic enhancers'. Same direction, different model and different readout.
+Honest size: the matched difference is 1.5 percentage points on a base of about a third. Real, repeatedly so, but small - do not oversell it as two different architectures.</a:t>
             </a:r>
             <a:endParaRPr lang="en-US" dirty="0"/>
           </a:p>
@@ -1236,8 +1512,11 @@
           <a:p>
             <a:r>
               <a:rPr lang="en-US" dirty="0"/>
-              <a:t>If the flank question comes up: the MPRA destroys the flanks of a 170 bp fragment on a plasmid and reads transcription; we move an intact ~0.8 kb element into closed chromatin and read accessibility. There is no chromatin to open in the MPRA. The honest shared conclusion is that neither assay finds much class information in 170 bp.
-Everything here is predicted accessibility from a model fine-tuned on our own fibroblast ATAC, not a measurement, and not the MPRA-trained probe used in the manuscript.</a:t>
+              <a:t>Stable 0.804 (n=1179) vs Dynamic pooled 0.745 (n=1161), p = 7.2e-11. By class: AP-1 gained 0.755, AP-1 lost 0.734, Dynamic not age-driven 0.727. Kruskal across the four, p = 1.7e-10.
+The 40%: partner share 19.6% for Stable against 24.5 / 26.6 / 27.3% for the Dynamic classes, so 27.3/19.6 = 1.39x. It is the same number as 80 vs 73, read from the other end - say it whichever way, but do not say both as if they were two results.
+Detection check, in case it is asked: footprint calling needs signal, so Stable sites carry more detected partners (5.89 vs 5.01 per site, p = 2e-82). Restricting to the 1,808 sites that hit the cap of 6 detected partners, the gap is unchanged: 0.806 vs 0.736, p = 2.1e-13. Not a detection artefact.
+Note this is a DIFFERENT statement from slide 5. There, only the AP-1-losing class drops in absolute AP-1 dependence. Here, all Dynamic classes are modestly less AP-1-centric in relative terms.
+The equivalent tile-scan measure (motif share vs a 10-50 bp collar) does NOT survive accessibility matching (p = 0.11); the collar is mostly noise at low-accessibility sites. This version is better powered because it only scores footprinted motifs.</a:t>
             </a:r>
             <a:endParaRPr lang="en-US" dirty="0"/>
           </a:p>
@@ -2173,6 +2452,862 @@
 </p:sld>
 </file>
 
+<file path=ppt/slides/slide10.xml><?xml version="1.0" encoding="utf-8"?>
+<p:sld xmlns:a="http://schemas.openxmlformats.org/drawingml/2006/main" xmlns:r="http://schemas.openxmlformats.org/officeDocument/2006/relationships" xmlns:p="http://schemas.openxmlformats.org/presentationml/2006/main">
+  <p:cSld name="Slide 10">
+    <p:spTree>
+      <p:nvGrpSpPr>
+        <p:cNvPr id="1" name=""/>
+        <p:cNvGrpSpPr/>
+        <p:nvPr/>
+      </p:nvGrpSpPr>
+      <p:grpSpPr>
+        <a:xfrm>
+          <a:off x="0" y="0"/>
+          <a:ext cx="0" cy="0"/>
+          <a:chOff x="0" y="0"/>
+          <a:chExt cx="0" cy="0"/>
+        </a:xfrm>
+      </p:grpSpPr>
+      <p:sp>
+        <p:nvSpPr>
+          <p:cNvPr id="2" name="Text 0"/>
+          <p:cNvSpPr/>
+          <p:nvPr>
+            <p:ph idx="100" type="title" hasCustomPrompt="1"/>
+          </p:nvPr>
+        </p:nvSpPr>
+        <p:spPr>
+          <a:xfrm>
+            <a:off x="502920" y="274320"/>
+            <a:ext cx="11155680" cy="731520"/>
+          </a:xfrm>
+          <a:prstGeom prst="rect">
+            <a:avLst/>
+          </a:prstGeom>
+          <a:noFill/>
+          <a:ln/>
+        </p:spPr>
+        <p:txBody>
+          <a:bodyPr wrap="square" rtlCol="0" anchor="ctr"/>
+          <a:lstStyle/>
+          <a:p>
+            <a:pPr algn="l" indent="0" marL="0">
+              <a:buNone/>
+            </a:pPr>
+            <a:r>
+              <a:rPr lang="en-US" sz="2800" b="1" dirty="0">
+                <a:solidFill>
+                  <a:schemeClr val="tx1"/>
+                </a:solidFill>
+              </a:rPr>
+              <a:t>The AP-1 ladder, and the spacing experiments</a:t>
+            </a:r>
+            <a:endParaRPr lang="en-US" sz="2800" dirty="0"/>
+          </a:p>
+        </p:txBody>
+      </p:sp>
+      <p:pic>
+        <p:nvPicPr>
+          <p:cNvPr id="3" name="Image 0" descr="/Users/z5162865/WongLab/AlphaGenome_Ap1/Analysis/slide_figures/m4_titration.png">    </p:cNvPr>
+          <p:cNvPicPr>
+            <a:picLocks noChangeAspect="1"/>
+          </p:cNvPicPr>
+          <p:nvPr/>
+        </p:nvPicPr>
+        <p:blipFill>
+          <a:blip r:embed="rId1"/>
+          <a:stretch>
+            <a:fillRect/>
+          </a:stretch>
+        </p:blipFill>
+        <p:spPr>
+          <a:xfrm>
+            <a:off x="717452" y="1097280"/>
+            <a:ext cx="10726615" cy="4800600"/>
+          </a:xfrm>
+          <a:prstGeom prst="rect">
+            <a:avLst/>
+          </a:prstGeom>
+        </p:spPr>
+      </p:pic>
+      <p:sp>
+        <p:nvSpPr>
+          <p:cNvPr id="4" name="Shape 1"/>
+          <p:cNvSpPr/>
+          <p:nvPr/>
+        </p:nvSpPr>
+        <p:spPr>
+          <a:xfrm>
+            <a:off x="502920" y="5989320"/>
+            <a:ext cx="50292" cy="566928"/>
+          </a:xfrm>
+          <a:prstGeom prst="rect">
+            <a:avLst/>
+          </a:prstGeom>
+          <a:solidFill>
+            <a:srgbClr val="3F3F3F"/>
+          </a:solidFill>
+          <a:ln w="12700">
+            <a:solidFill>
+              <a:srgbClr val="333333"/>
+            </a:solidFill>
+            <a:prstDash val="solid"/>
+          </a:ln>
+        </p:spPr>
+      </p:sp>
+      <p:sp>
+        <p:nvSpPr>
+          <p:cNvPr id="5" name="Text 2"/>
+          <p:cNvSpPr txBox="1"/>
+          <p:nvPr/>
+        </p:nvSpPr>
+        <p:spPr>
+          <a:xfrm>
+            <a:off x="749808" y="5989320"/>
+            <a:ext cx="10881360" cy="566928"/>
+          </a:xfrm>
+          <a:prstGeom prst="rect">
+            <a:avLst/>
+          </a:prstGeom>
+          <a:noFill/>
+          <a:ln/>
+        </p:spPr>
+        <p:txBody>
+          <a:bodyPr wrap="square" lIns="0" tIns="0" rIns="0" bIns="0" rtlCol="0" anchor="ctr"/>
+          <a:lstStyle/>
+          <a:p>
+            <a:pPr indent="0" marL="0">
+              <a:buNone/>
+            </a:pPr>
+            <a:r>
+              <a:rPr lang="en-US" sz="1550" dirty="0">
+                <a:solidFill>
+                  <a:srgbClr val="111111"/>
+                </a:solidFill>
+              </a:rPr>
+              <a:t>Rather than only destroying the motif, weaken it one base at a time, strengthen it, flip it, duplicate it or move it — each against a control that changes the same amount of sequence but no motif.</a:t>
+            </a:r>
+            <a:endParaRPr lang="en-US" sz="1550" dirty="0"/>
+          </a:p>
+        </p:txBody>
+      </p:sp>
+      <p:sp>
+        <p:nvSpPr>
+          <p:cNvPr id="25" name="Slide Number Placeholder 0"/>
+          <p:cNvSpPr>
+            <a:spLocks noGrp="1"/>
+          </p:cNvSpPr>
+          <p:nvPr>
+            <p:ph type="sldNum" sz="quarter" idx="4294967295"/>
+          </p:nvPr>
+        </p:nvSpPr>
+        <p:spPr>
+          <a:xfrm>
+            <a:off x="11658600" y="6446520"/>
+            <a:ext cx="800000" cy="300000"/>
+          </a:xfrm>
+          <a:prstGeom prst="rect">
+            <a:avLst/>
+          </a:prstGeom>
+          <a:extLst>
+            <a:ext uri="{C572A759-6A51-4108-AA02-DFA0A04FC94B}">
+              <ma14:wrappingTextBoxFlag xmlns:ma14="http://schemas.microsoft.com/office/mac/drawingml/2011/main" val="0"/>
+            </a:ext>
+          </a:extLst>
+        </p:spPr>
+        <p:txBody>
+          <a:bodyPr/>
+          <a:lstStyle>
+            <a:lvl1pPr>
+              <a:defRPr sz="1000">
+                <a:solidFill>
+                  <a:srgbClr val="A6A6A6"/>
+                </a:solidFill>
+              </a:defRPr>
+            </a:lvl1pPr>
+          </a:lstStyle>
+          <a:p>
+            <a:pPr algn="l"/>
+            <a:fld id="{F7021451-1387-4CA6-816F-3879F97B5CBC}" type="slidenum">
+              <a:rPr b="0" lang="en-US"/>
+              <a:t>10</a:t>
+            </a:fld>
+            <a:endParaRPr lang="en-US"/>
+          </a:p>
+        </p:txBody>
+      </p:sp>
+    </p:spTree>
+  </p:cSld>
+  <p:clrMapOvr>
+    <a:masterClrMapping/>
+  </p:clrMapOvr>
+</p:sld>
+</file>
+
+<file path=ppt/slides/slide11.xml><?xml version="1.0" encoding="utf-8"?>
+<p:sld xmlns:a="http://schemas.openxmlformats.org/drawingml/2006/main" xmlns:r="http://schemas.openxmlformats.org/officeDocument/2006/relationships" xmlns:p="http://schemas.openxmlformats.org/presentationml/2006/main">
+  <p:cSld name="Slide 11">
+    <p:spTree>
+      <p:nvGrpSpPr>
+        <p:cNvPr id="1" name=""/>
+        <p:cNvGrpSpPr/>
+        <p:nvPr/>
+      </p:nvGrpSpPr>
+      <p:grpSpPr>
+        <a:xfrm>
+          <a:off x="0" y="0"/>
+          <a:ext cx="0" cy="0"/>
+          <a:chOff x="0" y="0"/>
+          <a:chExt cx="0" cy="0"/>
+        </a:xfrm>
+      </p:grpSpPr>
+      <p:sp>
+        <p:nvSpPr>
+          <p:cNvPr id="2" name="Text 0"/>
+          <p:cNvSpPr/>
+          <p:nvPr>
+            <p:ph idx="100" type="title" hasCustomPrompt="1"/>
+          </p:nvPr>
+        </p:nvSpPr>
+        <p:spPr>
+          <a:xfrm>
+            <a:off x="502920" y="274320"/>
+            <a:ext cx="11155680" cy="731520"/>
+          </a:xfrm>
+          <a:prstGeom prst="rect">
+            <a:avLst/>
+          </a:prstGeom>
+          <a:noFill/>
+          <a:ln/>
+        </p:spPr>
+        <p:txBody>
+          <a:bodyPr wrap="square" rtlCol="0" anchor="ctr"/>
+          <a:lstStyle/>
+          <a:p>
+            <a:pPr algn="l" indent="0" marL="0">
+              <a:buNone/>
+            </a:pPr>
+            <a:r>
+              <a:rPr lang="en-US" sz="2800" b="1" dirty="0">
+                <a:solidFill>
+                  <a:schemeClr val="tx1"/>
+                </a:solidFill>
+              </a:rPr>
+              <a:t>Two differences that turned out to be accessibility</a:t>
+            </a:r>
+            <a:endParaRPr lang="en-US" sz="2800" dirty="0"/>
+          </a:p>
+        </p:txBody>
+      </p:sp>
+      <p:sp>
+        <p:nvSpPr>
+          <p:cNvPr id="3" name="Text 0"/>
+          <p:cNvSpPr/>
+          <p:nvPr>
+            <p:ph idx="101" type="body" hasCustomPrompt="1"/>
+          </p:nvPr>
+        </p:nvSpPr>
+        <p:spPr>
+          <a:xfrm>
+            <a:off x="502920" y="1234440"/>
+            <a:ext cx="11155680" cy="5029200"/>
+          </a:xfrm>
+          <a:prstGeom prst="rect">
+            <a:avLst/>
+          </a:prstGeom>
+          <a:noFill/>
+          <a:ln/>
+        </p:spPr>
+        <p:txBody>
+          <a:bodyPr wrap="square" rtlCol="0" anchor="t"/>
+          <a:lstStyle/>
+          <a:p>
+            <a:pPr algn="l" marL="342900" indent="-342900">
+              <a:spcBef>
+                <a:spcPts val="1100"/>
+              </a:spcBef>
+              <a:spcAft>
+                <a:spcPts val="300"/>
+              </a:spcAft>
+              <a:buSzPct val="100000"/>
+              <a:buChar char="•"/>
+            </a:pPr>
+            <a:r>
+              <a:rPr lang="en-US" sz="1700" b="1" dirty="0">
+                <a:solidFill>
+                  <a:srgbClr val="111111"/>
+                </a:solidFill>
+              </a:rPr>
+              <a:t>A second AP-1 copy looked worth more to Dynamic sites</a:t>
+            </a:r>
+            <a:endParaRPr lang="en-US" sz="1700" dirty="0"/>
+          </a:p>
+          <a:p>
+            <a:pPr algn="l" lvl="1" marL="685800" indent="-342900">
+              <a:spcAft>
+                <a:spcPts val="400"/>
+              </a:spcAft>
+              <a:buSzPct val="100000"/>
+              <a:buChar char="▪"/>
+            </a:pPr>
+            <a:r>
+              <a:rPr lang="en-US" sz="1450" dirty="0">
+                <a:solidFill>
+                  <a:srgbClr val="595959"/>
+                </a:solidFill>
+              </a:rPr>
+              <a:t>+0.72 vs +0.60 log2, p &lt; 1e-4 — matched on accessibility, p = 0.93. Gone.</a:t>
+            </a:r>
+            <a:endParaRPr lang="en-US" sz="1700" dirty="0"/>
+          </a:p>
+          <a:p>
+            <a:pPr algn="l" marL="342900" indent="-342900">
+              <a:spcBef>
+                <a:spcPts val="1100"/>
+              </a:spcBef>
+              <a:spcAft>
+                <a:spcPts val="300"/>
+              </a:spcAft>
+              <a:buSzPct val="100000"/>
+              <a:buChar char="•"/>
+            </a:pPr>
+            <a:r>
+              <a:rPr lang="en-US" sz="1700" b="1" dirty="0">
+                <a:solidFill>
+                  <a:srgbClr val="111111"/>
+                </a:solidFill>
+              </a:rPr>
+              <a:t>Upgrading an imperfect core to a perfect TGAGTCA looked worth more to Dynamic sites</a:t>
+            </a:r>
+            <a:endParaRPr lang="en-US" sz="1700" dirty="0"/>
+          </a:p>
+          <a:p>
+            <a:pPr algn="l" lvl="1" marL="685800" indent="-342900">
+              <a:spcAft>
+                <a:spcPts val="400"/>
+              </a:spcAft>
+              <a:buSzPct val="100000"/>
+              <a:buChar char="▪"/>
+            </a:pPr>
+            <a:r>
+              <a:rPr lang="en-US" sz="1450" dirty="0">
+                <a:solidFill>
+                  <a:srgbClr val="595959"/>
+                </a:solidFill>
+              </a:rPr>
+              <a:t>+0.66 vs +0.52, p &lt; 1e-4 — matched, p = 0.94. Gone.</a:t>
+            </a:r>
+            <a:endParaRPr lang="en-US" sz="1700" dirty="0"/>
+          </a:p>
+          <a:p>
+            <a:pPr algn="l" marL="342900" indent="-342900">
+              <a:spcBef>
+                <a:spcPts val="1100"/>
+              </a:spcBef>
+              <a:spcAft>
+                <a:spcPts val="300"/>
+              </a:spcAft>
+              <a:buSzPct val="100000"/>
+              <a:buChar char="•"/>
+            </a:pPr>
+            <a:r>
+              <a:rPr lang="en-US" sz="1700" b="1" dirty="0">
+                <a:solidFill>
+                  <a:srgbClr val="111111"/>
+                </a:solidFill>
+              </a:rPr>
+              <a:t>What did survive matching</a:t>
+            </a:r>
+            <a:endParaRPr lang="en-US" sz="1700" dirty="0"/>
+          </a:p>
+          <a:p>
+            <a:pPr algn="l" lvl="1" marL="685800" indent="-342900">
+              <a:spcAft>
+                <a:spcPts val="400"/>
+              </a:spcAft>
+              <a:buSzPct val="100000"/>
+              <a:buChar char="▪"/>
+            </a:pPr>
+            <a:r>
+              <a:rPr lang="en-US" sz="1450" dirty="0">
+                <a:solidFill>
+                  <a:srgbClr val="595959"/>
+                </a:solidFill>
+              </a:rPr>
+              <a:t>Destroying the motif costs Dynamic sites less (+0.16, p = 4e-4); the dose-response is shallower; relocating the motif helps them less.</a:t>
+            </a:r>
+            <a:endParaRPr lang="en-US" sz="1700" dirty="0"/>
+          </a:p>
+          <a:p>
+            <a:pPr algn="l" marL="342900" indent="-342900">
+              <a:spcBef>
+                <a:spcPts val="1100"/>
+              </a:spcBef>
+              <a:spcAft>
+                <a:spcPts val="300"/>
+              </a:spcAft>
+              <a:buSzPct val="100000"/>
+              <a:buChar char="•"/>
+            </a:pPr>
+            <a:r>
+              <a:rPr lang="en-US" sz="1700" b="1" dirty="0">
+                <a:solidFill>
+                  <a:srgbClr val="111111"/>
+                </a:solidFill>
+              </a:rPr>
+              <a:t>Two clean negatives worth having</a:t>
+            </a:r>
+            <a:endParaRPr lang="en-US" sz="1700" dirty="0"/>
+          </a:p>
+          <a:p>
+            <a:pPr algn="l" lvl="1" marL="685800" indent="-342900">
+              <a:spcAft>
+                <a:spcPts val="400"/>
+              </a:spcAft>
+              <a:buSzPct val="100000"/>
+              <a:buChar char="▪"/>
+            </a:pPr>
+            <a:r>
+              <a:rPr lang="en-US" sz="1450" dirty="0">
+                <a:solidFill>
+                  <a:srgbClr val="595959"/>
+                </a:solidFill>
+              </a:rPr>
+              <a:t>Reverse-complementing the whole motif costs nothing in either class (-0.03 log2, p = 0.89) — expected for a palindromic TRE, and a sanity check on the head.</a:t>
+            </a:r>
+            <a:endParaRPr lang="en-US" sz="1700" dirty="0"/>
+          </a:p>
+          <a:p>
+            <a:pPr algn="l" lvl="1" marL="685800" indent="-342900">
+              <a:spcAft>
+                <a:spcPts val="400"/>
+              </a:spcAft>
+              <a:buSzPct val="100000"/>
+              <a:buChar char="▪"/>
+            </a:pPr>
+            <a:r>
+              <a:rPr lang="en-US" sz="1450" dirty="0">
+                <a:solidFill>
+                  <a:srgbClr val="595959"/>
+                </a:solidFill>
+              </a:rPr>
+              <a:t>The spacing preference for a second copy is identical: best at ±20–40 bp, decaying by ±150 bp, with no class difference at any distance (all FDR &gt; 0.58).</a:t>
+            </a:r>
+            <a:endParaRPr lang="en-US" sz="1700" dirty="0"/>
+          </a:p>
+        </p:txBody>
+      </p:sp>
+      <p:sp>
+        <p:nvSpPr>
+          <p:cNvPr id="25" name="Slide Number Placeholder 0"/>
+          <p:cNvSpPr>
+            <a:spLocks noGrp="1"/>
+          </p:cNvSpPr>
+          <p:nvPr>
+            <p:ph type="sldNum" sz="quarter" idx="4294967295"/>
+          </p:nvPr>
+        </p:nvSpPr>
+        <p:spPr>
+          <a:xfrm>
+            <a:off x="11658600" y="6446520"/>
+            <a:ext cx="800000" cy="300000"/>
+          </a:xfrm>
+          <a:prstGeom prst="rect">
+            <a:avLst/>
+          </a:prstGeom>
+          <a:extLst>
+            <a:ext uri="{C572A759-6A51-4108-AA02-DFA0A04FC94B}">
+              <ma14:wrappingTextBoxFlag xmlns:ma14="http://schemas.microsoft.com/office/mac/drawingml/2011/main" val="0"/>
+            </a:ext>
+          </a:extLst>
+        </p:spPr>
+        <p:txBody>
+          <a:bodyPr/>
+          <a:lstStyle>
+            <a:lvl1pPr>
+              <a:defRPr sz="1000">
+                <a:solidFill>
+                  <a:srgbClr val="A6A6A6"/>
+                </a:solidFill>
+              </a:defRPr>
+            </a:lvl1pPr>
+          </a:lstStyle>
+          <a:p>
+            <a:pPr algn="l"/>
+            <a:fld id="{F7021451-1387-4CA6-816F-3879F97B5CBC}" type="slidenum">
+              <a:rPr b="0" lang="en-US"/>
+              <a:t>11</a:t>
+            </a:fld>
+            <a:endParaRPr lang="en-US"/>
+          </a:p>
+        </p:txBody>
+      </p:sp>
+    </p:spTree>
+  </p:cSld>
+  <p:clrMapOvr>
+    <a:masterClrMapping/>
+  </p:clrMapOvr>
+</p:sld>
+</file>
+
+<file path=ppt/slides/slide12.xml><?xml version="1.0" encoding="utf-8"?>
+<p:sld xmlns:a="http://schemas.openxmlformats.org/drawingml/2006/main" xmlns:r="http://schemas.openxmlformats.org/officeDocument/2006/relationships" xmlns:p="http://schemas.openxmlformats.org/presentationml/2006/main">
+  <p:cSld name="Slide 12">
+    <p:spTree>
+      <p:nvGrpSpPr>
+        <p:cNvPr id="1" name=""/>
+        <p:cNvGrpSpPr/>
+        <p:nvPr/>
+      </p:nvGrpSpPr>
+      <p:grpSpPr>
+        <a:xfrm>
+          <a:off x="0" y="0"/>
+          <a:ext cx="0" cy="0"/>
+          <a:chOff x="0" y="0"/>
+          <a:chExt cx="0" cy="0"/>
+        </a:xfrm>
+      </p:grpSpPr>
+      <p:sp>
+        <p:nvSpPr>
+          <p:cNvPr id="2" name="Text 0"/>
+          <p:cNvSpPr/>
+          <p:nvPr>
+            <p:ph idx="100" type="title" hasCustomPrompt="1"/>
+          </p:nvPr>
+        </p:nvSpPr>
+        <p:spPr>
+          <a:xfrm>
+            <a:off x="502920" y="274320"/>
+            <a:ext cx="11155680" cy="731520"/>
+          </a:xfrm>
+          <a:prstGeom prst="rect">
+            <a:avLst/>
+          </a:prstGeom>
+          <a:noFill/>
+          <a:ln/>
+        </p:spPr>
+        <p:txBody>
+          <a:bodyPr wrap="square" rtlCol="0" anchor="ctr"/>
+          <a:lstStyle/>
+          <a:p>
+            <a:pPr algn="l" indent="0" marL="0">
+              <a:buNone/>
+            </a:pPr>
+            <a:r>
+              <a:rPr lang="en-US" sz="2800" b="1" dirty="0">
+                <a:solidFill>
+                  <a:schemeClr val="tx1"/>
+                </a:solidFill>
+              </a:rPr>
+              <a:t>How this sits with the MPRA work</a:t>
+            </a:r>
+            <a:endParaRPr lang="en-US" sz="2800" dirty="0"/>
+          </a:p>
+        </p:txBody>
+      </p:sp>
+      <p:sp>
+        <p:nvSpPr>
+          <p:cNvPr id="3" name="Text 0"/>
+          <p:cNvSpPr/>
+          <p:nvPr>
+            <p:ph idx="101" type="body" hasCustomPrompt="1"/>
+          </p:nvPr>
+        </p:nvSpPr>
+        <p:spPr>
+          <a:xfrm>
+            <a:off x="502920" y="1234440"/>
+            <a:ext cx="11155680" cy="5029200"/>
+          </a:xfrm>
+          <a:prstGeom prst="rect">
+            <a:avLst/>
+          </a:prstGeom>
+          <a:noFill/>
+          <a:ln/>
+        </p:spPr>
+        <p:txBody>
+          <a:bodyPr wrap="square" rtlCol="0" anchor="t"/>
+          <a:lstStyle/>
+          <a:p>
+            <a:pPr algn="l" marL="342900" indent="-342900">
+              <a:spcBef>
+                <a:spcPts val="1100"/>
+              </a:spcBef>
+              <a:spcAft>
+                <a:spcPts val="300"/>
+              </a:spcAft>
+              <a:buSzPct val="100000"/>
+              <a:buChar char="•"/>
+            </a:pPr>
+            <a:r>
+              <a:rPr lang="en-US" sz="1700" b="1" dirty="0">
+                <a:solidFill>
+                  <a:srgbClr val="111111"/>
+                </a:solidFill>
+              </a:rPr>
+              <a:t>Agrees</a:t>
+            </a:r>
+            <a:endParaRPr lang="en-US" sz="1700" dirty="0"/>
+          </a:p>
+          <a:p>
+            <a:pPr algn="l" lvl="1" marL="685800" indent="-342900">
+              <a:spcAft>
+                <a:spcPts val="400"/>
+              </a:spcAft>
+              <a:buSzPct val="100000"/>
+              <a:buChar char="▪"/>
+            </a:pPr>
+            <a:r>
+              <a:rPr lang="en-US" sz="1450" dirty="0">
+                <a:solidFill>
+                  <a:srgbClr val="595959"/>
+                </a:solidFill>
+              </a:rPr>
+              <a:t>Dynamic elements have weaker endogenous chromatin, and depend on context rather than being sequence-autonomous.</a:t>
+            </a:r>
+            <a:endParaRPr lang="en-US" sz="1700" dirty="0"/>
+          </a:p>
+          <a:p>
+            <a:pPr algn="l" lvl="1" marL="685800" indent="-342900">
+              <a:spcAft>
+                <a:spcPts val="400"/>
+              </a:spcAft>
+              <a:buSzPct val="100000"/>
+              <a:buChar char="▪"/>
+            </a:pPr>
+            <a:r>
+              <a:rPr lang="en-US" sz="1450" dirty="0">
+                <a:solidFill>
+                  <a:srgbClr val="595959"/>
+                </a:solidFill>
+              </a:rPr>
+              <a:t>Shuffling the AP-1 core alone does not separate pooled Stable from pooled Dynamic.</a:t>
+            </a:r>
+            <a:endParaRPr lang="en-US" sz="1700" dirty="0"/>
+          </a:p>
+          <a:p>
+            <a:pPr algn="l" lvl="1" marL="685800" indent="-342900">
+              <a:spcAft>
+                <a:spcPts val="400"/>
+              </a:spcAft>
+              <a:buSzPct val="100000"/>
+              <a:buChar char="▪"/>
+            </a:pPr>
+            <a:r>
+              <a:rPr lang="en-US" sz="1450" dirty="0">
+                <a:solidFill>
+                  <a:srgbClr val="595959"/>
+                </a:solidFill>
+              </a:rPr>
+              <a:t>Age-gained elements behave like Stable ones — here, at their own AP-1 motif.</a:t>
+            </a:r>
+            <a:endParaRPr lang="en-US" sz="1700" dirty="0"/>
+          </a:p>
+          <a:p>
+            <a:pPr algn="l" lvl="1" marL="685800" indent="-342900">
+              <a:spcAft>
+                <a:spcPts val="400"/>
+              </a:spcAft>
+              <a:buSzPct val="100000"/>
+              <a:buChar char="▪"/>
+            </a:pPr>
+            <a:r>
+              <a:rPr lang="en-US" sz="1450" dirty="0">
+                <a:solidFill>
+                  <a:srgbClr val="595959"/>
+                </a:solidFill>
+              </a:rPr>
+              <a:t>C/EBP is the strongest partner motif at fibroblast AP-1 sites (net −0.71 log2, ahead of MEF2 and NFI).</a:t>
+            </a:r>
+            <a:endParaRPr lang="en-US" sz="1700" dirty="0"/>
+          </a:p>
+          <a:p>
+            <a:pPr algn="l" marL="342900" indent="-342900">
+              <a:spcBef>
+                <a:spcPts val="1100"/>
+              </a:spcBef>
+              <a:spcAft>
+                <a:spcPts val="300"/>
+              </a:spcAft>
+              <a:buSzPct val="100000"/>
+              <a:buChar char="•"/>
+            </a:pPr>
+            <a:r>
+              <a:rPr lang="en-US" sz="1700" b="1" dirty="0">
+                <a:solidFill>
+                  <a:srgbClr val="111111"/>
+                </a:solidFill>
+              </a:rPr>
+              <a:t>Adds</a:t>
+            </a:r>
+            <a:endParaRPr lang="en-US" sz="1700" dirty="0"/>
+          </a:p>
+          <a:p>
+            <a:pPr algn="l" lvl="1" marL="685800" indent="-342900">
+              <a:spcAft>
+                <a:spcPts val="400"/>
+              </a:spcAft>
+              <a:buSzPct val="100000"/>
+              <a:buChar char="▪"/>
+            </a:pPr>
+            <a:r>
+              <a:rPr lang="en-US" sz="1450" dirty="0">
+                <a:solidFill>
+                  <a:srgbClr val="595959"/>
+                </a:solidFill>
+              </a:rPr>
+              <a:t>The class difference is a whole-peak property, not a 170 bp one.</a:t>
+            </a:r>
+            <a:endParaRPr lang="en-US" sz="1700" dirty="0"/>
+          </a:p>
+          <a:p>
+            <a:pPr algn="l" lvl="1" marL="685800" indent="-342900">
+              <a:spcAft>
+                <a:spcPts val="400"/>
+              </a:spcAft>
+              <a:buSzPct val="100000"/>
+              <a:buChar char="▪"/>
+            </a:pPr>
+            <a:r>
+              <a:rPr lang="en-US" sz="1450" dirty="0">
+                <a:solidFill>
+                  <a:srgbClr val="595959"/>
+                </a:solidFill>
+              </a:rPr>
+              <a:t>Within Dynamic, the AP-1-losing sites are the ones that are sequence-different; the gaining ones are not.</a:t>
+            </a:r>
+            <a:endParaRPr lang="en-US" sz="1700" dirty="0"/>
+          </a:p>
+          <a:p>
+            <a:pPr algn="l" lvl="1" marL="685800" indent="-342900">
+              <a:spcAft>
+                <a:spcPts val="400"/>
+              </a:spcAft>
+              <a:buSzPct val="100000"/>
+              <a:buChar char="▪"/>
+            </a:pPr>
+            <a:r>
+              <a:rPr lang="en-US" sz="1450" dirty="0">
+                <a:solidFill>
+                  <a:srgbClr val="595959"/>
+                </a:solidFill>
+              </a:rPr>
+              <a:t>Unprompted, AlphaGenome makes the AP-1 core the most important 10 bp in over half of all sites — equally in both classes. The classes differ in how much of the dependence sits there, not in whether AP-1 leads.</a:t>
+            </a:r>
+            <a:endParaRPr lang="en-US" sz="1700" dirty="0"/>
+          </a:p>
+          <a:p>
+            <a:pPr algn="l" lvl="1" marL="685800" indent="-342900">
+              <a:spcAft>
+                <a:spcPts val="400"/>
+              </a:spcAft>
+              <a:buSzPct val="100000"/>
+              <a:buChar char="▪"/>
+            </a:pPr>
+            <a:r>
+              <a:rPr lang="en-US" sz="1450" dirty="0">
+                <a:solidFill>
+                  <a:srgbClr val="595959"/>
+                </a:solidFill>
+              </a:rPr>
+              <a:t>Dynamic sites spread their dependence slightly wider, and it survives accessibility matching (33.1% vs 31.3% within ±25 bp, P = 0.006) — the sequence-model version of “attention is more distributed at dynamic enhancers”.</a:t>
+            </a:r>
+            <a:endParaRPr lang="en-US" sz="1700" dirty="0"/>
+          </a:p>
+          <a:p>
+            <a:pPr algn="l" marL="342900" indent="-342900">
+              <a:spcBef>
+                <a:spcPts val="1100"/>
+              </a:spcBef>
+              <a:spcAft>
+                <a:spcPts val="300"/>
+              </a:spcAft>
+              <a:buSzPct val="100000"/>
+              <a:buChar char="•"/>
+            </a:pPr>
+            <a:r>
+              <a:rPr lang="en-US" sz="1700" b="1" dirty="0">
+                <a:solidFill>
+                  <a:srgbClr val="111111"/>
+                </a:solidFill>
+              </a:rPr>
+              <a:t>Keep off the slides</a:t>
+            </a:r>
+            <a:endParaRPr lang="en-US" sz="1700" dirty="0"/>
+          </a:p>
+          <a:p>
+            <a:pPr algn="l" lvl="1" marL="685800" indent="-342900">
+              <a:spcAft>
+                <a:spcPts val="400"/>
+              </a:spcAft>
+              <a:buSzPct val="100000"/>
+              <a:buChar char="▪"/>
+            </a:pPr>
+            <a:r>
+              <a:rPr lang="en-US" sz="1450" dirty="0">
+                <a:solidFill>
+                  <a:srgbClr val="595959"/>
+                </a:solidFill>
+              </a:rPr>
+              <a:t>Our in-situ 170 bp shuffle costs Stable sites more (−2.51 vs −1.96, p = 4e-40), the opposite of the MPRA flank result. Different assay — episomal activity vs chromatin accessibility — but it reads as a contradiction.</a:t>
+            </a:r>
+            <a:endParaRPr lang="en-US" sz="1700" dirty="0"/>
+          </a:p>
+        </p:txBody>
+      </p:sp>
+      <p:sp>
+        <p:nvSpPr>
+          <p:cNvPr id="25" name="Slide Number Placeholder 0"/>
+          <p:cNvSpPr>
+            <a:spLocks noGrp="1"/>
+          </p:cNvSpPr>
+          <p:nvPr>
+            <p:ph type="sldNum" sz="quarter" idx="4294967295"/>
+          </p:nvPr>
+        </p:nvSpPr>
+        <p:spPr>
+          <a:xfrm>
+            <a:off x="11658600" y="6446520"/>
+            <a:ext cx="800000" cy="300000"/>
+          </a:xfrm>
+          <a:prstGeom prst="rect">
+            <a:avLst/>
+          </a:prstGeom>
+          <a:extLst>
+            <a:ext uri="{C572A759-6A51-4108-AA02-DFA0A04FC94B}">
+              <ma14:wrappingTextBoxFlag xmlns:ma14="http://schemas.microsoft.com/office/mac/drawingml/2011/main" val="0"/>
+            </a:ext>
+          </a:extLst>
+        </p:spPr>
+        <p:txBody>
+          <a:bodyPr/>
+          <a:lstStyle>
+            <a:lvl1pPr>
+              <a:defRPr sz="1000">
+                <a:solidFill>
+                  <a:srgbClr val="A6A6A6"/>
+                </a:solidFill>
+              </a:defRPr>
+            </a:lvl1pPr>
+          </a:lstStyle>
+          <a:p>
+            <a:pPr algn="l"/>
+            <a:fld id="{F7021451-1387-4CA6-816F-3879F97B5CBC}" type="slidenum">
+              <a:rPr b="0" lang="en-US"/>
+              <a:t>12</a:t>
+            </a:fld>
+            <a:endParaRPr lang="en-US"/>
+          </a:p>
+        </p:txBody>
+      </p:sp>
+    </p:spTree>
+  </p:cSld>
+  <p:clrMapOvr>
+    <a:masterClrMapping/>
+  </p:clrMapOvr>
+</p:sld>
+</file>
+
 <file path=ppt/slides/slide2.xml><?xml version="1.0" encoding="utf-8"?>
 <p:sld xmlns:a="http://schemas.openxmlformats.org/drawingml/2006/main" xmlns:r="http://schemas.openxmlformats.org/officeDocument/2006/relationships" xmlns:p="http://schemas.openxmlformats.org/presentationml/2006/main">
   <p:cSld name="Slide 2">
@@ -2222,24 +3357,71 @@
                   <a:schemeClr val="tx1"/>
                 </a:solidFill>
               </a:rPr>
-              <a:t>Three perturbations, all in the native 131 kb window</a:t>
+              <a:t>Everything here is one prediction minus another</a:t>
             </a:r>
             <a:endParaRPr lang="en-US" sz="2800" dirty="0"/>
           </a:p>
         </p:txBody>
       </p:sp>
-      <p:sp>
-        <p:nvSpPr>
-          <p:cNvPr id="3" name="Text 0"/>
+      <p:pic>
+        <p:nvPicPr>
+          <p:cNvPr id="3" name="Image 0" descr="/Users/z5162865/WongLab/AlphaGenome_Ap1/Analysis/slide_figures/m1_pipeline.png">    </p:cNvPr>
+          <p:cNvPicPr>
+            <a:picLocks noChangeAspect="1"/>
+          </p:cNvPicPr>
+          <p:nvPr/>
+        </p:nvPicPr>
+        <p:blipFill>
+          <a:blip r:embed="rId1"/>
+          <a:stretch>
+            <a:fillRect/>
+          </a:stretch>
+        </p:blipFill>
+        <p:spPr>
+          <a:xfrm>
+            <a:off x="457200" y="1259403"/>
+            <a:ext cx="11247120" cy="4476354"/>
+          </a:xfrm>
+          <a:prstGeom prst="rect">
+            <a:avLst/>
+          </a:prstGeom>
+        </p:spPr>
+      </p:pic>
+      <p:sp>
+        <p:nvSpPr>
+          <p:cNvPr id="4" name="Shape 1"/>
           <p:cNvSpPr/>
-          <p:nvPr>
-            <p:ph idx="101" type="body" hasCustomPrompt="1"/>
-          </p:nvPr>
-        </p:nvSpPr>
-        <p:spPr>
-          <a:xfrm>
-            <a:off x="502920" y="1234440"/>
-            <a:ext cx="11155680" cy="5029200"/>
+          <p:nvPr/>
+        </p:nvSpPr>
+        <p:spPr>
+          <a:xfrm>
+            <a:off x="502920" y="5989320"/>
+            <a:ext cx="50292" cy="566928"/>
+          </a:xfrm>
+          <a:prstGeom prst="rect">
+            <a:avLst/>
+          </a:prstGeom>
+          <a:solidFill>
+            <a:srgbClr val="3F3F3F"/>
+          </a:solidFill>
+          <a:ln w="12700">
+            <a:solidFill>
+              <a:srgbClr val="333333"/>
+            </a:solidFill>
+            <a:prstDash val="solid"/>
+          </a:ln>
+        </p:spPr>
+      </p:sp>
+      <p:sp>
+        <p:nvSpPr>
+          <p:cNvPr id="5" name="Text 2"/>
+          <p:cNvSpPr txBox="1"/>
+          <p:nvPr/>
+        </p:nvSpPr>
+        <p:spPr>
+          <a:xfrm>
+            <a:off x="749808" y="5989320"/>
+            <a:ext cx="10881360" cy="566928"/>
           </a:xfrm>
           <a:prstGeom prst="rect">
             <a:avLst/>
@@ -2248,163 +3430,21 @@
           <a:ln/>
         </p:spPr>
         <p:txBody>
-          <a:bodyPr wrap="square" rtlCol="0" anchor="t"/>
-          <a:lstStyle/>
-          <a:p>
-            <a:pPr algn="l" marL="342900" indent="-342900">
-              <a:spcBef>
-                <a:spcPts val="1100"/>
-              </a:spcBef>
-              <a:spcAft>
-                <a:spcPts val="300"/>
-              </a:spcAft>
-              <a:buSzPct val="100000"/>
-              <a:buChar char="•"/>
-            </a:pPr>
-            <a:r>
-              <a:rPr lang="en-US" sz="1700" b="1" dirty="0">
+          <a:bodyPr wrap="square" lIns="0" tIns="0" rIns="0" bIns="0" rtlCol="0" anchor="ctr"/>
+          <a:lstStyle/>
+          <a:p>
+            <a:pPr indent="0" marL="0">
+              <a:buNone/>
+            </a:pPr>
+            <a:r>
+              <a:rPr lang="en-US" sz="1550" dirty="0">
                 <a:solidFill>
                   <a:srgbClr val="111111"/>
                 </a:solidFill>
               </a:rPr>
-              <a:t>Transplant — take the element out and drop it into 20 closed, non-open backgrounds</a:t>
-            </a:r>
-            <a:endParaRPr lang="en-US" sz="1700" dirty="0"/>
-          </a:p>
-          <a:p>
-            <a:pPr algn="l" lvl="1" marL="685800" indent="-342900">
-              <a:spcAft>
-                <a:spcPts val="400"/>
-              </a:spcAft>
-              <a:buSzPct val="100000"/>
-              <a:buChar char="▪"/>
-            </a:pPr>
-            <a:r>
-              <a:rPr lang="en-US" sz="1450" dirty="0">
-                <a:solidFill>
-                  <a:srgbClr val="595959"/>
-                </a:solidFill>
-              </a:rPr>
-              <a:t>scored against the same sequence shuffled, so the host contributes nothing. 50 donors per class.</a:t>
-            </a:r>
-            <a:endParaRPr lang="en-US" sz="1700" dirty="0"/>
-          </a:p>
-          <a:p>
-            <a:pPr algn="l" marL="342900" indent="-342900">
-              <a:spcBef>
-                <a:spcPts val="1100"/>
-              </a:spcBef>
-              <a:spcAft>
-                <a:spcPts val="300"/>
-              </a:spcAft>
-              <a:buSzPct val="100000"/>
-              <a:buChar char="•"/>
-            </a:pPr>
-            <a:r>
-              <a:rPr lang="en-US" sz="1700" b="1" dirty="0">
-                <a:solidFill>
-                  <a:srgbClr val="111111"/>
-                </a:solidFill>
-              </a:rPr>
-              <a:t>Swap — put every element into every other site's location, at two widths</a:t>
-            </a:r>
-            <a:endParaRPr lang="en-US" sz="1700" dirty="0"/>
-          </a:p>
-          <a:p>
-            <a:pPr algn="l" lvl="1" marL="685800" indent="-342900">
-              <a:spcAft>
-                <a:spcPts val="400"/>
-              </a:spcAft>
-              <a:buSzPct val="100000"/>
-              <a:buChar char="▪"/>
-            </a:pPr>
-            <a:r>
-              <a:rPr lang="en-US" sz="1450" dirty="0">
-                <a:solidFill>
-                  <a:srgbClr val="595959"/>
-                </a:solidFill>
-              </a:rPr>
-              <a:t>62,250 swaps; separates what the element IS from WHERE it sits.</a:t>
-            </a:r>
-            <a:endParaRPr lang="en-US" sz="1700" dirty="0"/>
-          </a:p>
-          <a:p>
-            <a:pPr algn="l" marL="342900" indent="-342900">
-              <a:spcBef>
-                <a:spcPts val="1100"/>
-              </a:spcBef>
-              <a:spcAft>
-                <a:spcPts val="300"/>
-              </a:spcAft>
-              <a:buSzPct val="100000"/>
-              <a:buChar char="•"/>
-            </a:pPr>
-            <a:r>
-              <a:rPr lang="en-US" sz="1700" b="1" dirty="0">
-                <a:solidFill>
-                  <a:srgbClr val="111111"/>
-                </a:solidFill>
-              </a:rPr>
-              <a:t>Shuffle, motif by motif — scramble the site's own AP-1 motif, and each partner motif, one at a time</a:t>
-            </a:r>
-            <a:endParaRPr lang="en-US" sz="1700" dirty="0"/>
-          </a:p>
-          <a:p>
-            <a:pPr algn="l" lvl="1" marL="685800" indent="-342900">
-              <a:spcAft>
-                <a:spcPts val="400"/>
-              </a:spcAft>
-              <a:buSzPct val="100000"/>
-              <a:buChar char="▪"/>
-            </a:pPr>
-            <a:r>
-              <a:rPr lang="en-US" sz="1450" dirty="0">
-                <a:solidFill>
-                  <a:srgbClr val="595959"/>
-                </a:solidFill>
-              </a:rPr>
-              <a:t>each partner is scored against a footprint-free window of the same width at the mirrored distance, so the comparison is inside one site and needs no accessibility matching.</a:t>
-            </a:r>
-            <a:endParaRPr lang="en-US" sz="1700" dirty="0"/>
-          </a:p>
-          <a:p>
-            <a:pPr algn="l" marL="342900" indent="-342900">
-              <a:spcBef>
-                <a:spcPts val="1100"/>
-              </a:spcBef>
-              <a:spcAft>
-                <a:spcPts val="300"/>
-              </a:spcAft>
-              <a:buSzPct val="100000"/>
-              <a:buChar char="•"/>
-            </a:pPr>
-            <a:r>
-              <a:rPr lang="en-US" sz="1700" b="1" dirty="0">
-                <a:solidFill>
-                  <a:srgbClr val="111111"/>
-                </a:solidFill>
-              </a:rPr>
-              <a:t>Why that last control matters</a:t>
-            </a:r>
-            <a:endParaRPr lang="en-US" sz="1700" dirty="0"/>
-          </a:p>
-          <a:p>
-            <a:pPr algn="l" lvl="1" marL="685800" indent="-342900">
-              <a:spcAft>
-                <a:spcPts val="400"/>
-              </a:spcAft>
-              <a:buSzPct val="100000"/>
-              <a:buChar char="▪"/>
-            </a:pPr>
-            <a:r>
-              <a:rPr lang="en-US" sz="1450" dirty="0">
-                <a:solidFill>
-                  <a:srgbClr val="595959"/>
-                </a:solidFill>
-              </a:rPr>
-              <a:t>Dynamic sites are about half as accessible as Stable ones. Any comparison that does not hold that constant will find a difference whether or not one exists - two results below are exactly that trap.</a:t>
-            </a:r>
-            <a:endParaRPr lang="en-US" sz="1700" dirty="0"/>
+              <a:t>No edit is ever compared against another site. The native and the edited sequence are the same 131 kb window through the same weights, so whatever changes in the prediction came from the edit.</a:t>
+            </a:r>
+            <a:endParaRPr lang="en-US" sz="1550" dirty="0"/>
           </a:p>
         </p:txBody>
       </p:sp>
@@ -2510,51 +3550,15 @@
                   <a:schemeClr val="tx1"/>
                 </a:solidFill>
               </a:rPr>
-              <a:t>A Stable element opens closed chromatin on its own</a:t>
+              <a:t>Edits made where the element stands</a:t>
             </a:r>
             <a:endParaRPr lang="en-US" sz="2800" dirty="0"/>
-          </a:p>
-        </p:txBody>
-      </p:sp>
-      <p:sp>
-        <p:nvSpPr>
-          <p:cNvPr id="3" name="Text 1"/>
-          <p:cNvSpPr txBox="1"/>
-          <p:nvPr/>
-        </p:nvSpPr>
-        <p:spPr>
-          <a:xfrm>
-            <a:off x="502920" y="969264"/>
-            <a:ext cx="11155680" cy="310896"/>
-          </a:xfrm>
-          <a:prstGeom prst="rect">
-            <a:avLst/>
-          </a:prstGeom>
-          <a:noFill/>
-          <a:ln/>
-        </p:spPr>
-        <p:txBody>
-          <a:bodyPr wrap="square" lIns="0" tIns="0" rIns="0" bIns="0" rtlCol="0" anchor="ctr"/>
-          <a:lstStyle/>
-          <a:p>
-            <a:pPr indent="0" marL="0">
-              <a:buNone/>
-            </a:pPr>
-            <a:r>
-              <a:rPr lang="en-US" sz="1250" i="1" dirty="0">
-                <a:solidFill>
-                  <a:srgbClr val="595959"/>
-                </a:solidFill>
-              </a:rPr>
-              <a:t>Each element moved into 20 closed backgrounds and scored against the same sequence shuffled; one point per donor, whole-peak width. Box, median and IQR, whiskers 1.5 × IQR; 50 donors per class; Mann–Whitney, Stable against the four Dynamic classes pooled.</a:t>
-            </a:r>
-            <a:endParaRPr lang="en-US" sz="1250" dirty="0"/>
           </a:p>
         </p:txBody>
       </p:sp>
       <p:pic>
         <p:nvPicPr>
-          <p:cNvPr id="4" name="Image 0" descr="/Users/z5162865/WongLab/AlphaGenome_Ap1/Analysis/slide_figures/r_fb_transplant.png">    </p:cNvPr>
+          <p:cNvPr id="3" name="Image 0" descr="/Users/z5162865/WongLab/AlphaGenome_Ap1/Analysis/slide_figures/m2_within_site.png">    </p:cNvPr>
           <p:cNvPicPr>
             <a:picLocks noChangeAspect="1"/>
           </p:cNvPicPr>
@@ -2568,8 +3572,8 @@
         </p:blipFill>
         <p:spPr>
           <a:xfrm>
-            <a:off x="1171501" y="1335024"/>
-            <a:ext cx="9818518" cy="3566160"/>
+            <a:off x="697734" y="1097280"/>
+            <a:ext cx="10766051" cy="4800600"/>
           </a:xfrm>
           <a:prstGeom prst="rect">
             <a:avLst/>
@@ -2578,14 +3582,14 @@
       </p:pic>
       <p:sp>
         <p:nvSpPr>
-          <p:cNvPr id="5" name="Shape 2"/>
+          <p:cNvPr id="4" name="Shape 1"/>
           <p:cNvSpPr/>
           <p:nvPr/>
         </p:nvSpPr>
         <p:spPr>
           <a:xfrm>
-            <a:off x="502920" y="5047488"/>
-            <a:ext cx="50292" cy="731520"/>
+            <a:off x="502920" y="5989320"/>
+            <a:ext cx="50292" cy="566928"/>
           </a:xfrm>
           <a:prstGeom prst="rect">
             <a:avLst/>
@@ -2603,14 +3607,14 @@
       </p:sp>
       <p:sp>
         <p:nvSpPr>
-          <p:cNvPr id="6" name="Text 3"/>
+          <p:cNvPr id="5" name="Text 2"/>
           <p:cNvSpPr txBox="1"/>
           <p:nvPr/>
         </p:nvSpPr>
         <p:spPr>
           <a:xfrm>
-            <a:off x="749808" y="5047488"/>
-            <a:ext cx="10881360" cy="731520"/>
+            <a:off x="749808" y="5989320"/>
+            <a:ext cx="10881360" cy="566928"/>
           </a:xfrm>
           <a:prstGeom prst="rect">
             <a:avLst/>
@@ -2626,50 +3630,14 @@
               <a:buNone/>
             </a:pPr>
             <a:r>
-              <a:rPr lang="en-US" sz="1700" dirty="0">
+              <a:rPr lang="en-US" sz="1550" dirty="0">
                 <a:solidFill>
                   <a:srgbClr val="111111"/>
                 </a:solidFill>
               </a:rPr>
-              <a:t>Stable AP-1 elements carry enough sequence to build their own accessible site. Dynamic ones do not — they need the neighbourhood they came from. That is "context, not sequence autonomy", shown by moving the sequence.</a:t>
-            </a:r>
-            <a:endParaRPr lang="en-US" sz="1700" dirty="0"/>
-          </a:p>
-        </p:txBody>
-      </p:sp>
-      <p:sp>
-        <p:nvSpPr>
-          <p:cNvPr id="7" name="Text 4"/>
-          <p:cNvSpPr txBox="1"/>
-          <p:nvPr/>
-        </p:nvSpPr>
-        <p:spPr>
-          <a:xfrm>
-            <a:off x="749808" y="5852160"/>
-            <a:ext cx="10881360" cy="603504"/>
-          </a:xfrm>
-          <a:prstGeom prst="rect">
-            <a:avLst/>
-          </a:prstGeom>
-          <a:noFill/>
-          <a:ln/>
-        </p:spPr>
-        <p:txBody>
-          <a:bodyPr wrap="square" lIns="0" tIns="0" rIns="0" bIns="0" rtlCol="0" anchor="t"/>
-          <a:lstStyle/>
-          <a:p>
-            <a:pPr indent="0" marL="0">
-              <a:buNone/>
-            </a:pPr>
-            <a:r>
-              <a:rPr lang="en-US" sz="1300" dirty="0">
-                <a:solidFill>
-                  <a:srgbClr val="595959"/>
-                </a:solidFill>
-              </a:rPr>
-              <a:t>Stable donors also come from more accessible loci. Holding that constant (measured ATAC, 224 donors) a Stable element still gains 1.8× more than a Dynamic one, P = 0.005 — the direction holds, but about a third of the gap above is accessibility rather than sequence.</a:t>
-            </a:r>
-            <a:endParaRPr lang="en-US" sz="1300" dirty="0"/>
+              <a:t>Three widths of shuffle, a tile scan across 600 bp, single-base saturation, and one partner motif at a time against a footprint-free window of the same width at the mirrored distance.</a:t>
+            </a:r>
+            <a:endParaRPr lang="en-US" sz="1550" dirty="0"/>
           </a:p>
         </p:txBody>
       </p:sp>
@@ -2775,51 +3743,15 @@
                   <a:schemeClr val="tx1"/>
                 </a:solidFill>
               </a:rPr>
-              <a:t>The element's identity lives at peak scale, not in 170 bp</a:t>
+              <a:t>Edits that move the element somewhere else</a:t>
             </a:r>
             <a:endParaRPr lang="en-US" sz="2800" dirty="0"/>
-          </a:p>
-        </p:txBody>
-      </p:sp>
-      <p:sp>
-        <p:nvSpPr>
-          <p:cNvPr id="3" name="Text 1"/>
-          <p:cNvSpPr txBox="1"/>
-          <p:nvPr/>
-        </p:nvSpPr>
-        <p:spPr>
-          <a:xfrm>
-            <a:off x="502920" y="969264"/>
-            <a:ext cx="11155680" cy="310896"/>
-          </a:xfrm>
-          <a:prstGeom prst="rect">
-            <a:avLst/>
-          </a:prstGeom>
-          <a:noFill/>
-          <a:ln/>
-        </p:spPr>
-        <p:txBody>
-          <a:bodyPr wrap="square" lIns="0" tIns="0" rIns="0" bIns="0" rtlCol="0" anchor="ctr"/>
-          <a:lstStyle/>
-          <a:p>
-            <a:pPr indent="0" marL="0">
-              <a:buNone/>
-            </a:pPr>
-            <a:r>
-              <a:rPr lang="en-US" sz="1250" i="1" dirty="0">
-                <a:solidFill>
-                  <a:srgbClr val="595959"/>
-                </a:solidFill>
-              </a:rPr>
-              <a:t>Every element swapped into every other site's location: the swapped site's accessibility regressed on the donor element and on the recipient location. The two weights are drawn pulling against each other from a common zero. 62,250 swaps; 95% CI from a cluster bootstrap over the 250 donors.</a:t>
-            </a:r>
-            <a:endParaRPr lang="en-US" sz="1250" dirty="0"/>
           </a:p>
         </p:txBody>
       </p:sp>
       <p:pic>
         <p:nvPicPr>
-          <p:cNvPr id="4" name="Image 0" descr="/Users/z5162865/WongLab/AlphaGenome_Ap1/Analysis/slide_figures/r_fb_scale.png">    </p:cNvPr>
+          <p:cNvPr id="3" name="Image 0" descr="/Users/z5162865/WongLab/AlphaGenome_Ap1/Analysis/slide_figures/m3_move.png">    </p:cNvPr>
           <p:cNvPicPr>
             <a:picLocks noChangeAspect="1"/>
           </p:cNvPicPr>
@@ -2833,8 +3765,8 @@
         </p:blipFill>
         <p:spPr>
           <a:xfrm>
-            <a:off x="1064362" y="1335024"/>
-            <a:ext cx="10032797" cy="3858768"/>
+            <a:off x="457200" y="1653790"/>
+            <a:ext cx="11247120" cy="3687580"/>
           </a:xfrm>
           <a:prstGeom prst="rect">
             <a:avLst/>
@@ -2843,14 +3775,14 @@
       </p:pic>
       <p:sp>
         <p:nvSpPr>
-          <p:cNvPr id="5" name="Shape 2"/>
+          <p:cNvPr id="4" name="Shape 1"/>
           <p:cNvSpPr/>
           <p:nvPr/>
         </p:nvSpPr>
         <p:spPr>
           <a:xfrm>
-            <a:off x="502920" y="5303520"/>
-            <a:ext cx="50292" cy="868680"/>
+            <a:off x="502920" y="5989320"/>
+            <a:ext cx="50292" cy="566928"/>
           </a:xfrm>
           <a:prstGeom prst="rect">
             <a:avLst/>
@@ -2868,14 +3800,14 @@
       </p:sp>
       <p:sp>
         <p:nvSpPr>
-          <p:cNvPr id="6" name="Text 3"/>
+          <p:cNvPr id="5" name="Text 2"/>
           <p:cNvSpPr txBox="1"/>
           <p:nvPr/>
         </p:nvSpPr>
         <p:spPr>
           <a:xfrm>
-            <a:off x="749808" y="5303520"/>
-            <a:ext cx="10881360" cy="868680"/>
+            <a:off x="749808" y="5989320"/>
+            <a:ext cx="10881360" cy="566928"/>
           </a:xfrm>
           <a:prstGeom prst="rect">
             <a:avLst/>
@@ -2891,14 +3823,14 @@
               <a:buNone/>
             </a:pPr>
             <a:r>
-              <a:rPr lang="en-US" sz="1700" dirty="0">
+              <a:rPr lang="en-US" sz="1550" dirty="0">
                 <a:solidFill>
                   <a:srgbClr val="111111"/>
                 </a:solidFill>
               </a:rPr>
-              <a:t>At 170 bp an element mostly takes on the level of wherever you put it; at full peak width it imposes its own. The information that opens chromatin is spread over the whole peak — which is why a 170 bp assay cannot see it.</a:t>
-            </a:r>
-            <a:endParaRPr lang="en-US" sz="1700" dirty="0"/>
+              <a:t>Transplant asks whether an element can build a site on its own, by dropping it into chromatin that has none. Swap asks whether a site's level is set by the sequence or by the address.</a:t>
+            </a:r>
+            <a:endParaRPr lang="en-US" sz="1550" dirty="0"/>
           </a:p>
         </p:txBody>
       </p:sp>
@@ -3004,7 +3936,7 @@
                   <a:schemeClr val="tx1"/>
                 </a:solidFill>
               </a:rPr>
-              <a:t>Only the AP-1-losing sites let go — and only of AP-1</a:t>
+              <a:t>A Stable element opens closed chromatin on its own</a:t>
             </a:r>
             <a:endParaRPr lang="en-US" sz="2800" dirty="0"/>
           </a:p>
@@ -3040,7 +3972,7 @@
                   <a:srgbClr val="595959"/>
                 </a:solidFill>
               </a:rPr>
-              <a:t>The site's own AP-1 motif and each partner motif shuffled separately inside the same window; partners net of a width- and distance-matched footprint-free control. Box, median and IQR, whiskers 5th–95th centile; the notch is a 95% interval on the median. Dynamic split into the age classes as given. Mann–Whitney against Stable.</a:t>
+              <a:t>Each element moved into 20 closed backgrounds and scored against the same sequence shuffled; one point per donor, whole-peak width. Box, median and IQR, whiskers 1.5 × IQR; 50 donors per class; Mann–Whitney, Stable against the four Dynamic classes pooled.</a:t>
             </a:r>
             <a:endParaRPr lang="en-US" sz="1250" dirty="0"/>
           </a:p>
@@ -3048,7 +3980,7 @@
       </p:sp>
       <p:pic>
         <p:nvPicPr>
-          <p:cNvPr id="4" name="Image 0" descr="/Users/z5162865/WongLab/AlphaGenome_Ap1/Analysis/slide_figures/r_fb_specificity.png">    </p:cNvPr>
+          <p:cNvPr id="4" name="Image 0" descr="/Users/z5162865/WongLab/AlphaGenome_Ap1/Analysis/slide_figures/r_fb_transplant.png">    </p:cNvPr>
           <p:cNvPicPr>
             <a:picLocks noChangeAspect="1"/>
           </p:cNvPicPr>
@@ -3062,8 +3994,8 @@
         </p:blipFill>
         <p:spPr>
           <a:xfrm>
-            <a:off x="1064362" y="1335024"/>
-            <a:ext cx="10032797" cy="3858768"/>
+            <a:off x="1171501" y="1335024"/>
+            <a:ext cx="9818518" cy="3566160"/>
           </a:xfrm>
           <a:prstGeom prst="rect">
             <a:avLst/>
@@ -3078,8 +4010,8 @@
         </p:nvSpPr>
         <p:spPr>
           <a:xfrm>
-            <a:off x="502920" y="5303520"/>
-            <a:ext cx="50292" cy="868680"/>
+            <a:off x="502920" y="5047488"/>
+            <a:ext cx="50292" cy="731520"/>
           </a:xfrm>
           <a:prstGeom prst="rect">
             <a:avLst/>
@@ -3103,8 +4035,8 @@
         </p:nvSpPr>
         <p:spPr>
           <a:xfrm>
-            <a:off x="749808" y="5303520"/>
-            <a:ext cx="10881360" cy="868680"/>
+            <a:off x="749808" y="5047488"/>
+            <a:ext cx="10881360" cy="731520"/>
           </a:xfrm>
           <a:prstGeom prst="rect">
             <a:avLst/>
@@ -3125,9 +4057,45 @@
                   <a:srgbClr val="111111"/>
                 </a:solidFill>
               </a:rPr>
-              <a:t>Sites that lose AP-1 binding with age were never strongly AP-1-driven: they depend 36% less on their own motif while using every other motif exactly as much. Sites that gain AP-1 with age are indistinguishable from Stable — so "Dynamic" is not one thing, and splitting it is what shows that.</a:t>
+              <a:t>Stable AP-1 elements carry enough sequence to build their own accessible site. Dynamic ones do not — they need the neighbourhood they came from. That is "context, not sequence autonomy", shown by moving the sequence.</a:t>
             </a:r>
             <a:endParaRPr lang="en-US" sz="1700" dirty="0"/>
+          </a:p>
+        </p:txBody>
+      </p:sp>
+      <p:sp>
+        <p:nvSpPr>
+          <p:cNvPr id="7" name="Text 4"/>
+          <p:cNvSpPr txBox="1"/>
+          <p:nvPr/>
+        </p:nvSpPr>
+        <p:spPr>
+          <a:xfrm>
+            <a:off x="749808" y="5852160"/>
+            <a:ext cx="10881360" cy="603504"/>
+          </a:xfrm>
+          <a:prstGeom prst="rect">
+            <a:avLst/>
+          </a:prstGeom>
+          <a:noFill/>
+          <a:ln/>
+        </p:spPr>
+        <p:txBody>
+          <a:bodyPr wrap="square" lIns="0" tIns="0" rIns="0" bIns="0" rtlCol="0" anchor="t"/>
+          <a:lstStyle/>
+          <a:p>
+            <a:pPr indent="0" marL="0">
+              <a:buNone/>
+            </a:pPr>
+            <a:r>
+              <a:rPr lang="en-US" sz="1300" dirty="0">
+                <a:solidFill>
+                  <a:srgbClr val="595959"/>
+                </a:solidFill>
+              </a:rPr>
+              <a:t>Stable donors also come from more accessible loci. Holding that constant (measured ATAC, 224 donors) a Stable element still gains 1.8× more than a Dynamic one, P = 0.005 — the direction holds, but about a third of the gap above is accessibility rather than sequence.</a:t>
+            </a:r>
+            <a:endParaRPr lang="en-US" sz="1300" dirty="0"/>
           </a:p>
         </p:txBody>
       </p:sp>
@@ -3233,7 +4201,7 @@
                   <a:schemeClr val="tx1"/>
                 </a:solidFill>
               </a:rPr>
-              <a:t>Where the dependence sits: on the motif, and more so if Stable</a:t>
+              <a:t>The element's identity lives at peak scale, not in 170 bp</a:t>
             </a:r>
             <a:endParaRPr lang="en-US" sz="2800" dirty="0"/>
           </a:p>
@@ -3269,7 +4237,7 @@
                   <a:srgbClr val="595959"/>
                 </a:solidFill>
               </a:rPr>
-              <a:t>Each 10 bp tile replaced in turn; each site's own noise floor removed, then normalised to its own total, so the curve is where the dependence sits, not how much there is. Median per site, band a bootstrap 95% CI; Mann–Whitney per position, BH-FDR across the 60. Cropped to ±150 bp.</a:t>
+              <a:t>Every element swapped into every other site's location: the swapped site's accessibility regressed on the donor element and on the recipient location. The two weights are drawn pulling against each other from a common zero. 62,250 swaps; 95% CI from a cluster bootstrap over the 250 donors.</a:t>
             </a:r>
             <a:endParaRPr lang="en-US" sz="1250" dirty="0"/>
           </a:p>
@@ -3277,7 +4245,7 @@
       </p:sp>
       <p:pic>
         <p:nvPicPr>
-          <p:cNvPr id="4" name="Image 0" descr="/Users/z5162865/WongLab/AlphaGenome_Ap1/Analysis/slide_figures/r_fb_density.png">    </p:cNvPr>
+          <p:cNvPr id="4" name="Image 0" descr="/Users/z5162865/WongLab/AlphaGenome_Ap1/Analysis/slide_figures/r_fb_scale.png">    </p:cNvPr>
           <p:cNvPicPr>
             <a:picLocks noChangeAspect="1"/>
           </p:cNvPicPr>
@@ -3291,8 +4259,8 @@
         </p:blipFill>
         <p:spPr>
           <a:xfrm>
-            <a:off x="1115221" y="1335024"/>
-            <a:ext cx="9931078" cy="3566160"/>
+            <a:off x="1064362" y="1335024"/>
+            <a:ext cx="10032797" cy="3858768"/>
           </a:xfrm>
           <a:prstGeom prst="rect">
             <a:avLst/>
@@ -3307,8 +4275,8 @@
         </p:nvSpPr>
         <p:spPr>
           <a:xfrm>
-            <a:off x="502920" y="5047488"/>
-            <a:ext cx="50292" cy="731520"/>
+            <a:off x="502920" y="5303520"/>
+            <a:ext cx="50292" cy="868680"/>
           </a:xfrm>
           <a:prstGeom prst="rect">
             <a:avLst/>
@@ -3332,8 +4300,8 @@
         </p:nvSpPr>
         <p:spPr>
           <a:xfrm>
-            <a:off x="749808" y="5047488"/>
-            <a:ext cx="10881360" cy="731520"/>
+            <a:off x="749808" y="5303520"/>
+            <a:ext cx="10881360" cy="868680"/>
           </a:xfrm>
           <a:prstGeom prst="rect">
             <a:avLst/>
@@ -3354,45 +4322,9 @@
                   <a:srgbClr val="111111"/>
                 </a:solidFill>
               </a:rPr>
-              <a:t>A spike on the AP-1 core sitting on a shallow shoulder that reaches ±100 bp — and the model was never told where the motif was. The spike is taller for Stable sites, and the two tiles covering the core are the only positions in the whole window where the classes differ at all.</a:t>
+              <a:t>At 170 bp an element mostly takes on the level of wherever you put it; at full peak width it imposes its own. The information that opens chromatin is spread over the whole peak — which is why a 170 bp assay cannot see it.</a:t>
             </a:r>
             <a:endParaRPr lang="en-US" sz="1700" dirty="0"/>
-          </a:p>
-        </p:txBody>
-      </p:sp>
-      <p:sp>
-        <p:nvSpPr>
-          <p:cNvPr id="7" name="Text 4"/>
-          <p:cNvSpPr txBox="1"/>
-          <p:nvPr/>
-        </p:nvSpPr>
-        <p:spPr>
-          <a:xfrm>
-            <a:off x="749808" y="5852160"/>
-            <a:ext cx="10881360" cy="603504"/>
-          </a:xfrm>
-          <a:prstGeom prst="rect">
-            <a:avLst/>
-          </a:prstGeom>
-          <a:noFill/>
-          <a:ln/>
-        </p:spPr>
-        <p:txBody>
-          <a:bodyPr wrap="square" lIns="0" tIns="0" rIns="0" bIns="0" rtlCol="0" anchor="t"/>
-          <a:lstStyle/>
-          <a:p>
-            <a:pPr indent="0" marL="0">
-              <a:buNone/>
-            </a:pPr>
-            <a:r>
-              <a:rPr lang="en-US" sz="1300" dirty="0">
-                <a:solidFill>
-                  <a:srgbClr val="595959"/>
-                </a:solidFill>
-              </a:rPr>
-              <a:t>Holding accessibility constant the gap halves but holds: 33.1% vs 31.3% of importance within ±25 bp, P = 0.006 over 860 matched pairs. The older ratio version of this measure did not survive that check (P = 0.11); this one does, because the noise floor is removed per site first.</a:t>
-            </a:r>
-            <a:endParaRPr lang="en-US" sz="1300" dirty="0"/>
           </a:p>
         </p:txBody>
       </p:sp>
@@ -3498,7 +4430,7 @@
                   <a:schemeClr val="tx1"/>
                 </a:solidFill>
               </a:rPr>
-              <a:t>Dynamic sites hand more of the load to the partner motifs</a:t>
+              <a:t>Only the AP-1-losing sites let go — and only of AP-1</a:t>
             </a:r>
             <a:endParaRPr lang="en-US" sz="2800" dirty="0"/>
           </a:p>
@@ -3534,7 +4466,7 @@
                   <a:srgbClr val="595959"/>
                 </a:solidFill>
               </a:rPr>
-              <a:t>Per site: |own AP-1| / (|own AP-1| + |partner motifs|), the share of its motif dependence that sits inside the AP-1 motif rather than outside it. Both terms are AlphaGenome shuffle effects measured inside the same window, so accessibility cannot drive the comparison. Median per site; error bar, bootstrap 95% CI; Mann–Whitney.</a:t>
+              <a:t>The site's own AP-1 motif and each partner motif shuffled separately inside the same window; partners net of a width- and distance-matched footprint-free control. Box, median and IQR, whiskers 5th–95th centile; the notch is a 95% interval on the median. Dynamic split into the age classes as given. Mann–Whitney against Stable.</a:t>
             </a:r>
             <a:endParaRPr lang="en-US" sz="1250" dirty="0"/>
           </a:p>
@@ -3542,7 +4474,7 @@
       </p:sp>
       <p:pic>
         <p:nvPicPr>
-          <p:cNvPr id="4" name="Image 0" descr="/Users/z5162865/WongLab/AlphaGenome_Ap1/Analysis/slide_figures/r_fb_share.png">    </p:cNvPr>
+          <p:cNvPr id="4" name="Image 0" descr="/Users/z5162865/WongLab/AlphaGenome_Ap1/Analysis/slide_figures/r_fb_specificity.png">    </p:cNvPr>
           <p:cNvPicPr>
             <a:picLocks noChangeAspect="1"/>
           </p:cNvPicPr>
@@ -3619,7 +4551,7 @@
                   <a:srgbClr val="111111"/>
                 </a:solidFill>
               </a:rPr>
-              <a:t>Outside the motif is where the classes differ: a Stable site leaves 20% of its motif dependence to partners, a Dynamic site 25–27% — about 40% more — and every Dynamic class sits on the same side. AP-1 still leads everywhere; it just carries less of the load.</a:t>
+              <a:t>Sites that lose AP-1 binding with age were never strongly AP-1-driven: they depend 36% less on their own motif while using every other motif exactly as much. Sites that gain AP-1 with age are indistinguishable from Stable — so "Dynamic" is not one thing, and splitting it is what shows that.</a:t>
             </a:r>
             <a:endParaRPr lang="en-US" sz="1700" dirty="0"/>
           </a:p>
@@ -3727,7 +4659,7 @@
                   <a:schemeClr val="tx1"/>
                 </a:solidFill>
               </a:rPr>
-              <a:t>Two differences that turned out to be accessibility</a:t>
+              <a:t>Where the dependence sits: on the motif, and more so if Stable</a:t>
             </a:r>
             <a:endParaRPr lang="en-US" sz="2800" dirty="0"/>
           </a:p>
@@ -3735,16 +4667,14 @@
       </p:sp>
       <p:sp>
         <p:nvSpPr>
-          <p:cNvPr id="3" name="Text 0"/>
-          <p:cNvSpPr/>
-          <p:nvPr>
-            <p:ph idx="101" type="body" hasCustomPrompt="1"/>
-          </p:nvPr>
-        </p:nvSpPr>
-        <p:spPr>
-          <a:xfrm>
-            <a:off x="502920" y="1234440"/>
-            <a:ext cx="11155680" cy="5029200"/>
+          <p:cNvPr id="3" name="Text 1"/>
+          <p:cNvSpPr txBox="1"/>
+          <p:nvPr/>
+        </p:nvSpPr>
+        <p:spPr>
+          <a:xfrm>
+            <a:off x="502920" y="969264"/>
+            <a:ext cx="11155680" cy="310896"/>
           </a:xfrm>
           <a:prstGeom prst="rect">
             <a:avLst/>
@@ -3753,181 +4683,142 @@
           <a:ln/>
         </p:spPr>
         <p:txBody>
-          <a:bodyPr wrap="square" rtlCol="0" anchor="t"/>
-          <a:lstStyle/>
-          <a:p>
-            <a:pPr algn="l" marL="342900" indent="-342900">
-              <a:spcBef>
-                <a:spcPts val="1100"/>
-              </a:spcBef>
-              <a:spcAft>
-                <a:spcPts val="300"/>
-              </a:spcAft>
-              <a:buSzPct val="100000"/>
-              <a:buChar char="•"/>
-            </a:pPr>
-            <a:r>
-              <a:rPr lang="en-US" sz="1700" b="1" dirty="0">
+          <a:bodyPr wrap="square" lIns="0" tIns="0" rIns="0" bIns="0" rtlCol="0" anchor="ctr"/>
+          <a:lstStyle/>
+          <a:p>
+            <a:pPr indent="0" marL="0">
+              <a:buNone/>
+            </a:pPr>
+            <a:r>
+              <a:rPr lang="en-US" sz="1250" i="1" dirty="0">
+                <a:solidFill>
+                  <a:srgbClr val="595959"/>
+                </a:solidFill>
+              </a:rPr>
+              <a:t>Each 10 bp tile replaced in turn; each site's own noise floor removed, then normalised to its own total, so the curve is where the dependence sits, not how much there is. Median per site, band a bootstrap 95% CI; Mann–Whitney per position, BH-FDR across the 60. Cropped to ±150 bp.</a:t>
+            </a:r>
+            <a:endParaRPr lang="en-US" sz="1250" dirty="0"/>
+          </a:p>
+        </p:txBody>
+      </p:sp>
+      <p:pic>
+        <p:nvPicPr>
+          <p:cNvPr id="4" name="Image 0" descr="/Users/z5162865/WongLab/AlphaGenome_Ap1/Analysis/slide_figures/r_fb_density.png">    </p:cNvPr>
+          <p:cNvPicPr>
+            <a:picLocks noChangeAspect="1"/>
+          </p:cNvPicPr>
+          <p:nvPr/>
+        </p:nvPicPr>
+        <p:blipFill>
+          <a:blip r:embed="rId1"/>
+          <a:stretch>
+            <a:fillRect/>
+          </a:stretch>
+        </p:blipFill>
+        <p:spPr>
+          <a:xfrm>
+            <a:off x="1115221" y="1335024"/>
+            <a:ext cx="9931078" cy="3566160"/>
+          </a:xfrm>
+          <a:prstGeom prst="rect">
+            <a:avLst/>
+          </a:prstGeom>
+        </p:spPr>
+      </p:pic>
+      <p:sp>
+        <p:nvSpPr>
+          <p:cNvPr id="5" name="Shape 2"/>
+          <p:cNvSpPr/>
+          <p:nvPr/>
+        </p:nvSpPr>
+        <p:spPr>
+          <a:xfrm>
+            <a:off x="502920" y="5047488"/>
+            <a:ext cx="50292" cy="731520"/>
+          </a:xfrm>
+          <a:prstGeom prst="rect">
+            <a:avLst/>
+          </a:prstGeom>
+          <a:solidFill>
+            <a:srgbClr val="3F3F3F"/>
+          </a:solidFill>
+          <a:ln w="12700">
+            <a:solidFill>
+              <a:srgbClr val="333333"/>
+            </a:solidFill>
+            <a:prstDash val="solid"/>
+          </a:ln>
+        </p:spPr>
+      </p:sp>
+      <p:sp>
+        <p:nvSpPr>
+          <p:cNvPr id="6" name="Text 3"/>
+          <p:cNvSpPr txBox="1"/>
+          <p:nvPr/>
+        </p:nvSpPr>
+        <p:spPr>
+          <a:xfrm>
+            <a:off x="749808" y="5047488"/>
+            <a:ext cx="10881360" cy="731520"/>
+          </a:xfrm>
+          <a:prstGeom prst="rect">
+            <a:avLst/>
+          </a:prstGeom>
+          <a:noFill/>
+          <a:ln/>
+        </p:spPr>
+        <p:txBody>
+          <a:bodyPr wrap="square" lIns="0" tIns="0" rIns="0" bIns="0" rtlCol="0" anchor="ctr"/>
+          <a:lstStyle/>
+          <a:p>
+            <a:pPr indent="0" marL="0">
+              <a:buNone/>
+            </a:pPr>
+            <a:r>
+              <a:rPr lang="en-US" sz="1700" dirty="0">
                 <a:solidFill>
                   <a:srgbClr val="111111"/>
                 </a:solidFill>
               </a:rPr>
-              <a:t>A second AP-1 copy looked worth more to Dynamic sites</a:t>
+              <a:t>A spike on the AP-1 core sitting on a shallow shoulder that reaches ±100 bp — and the model was never told where the motif was. The spike is taller for Stable sites, and the two tiles covering the core are the only positions in the whole window where the classes differ at all.</a:t>
             </a:r>
             <a:endParaRPr lang="en-US" sz="1700" dirty="0"/>
           </a:p>
-          <a:p>
-            <a:pPr algn="l" lvl="1" marL="685800" indent="-342900">
-              <a:spcAft>
-                <a:spcPts val="400"/>
-              </a:spcAft>
-              <a:buSzPct val="100000"/>
-              <a:buChar char="▪"/>
-            </a:pPr>
-            <a:r>
-              <a:rPr lang="en-US" sz="1450" dirty="0">
+        </p:txBody>
+      </p:sp>
+      <p:sp>
+        <p:nvSpPr>
+          <p:cNvPr id="7" name="Text 4"/>
+          <p:cNvSpPr txBox="1"/>
+          <p:nvPr/>
+        </p:nvSpPr>
+        <p:spPr>
+          <a:xfrm>
+            <a:off x="749808" y="5852160"/>
+            <a:ext cx="10881360" cy="603504"/>
+          </a:xfrm>
+          <a:prstGeom prst="rect">
+            <a:avLst/>
+          </a:prstGeom>
+          <a:noFill/>
+          <a:ln/>
+        </p:spPr>
+        <p:txBody>
+          <a:bodyPr wrap="square" lIns="0" tIns="0" rIns="0" bIns="0" rtlCol="0" anchor="t"/>
+          <a:lstStyle/>
+          <a:p>
+            <a:pPr indent="0" marL="0">
+              <a:buNone/>
+            </a:pPr>
+            <a:r>
+              <a:rPr lang="en-US" sz="1300" dirty="0">
                 <a:solidFill>
                   <a:srgbClr val="595959"/>
                 </a:solidFill>
               </a:rPr>
-              <a:t>+0.72 vs +0.60 log2, p &lt; 1e-4 — matched on accessibility, p = 0.93. Gone.</a:t>
-            </a:r>
-            <a:endParaRPr lang="en-US" sz="1700" dirty="0"/>
-          </a:p>
-          <a:p>
-            <a:pPr algn="l" marL="342900" indent="-342900">
-              <a:spcBef>
-                <a:spcPts val="1100"/>
-              </a:spcBef>
-              <a:spcAft>
-                <a:spcPts val="300"/>
-              </a:spcAft>
-              <a:buSzPct val="100000"/>
-              <a:buChar char="•"/>
-            </a:pPr>
-            <a:r>
-              <a:rPr lang="en-US" sz="1700" b="1" dirty="0">
-                <a:solidFill>
-                  <a:srgbClr val="111111"/>
-                </a:solidFill>
-              </a:rPr>
-              <a:t>Upgrading an imperfect core to a perfect TGAGTCA looked worth more to Dynamic sites</a:t>
-            </a:r>
-            <a:endParaRPr lang="en-US" sz="1700" dirty="0"/>
-          </a:p>
-          <a:p>
-            <a:pPr algn="l" lvl="1" marL="685800" indent="-342900">
-              <a:spcAft>
-                <a:spcPts val="400"/>
-              </a:spcAft>
-              <a:buSzPct val="100000"/>
-              <a:buChar char="▪"/>
-            </a:pPr>
-            <a:r>
-              <a:rPr lang="en-US" sz="1450" dirty="0">
-                <a:solidFill>
-                  <a:srgbClr val="595959"/>
-                </a:solidFill>
-              </a:rPr>
-              <a:t>+0.66 vs +0.52, p &lt; 1e-4 — matched, p = 0.94. Gone.</a:t>
-            </a:r>
-            <a:endParaRPr lang="en-US" sz="1700" dirty="0"/>
-          </a:p>
-          <a:p>
-            <a:pPr algn="l" marL="342900" indent="-342900">
-              <a:spcBef>
-                <a:spcPts val="1100"/>
-              </a:spcBef>
-              <a:spcAft>
-                <a:spcPts val="300"/>
-              </a:spcAft>
-              <a:buSzPct val="100000"/>
-              <a:buChar char="•"/>
-            </a:pPr>
-            <a:r>
-              <a:rPr lang="en-US" sz="1700" b="1" dirty="0">
-                <a:solidFill>
-                  <a:srgbClr val="111111"/>
-                </a:solidFill>
-              </a:rPr>
-              <a:t>What did survive matching</a:t>
-            </a:r>
-            <a:endParaRPr lang="en-US" sz="1700" dirty="0"/>
-          </a:p>
-          <a:p>
-            <a:pPr algn="l" lvl="1" marL="685800" indent="-342900">
-              <a:spcAft>
-                <a:spcPts val="400"/>
-              </a:spcAft>
-              <a:buSzPct val="100000"/>
-              <a:buChar char="▪"/>
-            </a:pPr>
-            <a:r>
-              <a:rPr lang="en-US" sz="1450" dirty="0">
-                <a:solidFill>
-                  <a:srgbClr val="595959"/>
-                </a:solidFill>
-              </a:rPr>
-              <a:t>Destroying the motif costs Dynamic sites less (+0.16, p = 4e-4); the dose-response is shallower; relocating the motif helps them less.</a:t>
-            </a:r>
-            <a:endParaRPr lang="en-US" sz="1700" dirty="0"/>
-          </a:p>
-          <a:p>
-            <a:pPr algn="l" marL="342900" indent="-342900">
-              <a:spcBef>
-                <a:spcPts val="1100"/>
-              </a:spcBef>
-              <a:spcAft>
-                <a:spcPts val="300"/>
-              </a:spcAft>
-              <a:buSzPct val="100000"/>
-              <a:buChar char="•"/>
-            </a:pPr>
-            <a:r>
-              <a:rPr lang="en-US" sz="1700" b="1" dirty="0">
-                <a:solidFill>
-                  <a:srgbClr val="111111"/>
-                </a:solidFill>
-              </a:rPr>
-              <a:t>Two clean negatives worth having</a:t>
-            </a:r>
-            <a:endParaRPr lang="en-US" sz="1700" dirty="0"/>
-          </a:p>
-          <a:p>
-            <a:pPr algn="l" lvl="1" marL="685800" indent="-342900">
-              <a:spcAft>
-                <a:spcPts val="400"/>
-              </a:spcAft>
-              <a:buSzPct val="100000"/>
-              <a:buChar char="▪"/>
-            </a:pPr>
-            <a:r>
-              <a:rPr lang="en-US" sz="1450" dirty="0">
-                <a:solidFill>
-                  <a:srgbClr val="595959"/>
-                </a:solidFill>
-              </a:rPr>
-              <a:t>Reverse-complementing the whole motif costs nothing in either class (-0.03 log2, p = 0.89) — expected for a palindromic TRE, and a sanity check on the head.</a:t>
-            </a:r>
-            <a:endParaRPr lang="en-US" sz="1700" dirty="0"/>
-          </a:p>
-          <a:p>
-            <a:pPr algn="l" lvl="1" marL="685800" indent="-342900">
-              <a:spcAft>
-                <a:spcPts val="400"/>
-              </a:spcAft>
-              <a:buSzPct val="100000"/>
-              <a:buChar char="▪"/>
-            </a:pPr>
-            <a:r>
-              <a:rPr lang="en-US" sz="1450" dirty="0">
-                <a:solidFill>
-                  <a:srgbClr val="595959"/>
-                </a:solidFill>
-              </a:rPr>
-              <a:t>The spacing preference for a second copy is identical: best at ±20–40 bp, decaying by ±150 bp, with no class difference at any distance (all FDR &gt; 0.58).</a:t>
-            </a:r>
-            <a:endParaRPr lang="en-US" sz="1700" dirty="0"/>
+              <a:t>Holding accessibility constant the gap halves but holds: 33.1% vs 31.3% of importance within ±25 bp, P = 0.006 over 860 matched pairs. The older ratio version of this measure did not survive that check (P = 0.11); this one does, because the noise floor is removed per site first.</a:t>
+            </a:r>
+            <a:endParaRPr lang="en-US" sz="1300" dirty="0"/>
           </a:p>
         </p:txBody>
       </p:sp>
@@ -4033,7 +4924,7 @@
                   <a:schemeClr val="tx1"/>
                 </a:solidFill>
               </a:rPr>
-              <a:t>How this sits with the MPRA work</a:t>
+              <a:t>Dynamic sites hand more of the load to the partner motifs</a:t>
             </a:r>
             <a:endParaRPr lang="en-US" sz="2800" dirty="0"/>
           </a:p>
@@ -4041,16 +4932,14 @@
       </p:sp>
       <p:sp>
         <p:nvSpPr>
-          <p:cNvPr id="3" name="Text 0"/>
-          <p:cNvSpPr/>
-          <p:nvPr>
-            <p:ph idx="101" type="body" hasCustomPrompt="1"/>
-          </p:nvPr>
-        </p:nvSpPr>
-        <p:spPr>
-          <a:xfrm>
-            <a:off x="502920" y="1234440"/>
-            <a:ext cx="11155680" cy="5029200"/>
+          <p:cNvPr id="3" name="Text 1"/>
+          <p:cNvSpPr txBox="1"/>
+          <p:nvPr/>
+        </p:nvSpPr>
+        <p:spPr>
+          <a:xfrm>
+            <a:off x="502920" y="969264"/>
+            <a:ext cx="11155680" cy="310896"/>
           </a:xfrm>
           <a:prstGeom prst="rect">
             <a:avLst/>
@@ -4059,230 +4948,104 @@
           <a:ln/>
         </p:spPr>
         <p:txBody>
-          <a:bodyPr wrap="square" rtlCol="0" anchor="t"/>
-          <a:lstStyle/>
-          <a:p>
-            <a:pPr algn="l" marL="342900" indent="-342900">
-              <a:spcBef>
-                <a:spcPts val="1100"/>
-              </a:spcBef>
-              <a:spcAft>
-                <a:spcPts val="300"/>
-              </a:spcAft>
-              <a:buSzPct val="100000"/>
-              <a:buChar char="•"/>
-            </a:pPr>
-            <a:r>
-              <a:rPr lang="en-US" sz="1700" b="1" dirty="0">
+          <a:bodyPr wrap="square" lIns="0" tIns="0" rIns="0" bIns="0" rtlCol="0" anchor="ctr"/>
+          <a:lstStyle/>
+          <a:p>
+            <a:pPr indent="0" marL="0">
+              <a:buNone/>
+            </a:pPr>
+            <a:r>
+              <a:rPr lang="en-US" sz="1250" i="1" dirty="0">
+                <a:solidFill>
+                  <a:srgbClr val="595959"/>
+                </a:solidFill>
+              </a:rPr>
+              <a:t>Per site: |own AP-1| / (|own AP-1| + |partner motifs|), the share of its motif dependence that sits inside the AP-1 motif rather than outside it. Both terms are AlphaGenome shuffle effects measured inside the same window, so accessibility cannot drive the comparison. Median per site; error bar, bootstrap 95% CI; Mann–Whitney.</a:t>
+            </a:r>
+            <a:endParaRPr lang="en-US" sz="1250" dirty="0"/>
+          </a:p>
+        </p:txBody>
+      </p:sp>
+      <p:pic>
+        <p:nvPicPr>
+          <p:cNvPr id="4" name="Image 0" descr="/Users/z5162865/WongLab/AlphaGenome_Ap1/Analysis/slide_figures/r_fb_share.png">    </p:cNvPr>
+          <p:cNvPicPr>
+            <a:picLocks noChangeAspect="1"/>
+          </p:cNvPicPr>
+          <p:nvPr/>
+        </p:nvPicPr>
+        <p:blipFill>
+          <a:blip r:embed="rId1"/>
+          <a:stretch>
+            <a:fillRect/>
+          </a:stretch>
+        </p:blipFill>
+        <p:spPr>
+          <a:xfrm>
+            <a:off x="1064362" y="1335024"/>
+            <a:ext cx="10032797" cy="3858768"/>
+          </a:xfrm>
+          <a:prstGeom prst="rect">
+            <a:avLst/>
+          </a:prstGeom>
+        </p:spPr>
+      </p:pic>
+      <p:sp>
+        <p:nvSpPr>
+          <p:cNvPr id="5" name="Shape 2"/>
+          <p:cNvSpPr/>
+          <p:nvPr/>
+        </p:nvSpPr>
+        <p:spPr>
+          <a:xfrm>
+            <a:off x="502920" y="5303520"/>
+            <a:ext cx="50292" cy="868680"/>
+          </a:xfrm>
+          <a:prstGeom prst="rect">
+            <a:avLst/>
+          </a:prstGeom>
+          <a:solidFill>
+            <a:srgbClr val="3F3F3F"/>
+          </a:solidFill>
+          <a:ln w="12700">
+            <a:solidFill>
+              <a:srgbClr val="333333"/>
+            </a:solidFill>
+            <a:prstDash val="solid"/>
+          </a:ln>
+        </p:spPr>
+      </p:sp>
+      <p:sp>
+        <p:nvSpPr>
+          <p:cNvPr id="6" name="Text 3"/>
+          <p:cNvSpPr txBox="1"/>
+          <p:nvPr/>
+        </p:nvSpPr>
+        <p:spPr>
+          <a:xfrm>
+            <a:off x="749808" y="5303520"/>
+            <a:ext cx="10881360" cy="868680"/>
+          </a:xfrm>
+          <a:prstGeom prst="rect">
+            <a:avLst/>
+          </a:prstGeom>
+          <a:noFill/>
+          <a:ln/>
+        </p:spPr>
+        <p:txBody>
+          <a:bodyPr wrap="square" lIns="0" tIns="0" rIns="0" bIns="0" rtlCol="0" anchor="ctr"/>
+          <a:lstStyle/>
+          <a:p>
+            <a:pPr indent="0" marL="0">
+              <a:buNone/>
+            </a:pPr>
+            <a:r>
+              <a:rPr lang="en-US" sz="1700" dirty="0">
                 <a:solidFill>
                   <a:srgbClr val="111111"/>
                 </a:solidFill>
               </a:rPr>
-              <a:t>Agrees</a:t>
-            </a:r>
-            <a:endParaRPr lang="en-US" sz="1700" dirty="0"/>
-          </a:p>
-          <a:p>
-            <a:pPr algn="l" lvl="1" marL="685800" indent="-342900">
-              <a:spcAft>
-                <a:spcPts val="400"/>
-              </a:spcAft>
-              <a:buSzPct val="100000"/>
-              <a:buChar char="▪"/>
-            </a:pPr>
-            <a:r>
-              <a:rPr lang="en-US" sz="1450" dirty="0">
-                <a:solidFill>
-                  <a:srgbClr val="595959"/>
-                </a:solidFill>
-              </a:rPr>
-              <a:t>Dynamic elements have weaker endogenous chromatin, and depend on context rather than being sequence-autonomous.</a:t>
-            </a:r>
-            <a:endParaRPr lang="en-US" sz="1700" dirty="0"/>
-          </a:p>
-          <a:p>
-            <a:pPr algn="l" lvl="1" marL="685800" indent="-342900">
-              <a:spcAft>
-                <a:spcPts val="400"/>
-              </a:spcAft>
-              <a:buSzPct val="100000"/>
-              <a:buChar char="▪"/>
-            </a:pPr>
-            <a:r>
-              <a:rPr lang="en-US" sz="1450" dirty="0">
-                <a:solidFill>
-                  <a:srgbClr val="595959"/>
-                </a:solidFill>
-              </a:rPr>
-              <a:t>Shuffling the AP-1 core alone does not separate pooled Stable from pooled Dynamic.</a:t>
-            </a:r>
-            <a:endParaRPr lang="en-US" sz="1700" dirty="0"/>
-          </a:p>
-          <a:p>
-            <a:pPr algn="l" lvl="1" marL="685800" indent="-342900">
-              <a:spcAft>
-                <a:spcPts val="400"/>
-              </a:spcAft>
-              <a:buSzPct val="100000"/>
-              <a:buChar char="▪"/>
-            </a:pPr>
-            <a:r>
-              <a:rPr lang="en-US" sz="1450" dirty="0">
-                <a:solidFill>
-                  <a:srgbClr val="595959"/>
-                </a:solidFill>
-              </a:rPr>
-              <a:t>Age-gained elements behave like Stable ones — here, at their own AP-1 motif.</a:t>
-            </a:r>
-            <a:endParaRPr lang="en-US" sz="1700" dirty="0"/>
-          </a:p>
-          <a:p>
-            <a:pPr algn="l" lvl="1" marL="685800" indent="-342900">
-              <a:spcAft>
-                <a:spcPts val="400"/>
-              </a:spcAft>
-              <a:buSzPct val="100000"/>
-              <a:buChar char="▪"/>
-            </a:pPr>
-            <a:r>
-              <a:rPr lang="en-US" sz="1450" dirty="0">
-                <a:solidFill>
-                  <a:srgbClr val="595959"/>
-                </a:solidFill>
-              </a:rPr>
-              <a:t>C/EBP is the strongest partner motif at fibroblast AP-1 sites (net −0.71 log2, ahead of MEF2 and NFI).</a:t>
-            </a:r>
-            <a:endParaRPr lang="en-US" sz="1700" dirty="0"/>
-          </a:p>
-          <a:p>
-            <a:pPr algn="l" marL="342900" indent="-342900">
-              <a:spcBef>
-                <a:spcPts val="1100"/>
-              </a:spcBef>
-              <a:spcAft>
-                <a:spcPts val="300"/>
-              </a:spcAft>
-              <a:buSzPct val="100000"/>
-              <a:buChar char="•"/>
-            </a:pPr>
-            <a:r>
-              <a:rPr lang="en-US" sz="1700" b="1" dirty="0">
-                <a:solidFill>
-                  <a:srgbClr val="111111"/>
-                </a:solidFill>
-              </a:rPr>
-              <a:t>Adds</a:t>
-            </a:r>
-            <a:endParaRPr lang="en-US" sz="1700" dirty="0"/>
-          </a:p>
-          <a:p>
-            <a:pPr algn="l" lvl="1" marL="685800" indent="-342900">
-              <a:spcAft>
-                <a:spcPts val="400"/>
-              </a:spcAft>
-              <a:buSzPct val="100000"/>
-              <a:buChar char="▪"/>
-            </a:pPr>
-            <a:r>
-              <a:rPr lang="en-US" sz="1450" dirty="0">
-                <a:solidFill>
-                  <a:srgbClr val="595959"/>
-                </a:solidFill>
-              </a:rPr>
-              <a:t>The class difference is a whole-peak property, not a 170 bp one.</a:t>
-            </a:r>
-            <a:endParaRPr lang="en-US" sz="1700" dirty="0"/>
-          </a:p>
-          <a:p>
-            <a:pPr algn="l" lvl="1" marL="685800" indent="-342900">
-              <a:spcAft>
-                <a:spcPts val="400"/>
-              </a:spcAft>
-              <a:buSzPct val="100000"/>
-              <a:buChar char="▪"/>
-            </a:pPr>
-            <a:r>
-              <a:rPr lang="en-US" sz="1450" dirty="0">
-                <a:solidFill>
-                  <a:srgbClr val="595959"/>
-                </a:solidFill>
-              </a:rPr>
-              <a:t>Within Dynamic, the AP-1-losing sites are the ones that are sequence-different; the gaining ones are not.</a:t>
-            </a:r>
-            <a:endParaRPr lang="en-US" sz="1700" dirty="0"/>
-          </a:p>
-          <a:p>
-            <a:pPr algn="l" lvl="1" marL="685800" indent="-342900">
-              <a:spcAft>
-                <a:spcPts val="400"/>
-              </a:spcAft>
-              <a:buSzPct val="100000"/>
-              <a:buChar char="▪"/>
-            </a:pPr>
-            <a:r>
-              <a:rPr lang="en-US" sz="1450" dirty="0">
-                <a:solidFill>
-                  <a:srgbClr val="595959"/>
-                </a:solidFill>
-              </a:rPr>
-              <a:t>Unprompted, AlphaGenome makes the AP-1 core the most important 10 bp in over half of all sites — equally in both classes. The classes differ in how much of the dependence sits there, not in whether AP-1 leads.</a:t>
-            </a:r>
-            <a:endParaRPr lang="en-US" sz="1700" dirty="0"/>
-          </a:p>
-          <a:p>
-            <a:pPr algn="l" lvl="1" marL="685800" indent="-342900">
-              <a:spcAft>
-                <a:spcPts val="400"/>
-              </a:spcAft>
-              <a:buSzPct val="100000"/>
-              <a:buChar char="▪"/>
-            </a:pPr>
-            <a:r>
-              <a:rPr lang="en-US" sz="1450" dirty="0">
-                <a:solidFill>
-                  <a:srgbClr val="595959"/>
-                </a:solidFill>
-              </a:rPr>
-              <a:t>Dynamic sites spread their dependence slightly wider, and it survives accessibility matching (33.1% vs 31.3% within ±25 bp, P = 0.006) — the sequence-model version of “attention is more distributed at dynamic enhancers”.</a:t>
-            </a:r>
-            <a:endParaRPr lang="en-US" sz="1700" dirty="0"/>
-          </a:p>
-          <a:p>
-            <a:pPr algn="l" marL="342900" indent="-342900">
-              <a:spcBef>
-                <a:spcPts val="1100"/>
-              </a:spcBef>
-              <a:spcAft>
-                <a:spcPts val="300"/>
-              </a:spcAft>
-              <a:buSzPct val="100000"/>
-              <a:buChar char="•"/>
-            </a:pPr>
-            <a:r>
-              <a:rPr lang="en-US" sz="1700" b="1" dirty="0">
-                <a:solidFill>
-                  <a:srgbClr val="111111"/>
-                </a:solidFill>
-              </a:rPr>
-              <a:t>Keep off the slides</a:t>
-            </a:r>
-            <a:endParaRPr lang="en-US" sz="1700" dirty="0"/>
-          </a:p>
-          <a:p>
-            <a:pPr algn="l" lvl="1" marL="685800" indent="-342900">
-              <a:spcAft>
-                <a:spcPts val="400"/>
-              </a:spcAft>
-              <a:buSzPct val="100000"/>
-              <a:buChar char="▪"/>
-            </a:pPr>
-            <a:r>
-              <a:rPr lang="en-US" sz="1450" dirty="0">
-                <a:solidFill>
-                  <a:srgbClr val="595959"/>
-                </a:solidFill>
-              </a:rPr>
-              <a:t>Our in-situ 170 bp shuffle costs Stable sites more (−2.51 vs −1.96, p = 4e-40), the opposite of the MPRA flank result. Different assay — episomal activity vs chromatin accessibility — but it reads as a contradiction.</a:t>
+              <a:t>Outside the motif is where the classes differ: a Stable site leaves 20% of its motif dependence to partners, a Dynamic site 25–27% — about 40% more — and every Dynamic class sits on the same side. AP-1 still leads everywhere; it just carries less of the load.</a:t>
             </a:r>
             <a:endParaRPr lang="en-US" sz="1700" dirty="0"/>
           </a:p>

--- a/Analysis/AP1_fibroblast_lab_meeting.pptx
+++ b/Analysis/AP1_fibroblast_lab_meeting.pptx
@@ -1324,9 +1324,11 @@
           <a:p>
             <a:r>
               <a:rPr lang="en-US" dirty="0"/>
-              <a:t>2,352 sites. Own AP-1 motif: Stable -1.21 (n=1179), AP-1 gained -1.19 (n=605, p = 0.93 vs Stable), Dynamic but not age-driven -1.10 (n=347, p = 0.055), AP-1 lost -0.78 (n=209, p = 2.3e-5).
-Partner motifs, net of control: Stable -0.20, gained -0.25, not age-driven -0.27, lost -0.22 - no class difference (vs Stable: p = 0.13, 0.23, 0.66). So the deficit is AP-1-specific, not general weakness. No single partner family takes over: nothing survives FDR in the per-family split.
+              <a:t>2,340 sites. Own AP-1 motif, median log2, with BH-adjusted P against Stable:
+  Stable -1.21 (n=1179, reference) · Age Up -1.19 (n=605, FDR 0.93) · Age Down -0.78 (n=209, FDR 9.1e-5) · Exercise Up -1.14 (n=233, FDR 0.49) · Exercise Down -0.96 (n=114, FDR 0.043)
+Partner motifs, net of control: -0.20 / -0.25 / -0.22 / -0.23 / -0.33. Nothing survives BH (smallest adjusted 0.20), so the deficit is AP-1-specific in both losing classes. So the deficit is AP-1-specific, not general weakness. No single partner family takes over: nothing survives FDR in the per-family split.
 Agreement: pooled Stable vs Dynamic at the motif is a null, which matches the manuscript's core-scramble result (no class difference). Age-gained being on par with Stable is the sequence-level version of 'age-gained reporter activity on par with stable'.
+Note on the split: a site that is dynamic with both age and exercise is counted under its age class, so the two exercise groups are the sites that are NOT also age-dynamic. Splitting them is what separated the old 'other Dynamic' group (p = 0.055, n = 347) into Exercise Up, which looks like Stable, and Exercise Down, which does not.
 Caveat: the own-AP-1 bar has no matched control, because one at distance 0 would overlap the motif. That inflates AP-1 relative to the partners in every class equally, so the class comparison is unaffected.</a:t>
             </a:r>
             <a:endParaRPr lang="en-US" dirty="0"/>
@@ -1512,7 +1514,8 @@
           <a:p>
             <a:r>
               <a:rPr lang="en-US" dirty="0"/>
-              <a:t>Stable 0.804 (n=1179) vs Dynamic pooled 0.745 (n=1161), p = 7.2e-11. By class: AP-1 gained 0.755, AP-1 lost 0.734, Dynamic not age-driven 0.727. Kruskal across the four, p = 1.7e-10.
+              <a:t>Stable 0.804 (n=1179) vs Dynamic pooled 0.745 (n=1161), p = 7.2e-11. By class: Age Up 0.755 (p = 7.9e-5), Age Down 0.734 (p = 4.1e-6), Exercise Up 0.726 (p = 1.9e-5), Exercise Down 0.732 (p = 8.7e-6).
+Worth contrasting with the previous slide out loud: there, only the LOSING classes moved. Here all four move, including both gaining classes. So the absolute dependence on AP-1 and the share of the total it carries are two different statements, and only the second separates every Dynamic class from Stable.
 The 40%: partner share 19.6% for Stable against 24.5 / 26.6 / 27.3% for the Dynamic classes, so 27.3/19.6 = 1.39x. It is the same number as 80 vs 73, read from the other end - say it whichever way, but do not say both as if they were two results.
 Detection check, in case it is asked: footprint calling needs signal, so Stable sites carry more detected partners (5.89 vs 5.01 per site, p = 2e-82). Restricting to the 1,808 sites that hit the cap of 6 detected partners, the gap is unchanged: 0.806 vs 0.736, p = 2.1e-13. Not a detection artefact.
 Note this is a DIFFERENT statement from slide 5. There, only the AP-1-losing class drops in absolute AP-1 dependence. Here, all Dynamic classes are modestly less AP-1-centric in relative terms.
@@ -2523,8 +2526,8 @@
         </p:blipFill>
         <p:spPr>
           <a:xfrm>
-            <a:off x="717452" y="1097280"/>
-            <a:ext cx="10726615" cy="4800600"/>
+            <a:off x="996791" y="1097280"/>
+            <a:ext cx="10167938" cy="4800600"/>
           </a:xfrm>
           <a:prstGeom prst="rect">
             <a:avLst/>
@@ -3174,7 +3177,7 @@
                   <a:srgbClr val="595959"/>
                 </a:solidFill>
               </a:rPr>
-              <a:t>Within Dynamic, the AP-1-losing sites are the ones that are sequence-different; the gaining ones are not.</a:t>
+              <a:t>Within Dynamic, the AP-1-LOSING sites are the ones that are sequence-different, with age and with exercise alike; the gaining ones look like Stable. Direction, not stimulus.</a:t>
             </a:r>
             <a:endParaRPr lang="en-US" sz="1700" dirty="0"/>
           </a:p>
@@ -3572,8 +3575,8 @@
         </p:blipFill>
         <p:spPr>
           <a:xfrm>
-            <a:off x="697734" y="1097280"/>
-            <a:ext cx="10766051" cy="4800600"/>
+            <a:off x="1014383" y="1097280"/>
+            <a:ext cx="10132754" cy="4800600"/>
           </a:xfrm>
           <a:prstGeom prst="rect">
             <a:avLst/>
@@ -3972,7 +3975,7 @@
                   <a:srgbClr val="595959"/>
                 </a:solidFill>
               </a:rPr>
-              <a:t>Each element moved into 20 closed backgrounds and scored against the same sequence shuffled; one point per donor, whole-peak width. Box, median and IQR, whiskers 1.5 × IQR; 50 donors per class; Mann–Whitney, Stable against the four Dynamic classes pooled.</a:t>
+              <a:t>Each element moved into 20 closed backgrounds and scored against the same sequence shuffled; one point per donor, whole-peak width. Box, median and IQR, whiskers 1.5 × IQR; 50 donors per class — Up = AP-1 gained, Down = AP-1 lost; Mann–Whitney, Stable against the four Dynamic classes pooled.</a:t>
             </a:r>
             <a:endParaRPr lang="en-US" sz="1250" dirty="0"/>
           </a:p>
@@ -4430,7 +4433,7 @@
                   <a:schemeClr val="tx1"/>
                 </a:solidFill>
               </a:rPr>
-              <a:t>Only the AP-1-losing sites let go — and only of AP-1</a:t>
+              <a:t>The sites that lose AP-1 let go of it — whether with age or exercise</a:t>
             </a:r>
             <a:endParaRPr lang="en-US" sz="2800" dirty="0"/>
           </a:p>
@@ -4466,7 +4469,7 @@
                   <a:srgbClr val="595959"/>
                 </a:solidFill>
               </a:rPr>
-              <a:t>The site's own AP-1 motif and each partner motif shuffled separately inside the same window; partners net of a width- and distance-matched footprint-free control. Box, median and IQR, whiskers 5th–95th centile; the notch is a 95% interval on the median. Dynamic split into the age classes as given. Mann–Whitney against Stable.</a:t>
+              <a:t>The site's own AP-1 motif and each partner motif shuffled separately inside the same window; partners net of a width- and distance-matched footprint-free control. Box, median and IQR, whiskers 5th–95th centile, notch a 95% interval on the median. Classes as given: Up = AP-1 gained, Down = AP-1 lost.</a:t>
             </a:r>
             <a:endParaRPr lang="en-US" sz="1250" dirty="0"/>
           </a:p>
@@ -4488,8 +4491,8 @@
         </p:blipFill>
         <p:spPr>
           <a:xfrm>
-            <a:off x="1064362" y="1335024"/>
-            <a:ext cx="10032797" cy="3858768"/>
+            <a:off x="1005840" y="1384808"/>
+            <a:ext cx="10149840" cy="3759200"/>
           </a:xfrm>
           <a:prstGeom prst="rect">
             <a:avLst/>
@@ -4551,7 +4554,7 @@
                   <a:srgbClr val="111111"/>
                 </a:solidFill>
               </a:rPr>
-              <a:t>Sites that lose AP-1 binding with age were never strongly AP-1-driven: they depend 36% less on their own motif while using every other motif exactly as much. Sites that gain AP-1 with age are indistinguishable from Stable — so "Dynamic" is not one thing, and splitting it is what shows that.</a:t>
+              <a:t>It is the direction that matters, not the stimulus. Both losing classes depend less on their own AP-1 motif — Age Down by 36%, Exercise Down by 21% — while both gaining classes are indistinguishable from Stable. No class differs at its partner motifs.</a:t>
             </a:r>
             <a:endParaRPr lang="en-US" sz="1700" dirty="0"/>
           </a:p>
@@ -4982,8 +4985,8 @@
         </p:blipFill>
         <p:spPr>
           <a:xfrm>
-            <a:off x="1064362" y="1335024"/>
-            <a:ext cx="10032797" cy="3858768"/>
+            <a:off x="1414343" y="1335024"/>
+            <a:ext cx="9332834" cy="3858768"/>
           </a:xfrm>
           <a:prstGeom prst="rect">
             <a:avLst/>
@@ -5045,7 +5048,7 @@
                   <a:srgbClr val="111111"/>
                 </a:solidFill>
               </a:rPr>
-              <a:t>Outside the motif is where the classes differ: a Stable site leaves 20% of its motif dependence to partners, a Dynamic site 25–27% — about 40% more — and every Dynamic class sits on the same side. AP-1 still leads everywhere; it just carries less of the load.</a:t>
+              <a:t>Outside the motif is where every class differs: a Stable site leaves 20% of its motif dependence to partners, each of the four Dynamic classes 25–27% — about a third more — and all four sit on the same side, gaining and losing alike. AP-1 still leads everywhere; it just carries less of the load.</a:t>
             </a:r>
             <a:endParaRPr lang="en-US" sz="1700" dirty="0"/>
           </a:p>

--- a/Analysis/AP1_fibroblast_lab_meeting.pptx
+++ b/Analysis/AP1_fibroblast_lab_meeting.pptx
@@ -17,9 +17,11 @@
     <p:sldId id="265" r:id="rId11"/>
     <p:sldId id="266" r:id="rId12"/>
     <p:sldId id="267" r:id="rId13"/>
+    <p:sldId id="268" r:id="rId14"/>
+    <p:sldId id="269" r:id="rId15"/>
   </p:sldIdLst>
   <p:notesMasterIdLst>
-    <p:notesMasterId r:id="rId14"/>
+    <p:notesMasterId r:id="rId16"/>
   </p:notesMasterIdLst>
   <p:sldSz cx="12192000" cy="6858000"/>
   <p:notesSz cx="6858000" cy="12192000"/>
@@ -601,12 +603,16 @@
           <a:p>
             <a:r>
               <a:rPr lang="en-US" dirty="0"/>
-              <a:t>This is where the next slide's numbers come from. 2,359 sites; 860 accessibility-matched pairs at caliper 0.1 log10.
-The ladder (1 to 7 bases of the core) is what gives a dose-response rather than a single on/off contrast - it is how we can say the Dynamic curve is SHALLOWER rather than just lower.
-Two controls worth naming if asked:
-  - the second copy is paired with a scrambled insert of the same width at the same distance, so the comparison is 'a motif there' against 'that much sequence there'
-  - moving the motif is paired with moving it to a spot that has no footprint
-The reverse complement is the sanity check on the head: a TRE is a near-palindrome, only 5 of the 11 bases actually move, and the predicted cost is -0.03 log2 (p = 0.89). If that had come out large, nothing else here would be trustworthy.</a:t>
+              <a:t>NUMBERS TO ANNOTATE WITH, strongest first:
+  - the peak tile carries 10.8% (Stable) / 9.9% (Dynamic) of a site's importance, against 1.7% for an average tile - about 6x enrichment
+  - within +-25 bp (5 of 60 tiles, 8% of the sequence): Stable 33.8% vs Dynamic 30.7%, p = 2.0e-6
+  - accessibility-matched, 860 pairs: 33.1% vs 31.3%, paired difference +1.5 points, Wilcoxon p = 0.006
+  - only 2 of 60 positions differ at FDR &lt; 0.05, and they are the two tiles over the core (FDR = 0.001). Every other position FDR &gt; 0.8
+  - in 56% of Stable and 52% of Dynamic sites the single most important tile IS a core tile, against a chance of 3.3% - 16x. That one does NOT differ by class (Fisher p = 0.063; matched McNemar p = 0.21), so quote it as the shared fact, not as a difference. Figure for it is on disk as r_fb_top_tile.png if anyone wants to see it.
+2,359 sites, 60 tiles of 10 bp from -300 to +290, fine-tuned FB head, readout atac_170.
+Why the floor subtraction matters, if asked: Dynamic sites are about half as accessible, so their log2 ratios are noisier, and noise is flat across position. Without removing each site's own floor (median |effect| beyond +-200 bp: 0.047 Dynamic, 0.037 Stable) a Dynamic profile looks more distributed whether or not it is. That is exactly the artefact this corrects for.
+Agreement: this is the AlphaGenome version of 'attention is more distributed at dynamic enhancers'. Same direction, different model and different readout.
+Honest size: the matched difference is 1.5 percentage points on a base of about a third. Real, repeatedly so, but small - do not oversell it as two different architectures.</a:t>
             </a:r>
             <a:endParaRPr lang="en-US" dirty="0"/>
           </a:p>
@@ -694,8 +700,12 @@
           <a:p>
             <a:r>
               <a:rPr lang="en-US" dirty="0"/>
-              <a:t>From the fibroblast titration, 2,359 sites, 860 accessibility-matched pairs (caliper 0.1 log10). This slide is the argument for why the matched analysis is worth doing - two of the five largest raw class differences in the titration were entirely explained by the accessibility gap.
-Age Down is the outlier again, consistently with the other arms: one base of the core changed -0.62 vs Stable -0.83; motif gone -0.72 vs -1.07.</a:t>
+              <a:t>Stable 0.804 (n=1179) vs Dynamic pooled 0.745 (n=1161), p = 7.2e-11. By class: Age Up 0.755 (p = 7.9e-5), Age Down 0.734 (p = 4.1e-6), Exercise Up 0.726 (p = 1.9e-5), Exercise Down 0.732 (p = 8.7e-6).
+Worth contrasting with the previous slide out loud: there, only the LOSING classes moved. Here all four move, including both gaining classes. So the absolute dependence on AP-1 and the share of the total it carries are two different statements, and only the second separates every Dynamic class from Stable.
+The 40%: partner share 19.6% for Stable against 24.5 / 26.6 / 27.3% for the Dynamic classes, so 27.3/19.6 = 1.39x. It is the same number as 80 vs 73, read from the other end - say it whichever way, but do not say both as if they were two results.
+Detection check, in case it is asked: footprint calling needs signal, so Stable sites carry more detected partners (5.89 vs 5.01 per site, p = 2e-82). Restricting to the 1,808 sites that hit the cap of 6 detected partners, the gap is unchanged: 0.806 vs 0.736, p = 2.1e-13. Not a detection artefact.
+Note this is a DIFFERENT statement from slide 5. There, only the AP-1-losing class drops in absolute AP-1 dependence. Here, all Dynamic classes are modestly less AP-1-centric in relative terms.
+The equivalent tile-scan measure (motif share vs a 10-50 bp collar) does NOT survive accessibility matching (p = 0.11); the collar is mostly noise at low-accessibility sites. This version is better powered because it only scores footprinted motifs.</a:t>
             </a:r>
             <a:endParaRPr lang="en-US" dirty="0"/>
           </a:p>
@@ -783,8 +793,12 @@
           <a:p>
             <a:r>
               <a:rPr lang="en-US" dirty="0"/>
-              <a:t>If the flank question comes up: the MPRA destroys the flanks of a 170 bp fragment on a plasmid and reads transcription; we move an intact ~0.8 kb element into closed chromatin and read accessibility. There is no chromatin to open in the MPRA. The honest shared conclusion is that neither assay finds much class information in 170 bp.
-Everything here is predicted accessibility from a model fine-tuned on our own fibroblast ATAC, not a measurement, and not the MPRA-trained probe used in the manuscript.</a:t>
+              <a:t>This is where the next slide's numbers come from. 2,359 sites; 860 accessibility-matched pairs at caliper 0.1 log10.
+The ladder (1 to 7 bases of the core) is what gives a dose-response rather than a single on/off contrast - it is how we can say the Dynamic curve is SHALLOWER rather than just lower.
+Two controls worth naming if asked:
+  - the second copy is paired with a scrambled insert of the same width at the same distance, so the comparison is 'a motif there' against 'that much sequence there'
+  - moving the motif is paired with moving it to a spot that has no footprint
+The reverse complement is the sanity check on the head: a TRE is a near-palindrome, only 5 of the 11 bases actually move, and the predicted cost is -0.03 log2 (p = 0.89). If that had come out large, nothing else here would be trustworthy.</a:t>
             </a:r>
             <a:endParaRPr lang="en-US" dirty="0"/>
           </a:p>
@@ -808,6 +822,184 @@
             <a:fld id="{F7021451-1387-4CA6-816F-3879F97B5CBC}" type="slidenum">
               <a:rPr lang="en-US"/>
               <a:t>12</a:t>
+            </a:fld>
+            <a:endParaRPr lang="en-US"/>
+          </a:p>
+        </p:txBody>
+      </p:sp>
+    </p:spTree>
+    <p:extLst>
+      <p:ext uri="{BB962C8B-B14F-4D97-AF65-F5344CB8AC3E}">
+        <p14:creationId xmlns:p14="http://schemas.microsoft.com/office/powerpoint/2010/main" val="1024086991"/>
+      </p:ext>
+    </p:extLst>
+  </p:cSld>
+  <p:clrMapOvr>
+    <a:masterClrMapping/>
+  </p:clrMapOvr>
+</p:notes>
+</file>
+
+<file path=ppt/notesSlides/notesSlide13.xml><?xml version="1.0" encoding="utf-8"?>
+<p:notes xmlns:a="http://schemas.openxmlformats.org/drawingml/2006/main" xmlns:r="http://schemas.openxmlformats.org/officeDocument/2006/relationships" xmlns:p="http://schemas.openxmlformats.org/presentationml/2006/main">
+  <p:cSld>
+    <p:spTree>
+      <p:nvGrpSpPr>
+        <p:cNvPr id="1" name=""/>
+        <p:cNvGrpSpPr/>
+        <p:nvPr/>
+      </p:nvGrpSpPr>
+      <p:grpSpPr>
+        <a:xfrm>
+          <a:off x="0" y="0"/>
+          <a:ext cx="0" cy="0"/>
+          <a:chOff x="0" y="0"/>
+          <a:chExt cx="0" cy="0"/>
+        </a:xfrm>
+      </p:grpSpPr>
+      <p:sp>
+        <p:nvSpPr>
+          <p:cNvPr id="2" name="Slide Image Placeholder 1"/>
+          <p:cNvSpPr>
+            <a:spLocks noGrp="1" noRot="1" noChangeAspect="1"/>
+          </p:cNvSpPr>
+          <p:nvPr>
+            <p:ph type="sldImg"/>
+          </p:nvPr>
+        </p:nvSpPr>
+        <p:spPr/>
+      </p:sp>
+      <p:sp>
+        <p:nvSpPr>
+          <p:cNvPr id="3" name="Notes Placeholder 2"/>
+          <p:cNvSpPr>
+            <a:spLocks noGrp="1"/>
+          </p:cNvSpPr>
+          <p:nvPr>
+            <p:ph type="body" idx="1"/>
+          </p:nvPr>
+        </p:nvSpPr>
+        <p:spPr/>
+        <p:txBody>
+          <a:bodyPr/>
+          <a:lstStyle/>
+          <a:p>
+            <a:r>
+              <a:rPr lang="en-US" dirty="0"/>
+              <a:t>From the fibroblast titration, 2,359 sites, 860 accessibility-matched pairs (caliper 0.1 log10). This slide is the argument for why the matched analysis is worth doing - two of the five largest raw class differences in the titration were entirely explained by the accessibility gap.
+Age Down is the outlier again, consistently with the other arms: one base of the core changed -0.62 vs Stable -0.83; motif gone -0.72 vs -1.07.</a:t>
+            </a:r>
+            <a:endParaRPr lang="en-US" dirty="0"/>
+          </a:p>
+        </p:txBody>
+      </p:sp>
+      <p:sp>
+        <p:nvSpPr>
+          <p:cNvPr id="4" name="Slide Number Placeholder 3"/>
+          <p:cNvSpPr>
+            <a:spLocks noGrp="1"/>
+          </p:cNvSpPr>
+          <p:nvPr>
+            <p:ph type="sldNum" sz="quarter" idx="10"/>
+          </p:nvPr>
+        </p:nvSpPr>
+        <p:spPr/>
+        <p:txBody>
+          <a:bodyPr/>
+          <a:lstStyle/>
+          <a:p>
+            <a:fld id="{F7021451-1387-4CA6-816F-3879F97B5CBC}" type="slidenum">
+              <a:rPr lang="en-US"/>
+              <a:t>13</a:t>
+            </a:fld>
+            <a:endParaRPr lang="en-US"/>
+          </a:p>
+        </p:txBody>
+      </p:sp>
+    </p:spTree>
+    <p:extLst>
+      <p:ext uri="{BB962C8B-B14F-4D97-AF65-F5344CB8AC3E}">
+        <p14:creationId xmlns:p14="http://schemas.microsoft.com/office/powerpoint/2010/main" val="1024086991"/>
+      </p:ext>
+    </p:extLst>
+  </p:cSld>
+  <p:clrMapOvr>
+    <a:masterClrMapping/>
+  </p:clrMapOvr>
+</p:notes>
+</file>
+
+<file path=ppt/notesSlides/notesSlide14.xml><?xml version="1.0" encoding="utf-8"?>
+<p:notes xmlns:a="http://schemas.openxmlformats.org/drawingml/2006/main" xmlns:r="http://schemas.openxmlformats.org/officeDocument/2006/relationships" xmlns:p="http://schemas.openxmlformats.org/presentationml/2006/main">
+  <p:cSld>
+    <p:spTree>
+      <p:nvGrpSpPr>
+        <p:cNvPr id="1" name=""/>
+        <p:cNvGrpSpPr/>
+        <p:nvPr/>
+      </p:nvGrpSpPr>
+      <p:grpSpPr>
+        <a:xfrm>
+          <a:off x="0" y="0"/>
+          <a:ext cx="0" cy="0"/>
+          <a:chOff x="0" y="0"/>
+          <a:chExt cx="0" cy="0"/>
+        </a:xfrm>
+      </p:grpSpPr>
+      <p:sp>
+        <p:nvSpPr>
+          <p:cNvPr id="2" name="Slide Image Placeholder 1"/>
+          <p:cNvSpPr>
+            <a:spLocks noGrp="1" noRot="1" noChangeAspect="1"/>
+          </p:cNvSpPr>
+          <p:nvPr>
+            <p:ph type="sldImg"/>
+          </p:nvPr>
+        </p:nvSpPr>
+        <p:spPr/>
+      </p:sp>
+      <p:sp>
+        <p:nvSpPr>
+          <p:cNvPr id="3" name="Notes Placeholder 2"/>
+          <p:cNvSpPr>
+            <a:spLocks noGrp="1"/>
+          </p:cNvSpPr>
+          <p:nvPr>
+            <p:ph type="body" idx="1"/>
+          </p:nvPr>
+        </p:nvSpPr>
+        <p:spPr/>
+        <p:txBody>
+          <a:bodyPr/>
+          <a:lstStyle/>
+          <a:p>
+            <a:r>
+              <a:rPr lang="en-US" dirty="0"/>
+              <a:t>If the flank question comes up: the MPRA destroys the flanks of a 170 bp fragment on a plasmid and reads transcription; we move an intact ~0.8 kb element into closed chromatin and read accessibility. There is no chromatin to open in the MPRA. The honest shared conclusion is that neither assay finds much class information in 170 bp.
+Everything here is predicted accessibility from a model fine-tuned on our own fibroblast ATAC, not a measurement, and not the MPRA-trained probe used in the manuscript.</a:t>
+            </a:r>
+            <a:endParaRPr lang="en-US" dirty="0"/>
+          </a:p>
+        </p:txBody>
+      </p:sp>
+      <p:sp>
+        <p:nvSpPr>
+          <p:cNvPr id="4" name="Slide Number Placeholder 3"/>
+          <p:cNvSpPr>
+            <a:spLocks noGrp="1"/>
+          </p:cNvSpPr>
+          <p:nvPr>
+            <p:ph type="sldNum" sz="quarter" idx="10"/>
+          </p:nvPr>
+        </p:nvSpPr>
+        <p:spPr/>
+        <p:txBody>
+          <a:bodyPr/>
+          <a:lstStyle/>
+          <a:p>
+            <a:fld id="{F7021451-1387-4CA6-816F-3879F97B5CBC}" type="slidenum">
+              <a:rPr lang="en-US"/>
+              <a:t>14</a:t>
             </a:fld>
             <a:endParaRPr lang="en-US"/>
           </a:p>
@@ -963,9 +1155,9 @@
           <a:p>
             <a:r>
               <a:rPr lang="en-US" dirty="0"/>
-              <a:t>Reading order: the three shuffles ask how much sequence you have to destroy; the tile scan and the saturation ask where in the sequence the dependence lives; the partner shuffle asks which other motifs matter.
-The partner control is the part to dwell on. Dynamic sites are about half as accessible as Stable ones, so any measure that compares a Dynamic number against a Stable number is open to that confound. Scoring a shuffled partner against a matched footprint-free window at the mirrored distance keeps the whole comparison inside one site, so accessibility cannot reach it.
-Every shuffle is repeated 10 times per site and averaged, so a single lucky permutation cannot carry a result.</a:t>
+              <a:t>Hosts are genomic windows with no called ATAC peak. 20 per element, 50 donor elements per class, scored at the whole-peak width.
+Why the shuffled control and not an empty host: an empty host still has its own baseline signal, and that baseline differs between hosts. Scoring element against shuffled inside the SAME host removes it.
+What this cannot do: the donors are not matched on accessibility. That is handled on the next slide and the caveat line there carries the matched number.</a:t>
             </a:r>
             <a:endParaRPr lang="en-US" dirty="0"/>
           </a:p>
@@ -1053,9 +1245,10 @@
           <a:p>
             <a:r>
               <a:rPr lang="en-US" dirty="0"/>
-              <a:t>Transplant: the control is the SAME sequence shuffled, dropped into the SAME host, so the host's own contribution cancels in the ratio. 20 hosts per element, 50 donors per class. Hosts are genomic windows with no called ATAC peak.
-Swap: every donor element written into every recipient location, both at 170 bp and at the whole peak, 62,250 combinations. Self-swaps are excluded. Because each donor appears in about 250 of those rows, the confidence intervals come from a cluster bootstrap over donors - an OLS standard error on 62,250 rows would be far too small.
-Caveat to have ready for the transplant slide: the donors are NOT matched on accessibility. That is handled separately and the slide carries the matched number.</a:t>
+              <a:t>Per-donor medians over 20 hosts: Stable +4.65 log2 (25x), Dynamic pooled +2.35 (5.1x), p = 1.5e-5.
+By class, as plotted: Stable 25x, Age Up 6.3x, Age Down 6.1x, Exercise Down 4.6x, Exercise Up 4.4x. Every Dynamic class sits well below Stable and they are close to each other, which is why pooling them is fair here.
+IMPORTANT CAVEAT, be ready for this question: the donors are not matched on accessibility - Stable donors come from loci about 1.8x more accessible (measured ATAC: 32.2 vs 18.0 CPM/kb). Matching on MEASURED fibroblast ATAC (model-independent), the residual Stable advantage is +0.84 +- 0.30 log2, i.e. about 1.8x, p = 0.005 (covariance adjustment, 224 donors). The 47 matched pairs point the same way (+0.99) but are underpowered (p = 0.13). So: direction solid, magnitude about a third to a half of the raw gap. Do not defend 25x vs 5x as a sequence effect.
+Also worth knowing: 0 of 50 Stable donors lack a measured ATAC peak, against 5-8 per Dynamic class.</a:t>
             </a:r>
             <a:endParaRPr lang="en-US" dirty="0"/>
           </a:p>
@@ -1143,10 +1336,8 @@
           <a:p>
             <a:r>
               <a:rPr lang="en-US" dirty="0"/>
-              <a:t>Per-donor medians over 20 hosts: Stable +4.65 log2 (25x), Dynamic pooled +2.35 (5.1x), p = 1.5e-5.
-By class, as plotted: Stable 25x, Age Up 6.3x, Age Down 6.1x, Exercise Down 4.6x, Exercise Up 4.4x. Every Dynamic class sits well below Stable and they are close to each other, which is why pooling them is fair here.
-IMPORTANT CAVEAT, be ready for this question: the donors are not matched on accessibility - Stable donors come from loci about 1.8x more accessible (measured ATAC: 32.2 vs 18.0 CPM/kb). Matching on MEASURED fibroblast ATAC (model-independent), the residual Stable advantage is +0.84 +- 0.30 log2, i.e. about 1.8x, p = 0.005 (covariance adjustment, 224 donors). The 47 matched pairs point the same way (+0.99) but are underpowered (p = 0.13). So: direction solid, magnitude about a third to a half of the raw gap. Do not defend 25x vs 5x as a sequence effect.
-Also worth knowing: 0 of 50 Stable donors lack a measured ATAC peak, against 5-8 per Dynamic class.</a:t>
+              <a:t>62,250 swaps, self-swaps excluded, at two widths: the 170 bp MPRA-sized window and the whole peak.
+Each donor appears in about 250 of those rows, so the rows are nowhere near independent. The intervals on the next slide come from a cluster bootstrap over the 250 donors; an OLS standard error on 62,250 rows would be far too small and would make both coefficients look certain.</a:t>
             </a:r>
             <a:endParaRPr lang="en-US" dirty="0"/>
           </a:p>
@@ -1324,12 +1515,9 @@
           <a:p>
             <a:r>
               <a:rPr lang="en-US" dirty="0"/>
-              <a:t>2,340 sites. Own AP-1 motif, median log2, with BH-adjusted P against Stable:
-  Stable -1.21 (n=1179, reference) · Age Up -1.19 (n=605, FDR 0.93) · Age Down -0.78 (n=209, FDR 9.1e-5) · Exercise Up -1.14 (n=233, FDR 0.49) · Exercise Down -0.96 (n=114, FDR 0.043)
-Partner motifs, net of control: -0.20 / -0.25 / -0.22 / -0.23 / -0.33. Nothing survives BH (smallest adjusted 0.20), so the deficit is AP-1-specific in both losing classes. So the deficit is AP-1-specific, not general weakness. No single partner family takes over: nothing survives FDR in the per-family split.
-Agreement: pooled Stable vs Dynamic at the motif is a null, which matches the manuscript's core-scramble result (no class difference). Age-gained being on par with Stable is the sequence-level version of 'age-gained reporter activity on par with stable'.
-Note on the split: a site that is dynamic with both age and exercise is counted under its age class, so the two exercise groups are the sites that are NOT also age-dynamic. Splitting them is what separated the old 'other Dynamic' group (p = 0.055, n = 347) into Exercise Up, which looks like Stable, and Exercise Down, which does not.
-Caveat: the own-AP-1 bar has no matched control, because one at distance 0 would overlap the motif. That inflates AP-1 relative to the partners in every class equally, so the class comparison is unaffected.</a:t>
+              <a:t>This is the control that makes the next two slides immune to the accessibility gap. Dynamic sites are about half as accessible as Stable ones, so any measure that compares a Dynamic number against a Stable number is exposed to that confound. Here both terms come from the same window of the same site.
+TOBIAS says only WHERE a footprint is and which family it belongs to. No footprint score enters the calculation; the effect is always AlphaGenome's.
+One asymmetry to admit if asked: the site's own AP-1 motif has no matched control, because a control at distance 0 would overlap the motif. That inflates AP-1 relative to the partners in every class equally, so the comparison BETWEEN classes is unaffected.</a:t>
             </a:r>
             <a:endParaRPr lang="en-US" dirty="0"/>
           </a:p>
@@ -1417,16 +1605,12 @@
           <a:p>
             <a:r>
               <a:rPr lang="en-US" dirty="0"/>
-              <a:t>NUMBERS TO ANNOTATE WITH, strongest first:
-  - the peak tile carries 10.8% (Stable) / 9.9% (Dynamic) of a site's importance, against 1.7% for an average tile - about 6x enrichment
-  - within +-25 bp (5 of 60 tiles, 8% of the sequence): Stable 33.8% vs Dynamic 30.7%, p = 2.0e-6
-  - accessibility-matched, 860 pairs: 33.1% vs 31.3%, paired difference +1.5 points, Wilcoxon p = 0.006
-  - only 2 of 60 positions differ at FDR &lt; 0.05, and they are the two tiles over the core (FDR = 0.001). Every other position FDR &gt; 0.8
-  - in 56% of Stable and 52% of Dynamic sites the single most important tile IS a core tile, against a chance of 3.3% - 16x. That one does NOT differ by class (Fisher p = 0.063; matched McNemar p = 0.21), so quote it as the shared fact, not as a difference. Figure for it is on disk as r_fb_top_tile.png if anyone wants to see it.
-2,359 sites, 60 tiles of 10 bp from -300 to +290, fine-tuned FB head, readout atac_170.
-Why the floor subtraction matters, if asked: Dynamic sites are about half as accessible, so their log2 ratios are noisier, and noise is flat across position. Without removing each site's own floor (median |effect| beyond +-200 bp: 0.047 Dynamic, 0.037 Stable) a Dynamic profile looks more distributed whether or not it is. That is exactly the artefact this corrects for.
-Agreement: this is the AlphaGenome version of 'attention is more distributed at dynamic enhancers'. Same direction, different model and different readout.
-Honest size: the matched difference is 1.5 percentage points on a base of about a third. Real, repeatedly so, but small - do not oversell it as two different architectures.</a:t>
+              <a:t>2,340 sites. Own AP-1 motif, median log2, with BH-adjusted P against Stable:
+  Stable -1.21 (n=1179, reference) · Age Up -1.19 (n=605, FDR 0.93) · Age Down -0.78 (n=209, FDR 9.1e-5) · Exercise Up -1.14 (n=233, FDR 0.49) · Exercise Down -0.96 (n=114, FDR 0.043)
+Partner motifs, net of control: -0.20 / -0.25 / -0.22 / -0.23 / -0.33. Nothing survives BH (smallest adjusted 0.20), so the deficit is AP-1-specific in both losing classes. So the deficit is AP-1-specific, not general weakness. No single partner family takes over: nothing survives FDR in the per-family split.
+Agreement: pooled Stable vs Dynamic at the motif is a null, which matches the manuscript's core-scramble result (no class difference). Age-gained being on par with Stable is the sequence-level version of 'age-gained reporter activity on par with stable'.
+Note on the split: a site that is dynamic with both age and exercise is counted under its age class, so the two exercise groups are the sites that are NOT also age-dynamic. Splitting them is what separated the old 'other Dynamic' group (p = 0.055, n = 347) into Exercise Up, which looks like Stable, and Exercise Down, which does not.
+Caveat: the own-AP-1 bar has no matched control, because one at distance 0 would overlap the motif. That inflates AP-1 relative to the partners in every class equally, so the class comparison is unaffected.</a:t>
             </a:r>
             <a:endParaRPr lang="en-US" dirty="0"/>
           </a:p>
@@ -1514,12 +1698,8 @@
           <a:p>
             <a:r>
               <a:rPr lang="en-US" dirty="0"/>
-              <a:t>Stable 0.804 (n=1179) vs Dynamic pooled 0.745 (n=1161), p = 7.2e-11. By class: Age Up 0.755 (p = 7.9e-5), Age Down 0.734 (p = 4.1e-6), Exercise Up 0.726 (p = 1.9e-5), Exercise Down 0.732 (p = 8.7e-6).
-Worth contrasting with the previous slide out loud: there, only the LOSING classes moved. Here all four move, including both gaining classes. So the absolute dependence on AP-1 and the share of the total it carries are two different statements, and only the second separates every Dynamic class from Stable.
-The 40%: partner share 19.6% for Stable against 24.5 / 26.6 / 27.3% for the Dynamic classes, so 27.3/19.6 = 1.39x. It is the same number as 80 vs 73, read from the other end - say it whichever way, but do not say both as if they were two results.
-Detection check, in case it is asked: footprint calling needs signal, so Stable sites carry more detected partners (5.89 vs 5.01 per site, p = 2e-82). Restricting to the 1,808 sites that hit the cap of 6 detected partners, the gap is unchanged: 0.806 vs 0.736, p = 2.1e-13. Not a detection artefact.
-Note this is a DIFFERENT statement from slide 5. There, only the AP-1-losing class drops in absolute AP-1 dependence. Here, all Dynamic classes are modestly less AP-1-centric in relative terms.
-The equivalent tile-scan measure (motif share vs a 10-50 bp collar) does NOT survive accessibility matching (p = 0.11); the collar is mostly noise at low-accessibility sites. This version is better powered because it only scores footprinted motifs.</a:t>
+              <a:t>60 tiles of 10 bp from -300 to +290, one prediction each; then 61 positions x 3 alternative bases.
+The analysis step that matters is on the next slide: each site's profile has its OWN noise floor subtracted (the median |effect| beyond +-200 bp) before being normalised to its own total. Without that, Dynamic sites look more 'distributed' simply because they are less accessible and therefore noisier, and noise is flat across position.</a:t>
             </a:r>
             <a:endParaRPr lang="en-US" dirty="0"/>
           </a:p>
@@ -2504,15 +2684,51 @@
                   <a:schemeClr val="tx1"/>
                 </a:solidFill>
               </a:rPr>
-              <a:t>The AP-1 ladder, and the spacing experiments</a:t>
+              <a:t>Where the dependence sits: on the motif, and more so if Stable</a:t>
             </a:r>
             <a:endParaRPr lang="en-US" sz="2800" dirty="0"/>
+          </a:p>
+        </p:txBody>
+      </p:sp>
+      <p:sp>
+        <p:nvSpPr>
+          <p:cNvPr id="3" name="Text 1"/>
+          <p:cNvSpPr txBox="1"/>
+          <p:nvPr/>
+        </p:nvSpPr>
+        <p:spPr>
+          <a:xfrm>
+            <a:off x="502920" y="969264"/>
+            <a:ext cx="11155680" cy="310896"/>
+          </a:xfrm>
+          <a:prstGeom prst="rect">
+            <a:avLst/>
+          </a:prstGeom>
+          <a:noFill/>
+          <a:ln/>
+        </p:spPr>
+        <p:txBody>
+          <a:bodyPr wrap="square" lIns="0" tIns="0" rIns="0" bIns="0" rtlCol="0" anchor="ctr"/>
+          <a:lstStyle/>
+          <a:p>
+            <a:pPr indent="0" marL="0">
+              <a:buNone/>
+            </a:pPr>
+            <a:r>
+              <a:rPr lang="en-US" sz="1250" i="1" dirty="0">
+                <a:solidFill>
+                  <a:srgbClr val="595959"/>
+                </a:solidFill>
+              </a:rPr>
+              <a:t>Each 10 bp tile replaced in turn; each site's own noise floor removed, then normalised to its own total, so the curve is where the dependence sits, not how much there is. Median per site, band a bootstrap 95% CI; Mann–Whitney per position, BH-FDR across the 60. Cropped to ±150 bp.</a:t>
+            </a:r>
+            <a:endParaRPr lang="en-US" sz="1250" dirty="0"/>
           </a:p>
         </p:txBody>
       </p:sp>
       <p:pic>
         <p:nvPicPr>
-          <p:cNvPr id="3" name="Image 0" descr="/Users/z5162865/WongLab/AlphaGenome_Ap1/Analysis/slide_figures/m4_titration.png">    </p:cNvPr>
+          <p:cNvPr id="4" name="Image 0" descr="/Users/z5162865/WongLab/AlphaGenome_Ap1/Analysis/slide_figures/r_fb_density.png">    </p:cNvPr>
           <p:cNvPicPr>
             <a:picLocks noChangeAspect="1"/>
           </p:cNvPicPr>
@@ -2526,8 +2742,8 @@
         </p:blipFill>
         <p:spPr>
           <a:xfrm>
-            <a:off x="996791" y="1097280"/>
-            <a:ext cx="10167938" cy="4800600"/>
+            <a:off x="1115221" y="1335024"/>
+            <a:ext cx="9931078" cy="3566160"/>
           </a:xfrm>
           <a:prstGeom prst="rect">
             <a:avLst/>
@@ -2536,14 +2752,14 @@
       </p:pic>
       <p:sp>
         <p:nvSpPr>
-          <p:cNvPr id="4" name="Shape 1"/>
+          <p:cNvPr id="5" name="Shape 2"/>
           <p:cNvSpPr/>
           <p:nvPr/>
         </p:nvSpPr>
         <p:spPr>
           <a:xfrm>
-            <a:off x="502920" y="5989320"/>
-            <a:ext cx="50292" cy="566928"/>
+            <a:off x="502920" y="5047488"/>
+            <a:ext cx="50292" cy="731520"/>
           </a:xfrm>
           <a:prstGeom prst="rect">
             <a:avLst/>
@@ -2561,14 +2777,14 @@
       </p:sp>
       <p:sp>
         <p:nvSpPr>
-          <p:cNvPr id="5" name="Text 2"/>
+          <p:cNvPr id="6" name="Text 3"/>
           <p:cNvSpPr txBox="1"/>
           <p:nvPr/>
         </p:nvSpPr>
         <p:spPr>
           <a:xfrm>
-            <a:off x="749808" y="5989320"/>
-            <a:ext cx="10881360" cy="566928"/>
+            <a:off x="749808" y="5047488"/>
+            <a:ext cx="10881360" cy="731520"/>
           </a:xfrm>
           <a:prstGeom prst="rect">
             <a:avLst/>
@@ -2584,14 +2800,50 @@
               <a:buNone/>
             </a:pPr>
             <a:r>
-              <a:rPr lang="en-US" sz="1550" dirty="0">
+              <a:rPr lang="en-US" sz="1700" dirty="0">
                 <a:solidFill>
                   <a:srgbClr val="111111"/>
                 </a:solidFill>
               </a:rPr>
-              <a:t>Rather than only destroying the motif, weaken it one base at a time, strengthen it, flip it, duplicate it or move it — each against a control that changes the same amount of sequence but no motif.</a:t>
-            </a:r>
-            <a:endParaRPr lang="en-US" sz="1550" dirty="0"/>
+              <a:t>A spike on the AP-1 core sitting on a shallow shoulder that reaches ±100 bp — and the model was never told where the motif was. The spike is taller for Stable sites, and the two tiles covering the core are the only positions in the whole window where the classes differ at all.</a:t>
+            </a:r>
+            <a:endParaRPr lang="en-US" sz="1700" dirty="0"/>
+          </a:p>
+        </p:txBody>
+      </p:sp>
+      <p:sp>
+        <p:nvSpPr>
+          <p:cNvPr id="7" name="Text 4"/>
+          <p:cNvSpPr txBox="1"/>
+          <p:nvPr/>
+        </p:nvSpPr>
+        <p:spPr>
+          <a:xfrm>
+            <a:off x="749808" y="5852160"/>
+            <a:ext cx="10881360" cy="603504"/>
+          </a:xfrm>
+          <a:prstGeom prst="rect">
+            <a:avLst/>
+          </a:prstGeom>
+          <a:noFill/>
+          <a:ln/>
+        </p:spPr>
+        <p:txBody>
+          <a:bodyPr wrap="square" lIns="0" tIns="0" rIns="0" bIns="0" rtlCol="0" anchor="t"/>
+          <a:lstStyle/>
+          <a:p>
+            <a:pPr indent="0" marL="0">
+              <a:buNone/>
+            </a:pPr>
+            <a:r>
+              <a:rPr lang="en-US" sz="1300" dirty="0">
+                <a:solidFill>
+                  <a:srgbClr val="595959"/>
+                </a:solidFill>
+              </a:rPr>
+              <a:t>Holding accessibility constant the gap halves but holds: 33.1% vs 31.3% of importance within ±25 bp, P = 0.006 over 860 matched pairs. The older ratio version of this measure did not survive that check (P = 0.11); this one does, because the noise floor is removed per site first.</a:t>
+            </a:r>
+            <a:endParaRPr lang="en-US" sz="1300" dirty="0"/>
           </a:p>
         </p:txBody>
       </p:sp>
@@ -2697,7 +2949,7 @@
                   <a:schemeClr val="tx1"/>
                 </a:solidFill>
               </a:rPr>
-              <a:t>Two differences that turned out to be accessibility</a:t>
+              <a:t>Dynamic sites hand more of the load to the partner motifs</a:t>
             </a:r>
             <a:endParaRPr lang="en-US" sz="2800" dirty="0"/>
           </a:p>
@@ -2705,16 +2957,14 @@
       </p:sp>
       <p:sp>
         <p:nvSpPr>
-          <p:cNvPr id="3" name="Text 0"/>
-          <p:cNvSpPr/>
-          <p:nvPr>
-            <p:ph idx="101" type="body" hasCustomPrompt="1"/>
-          </p:nvPr>
-        </p:nvSpPr>
-        <p:spPr>
-          <a:xfrm>
-            <a:off x="502920" y="1234440"/>
-            <a:ext cx="11155680" cy="5029200"/>
+          <p:cNvPr id="3" name="Text 1"/>
+          <p:cNvSpPr txBox="1"/>
+          <p:nvPr/>
+        </p:nvSpPr>
+        <p:spPr>
+          <a:xfrm>
+            <a:off x="502920" y="969264"/>
+            <a:ext cx="11155680" cy="310896"/>
           </a:xfrm>
           <a:prstGeom prst="rect">
             <a:avLst/>
@@ -2723,179 +2973,104 @@
           <a:ln/>
         </p:spPr>
         <p:txBody>
-          <a:bodyPr wrap="square" rtlCol="0" anchor="t"/>
-          <a:lstStyle/>
-          <a:p>
-            <a:pPr algn="l" marL="342900" indent="-342900">
-              <a:spcBef>
-                <a:spcPts val="1100"/>
-              </a:spcBef>
-              <a:spcAft>
-                <a:spcPts val="300"/>
-              </a:spcAft>
-              <a:buSzPct val="100000"/>
-              <a:buChar char="•"/>
+          <a:bodyPr wrap="square" lIns="0" tIns="0" rIns="0" bIns="0" rtlCol="0" anchor="ctr"/>
+          <a:lstStyle/>
+          <a:p>
+            <a:pPr indent="0" marL="0">
+              <a:buNone/>
             </a:pPr>
             <a:r>
-              <a:rPr lang="en-US" sz="1700" b="1" dirty="0">
+              <a:rPr lang="en-US" sz="1250" i="1" dirty="0">
+                <a:solidFill>
+                  <a:srgbClr val="595959"/>
+                </a:solidFill>
+              </a:rPr>
+              <a:t>Per site: |own AP-1| / (|own AP-1| + |partner motifs|), the share of its motif dependence that sits inside the AP-1 motif rather than outside it. Both terms are AlphaGenome shuffle effects measured inside the same window, so accessibility cannot drive the comparison. Median per site; error bar, bootstrap 95% CI; Mann–Whitney.</a:t>
+            </a:r>
+            <a:endParaRPr lang="en-US" sz="1250" dirty="0"/>
+          </a:p>
+        </p:txBody>
+      </p:sp>
+      <p:pic>
+        <p:nvPicPr>
+          <p:cNvPr id="4" name="Image 0" descr="/Users/z5162865/WongLab/AlphaGenome_Ap1/Analysis/slide_figures/r_fb_share.png">    </p:cNvPr>
+          <p:cNvPicPr>
+            <a:picLocks noChangeAspect="1"/>
+          </p:cNvPicPr>
+          <p:nvPr/>
+        </p:nvPicPr>
+        <p:blipFill>
+          <a:blip r:embed="rId1"/>
+          <a:stretch>
+            <a:fillRect/>
+          </a:stretch>
+        </p:blipFill>
+        <p:spPr>
+          <a:xfrm>
+            <a:off x="1414343" y="1335024"/>
+            <a:ext cx="9332834" cy="3858768"/>
+          </a:xfrm>
+          <a:prstGeom prst="rect">
+            <a:avLst/>
+          </a:prstGeom>
+        </p:spPr>
+      </p:pic>
+      <p:sp>
+        <p:nvSpPr>
+          <p:cNvPr id="5" name="Shape 2"/>
+          <p:cNvSpPr/>
+          <p:nvPr/>
+        </p:nvSpPr>
+        <p:spPr>
+          <a:xfrm>
+            <a:off x="502920" y="5303520"/>
+            <a:ext cx="50292" cy="868680"/>
+          </a:xfrm>
+          <a:prstGeom prst="rect">
+            <a:avLst/>
+          </a:prstGeom>
+          <a:solidFill>
+            <a:srgbClr val="3F3F3F"/>
+          </a:solidFill>
+          <a:ln w="12700">
+            <a:solidFill>
+              <a:srgbClr val="333333"/>
+            </a:solidFill>
+            <a:prstDash val="solid"/>
+          </a:ln>
+        </p:spPr>
+      </p:sp>
+      <p:sp>
+        <p:nvSpPr>
+          <p:cNvPr id="6" name="Text 3"/>
+          <p:cNvSpPr txBox="1"/>
+          <p:nvPr/>
+        </p:nvSpPr>
+        <p:spPr>
+          <a:xfrm>
+            <a:off x="749808" y="5303520"/>
+            <a:ext cx="10881360" cy="868680"/>
+          </a:xfrm>
+          <a:prstGeom prst="rect">
+            <a:avLst/>
+          </a:prstGeom>
+          <a:noFill/>
+          <a:ln/>
+        </p:spPr>
+        <p:txBody>
+          <a:bodyPr wrap="square" lIns="0" tIns="0" rIns="0" bIns="0" rtlCol="0" anchor="ctr"/>
+          <a:lstStyle/>
+          <a:p>
+            <a:pPr indent="0" marL="0">
+              <a:buNone/>
+            </a:pPr>
+            <a:r>
+              <a:rPr lang="en-US" sz="1700" dirty="0">
                 <a:solidFill>
                   <a:srgbClr val="111111"/>
                 </a:solidFill>
               </a:rPr>
-              <a:t>A second AP-1 copy looked worth more to Dynamic sites</a:t>
-            </a:r>
-            <a:endParaRPr lang="en-US" sz="1700" dirty="0"/>
-          </a:p>
-          <a:p>
-            <a:pPr algn="l" lvl="1" marL="685800" indent="-342900">
-              <a:spcAft>
-                <a:spcPts val="400"/>
-              </a:spcAft>
-              <a:buSzPct val="100000"/>
-              <a:buChar char="▪"/>
-            </a:pPr>
-            <a:r>
-              <a:rPr lang="en-US" sz="1450" dirty="0">
-                <a:solidFill>
-                  <a:srgbClr val="595959"/>
-                </a:solidFill>
-              </a:rPr>
-              <a:t>+0.72 vs +0.60 log2, p &lt; 1e-4 — matched on accessibility, p = 0.93. Gone.</a:t>
-            </a:r>
-            <a:endParaRPr lang="en-US" sz="1700" dirty="0"/>
-          </a:p>
-          <a:p>
-            <a:pPr algn="l" marL="342900" indent="-342900">
-              <a:spcBef>
-                <a:spcPts val="1100"/>
-              </a:spcBef>
-              <a:spcAft>
-                <a:spcPts val="300"/>
-              </a:spcAft>
-              <a:buSzPct val="100000"/>
-              <a:buChar char="•"/>
-            </a:pPr>
-            <a:r>
-              <a:rPr lang="en-US" sz="1700" b="1" dirty="0">
-                <a:solidFill>
-                  <a:srgbClr val="111111"/>
-                </a:solidFill>
-              </a:rPr>
-              <a:t>Upgrading an imperfect core to a perfect TGAGTCA looked worth more to Dynamic sites</a:t>
-            </a:r>
-            <a:endParaRPr lang="en-US" sz="1700" dirty="0"/>
-          </a:p>
-          <a:p>
-            <a:pPr algn="l" lvl="1" marL="685800" indent="-342900">
-              <a:spcAft>
-                <a:spcPts val="400"/>
-              </a:spcAft>
-              <a:buSzPct val="100000"/>
-              <a:buChar char="▪"/>
-            </a:pPr>
-            <a:r>
-              <a:rPr lang="en-US" sz="1450" dirty="0">
-                <a:solidFill>
-                  <a:srgbClr val="595959"/>
-                </a:solidFill>
-              </a:rPr>
-              <a:t>+0.66 vs +0.52, p &lt; 1e-4 — matched, p = 0.94. Gone.</a:t>
-            </a:r>
-            <a:endParaRPr lang="en-US" sz="1700" dirty="0"/>
-          </a:p>
-          <a:p>
-            <a:pPr algn="l" marL="342900" indent="-342900">
-              <a:spcBef>
-                <a:spcPts val="1100"/>
-              </a:spcBef>
-              <a:spcAft>
-                <a:spcPts val="300"/>
-              </a:spcAft>
-              <a:buSzPct val="100000"/>
-              <a:buChar char="•"/>
-            </a:pPr>
-            <a:r>
-              <a:rPr lang="en-US" sz="1700" b="1" dirty="0">
-                <a:solidFill>
-                  <a:srgbClr val="111111"/>
-                </a:solidFill>
-              </a:rPr>
-              <a:t>What did survive matching</a:t>
-            </a:r>
-            <a:endParaRPr lang="en-US" sz="1700" dirty="0"/>
-          </a:p>
-          <a:p>
-            <a:pPr algn="l" lvl="1" marL="685800" indent="-342900">
-              <a:spcAft>
-                <a:spcPts val="400"/>
-              </a:spcAft>
-              <a:buSzPct val="100000"/>
-              <a:buChar char="▪"/>
-            </a:pPr>
-            <a:r>
-              <a:rPr lang="en-US" sz="1450" dirty="0">
-                <a:solidFill>
-                  <a:srgbClr val="595959"/>
-                </a:solidFill>
-              </a:rPr>
-              <a:t>Destroying the motif costs Dynamic sites less (+0.16, p = 4e-4); the dose-response is shallower; relocating the motif helps them less.</a:t>
-            </a:r>
-            <a:endParaRPr lang="en-US" sz="1700" dirty="0"/>
-          </a:p>
-          <a:p>
-            <a:pPr algn="l" marL="342900" indent="-342900">
-              <a:spcBef>
-                <a:spcPts val="1100"/>
-              </a:spcBef>
-              <a:spcAft>
-                <a:spcPts val="300"/>
-              </a:spcAft>
-              <a:buSzPct val="100000"/>
-              <a:buChar char="•"/>
-            </a:pPr>
-            <a:r>
-              <a:rPr lang="en-US" sz="1700" b="1" dirty="0">
-                <a:solidFill>
-                  <a:srgbClr val="111111"/>
-                </a:solidFill>
-              </a:rPr>
-              <a:t>Two clean negatives worth having</a:t>
-            </a:r>
-            <a:endParaRPr lang="en-US" sz="1700" dirty="0"/>
-          </a:p>
-          <a:p>
-            <a:pPr algn="l" lvl="1" marL="685800" indent="-342900">
-              <a:spcAft>
-                <a:spcPts val="400"/>
-              </a:spcAft>
-              <a:buSzPct val="100000"/>
-              <a:buChar char="▪"/>
-            </a:pPr>
-            <a:r>
-              <a:rPr lang="en-US" sz="1450" dirty="0">
-                <a:solidFill>
-                  <a:srgbClr val="595959"/>
-                </a:solidFill>
-              </a:rPr>
-              <a:t>Reverse-complementing the whole motif costs nothing in either class (-0.03 log2, p = 0.89) — expected for a palindromic TRE, and a sanity check on the head.</a:t>
-            </a:r>
-            <a:endParaRPr lang="en-US" sz="1700" dirty="0"/>
-          </a:p>
-          <a:p>
-            <a:pPr algn="l" lvl="1" marL="685800" indent="-342900">
-              <a:spcAft>
-                <a:spcPts val="400"/>
-              </a:spcAft>
-              <a:buSzPct val="100000"/>
-              <a:buChar char="▪"/>
-            </a:pPr>
-            <a:r>
-              <a:rPr lang="en-US" sz="1450" dirty="0">
-                <a:solidFill>
-                  <a:srgbClr val="595959"/>
-                </a:solidFill>
-              </a:rPr>
-              <a:t>The spacing preference for a second copy is identical: best at ±20–40 bp, decaying by ±150 bp, with no class difference at any distance (all FDR &gt; 0.58).</a:t>
+              <a:t>Outside the motif is where every class differs: a Stable site leaves 20% of its motif dependence to partners, each of the four Dynamic classes 25–27% — about a third more — and all four sit on the same side, gaining and losing alike. AP-1 still leads everywhere; it just carries less of the load.</a:t>
             </a:r>
             <a:endParaRPr lang="en-US" sz="1700" dirty="0"/>
           </a:p>
@@ -3003,7 +3178,200 @@
                   <a:schemeClr val="tx1"/>
                 </a:solidFill>
               </a:rPr>
-              <a:t>How this sits with the MPRA work</a:t>
+              <a:t>The AP-1 ladder, and the spacing experiments</a:t>
+            </a:r>
+            <a:endParaRPr lang="en-US" sz="2800" dirty="0"/>
+          </a:p>
+        </p:txBody>
+      </p:sp>
+      <p:pic>
+        <p:nvPicPr>
+          <p:cNvPr id="3" name="Image 0" descr="/Users/z5162865/WongLab/AlphaGenome_Ap1/Analysis/slide_figures/m6_titration.png">    </p:cNvPr>
+          <p:cNvPicPr>
+            <a:picLocks noChangeAspect="1"/>
+          </p:cNvPicPr>
+          <p:nvPr/>
+        </p:nvPicPr>
+        <p:blipFill>
+          <a:blip r:embed="rId1"/>
+          <a:stretch>
+            <a:fillRect/>
+          </a:stretch>
+        </p:blipFill>
+        <p:spPr>
+          <a:xfrm>
+            <a:off x="996791" y="1097280"/>
+            <a:ext cx="10167938" cy="4800600"/>
+          </a:xfrm>
+          <a:prstGeom prst="rect">
+            <a:avLst/>
+          </a:prstGeom>
+        </p:spPr>
+      </p:pic>
+      <p:sp>
+        <p:nvSpPr>
+          <p:cNvPr id="4" name="Shape 1"/>
+          <p:cNvSpPr/>
+          <p:nvPr/>
+        </p:nvSpPr>
+        <p:spPr>
+          <a:xfrm>
+            <a:off x="502920" y="5989320"/>
+            <a:ext cx="50292" cy="566928"/>
+          </a:xfrm>
+          <a:prstGeom prst="rect">
+            <a:avLst/>
+          </a:prstGeom>
+          <a:solidFill>
+            <a:srgbClr val="3F3F3F"/>
+          </a:solidFill>
+          <a:ln w="12700">
+            <a:solidFill>
+              <a:srgbClr val="333333"/>
+            </a:solidFill>
+            <a:prstDash val="solid"/>
+          </a:ln>
+        </p:spPr>
+      </p:sp>
+      <p:sp>
+        <p:nvSpPr>
+          <p:cNvPr id="5" name="Text 2"/>
+          <p:cNvSpPr txBox="1"/>
+          <p:nvPr/>
+        </p:nvSpPr>
+        <p:spPr>
+          <a:xfrm>
+            <a:off x="749808" y="5989320"/>
+            <a:ext cx="10881360" cy="566928"/>
+          </a:xfrm>
+          <a:prstGeom prst="rect">
+            <a:avLst/>
+          </a:prstGeom>
+          <a:noFill/>
+          <a:ln/>
+        </p:spPr>
+        <p:txBody>
+          <a:bodyPr wrap="square" lIns="0" tIns="0" rIns="0" bIns="0" rtlCol="0" anchor="ctr"/>
+          <a:lstStyle/>
+          <a:p>
+            <a:pPr indent="0" marL="0">
+              <a:buNone/>
+            </a:pPr>
+            <a:r>
+              <a:rPr lang="en-US" sz="1550" dirty="0">
+                <a:solidFill>
+                  <a:srgbClr val="111111"/>
+                </a:solidFill>
+              </a:rPr>
+              <a:t>Rather than only destroying the motif, weaken it one base at a time, strengthen it, flip it, duplicate it or move it — each against a control that changes the same amount of sequence but no motif.</a:t>
+            </a:r>
+            <a:endParaRPr lang="en-US" sz="1550" dirty="0"/>
+          </a:p>
+        </p:txBody>
+      </p:sp>
+      <p:sp>
+        <p:nvSpPr>
+          <p:cNvPr id="25" name="Slide Number Placeholder 0"/>
+          <p:cNvSpPr>
+            <a:spLocks noGrp="1"/>
+          </p:cNvSpPr>
+          <p:nvPr>
+            <p:ph type="sldNum" sz="quarter" idx="4294967295"/>
+          </p:nvPr>
+        </p:nvSpPr>
+        <p:spPr>
+          <a:xfrm>
+            <a:off x="11658600" y="6446520"/>
+            <a:ext cx="800000" cy="300000"/>
+          </a:xfrm>
+          <a:prstGeom prst="rect">
+            <a:avLst/>
+          </a:prstGeom>
+          <a:extLst>
+            <a:ext uri="{C572A759-6A51-4108-AA02-DFA0A04FC94B}">
+              <ma14:wrappingTextBoxFlag xmlns:ma14="http://schemas.microsoft.com/office/mac/drawingml/2011/main" val="0"/>
+            </a:ext>
+          </a:extLst>
+        </p:spPr>
+        <p:txBody>
+          <a:bodyPr/>
+          <a:lstStyle>
+            <a:lvl1pPr>
+              <a:defRPr sz="1000">
+                <a:solidFill>
+                  <a:srgbClr val="A6A6A6"/>
+                </a:solidFill>
+              </a:defRPr>
+            </a:lvl1pPr>
+          </a:lstStyle>
+          <a:p>
+            <a:pPr algn="l"/>
+            <a:fld id="{F7021451-1387-4CA6-816F-3879F97B5CBC}" type="slidenum">
+              <a:rPr b="0" lang="en-US"/>
+              <a:t>12</a:t>
+            </a:fld>
+            <a:endParaRPr lang="en-US"/>
+          </a:p>
+        </p:txBody>
+      </p:sp>
+    </p:spTree>
+  </p:cSld>
+  <p:clrMapOvr>
+    <a:masterClrMapping/>
+  </p:clrMapOvr>
+</p:sld>
+</file>
+
+<file path=ppt/slides/slide13.xml><?xml version="1.0" encoding="utf-8"?>
+<p:sld xmlns:a="http://schemas.openxmlformats.org/drawingml/2006/main" xmlns:r="http://schemas.openxmlformats.org/officeDocument/2006/relationships" xmlns:p="http://schemas.openxmlformats.org/presentationml/2006/main">
+  <p:cSld name="Slide 13">
+    <p:spTree>
+      <p:nvGrpSpPr>
+        <p:cNvPr id="1" name=""/>
+        <p:cNvGrpSpPr/>
+        <p:nvPr/>
+      </p:nvGrpSpPr>
+      <p:grpSpPr>
+        <a:xfrm>
+          <a:off x="0" y="0"/>
+          <a:ext cx="0" cy="0"/>
+          <a:chOff x="0" y="0"/>
+          <a:chExt cx="0" cy="0"/>
+        </a:xfrm>
+      </p:grpSpPr>
+      <p:sp>
+        <p:nvSpPr>
+          <p:cNvPr id="2" name="Text 0"/>
+          <p:cNvSpPr/>
+          <p:nvPr>
+            <p:ph idx="100" type="title" hasCustomPrompt="1"/>
+          </p:nvPr>
+        </p:nvSpPr>
+        <p:spPr>
+          <a:xfrm>
+            <a:off x="502920" y="274320"/>
+            <a:ext cx="11155680" cy="731520"/>
+          </a:xfrm>
+          <a:prstGeom prst="rect">
+            <a:avLst/>
+          </a:prstGeom>
+          <a:noFill/>
+          <a:ln/>
+        </p:spPr>
+        <p:txBody>
+          <a:bodyPr wrap="square" rtlCol="0" anchor="ctr"/>
+          <a:lstStyle/>
+          <a:p>
+            <a:pPr algn="l" indent="0" marL="0">
+              <a:buNone/>
+            </a:pPr>
+            <a:r>
+              <a:rPr lang="en-US" sz="2800" b="1" dirty="0">
+                <a:solidFill>
+                  <a:schemeClr val="tx1"/>
+                </a:solidFill>
+              </a:rPr>
+              <a:t>Two differences that turned out to be accessibility</a:t>
             </a:r>
             <a:endParaRPr lang="en-US" sz="2800" dirty="0"/>
           </a:p>
@@ -3048,7 +3416,7 @@
                   <a:srgbClr val="111111"/>
                 </a:solidFill>
               </a:rPr>
-              <a:t>Agrees</a:t>
+              <a:t>A second AP-1 copy looked worth more to Dynamic sites</a:t>
             </a:r>
             <a:endParaRPr lang="en-US" sz="1700" dirty="0"/>
           </a:p>
@@ -3066,61 +3434,7 @@
                   <a:srgbClr val="595959"/>
                 </a:solidFill>
               </a:rPr>
-              <a:t>Dynamic elements have weaker endogenous chromatin, and depend on context rather than being sequence-autonomous.</a:t>
-            </a:r>
-            <a:endParaRPr lang="en-US" sz="1700" dirty="0"/>
-          </a:p>
-          <a:p>
-            <a:pPr algn="l" lvl="1" marL="685800" indent="-342900">
-              <a:spcAft>
-                <a:spcPts val="400"/>
-              </a:spcAft>
-              <a:buSzPct val="100000"/>
-              <a:buChar char="▪"/>
-            </a:pPr>
-            <a:r>
-              <a:rPr lang="en-US" sz="1450" dirty="0">
-                <a:solidFill>
-                  <a:srgbClr val="595959"/>
-                </a:solidFill>
-              </a:rPr>
-              <a:t>Shuffling the AP-1 core alone does not separate pooled Stable from pooled Dynamic.</a:t>
-            </a:r>
-            <a:endParaRPr lang="en-US" sz="1700" dirty="0"/>
-          </a:p>
-          <a:p>
-            <a:pPr algn="l" lvl="1" marL="685800" indent="-342900">
-              <a:spcAft>
-                <a:spcPts val="400"/>
-              </a:spcAft>
-              <a:buSzPct val="100000"/>
-              <a:buChar char="▪"/>
-            </a:pPr>
-            <a:r>
-              <a:rPr lang="en-US" sz="1450" dirty="0">
-                <a:solidFill>
-                  <a:srgbClr val="595959"/>
-                </a:solidFill>
-              </a:rPr>
-              <a:t>Age-gained elements behave like Stable ones — here, at their own AP-1 motif.</a:t>
-            </a:r>
-            <a:endParaRPr lang="en-US" sz="1700" dirty="0"/>
-          </a:p>
-          <a:p>
-            <a:pPr algn="l" lvl="1" marL="685800" indent="-342900">
-              <a:spcAft>
-                <a:spcPts val="400"/>
-              </a:spcAft>
-              <a:buSzPct val="100000"/>
-              <a:buChar char="▪"/>
-            </a:pPr>
-            <a:r>
-              <a:rPr lang="en-US" sz="1450" dirty="0">
-                <a:solidFill>
-                  <a:srgbClr val="595959"/>
-                </a:solidFill>
-              </a:rPr>
-              <a:t>C/EBP is the strongest partner motif at fibroblast AP-1 sites (net −0.71 log2, ahead of MEF2 and NFI).</a:t>
+              <a:t>+0.72 vs +0.60 log2, p &lt; 1e-4 — matched on accessibility, p = 0.93. Gone.</a:t>
             </a:r>
             <a:endParaRPr lang="en-US" sz="1700" dirty="0"/>
           </a:p>
@@ -3141,7 +3455,7 @@
                   <a:srgbClr val="111111"/>
                 </a:solidFill>
               </a:rPr>
-              <a:t>Adds</a:t>
+              <a:t>Upgrading an imperfect core to a perfect TGAGTCA looked worth more to Dynamic sites</a:t>
             </a:r>
             <a:endParaRPr lang="en-US" sz="1700" dirty="0"/>
           </a:p>
@@ -3159,61 +3473,7 @@
                   <a:srgbClr val="595959"/>
                 </a:solidFill>
               </a:rPr>
-              <a:t>The class difference is a whole-peak property, not a 170 bp one.</a:t>
-            </a:r>
-            <a:endParaRPr lang="en-US" sz="1700" dirty="0"/>
-          </a:p>
-          <a:p>
-            <a:pPr algn="l" lvl="1" marL="685800" indent="-342900">
-              <a:spcAft>
-                <a:spcPts val="400"/>
-              </a:spcAft>
-              <a:buSzPct val="100000"/>
-              <a:buChar char="▪"/>
-            </a:pPr>
-            <a:r>
-              <a:rPr lang="en-US" sz="1450" dirty="0">
-                <a:solidFill>
-                  <a:srgbClr val="595959"/>
-                </a:solidFill>
-              </a:rPr>
-              <a:t>Within Dynamic, the AP-1-LOSING sites are the ones that are sequence-different, with age and with exercise alike; the gaining ones look like Stable. Direction, not stimulus.</a:t>
-            </a:r>
-            <a:endParaRPr lang="en-US" sz="1700" dirty="0"/>
-          </a:p>
-          <a:p>
-            <a:pPr algn="l" lvl="1" marL="685800" indent="-342900">
-              <a:spcAft>
-                <a:spcPts val="400"/>
-              </a:spcAft>
-              <a:buSzPct val="100000"/>
-              <a:buChar char="▪"/>
-            </a:pPr>
-            <a:r>
-              <a:rPr lang="en-US" sz="1450" dirty="0">
-                <a:solidFill>
-                  <a:srgbClr val="595959"/>
-                </a:solidFill>
-              </a:rPr>
-              <a:t>Unprompted, AlphaGenome makes the AP-1 core the most important 10 bp in over half of all sites — equally in both classes. The classes differ in how much of the dependence sits there, not in whether AP-1 leads.</a:t>
-            </a:r>
-            <a:endParaRPr lang="en-US" sz="1700" dirty="0"/>
-          </a:p>
-          <a:p>
-            <a:pPr algn="l" lvl="1" marL="685800" indent="-342900">
-              <a:spcAft>
-                <a:spcPts val="400"/>
-              </a:spcAft>
-              <a:buSzPct val="100000"/>
-              <a:buChar char="▪"/>
-            </a:pPr>
-            <a:r>
-              <a:rPr lang="en-US" sz="1450" dirty="0">
-                <a:solidFill>
-                  <a:srgbClr val="595959"/>
-                </a:solidFill>
-              </a:rPr>
-              <a:t>Dynamic sites spread their dependence slightly wider, and it survives accessibility matching (33.1% vs 31.3% within ±25 bp, P = 0.006) — the sequence-model version of “attention is more distributed at dynamic enhancers”.</a:t>
+              <a:t>+0.66 vs +0.52, p &lt; 1e-4 — matched, p = 0.94. Gone.</a:t>
             </a:r>
             <a:endParaRPr lang="en-US" sz="1700" dirty="0"/>
           </a:p>
@@ -3234,7 +3494,7 @@
                   <a:srgbClr val="111111"/>
                 </a:solidFill>
               </a:rPr>
-              <a:t>Keep off the slides</a:t>
+              <a:t>What did survive matching</a:t>
             </a:r>
             <a:endParaRPr lang="en-US" sz="1700" dirty="0"/>
           </a:p>
@@ -3252,7 +3512,64 @@
                   <a:srgbClr val="595959"/>
                 </a:solidFill>
               </a:rPr>
-              <a:t>Our in-situ 170 bp shuffle costs Stable sites more (−2.51 vs −1.96, p = 4e-40), the opposite of the MPRA flank result. Different assay — episomal activity vs chromatin accessibility — but it reads as a contradiction.</a:t>
+              <a:t>Destroying the motif costs Dynamic sites less (+0.16, p = 4e-4); the dose-response is shallower; relocating the motif helps them less.</a:t>
+            </a:r>
+            <a:endParaRPr lang="en-US" sz="1700" dirty="0"/>
+          </a:p>
+          <a:p>
+            <a:pPr algn="l" marL="342900" indent="-342900">
+              <a:spcBef>
+                <a:spcPts val="1100"/>
+              </a:spcBef>
+              <a:spcAft>
+                <a:spcPts val="300"/>
+              </a:spcAft>
+              <a:buSzPct val="100000"/>
+              <a:buChar char="•"/>
+            </a:pPr>
+            <a:r>
+              <a:rPr lang="en-US" sz="1700" b="1" dirty="0">
+                <a:solidFill>
+                  <a:srgbClr val="111111"/>
+                </a:solidFill>
+              </a:rPr>
+              <a:t>Two clean negatives worth having</a:t>
+            </a:r>
+            <a:endParaRPr lang="en-US" sz="1700" dirty="0"/>
+          </a:p>
+          <a:p>
+            <a:pPr algn="l" lvl="1" marL="685800" indent="-342900">
+              <a:spcAft>
+                <a:spcPts val="400"/>
+              </a:spcAft>
+              <a:buSzPct val="100000"/>
+              <a:buChar char="▪"/>
+            </a:pPr>
+            <a:r>
+              <a:rPr lang="en-US" sz="1450" dirty="0">
+                <a:solidFill>
+                  <a:srgbClr val="595959"/>
+                </a:solidFill>
+              </a:rPr>
+              <a:t>Reverse-complementing the whole motif costs nothing in either class (-0.03 log2, p = 0.89) — expected for a palindromic TRE, and a sanity check on the head.</a:t>
+            </a:r>
+            <a:endParaRPr lang="en-US" sz="1700" dirty="0"/>
+          </a:p>
+          <a:p>
+            <a:pPr algn="l" lvl="1" marL="685800" indent="-342900">
+              <a:spcAft>
+                <a:spcPts val="400"/>
+              </a:spcAft>
+              <a:buSzPct val="100000"/>
+              <a:buChar char="▪"/>
+            </a:pPr>
+            <a:r>
+              <a:rPr lang="en-US" sz="1450" dirty="0">
+                <a:solidFill>
+                  <a:srgbClr val="595959"/>
+                </a:solidFill>
+              </a:rPr>
+              <a:t>The spacing preference for a second copy is identical: best at ±20–40 bp, decaying by ±150 bp, with no class difference at any distance (all FDR &gt; 0.58).</a:t>
             </a:r>
             <a:endParaRPr lang="en-US" sz="1700" dirty="0"/>
           </a:p>
@@ -3297,7 +3614,364 @@
             <a:pPr algn="l"/>
             <a:fld id="{F7021451-1387-4CA6-816F-3879F97B5CBC}" type="slidenum">
               <a:rPr b="0" lang="en-US"/>
-              <a:t>12</a:t>
+              <a:t>13</a:t>
+            </a:fld>
+            <a:endParaRPr lang="en-US"/>
+          </a:p>
+        </p:txBody>
+      </p:sp>
+    </p:spTree>
+  </p:cSld>
+  <p:clrMapOvr>
+    <a:masterClrMapping/>
+  </p:clrMapOvr>
+</p:sld>
+</file>
+
+<file path=ppt/slides/slide14.xml><?xml version="1.0" encoding="utf-8"?>
+<p:sld xmlns:a="http://schemas.openxmlformats.org/drawingml/2006/main" xmlns:r="http://schemas.openxmlformats.org/officeDocument/2006/relationships" xmlns:p="http://schemas.openxmlformats.org/presentationml/2006/main">
+  <p:cSld name="Slide 14">
+    <p:spTree>
+      <p:nvGrpSpPr>
+        <p:cNvPr id="1" name=""/>
+        <p:cNvGrpSpPr/>
+        <p:nvPr/>
+      </p:nvGrpSpPr>
+      <p:grpSpPr>
+        <a:xfrm>
+          <a:off x="0" y="0"/>
+          <a:ext cx="0" cy="0"/>
+          <a:chOff x="0" y="0"/>
+          <a:chExt cx="0" cy="0"/>
+        </a:xfrm>
+      </p:grpSpPr>
+      <p:sp>
+        <p:nvSpPr>
+          <p:cNvPr id="2" name="Text 0"/>
+          <p:cNvSpPr/>
+          <p:nvPr>
+            <p:ph idx="100" type="title" hasCustomPrompt="1"/>
+          </p:nvPr>
+        </p:nvSpPr>
+        <p:spPr>
+          <a:xfrm>
+            <a:off x="502920" y="274320"/>
+            <a:ext cx="11155680" cy="731520"/>
+          </a:xfrm>
+          <a:prstGeom prst="rect">
+            <a:avLst/>
+          </a:prstGeom>
+          <a:noFill/>
+          <a:ln/>
+        </p:spPr>
+        <p:txBody>
+          <a:bodyPr wrap="square" rtlCol="0" anchor="ctr"/>
+          <a:lstStyle/>
+          <a:p>
+            <a:pPr algn="l" indent="0" marL="0">
+              <a:buNone/>
+            </a:pPr>
+            <a:r>
+              <a:rPr lang="en-US" sz="2800" b="1" dirty="0">
+                <a:solidFill>
+                  <a:schemeClr val="tx1"/>
+                </a:solidFill>
+              </a:rPr>
+              <a:t>How this sits with the MPRA work</a:t>
+            </a:r>
+            <a:endParaRPr lang="en-US" sz="2800" dirty="0"/>
+          </a:p>
+        </p:txBody>
+      </p:sp>
+      <p:sp>
+        <p:nvSpPr>
+          <p:cNvPr id="3" name="Text 0"/>
+          <p:cNvSpPr/>
+          <p:nvPr>
+            <p:ph idx="101" type="body" hasCustomPrompt="1"/>
+          </p:nvPr>
+        </p:nvSpPr>
+        <p:spPr>
+          <a:xfrm>
+            <a:off x="502920" y="1234440"/>
+            <a:ext cx="11155680" cy="5029200"/>
+          </a:xfrm>
+          <a:prstGeom prst="rect">
+            <a:avLst/>
+          </a:prstGeom>
+          <a:noFill/>
+          <a:ln/>
+        </p:spPr>
+        <p:txBody>
+          <a:bodyPr wrap="square" rtlCol="0" anchor="t"/>
+          <a:lstStyle/>
+          <a:p>
+            <a:pPr algn="l" marL="342900" indent="-342900">
+              <a:spcBef>
+                <a:spcPts val="1100"/>
+              </a:spcBef>
+              <a:spcAft>
+                <a:spcPts val="300"/>
+              </a:spcAft>
+              <a:buSzPct val="100000"/>
+              <a:buChar char="•"/>
+            </a:pPr>
+            <a:r>
+              <a:rPr lang="en-US" sz="1700" b="1" dirty="0">
+                <a:solidFill>
+                  <a:srgbClr val="111111"/>
+                </a:solidFill>
+              </a:rPr>
+              <a:t>Agrees</a:t>
+            </a:r>
+            <a:endParaRPr lang="en-US" sz="1700" dirty="0"/>
+          </a:p>
+          <a:p>
+            <a:pPr algn="l" lvl="1" marL="685800" indent="-342900">
+              <a:spcAft>
+                <a:spcPts val="400"/>
+              </a:spcAft>
+              <a:buSzPct val="100000"/>
+              <a:buChar char="▪"/>
+            </a:pPr>
+            <a:r>
+              <a:rPr lang="en-US" sz="1450" dirty="0">
+                <a:solidFill>
+                  <a:srgbClr val="595959"/>
+                </a:solidFill>
+              </a:rPr>
+              <a:t>Dynamic elements have weaker endogenous chromatin, and depend on context rather than being sequence-autonomous.</a:t>
+            </a:r>
+            <a:endParaRPr lang="en-US" sz="1700" dirty="0"/>
+          </a:p>
+          <a:p>
+            <a:pPr algn="l" lvl="1" marL="685800" indent="-342900">
+              <a:spcAft>
+                <a:spcPts val="400"/>
+              </a:spcAft>
+              <a:buSzPct val="100000"/>
+              <a:buChar char="▪"/>
+            </a:pPr>
+            <a:r>
+              <a:rPr lang="en-US" sz="1450" dirty="0">
+                <a:solidFill>
+                  <a:srgbClr val="595959"/>
+                </a:solidFill>
+              </a:rPr>
+              <a:t>Shuffling the AP-1 core alone does not separate pooled Stable from pooled Dynamic.</a:t>
+            </a:r>
+            <a:endParaRPr lang="en-US" sz="1700" dirty="0"/>
+          </a:p>
+          <a:p>
+            <a:pPr algn="l" lvl="1" marL="685800" indent="-342900">
+              <a:spcAft>
+                <a:spcPts val="400"/>
+              </a:spcAft>
+              <a:buSzPct val="100000"/>
+              <a:buChar char="▪"/>
+            </a:pPr>
+            <a:r>
+              <a:rPr lang="en-US" sz="1450" dirty="0">
+                <a:solidFill>
+                  <a:srgbClr val="595959"/>
+                </a:solidFill>
+              </a:rPr>
+              <a:t>Age-gained elements behave like Stable ones — here, at their own AP-1 motif.</a:t>
+            </a:r>
+            <a:endParaRPr lang="en-US" sz="1700" dirty="0"/>
+          </a:p>
+          <a:p>
+            <a:pPr algn="l" lvl="1" marL="685800" indent="-342900">
+              <a:spcAft>
+                <a:spcPts val="400"/>
+              </a:spcAft>
+              <a:buSzPct val="100000"/>
+              <a:buChar char="▪"/>
+            </a:pPr>
+            <a:r>
+              <a:rPr lang="en-US" sz="1450" dirty="0">
+                <a:solidFill>
+                  <a:srgbClr val="595959"/>
+                </a:solidFill>
+              </a:rPr>
+              <a:t>C/EBP is the strongest partner motif at fibroblast AP-1 sites (net −0.71 log2, ahead of MEF2 and NFI).</a:t>
+            </a:r>
+            <a:endParaRPr lang="en-US" sz="1700" dirty="0"/>
+          </a:p>
+          <a:p>
+            <a:pPr algn="l" marL="342900" indent="-342900">
+              <a:spcBef>
+                <a:spcPts val="1100"/>
+              </a:spcBef>
+              <a:spcAft>
+                <a:spcPts val="300"/>
+              </a:spcAft>
+              <a:buSzPct val="100000"/>
+              <a:buChar char="•"/>
+            </a:pPr>
+            <a:r>
+              <a:rPr lang="en-US" sz="1700" b="1" dirty="0">
+                <a:solidFill>
+                  <a:srgbClr val="111111"/>
+                </a:solidFill>
+              </a:rPr>
+              <a:t>Adds</a:t>
+            </a:r>
+            <a:endParaRPr lang="en-US" sz="1700" dirty="0"/>
+          </a:p>
+          <a:p>
+            <a:pPr algn="l" lvl="1" marL="685800" indent="-342900">
+              <a:spcAft>
+                <a:spcPts val="400"/>
+              </a:spcAft>
+              <a:buSzPct val="100000"/>
+              <a:buChar char="▪"/>
+            </a:pPr>
+            <a:r>
+              <a:rPr lang="en-US" sz="1450" dirty="0">
+                <a:solidFill>
+                  <a:srgbClr val="595959"/>
+                </a:solidFill>
+              </a:rPr>
+              <a:t>The class difference is a whole-peak property, not a 170 bp one.</a:t>
+            </a:r>
+            <a:endParaRPr lang="en-US" sz="1700" dirty="0"/>
+          </a:p>
+          <a:p>
+            <a:pPr algn="l" lvl="1" marL="685800" indent="-342900">
+              <a:spcAft>
+                <a:spcPts val="400"/>
+              </a:spcAft>
+              <a:buSzPct val="100000"/>
+              <a:buChar char="▪"/>
+            </a:pPr>
+            <a:r>
+              <a:rPr lang="en-US" sz="1450" dirty="0">
+                <a:solidFill>
+                  <a:srgbClr val="595959"/>
+                </a:solidFill>
+              </a:rPr>
+              <a:t>Within Dynamic, the AP-1-LOSING sites are the ones that are sequence-different, with age and with exercise alike; the gaining ones look like Stable. Direction, not stimulus.</a:t>
+            </a:r>
+            <a:endParaRPr lang="en-US" sz="1700" dirty="0"/>
+          </a:p>
+          <a:p>
+            <a:pPr algn="l" lvl="1" marL="685800" indent="-342900">
+              <a:spcAft>
+                <a:spcPts val="400"/>
+              </a:spcAft>
+              <a:buSzPct val="100000"/>
+              <a:buChar char="▪"/>
+            </a:pPr>
+            <a:r>
+              <a:rPr lang="en-US" sz="1450" dirty="0">
+                <a:solidFill>
+                  <a:srgbClr val="595959"/>
+                </a:solidFill>
+              </a:rPr>
+              <a:t>Unprompted, AlphaGenome makes the AP-1 core the most important 10 bp in over half of all sites — equally in both classes. The classes differ in how much of the dependence sits there, not in whether AP-1 leads.</a:t>
+            </a:r>
+            <a:endParaRPr lang="en-US" sz="1700" dirty="0"/>
+          </a:p>
+          <a:p>
+            <a:pPr algn="l" lvl="1" marL="685800" indent="-342900">
+              <a:spcAft>
+                <a:spcPts val="400"/>
+              </a:spcAft>
+              <a:buSzPct val="100000"/>
+              <a:buChar char="▪"/>
+            </a:pPr>
+            <a:r>
+              <a:rPr lang="en-US" sz="1450" dirty="0">
+                <a:solidFill>
+                  <a:srgbClr val="595959"/>
+                </a:solidFill>
+              </a:rPr>
+              <a:t>Dynamic sites spread their dependence slightly wider, and it survives accessibility matching (33.1% vs 31.3% within ±25 bp, P = 0.006) — the sequence-model version of “attention is more distributed at dynamic enhancers”.</a:t>
+            </a:r>
+            <a:endParaRPr lang="en-US" sz="1700" dirty="0"/>
+          </a:p>
+          <a:p>
+            <a:pPr algn="l" marL="342900" indent="-342900">
+              <a:spcBef>
+                <a:spcPts val="1100"/>
+              </a:spcBef>
+              <a:spcAft>
+                <a:spcPts val="300"/>
+              </a:spcAft>
+              <a:buSzPct val="100000"/>
+              <a:buChar char="•"/>
+            </a:pPr>
+            <a:r>
+              <a:rPr lang="en-US" sz="1700" b="1" dirty="0">
+                <a:solidFill>
+                  <a:srgbClr val="111111"/>
+                </a:solidFill>
+              </a:rPr>
+              <a:t>Keep off the slides</a:t>
+            </a:r>
+            <a:endParaRPr lang="en-US" sz="1700" dirty="0"/>
+          </a:p>
+          <a:p>
+            <a:pPr algn="l" lvl="1" marL="685800" indent="-342900">
+              <a:spcAft>
+                <a:spcPts val="400"/>
+              </a:spcAft>
+              <a:buSzPct val="100000"/>
+              <a:buChar char="▪"/>
+            </a:pPr>
+            <a:r>
+              <a:rPr lang="en-US" sz="1450" dirty="0">
+                <a:solidFill>
+                  <a:srgbClr val="595959"/>
+                </a:solidFill>
+              </a:rPr>
+              <a:t>Our in-situ 170 bp shuffle costs Stable sites more (−2.51 vs −1.96, p = 4e-40), the opposite of the MPRA flank result. Different assay — episomal activity vs chromatin accessibility — but it reads as a contradiction.</a:t>
+            </a:r>
+            <a:endParaRPr lang="en-US" sz="1700" dirty="0"/>
+          </a:p>
+        </p:txBody>
+      </p:sp>
+      <p:sp>
+        <p:nvSpPr>
+          <p:cNvPr id="25" name="Slide Number Placeholder 0"/>
+          <p:cNvSpPr>
+            <a:spLocks noGrp="1"/>
+          </p:cNvSpPr>
+          <p:nvPr>
+            <p:ph type="sldNum" sz="quarter" idx="4294967295"/>
+          </p:nvPr>
+        </p:nvSpPr>
+        <p:spPr>
+          <a:xfrm>
+            <a:off x="11658600" y="6446520"/>
+            <a:ext cx="800000" cy="300000"/>
+          </a:xfrm>
+          <a:prstGeom prst="rect">
+            <a:avLst/>
+          </a:prstGeom>
+          <a:extLst>
+            <a:ext uri="{C572A759-6A51-4108-AA02-DFA0A04FC94B}">
+              <ma14:wrappingTextBoxFlag xmlns:ma14="http://schemas.microsoft.com/office/mac/drawingml/2011/main" val="0"/>
+            </a:ext>
+          </a:extLst>
+        </p:spPr>
+        <p:txBody>
+          <a:bodyPr/>
+          <a:lstStyle>
+            <a:lvl1pPr>
+              <a:defRPr sz="1000">
+                <a:solidFill>
+                  <a:srgbClr val="A6A6A6"/>
+                </a:solidFill>
+              </a:defRPr>
+            </a:lvl1pPr>
+          </a:lstStyle>
+          <a:p>
+            <a:pPr algn="l"/>
+            <a:fld id="{F7021451-1387-4CA6-816F-3879F97B5CBC}" type="slidenum">
+              <a:rPr b="0" lang="en-US"/>
+              <a:t>14</a:t>
             </a:fld>
             <a:endParaRPr lang="en-US"/>
           </a:p>
@@ -3553,7 +4227,7 @@
                   <a:schemeClr val="tx1"/>
                 </a:solidFill>
               </a:rPr>
-              <a:t>Edits made where the element stands</a:t>
+              <a:t>Transplant: can the element build a site on its own?</a:t>
             </a:r>
             <a:endParaRPr lang="en-US" sz="2800" dirty="0"/>
           </a:p>
@@ -3561,7 +4235,7 @@
       </p:sp>
       <p:pic>
         <p:nvPicPr>
-          <p:cNvPr id="3" name="Image 0" descr="/Users/z5162865/WongLab/AlphaGenome_Ap1/Analysis/slide_figures/m2_within_site.png">    </p:cNvPr>
+          <p:cNvPr id="3" name="Image 0" descr="/Users/z5162865/WongLab/AlphaGenome_Ap1/Analysis/slide_figures/m2_transplant.png">    </p:cNvPr>
           <p:cNvPicPr>
             <a:picLocks noChangeAspect="1"/>
           </p:cNvPicPr>
@@ -3575,8 +4249,8 @@
         </p:blipFill>
         <p:spPr>
           <a:xfrm>
-            <a:off x="1014383" y="1097280"/>
-            <a:ext cx="10132754" cy="4800600"/>
+            <a:off x="457200" y="1626468"/>
+            <a:ext cx="11247120" cy="3742224"/>
           </a:xfrm>
           <a:prstGeom prst="rect">
             <a:avLst/>
@@ -3638,7 +4312,7 @@
                   <a:srgbClr val="111111"/>
                 </a:solidFill>
               </a:rPr>
-              <a:t>Three widths of shuffle, a tile scan across 600 bp, single-base saturation, and one partner motif at a time against a footprint-free window of the same width at the mirrored distance.</a:t>
+              <a:t>The control is the same letters shuffled, dropped into the same background — so whatever the host contributes, it contributes to both and cancels in the ratio.</a:t>
             </a:r>
             <a:endParaRPr lang="en-US" sz="1550" dirty="0"/>
           </a:p>
@@ -3746,15 +4420,51 @@
                   <a:schemeClr val="tx1"/>
                 </a:solidFill>
               </a:rPr>
-              <a:t>Edits that move the element somewhere else</a:t>
+              <a:t>A Stable element opens closed chromatin on its own</a:t>
             </a:r>
             <a:endParaRPr lang="en-US" sz="2800" dirty="0"/>
+          </a:p>
+        </p:txBody>
+      </p:sp>
+      <p:sp>
+        <p:nvSpPr>
+          <p:cNvPr id="3" name="Text 1"/>
+          <p:cNvSpPr txBox="1"/>
+          <p:nvPr/>
+        </p:nvSpPr>
+        <p:spPr>
+          <a:xfrm>
+            <a:off x="502920" y="969264"/>
+            <a:ext cx="11155680" cy="310896"/>
+          </a:xfrm>
+          <a:prstGeom prst="rect">
+            <a:avLst/>
+          </a:prstGeom>
+          <a:noFill/>
+          <a:ln/>
+        </p:spPr>
+        <p:txBody>
+          <a:bodyPr wrap="square" lIns="0" tIns="0" rIns="0" bIns="0" rtlCol="0" anchor="ctr"/>
+          <a:lstStyle/>
+          <a:p>
+            <a:pPr indent="0" marL="0">
+              <a:buNone/>
+            </a:pPr>
+            <a:r>
+              <a:rPr lang="en-US" sz="1250" i="1" dirty="0">
+                <a:solidFill>
+                  <a:srgbClr val="595959"/>
+                </a:solidFill>
+              </a:rPr>
+              <a:t>Each element moved into 20 closed backgrounds and scored against the same sequence shuffled; one point per donor, whole-peak width. Box, median and IQR, whiskers 1.5 × IQR; 50 donors per class — Up = AP-1 gained, Down = AP-1 lost; Mann–Whitney, Stable against the four Dynamic classes pooled.</a:t>
+            </a:r>
+            <a:endParaRPr lang="en-US" sz="1250" dirty="0"/>
           </a:p>
         </p:txBody>
       </p:sp>
       <p:pic>
         <p:nvPicPr>
-          <p:cNvPr id="3" name="Image 0" descr="/Users/z5162865/WongLab/AlphaGenome_Ap1/Analysis/slide_figures/m3_move.png">    </p:cNvPr>
+          <p:cNvPr id="4" name="Image 0" descr="/Users/z5162865/WongLab/AlphaGenome_Ap1/Analysis/slide_figures/r_fb_transplant.png">    </p:cNvPr>
           <p:cNvPicPr>
             <a:picLocks noChangeAspect="1"/>
           </p:cNvPicPr>
@@ -3768,8 +4478,8 @@
         </p:blipFill>
         <p:spPr>
           <a:xfrm>
-            <a:off x="457200" y="1653790"/>
-            <a:ext cx="11247120" cy="3687580"/>
+            <a:off x="1171501" y="1335024"/>
+            <a:ext cx="9818518" cy="3566160"/>
           </a:xfrm>
           <a:prstGeom prst="rect">
             <a:avLst/>
@@ -3778,14 +4488,14 @@
       </p:pic>
       <p:sp>
         <p:nvSpPr>
-          <p:cNvPr id="4" name="Shape 1"/>
+          <p:cNvPr id="5" name="Shape 2"/>
           <p:cNvSpPr/>
           <p:nvPr/>
         </p:nvSpPr>
         <p:spPr>
           <a:xfrm>
-            <a:off x="502920" y="5989320"/>
-            <a:ext cx="50292" cy="566928"/>
+            <a:off x="502920" y="5047488"/>
+            <a:ext cx="50292" cy="731520"/>
           </a:xfrm>
           <a:prstGeom prst="rect">
             <a:avLst/>
@@ -3803,14 +4513,14 @@
       </p:sp>
       <p:sp>
         <p:nvSpPr>
-          <p:cNvPr id="5" name="Text 2"/>
+          <p:cNvPr id="6" name="Text 3"/>
           <p:cNvSpPr txBox="1"/>
           <p:nvPr/>
         </p:nvSpPr>
         <p:spPr>
           <a:xfrm>
-            <a:off x="749808" y="5989320"/>
-            <a:ext cx="10881360" cy="566928"/>
+            <a:off x="749808" y="5047488"/>
+            <a:ext cx="10881360" cy="731520"/>
           </a:xfrm>
           <a:prstGeom prst="rect">
             <a:avLst/>
@@ -3826,14 +4536,50 @@
               <a:buNone/>
             </a:pPr>
             <a:r>
-              <a:rPr lang="en-US" sz="1550" dirty="0">
+              <a:rPr lang="en-US" sz="1700" dirty="0">
                 <a:solidFill>
                   <a:srgbClr val="111111"/>
                 </a:solidFill>
               </a:rPr>
-              <a:t>Transplant asks whether an element can build a site on its own, by dropping it into chromatin that has none. Swap asks whether a site's level is set by the sequence or by the address.</a:t>
-            </a:r>
-            <a:endParaRPr lang="en-US" sz="1550" dirty="0"/>
+              <a:t>Stable AP-1 elements carry enough sequence to build their own accessible site. Dynamic ones do not — they need the neighbourhood they came from. That is "context, not sequence autonomy", shown by moving the sequence.</a:t>
+            </a:r>
+            <a:endParaRPr lang="en-US" sz="1700" dirty="0"/>
+          </a:p>
+        </p:txBody>
+      </p:sp>
+      <p:sp>
+        <p:nvSpPr>
+          <p:cNvPr id="7" name="Text 4"/>
+          <p:cNvSpPr txBox="1"/>
+          <p:nvPr/>
+        </p:nvSpPr>
+        <p:spPr>
+          <a:xfrm>
+            <a:off x="749808" y="5852160"/>
+            <a:ext cx="10881360" cy="603504"/>
+          </a:xfrm>
+          <a:prstGeom prst="rect">
+            <a:avLst/>
+          </a:prstGeom>
+          <a:noFill/>
+          <a:ln/>
+        </p:spPr>
+        <p:txBody>
+          <a:bodyPr wrap="square" lIns="0" tIns="0" rIns="0" bIns="0" rtlCol="0" anchor="t"/>
+          <a:lstStyle/>
+          <a:p>
+            <a:pPr indent="0" marL="0">
+              <a:buNone/>
+            </a:pPr>
+            <a:r>
+              <a:rPr lang="en-US" sz="1300" dirty="0">
+                <a:solidFill>
+                  <a:srgbClr val="595959"/>
+                </a:solidFill>
+              </a:rPr>
+              <a:t>Stable donors also come from more accessible loci. Holding that constant (measured ATAC, 224 donors) a Stable element still gains 1.8× more than a Dynamic one, P = 0.005 — the direction holds, but about a third of the gap above is accessibility rather than sequence.</a:t>
+            </a:r>
+            <a:endParaRPr lang="en-US" sz="1300" dirty="0"/>
           </a:p>
         </p:txBody>
       </p:sp>
@@ -3939,51 +4685,15 @@
                   <a:schemeClr val="tx1"/>
                 </a:solidFill>
               </a:rPr>
-              <a:t>A Stable element opens closed chromatin on its own</a:t>
+              <a:t>Swap: is the level set by the element, or by the place?</a:t>
             </a:r>
             <a:endParaRPr lang="en-US" sz="2800" dirty="0"/>
-          </a:p>
-        </p:txBody>
-      </p:sp>
-      <p:sp>
-        <p:nvSpPr>
-          <p:cNvPr id="3" name="Text 1"/>
-          <p:cNvSpPr txBox="1"/>
-          <p:nvPr/>
-        </p:nvSpPr>
-        <p:spPr>
-          <a:xfrm>
-            <a:off x="502920" y="969264"/>
-            <a:ext cx="11155680" cy="310896"/>
-          </a:xfrm>
-          <a:prstGeom prst="rect">
-            <a:avLst/>
-          </a:prstGeom>
-          <a:noFill/>
-          <a:ln/>
-        </p:spPr>
-        <p:txBody>
-          <a:bodyPr wrap="square" lIns="0" tIns="0" rIns="0" bIns="0" rtlCol="0" anchor="ctr"/>
-          <a:lstStyle/>
-          <a:p>
-            <a:pPr indent="0" marL="0">
-              <a:buNone/>
-            </a:pPr>
-            <a:r>
-              <a:rPr lang="en-US" sz="1250" i="1" dirty="0">
-                <a:solidFill>
-                  <a:srgbClr val="595959"/>
-                </a:solidFill>
-              </a:rPr>
-              <a:t>Each element moved into 20 closed backgrounds and scored against the same sequence shuffled; one point per donor, whole-peak width. Box, median and IQR, whiskers 1.5 × IQR; 50 donors per class — Up = AP-1 gained, Down = AP-1 lost; Mann–Whitney, Stable against the four Dynamic classes pooled.</a:t>
-            </a:r>
-            <a:endParaRPr lang="en-US" sz="1250" dirty="0"/>
           </a:p>
         </p:txBody>
       </p:sp>
       <p:pic>
         <p:nvPicPr>
-          <p:cNvPr id="4" name="Image 0" descr="/Users/z5162865/WongLab/AlphaGenome_Ap1/Analysis/slide_figures/r_fb_transplant.png">    </p:cNvPr>
+          <p:cNvPr id="3" name="Image 0" descr="/Users/z5162865/WongLab/AlphaGenome_Ap1/Analysis/slide_figures/m3_swap.png">    </p:cNvPr>
           <p:cNvPicPr>
             <a:picLocks noChangeAspect="1"/>
           </p:cNvPicPr>
@@ -3997,8 +4707,8 @@
         </p:blipFill>
         <p:spPr>
           <a:xfrm>
-            <a:off x="1171501" y="1335024"/>
-            <a:ext cx="9818518" cy="3566160"/>
+            <a:off x="457200" y="1554896"/>
+            <a:ext cx="11247120" cy="3885369"/>
           </a:xfrm>
           <a:prstGeom prst="rect">
             <a:avLst/>
@@ -4007,14 +4717,14 @@
       </p:pic>
       <p:sp>
         <p:nvSpPr>
-          <p:cNvPr id="5" name="Shape 2"/>
+          <p:cNvPr id="4" name="Shape 1"/>
           <p:cNvSpPr/>
           <p:nvPr/>
         </p:nvSpPr>
         <p:spPr>
           <a:xfrm>
-            <a:off x="502920" y="5047488"/>
-            <a:ext cx="50292" cy="731520"/>
+            <a:off x="502920" y="5989320"/>
+            <a:ext cx="50292" cy="566928"/>
           </a:xfrm>
           <a:prstGeom prst="rect">
             <a:avLst/>
@@ -4032,14 +4742,14 @@
       </p:sp>
       <p:sp>
         <p:nvSpPr>
-          <p:cNvPr id="6" name="Text 3"/>
+          <p:cNvPr id="5" name="Text 2"/>
           <p:cNvSpPr txBox="1"/>
           <p:nvPr/>
         </p:nvSpPr>
         <p:spPr>
           <a:xfrm>
-            <a:off x="749808" y="5047488"/>
-            <a:ext cx="10881360" cy="731520"/>
+            <a:off x="749808" y="5989320"/>
+            <a:ext cx="10881360" cy="566928"/>
           </a:xfrm>
           <a:prstGeom prst="rect">
             <a:avLst/>
@@ -4055,50 +4765,14 @@
               <a:buNone/>
             </a:pPr>
             <a:r>
-              <a:rPr lang="en-US" sz="1700" dirty="0">
+              <a:rPr lang="en-US" sz="1550" dirty="0">
                 <a:solidFill>
                   <a:srgbClr val="111111"/>
                 </a:solidFill>
               </a:rPr>
-              <a:t>Stable AP-1 elements carry enough sequence to build their own accessible site. Dynamic ones do not — they need the neighbourhood they came from. That is "context, not sequence autonomy", shown by moving the sequence.</a:t>
-            </a:r>
-            <a:endParaRPr lang="en-US" sz="1700" dirty="0"/>
-          </a:p>
-        </p:txBody>
-      </p:sp>
-      <p:sp>
-        <p:nvSpPr>
-          <p:cNvPr id="7" name="Text 4"/>
-          <p:cNvSpPr txBox="1"/>
-          <p:nvPr/>
-        </p:nvSpPr>
-        <p:spPr>
-          <a:xfrm>
-            <a:off x="749808" y="5852160"/>
-            <a:ext cx="10881360" cy="603504"/>
-          </a:xfrm>
-          <a:prstGeom prst="rect">
-            <a:avLst/>
-          </a:prstGeom>
-          <a:noFill/>
-          <a:ln/>
-        </p:spPr>
-        <p:txBody>
-          <a:bodyPr wrap="square" lIns="0" tIns="0" rIns="0" bIns="0" rtlCol="0" anchor="t"/>
-          <a:lstStyle/>
-          <a:p>
-            <a:pPr indent="0" marL="0">
-              <a:buNone/>
-            </a:pPr>
-            <a:r>
-              <a:rPr lang="en-US" sz="1300" dirty="0">
-                <a:solidFill>
-                  <a:srgbClr val="595959"/>
-                </a:solidFill>
-              </a:rPr>
-              <a:t>Stable donors also come from more accessible loci. Holding that constant (measured ATAC, 224 donors) a Stable element still gains 1.8× more than a Dynamic one, P = 0.005 — the direction holds, but about a third of the gap above is accessibility rather than sequence.</a:t>
-            </a:r>
-            <a:endParaRPr lang="en-US" sz="1300" dirty="0"/>
+              <a:t>Write every element into every other element's location and regress the result on both. Whichever term carries more weight is the one that sets a site's accessibility.</a:t>
+            </a:r>
+            <a:endParaRPr lang="en-US" sz="1550" dirty="0"/>
           </a:p>
         </p:txBody>
       </p:sp>
@@ -4433,51 +5107,15 @@
                   <a:schemeClr val="tx1"/>
                 </a:solidFill>
               </a:rPr>
-              <a:t>The sites that lose AP-1 let go of it — whether with age or exercise</a:t>
+              <a:t>Shuffling one motif at a time, inside the site</a:t>
             </a:r>
             <a:endParaRPr lang="en-US" sz="2800" dirty="0"/>
-          </a:p>
-        </p:txBody>
-      </p:sp>
-      <p:sp>
-        <p:nvSpPr>
-          <p:cNvPr id="3" name="Text 1"/>
-          <p:cNvSpPr txBox="1"/>
-          <p:nvPr/>
-        </p:nvSpPr>
-        <p:spPr>
-          <a:xfrm>
-            <a:off x="502920" y="969264"/>
-            <a:ext cx="11155680" cy="310896"/>
-          </a:xfrm>
-          <a:prstGeom prst="rect">
-            <a:avLst/>
-          </a:prstGeom>
-          <a:noFill/>
-          <a:ln/>
-        </p:spPr>
-        <p:txBody>
-          <a:bodyPr wrap="square" lIns="0" tIns="0" rIns="0" bIns="0" rtlCol="0" anchor="ctr"/>
-          <a:lstStyle/>
-          <a:p>
-            <a:pPr indent="0" marL="0">
-              <a:buNone/>
-            </a:pPr>
-            <a:r>
-              <a:rPr lang="en-US" sz="1250" i="1" dirty="0">
-                <a:solidFill>
-                  <a:srgbClr val="595959"/>
-                </a:solidFill>
-              </a:rPr>
-              <a:t>The site's own AP-1 motif and each partner motif shuffled separately inside the same window; partners net of a width- and distance-matched footprint-free control. Box, median and IQR, whiskers 5th–95th centile, notch a 95% interval on the median. Classes as given: Up = AP-1 gained, Down = AP-1 lost.</a:t>
-            </a:r>
-            <a:endParaRPr lang="en-US" sz="1250" dirty="0"/>
           </a:p>
         </p:txBody>
       </p:sp>
       <p:pic>
         <p:nvPicPr>
-          <p:cNvPr id="4" name="Image 0" descr="/Users/z5162865/WongLab/AlphaGenome_Ap1/Analysis/slide_figures/r_fb_specificity.png">    </p:cNvPr>
+          <p:cNvPr id="3" name="Image 0" descr="/Users/z5162865/WongLab/AlphaGenome_Ap1/Analysis/slide_figures/m4_shuffle.png">    </p:cNvPr>
           <p:cNvPicPr>
             <a:picLocks noChangeAspect="1"/>
           </p:cNvPicPr>
@@ -4491,8 +5129,8 @@
         </p:blipFill>
         <p:spPr>
           <a:xfrm>
-            <a:off x="1005840" y="1384808"/>
-            <a:ext cx="10149840" cy="3759200"/>
+            <a:off x="457200" y="1575345"/>
+            <a:ext cx="11247120" cy="3844470"/>
           </a:xfrm>
           <a:prstGeom prst="rect">
             <a:avLst/>
@@ -4501,14 +5139,14 @@
       </p:pic>
       <p:sp>
         <p:nvSpPr>
-          <p:cNvPr id="5" name="Shape 2"/>
+          <p:cNvPr id="4" name="Shape 1"/>
           <p:cNvSpPr/>
           <p:nvPr/>
         </p:nvSpPr>
         <p:spPr>
           <a:xfrm>
-            <a:off x="502920" y="5303520"/>
-            <a:ext cx="50292" cy="868680"/>
+            <a:off x="502920" y="5989320"/>
+            <a:ext cx="50292" cy="566928"/>
           </a:xfrm>
           <a:prstGeom prst="rect">
             <a:avLst/>
@@ -4526,14 +5164,14 @@
       </p:sp>
       <p:sp>
         <p:nvSpPr>
-          <p:cNvPr id="6" name="Text 3"/>
+          <p:cNvPr id="5" name="Text 2"/>
           <p:cNvSpPr txBox="1"/>
           <p:nvPr/>
         </p:nvSpPr>
         <p:spPr>
           <a:xfrm>
-            <a:off x="749808" y="5303520"/>
-            <a:ext cx="10881360" cy="868680"/>
+            <a:off x="749808" y="5989320"/>
+            <a:ext cx="10881360" cy="566928"/>
           </a:xfrm>
           <a:prstGeom prst="rect">
             <a:avLst/>
@@ -4549,14 +5187,14 @@
               <a:buNone/>
             </a:pPr>
             <a:r>
-              <a:rPr lang="en-US" sz="1700" dirty="0">
+              <a:rPr lang="en-US" sz="1550" dirty="0">
                 <a:solidFill>
                   <a:srgbClr val="111111"/>
                 </a:solidFill>
               </a:rPr>
-              <a:t>It is the direction that matters, not the stimulus. Both losing classes depend less on their own AP-1 motif — Age Down by 36%, Exercise Down by 21% — while both gaining classes are indistinguishable from Stable. No class differs at its partner motifs.</a:t>
-            </a:r>
-            <a:endParaRPr lang="en-US" sz="1700" dirty="0"/>
+              <a:t>Each partner motif is scored against a footprint-free window of the same width at the mirrored distance, so the two differ only in whether a motif was there. Everything stays inside one site.</a:t>
+            </a:r>
+            <a:endParaRPr lang="en-US" sz="1550" dirty="0"/>
           </a:p>
         </p:txBody>
       </p:sp>
@@ -4662,7 +5300,7 @@
                   <a:schemeClr val="tx1"/>
                 </a:solidFill>
               </a:rPr>
-              <a:t>Where the dependence sits: on the motif, and more so if Stable</a:t>
+              <a:t>The sites that lose AP-1 let go of it — whether with age or exercise</a:t>
             </a:r>
             <a:endParaRPr lang="en-US" sz="2800" dirty="0"/>
           </a:p>
@@ -4698,7 +5336,7 @@
                   <a:srgbClr val="595959"/>
                 </a:solidFill>
               </a:rPr>
-              <a:t>Each 10 bp tile replaced in turn; each site's own noise floor removed, then normalised to its own total, so the curve is where the dependence sits, not how much there is. Median per site, band a bootstrap 95% CI; Mann–Whitney per position, BH-FDR across the 60. Cropped to ±150 bp.</a:t>
+              <a:t>The site's own AP-1 motif and each partner motif shuffled separately inside the same window; partners net of a width- and distance-matched footprint-free control. Box, median and IQR, whiskers 5th–95th centile, notch a 95% interval on the median. Classes as given: Up = AP-1 gained, Down = AP-1 lost.</a:t>
             </a:r>
             <a:endParaRPr lang="en-US" sz="1250" dirty="0"/>
           </a:p>
@@ -4706,7 +5344,7 @@
       </p:sp>
       <p:pic>
         <p:nvPicPr>
-          <p:cNvPr id="4" name="Image 0" descr="/Users/z5162865/WongLab/AlphaGenome_Ap1/Analysis/slide_figures/r_fb_density.png">    </p:cNvPr>
+          <p:cNvPr id="4" name="Image 0" descr="/Users/z5162865/WongLab/AlphaGenome_Ap1/Analysis/slide_figures/r_fb_specificity.png">    </p:cNvPr>
           <p:cNvPicPr>
             <a:picLocks noChangeAspect="1"/>
           </p:cNvPicPr>
@@ -4720,8 +5358,8 @@
         </p:blipFill>
         <p:spPr>
           <a:xfrm>
-            <a:off x="1115221" y="1335024"/>
-            <a:ext cx="9931078" cy="3566160"/>
+            <a:off x="1005840" y="1384808"/>
+            <a:ext cx="10149840" cy="3759200"/>
           </a:xfrm>
           <a:prstGeom prst="rect">
             <a:avLst/>
@@ -4736,8 +5374,8 @@
         </p:nvSpPr>
         <p:spPr>
           <a:xfrm>
-            <a:off x="502920" y="5047488"/>
-            <a:ext cx="50292" cy="731520"/>
+            <a:off x="502920" y="5303520"/>
+            <a:ext cx="50292" cy="868680"/>
           </a:xfrm>
           <a:prstGeom prst="rect">
             <a:avLst/>
@@ -4761,8 +5399,8 @@
         </p:nvSpPr>
         <p:spPr>
           <a:xfrm>
-            <a:off x="749808" y="5047488"/>
-            <a:ext cx="10881360" cy="731520"/>
+            <a:off x="749808" y="5303520"/>
+            <a:ext cx="10881360" cy="868680"/>
           </a:xfrm>
           <a:prstGeom prst="rect">
             <a:avLst/>
@@ -4783,45 +5421,9 @@
                   <a:srgbClr val="111111"/>
                 </a:solidFill>
               </a:rPr>
-              <a:t>A spike on the AP-1 core sitting on a shallow shoulder that reaches ±100 bp — and the model was never told where the motif was. The spike is taller for Stable sites, and the two tiles covering the core are the only positions in the whole window where the classes differ at all.</a:t>
+              <a:t>It is the direction that matters, not the stimulus. Both losing classes depend less on their own AP-1 motif — Age Down by 36%, Exercise Down by 21% — while both gaining classes are indistinguishable from Stable. No class differs at its partner motifs.</a:t>
             </a:r>
             <a:endParaRPr lang="en-US" sz="1700" dirty="0"/>
-          </a:p>
-        </p:txBody>
-      </p:sp>
-      <p:sp>
-        <p:nvSpPr>
-          <p:cNvPr id="7" name="Text 4"/>
-          <p:cNvSpPr txBox="1"/>
-          <p:nvPr/>
-        </p:nvSpPr>
-        <p:spPr>
-          <a:xfrm>
-            <a:off x="749808" y="5852160"/>
-            <a:ext cx="10881360" cy="603504"/>
-          </a:xfrm>
-          <a:prstGeom prst="rect">
-            <a:avLst/>
-          </a:prstGeom>
-          <a:noFill/>
-          <a:ln/>
-        </p:spPr>
-        <p:txBody>
-          <a:bodyPr wrap="square" lIns="0" tIns="0" rIns="0" bIns="0" rtlCol="0" anchor="t"/>
-          <a:lstStyle/>
-          <a:p>
-            <a:pPr indent="0" marL="0">
-              <a:buNone/>
-            </a:pPr>
-            <a:r>
-              <a:rPr lang="en-US" sz="1300" dirty="0">
-                <a:solidFill>
-                  <a:srgbClr val="595959"/>
-                </a:solidFill>
-              </a:rPr>
-              <a:t>Holding accessibility constant the gap halves but holds: 33.1% vs 31.3% of importance within ±25 bp, P = 0.006 over 860 matched pairs. The older ratio version of this measure did not survive that check (P = 0.11); this one does, because the noise floor is removed per site first.</a:t>
-            </a:r>
-            <a:endParaRPr lang="en-US" sz="1300" dirty="0"/>
           </a:p>
         </p:txBody>
       </p:sp>
@@ -4927,51 +5529,15 @@
                   <a:schemeClr val="tx1"/>
                 </a:solidFill>
               </a:rPr>
-              <a:t>Dynamic sites hand more of the load to the partner motifs</a:t>
+              <a:t>Scanning the whole window, tile by tile and base by base</a:t>
             </a:r>
             <a:endParaRPr lang="en-US" sz="2800" dirty="0"/>
-          </a:p>
-        </p:txBody>
-      </p:sp>
-      <p:sp>
-        <p:nvSpPr>
-          <p:cNvPr id="3" name="Text 1"/>
-          <p:cNvSpPr txBox="1"/>
-          <p:nvPr/>
-        </p:nvSpPr>
-        <p:spPr>
-          <a:xfrm>
-            <a:off x="502920" y="969264"/>
-            <a:ext cx="11155680" cy="310896"/>
-          </a:xfrm>
-          <a:prstGeom prst="rect">
-            <a:avLst/>
-          </a:prstGeom>
-          <a:noFill/>
-          <a:ln/>
-        </p:spPr>
-        <p:txBody>
-          <a:bodyPr wrap="square" lIns="0" tIns="0" rIns="0" bIns="0" rtlCol="0" anchor="ctr"/>
-          <a:lstStyle/>
-          <a:p>
-            <a:pPr indent="0" marL="0">
-              <a:buNone/>
-            </a:pPr>
-            <a:r>
-              <a:rPr lang="en-US" sz="1250" i="1" dirty="0">
-                <a:solidFill>
-                  <a:srgbClr val="595959"/>
-                </a:solidFill>
-              </a:rPr>
-              <a:t>Per site: |own AP-1| / (|own AP-1| + |partner motifs|), the share of its motif dependence that sits inside the AP-1 motif rather than outside it. Both terms are AlphaGenome shuffle effects measured inside the same window, so accessibility cannot drive the comparison. Median per site; error bar, bootstrap 95% CI; Mann–Whitney.</a:t>
-            </a:r>
-            <a:endParaRPr lang="en-US" sz="1250" dirty="0"/>
           </a:p>
         </p:txBody>
       </p:sp>
       <p:pic>
         <p:nvPicPr>
-          <p:cNvPr id="4" name="Image 0" descr="/Users/z5162865/WongLab/AlphaGenome_Ap1/Analysis/slide_figures/r_fb_share.png">    </p:cNvPr>
+          <p:cNvPr id="3" name="Image 0" descr="/Users/z5162865/WongLab/AlphaGenome_Ap1/Analysis/slide_figures/m5_scan.png">    </p:cNvPr>
           <p:cNvPicPr>
             <a:picLocks noChangeAspect="1"/>
           </p:cNvPicPr>
@@ -4985,8 +5551,8 @@
         </p:blipFill>
         <p:spPr>
           <a:xfrm>
-            <a:off x="1414343" y="1335024"/>
-            <a:ext cx="9332834" cy="3858768"/>
+            <a:off x="457200" y="1575345"/>
+            <a:ext cx="11247120" cy="3844470"/>
           </a:xfrm>
           <a:prstGeom prst="rect">
             <a:avLst/>
@@ -4995,14 +5561,14 @@
       </p:pic>
       <p:sp>
         <p:nvSpPr>
-          <p:cNvPr id="5" name="Shape 2"/>
+          <p:cNvPr id="4" name="Shape 1"/>
           <p:cNvSpPr/>
           <p:nvPr/>
         </p:nvSpPr>
         <p:spPr>
           <a:xfrm>
-            <a:off x="502920" y="5303520"/>
-            <a:ext cx="50292" cy="868680"/>
+            <a:off x="502920" y="5989320"/>
+            <a:ext cx="50292" cy="566928"/>
           </a:xfrm>
           <a:prstGeom prst="rect">
             <a:avLst/>
@@ -5020,14 +5586,14 @@
       </p:sp>
       <p:sp>
         <p:nvSpPr>
-          <p:cNvPr id="6" name="Text 3"/>
+          <p:cNvPr id="5" name="Text 2"/>
           <p:cNvSpPr txBox="1"/>
           <p:nvPr/>
         </p:nvSpPr>
         <p:spPr>
           <a:xfrm>
-            <a:off x="749808" y="5303520"/>
-            <a:ext cx="10881360" cy="868680"/>
+            <a:off x="749808" y="5989320"/>
+            <a:ext cx="10881360" cy="566928"/>
           </a:xfrm>
           <a:prstGeom prst="rect">
             <a:avLst/>
@@ -5043,14 +5609,14 @@
               <a:buNone/>
             </a:pPr>
             <a:r>
-              <a:rPr lang="en-US" sz="1700" dirty="0">
+              <a:rPr lang="en-US" sz="1550" dirty="0">
                 <a:solidFill>
                   <a:srgbClr val="111111"/>
                 </a:solidFill>
               </a:rPr>
-              <a:t>Outside the motif is where every class differs: a Stable site leaves 20% of its motif dependence to partners, each of the four Dynamic classes 25–27% — about a third more — and all four sit on the same side, gaining and losing alike. AP-1 still leads everywhere; it just carries less of the load.</a:t>
-            </a:r>
-            <a:endParaRPr lang="en-US" sz="1700" dirty="0"/>
+              <a:t>Rather than choosing a region to destroy, replace every 10 bp tile across 600 bp in turn — and then every single base across the middle 61 — and ask where the cost lands.</a:t>
+            </a:r>
+            <a:endParaRPr lang="en-US" sz="1550" dirty="0"/>
           </a:p>
         </p:txBody>
       </p:sp>

--- a/Analysis/AP1_fibroblast_lab_meeting.pptx
+++ b/Analysis/AP1_fibroblast_lab_meeting.pptx
@@ -3186,7 +3186,7 @@
       </p:sp>
       <p:pic>
         <p:nvPicPr>
-          <p:cNvPr id="3" name="Image 0" descr="/Users/z5162865/WongLab/AlphaGenome_Ap1/Analysis/slide_figures/m6_titration.png">    </p:cNvPr>
+          <p:cNvPr id="3" name="Image 0" descr="/Users/z5162865/WongLab/AlphaGenome_Ap1/Analysis/slide_figures/d6_titration.png">    </p:cNvPr>
           <p:cNvPicPr>
             <a:picLocks noChangeAspect="1"/>
           </p:cNvPicPr>
@@ -3200,8 +3200,8 @@
         </p:blipFill>
         <p:spPr>
           <a:xfrm>
-            <a:off x="996791" y="1097280"/>
-            <a:ext cx="10167938" cy="4800600"/>
+            <a:off x="457200" y="1186808"/>
+            <a:ext cx="11247120" cy="4621544"/>
           </a:xfrm>
           <a:prstGeom prst="rect">
             <a:avLst/>
@@ -4042,7 +4042,7 @@
       </p:sp>
       <p:pic>
         <p:nvPicPr>
-          <p:cNvPr id="3" name="Image 0" descr="/Users/z5162865/WongLab/AlphaGenome_Ap1/Analysis/slide_figures/m1_pipeline.png">    </p:cNvPr>
+          <p:cNvPr id="3" name="Image 0" descr="/Users/z5162865/WongLab/AlphaGenome_Ap1/Analysis/slide_figures/d1_pipeline.png">    </p:cNvPr>
           <p:cNvPicPr>
             <a:picLocks noChangeAspect="1"/>
           </p:cNvPicPr>
@@ -4056,8 +4056,8 @@
         </p:blipFill>
         <p:spPr>
           <a:xfrm>
-            <a:off x="457200" y="1259403"/>
-            <a:ext cx="11247120" cy="4476354"/>
+            <a:off x="457200" y="1769613"/>
+            <a:ext cx="11247120" cy="3455933"/>
           </a:xfrm>
           <a:prstGeom prst="rect">
             <a:avLst/>
@@ -4235,7 +4235,7 @@
       </p:sp>
       <p:pic>
         <p:nvPicPr>
-          <p:cNvPr id="3" name="Image 0" descr="/Users/z5162865/WongLab/AlphaGenome_Ap1/Analysis/slide_figures/m2_transplant.png">    </p:cNvPr>
+          <p:cNvPr id="3" name="Image 0" descr="/Users/z5162865/WongLab/AlphaGenome_Ap1/Analysis/slide_figures/d2_transplant.png">    </p:cNvPr>
           <p:cNvPicPr>
             <a:picLocks noChangeAspect="1"/>
           </p:cNvPicPr>
@@ -4693,7 +4693,7 @@
       </p:sp>
       <p:pic>
         <p:nvPicPr>
-          <p:cNvPr id="3" name="Image 0" descr="/Users/z5162865/WongLab/AlphaGenome_Ap1/Analysis/slide_figures/m3_swap.png">    </p:cNvPr>
+          <p:cNvPr id="3" name="Image 0" descr="/Users/z5162865/WongLab/AlphaGenome_Ap1/Analysis/slide_figures/d3_swap.png">    </p:cNvPr>
           <p:cNvPicPr>
             <a:picLocks noChangeAspect="1"/>
           </p:cNvPicPr>
@@ -4707,8 +4707,8 @@
         </p:blipFill>
         <p:spPr>
           <a:xfrm>
-            <a:off x="457200" y="1554896"/>
-            <a:ext cx="11247120" cy="3885369"/>
+            <a:off x="457200" y="1667367"/>
+            <a:ext cx="11247120" cy="3660426"/>
           </a:xfrm>
           <a:prstGeom prst="rect">
             <a:avLst/>
@@ -5115,7 +5115,7 @@
       </p:sp>
       <p:pic>
         <p:nvPicPr>
-          <p:cNvPr id="3" name="Image 0" descr="/Users/z5162865/WongLab/AlphaGenome_Ap1/Analysis/slide_figures/m4_shuffle.png">    </p:cNvPr>
+          <p:cNvPr id="3" name="Image 0" descr="/Users/z5162865/WongLab/AlphaGenome_Ap1/Analysis/slide_figures/d4_shuffle.png">    </p:cNvPr>
           <p:cNvPicPr>
             <a:picLocks noChangeAspect="1"/>
           </p:cNvPicPr>
@@ -5129,8 +5129,8 @@
         </p:blipFill>
         <p:spPr>
           <a:xfrm>
-            <a:off x="457200" y="1575345"/>
-            <a:ext cx="11247120" cy="3844470"/>
+            <a:off x="457200" y="1340178"/>
+            <a:ext cx="11247120" cy="4314804"/>
           </a:xfrm>
           <a:prstGeom prst="rect">
             <a:avLst/>
@@ -5537,7 +5537,7 @@
       </p:sp>
       <p:pic>
         <p:nvPicPr>
-          <p:cNvPr id="3" name="Image 0" descr="/Users/z5162865/WongLab/AlphaGenome_Ap1/Analysis/slide_figures/m5_scan.png">    </p:cNvPr>
+          <p:cNvPr id="3" name="Image 0" descr="/Users/z5162865/WongLab/AlphaGenome_Ap1/Analysis/slide_figures/d5_scan.png">    </p:cNvPr>
           <p:cNvPicPr>
             <a:picLocks noChangeAspect="1"/>
           </p:cNvPicPr>
@@ -5551,8 +5551,8 @@
         </p:blipFill>
         <p:spPr>
           <a:xfrm>
-            <a:off x="457200" y="1575345"/>
-            <a:ext cx="11247120" cy="3844470"/>
+            <a:off x="457200" y="1227707"/>
+            <a:ext cx="11247120" cy="4539747"/>
           </a:xfrm>
           <a:prstGeom prst="rect">
             <a:avLst/>

--- a/Analysis/AP1_fibroblast_lab_meeting.pptx
+++ b/Analysis/AP1_fibroblast_lab_meeting.pptx
@@ -19,9 +19,12 @@
     <p:sldId id="267" r:id="rId13"/>
     <p:sldId id="268" r:id="rId14"/>
     <p:sldId id="269" r:id="rId15"/>
+    <p:sldId id="270" r:id="rId16"/>
+    <p:sldId id="271" r:id="rId17"/>
+    <p:sldId id="272" r:id="rId18"/>
   </p:sldIdLst>
   <p:notesMasterIdLst>
-    <p:notesMasterId r:id="rId16"/>
+    <p:notesMasterId r:id="rId19"/>
   </p:notesMasterIdLst>
   <p:sldSz cx="12192000" cy="6858000"/>
   <p:notesSz cx="6858000" cy="12192000"/>
@@ -700,12 +703,14 @@
           <a:p>
             <a:r>
               <a:rPr lang="en-US" dirty="0"/>
-              <a:t>Stable 0.804 (n=1179) vs Dynamic pooled 0.745 (n=1161), p = 7.2e-11. By class: Age Up 0.755 (p = 7.9e-5), Age Down 0.734 (p = 4.1e-6), Exercise Up 0.726 (p = 1.9e-5), Exercise Down 0.732 (p = 8.7e-6).
-Worth contrasting with the previous slide out loud: there, only the LOSING classes moved. Here all four move, including both gaining classes. So the absolute dependence on AP-1 and the share of the total it carries are two different statements, and only the second separates every Dynamic class from Stable.
-The 40%: partner share 19.6% for Stable against 24.5 / 26.6 / 27.3% for the Dynamic classes, so 27.3/19.6 = 1.39x. It is the same number as 80 vs 73, read from the other end - say it whichever way, but do not say both as if they were two results.
-Detection check, in case it is asked: footprint calling needs signal, so Stable sites carry more detected partners (5.89 vs 5.01 per site, p = 2e-82). Restricting to the 1,808 sites that hit the cap of 6 detected partners, the gap is unchanged: 0.806 vs 0.736, p = 2.1e-13. Not a detection artefact.
-Note this is a DIFFERENT statement from slide 5. There, only the AP-1-losing class drops in absolute AP-1 dependence. Here, all Dynamic classes are modestly less AP-1-centric in relative terms.
-The equivalent tile-scan measure (motif share vs a 10-50 bp collar) does NOT survive accessibility matching (p = 0.11); the collar is mostly noise at low-accessibility sites. This version is better powered because it only scores footprinted motifs.</a:t>
+              <a:t>Stable vs Dynamic, cumulative share within ±x bp:
+  ±20 bp  33.8% / 30.7%   (the previous slide's number)
+  ±40 bp  49.0% / 44.5%
+  ±60 bp  62.8% / 57.5%   &lt;- widest gap, 5.3 points
+  ±100 bp 80.0% / 75.7%
+Half-maximum radius by linear interpolation: Stable 41.4 bp, Dynamic 48.1 bp.
+Why this view: the two profiles on the previous slide differ by about a percentage point per position, which is invisible when both are drawn at full height. Integrating makes a real difference legible without inflating it - the quantity at every radius is still a share of the site's own total.
+The honest size is unchanged from the previous slide: about 1.5 points once accessibility is matched, on a base of a third. Do not let the separation in this plot be heard as two different architectures.</a:t>
             </a:r>
             <a:endParaRPr lang="en-US" dirty="0"/>
           </a:p>
@@ -793,12 +798,9 @@
           <a:p>
             <a:r>
               <a:rPr lang="en-US" dirty="0"/>
-              <a:t>This is where the next slide's numbers come from. 2,359 sites; 860 accessibility-matched pairs at caliper 0.1 log10.
-The ladder (1 to 7 bases of the core) is what gives a dose-response rather than a single on/off contrast - it is how we can say the Dynamic curve is SHALLOWER rather than just lower.
-Two controls worth naming if asked:
-  - the second copy is paired with a scrambled insert of the same width at the same distance, so the comparison is 'a motif there' against 'that much sequence there'
-  - moving the motif is paired with moving it to a spot that has no footprint
-The reverse complement is the sanity check on the head: a TRE is a near-palindrome, only 5 of the 11 bases actually move, and the predicted cost is -0.03 log2 (p = 0.89). If that had come out large, nothing else here would be trustworthy.</a:t>
+              <a:t>Two of 60 positions reach FDR &lt; 0.05 and they are the two core tiles: -10 bp (+0.94 points, FDR 0.0008) and 0 bp (+0.84 points, FDR 0.0007). The next largest difference anywhere is +0.31 points at -20 bp, FDR 0.81; every other position FDR &gt; 0.9.
+Use this one if the point you want to land is WHERE the classes differ rather than BY HOW MUCH. It is the most conservative of the three - the whole class difference is two points above a flat line, and the plot says so.
+A difference plot hides the shared signal: both classes still put a large spike on the motif, and that spike is the main result of the previous slide. Say it out loud if you show this instead.</a:t>
             </a:r>
             <a:endParaRPr lang="en-US" dirty="0"/>
           </a:p>
@@ -886,8 +888,15 @@
           <a:p>
             <a:r>
               <a:rPr lang="en-US" dirty="0"/>
-              <a:t>From the fibroblast titration, 2,359 sites, 860 accessibility-matched pairs (caliper 0.1 log10). This slide is the argument for why the matched analysis is worth doing - two of the five largest raw class differences in the titration were entirely explained by the accessibility gap.
-Age Down is the outlier again, consistently with the other arms: one base of the core changed -0.62 vs Stable -0.83; motif gone -0.72 vs -1.07.</a:t>
+              <a:t>Share within ±25 bp, median per site, with BH-adjusted P against Stable:
+  Stable         33.8%  (n=1179, reference)
+  Age Up         31.3%  (n=613,  FDR 0.0038)
+  Age Down       28.3%  (n=212,  FDR 0.00045)
+  Exercise Up    31.5%  (n=240,  FDR 0.0087)
+  Exercise Down  28.6%  (n=115,  FDR 0.0084)
+This is the only one of the three alternatives that shows something the pooled comparison cannot. It is also the one that connects to slide 8: there, the LOSING classes let go of the motif in absolute terms; here, the same two classes are the ones whose dependence is least concentrated on it. Same partition, different measurement.
+What it is NOT: this is not accessibility. The matched analysis on the previous slide (860 pairs, p = 0.006) holds for the pooled contrast; the per-class split has not been matched, because the smaller classes do not support it. If pushed, that is the honest answer - the pooled difference survives matching, the ordering within Dynamic is unmatched and n=115 at the bottom.
+A site dynamic with both age and exercise is counted under its age class, as everywhere else in the deck.</a:t>
             </a:r>
             <a:endParaRPr lang="en-US" dirty="0"/>
           </a:p>
@@ -975,8 +984,12 @@
           <a:p>
             <a:r>
               <a:rPr lang="en-US" dirty="0"/>
-              <a:t>If the flank question comes up: the MPRA destroys the flanks of a 170 bp fragment on a plasmid and reads transcription; we move an intact ~0.8 kb element into closed chromatin and read accessibility. There is no chromatin to open in the MPRA. The honest shared conclusion is that neither assay finds much class information in 170 bp.
-Everything here is predicted accessibility from a model fine-tuned on our own fibroblast ATAC, not a measurement, and not the MPRA-trained probe used in the manuscript.</a:t>
+              <a:t>Stable 0.804 (n=1179) vs Dynamic pooled 0.745 (n=1161), p = 7.2e-11. By class: Age Up 0.755 (p = 7.9e-5), Age Down 0.734 (p = 4.1e-6), Exercise Up 0.726 (p = 1.9e-5), Exercise Down 0.732 (p = 8.7e-6).
+Worth contrasting with the previous slide out loud: there, only the LOSING classes moved. Here all four move, including both gaining classes. So the absolute dependence on AP-1 and the share of the total it carries are two different statements, and only the second separates every Dynamic class from Stable.
+The 40%: partner share 19.6% for Stable against 24.5 / 26.6 / 27.3% for the Dynamic classes, so 27.3/19.6 = 1.39x. It is the same number as 80 vs 73, read from the other end - say it whichever way, but do not say both as if they were two results.
+Detection check, in case it is asked: footprint calling needs signal, so Stable sites carry more detected partners (5.89 vs 5.01 per site, p = 2e-82). Restricting to the 1,808 sites that hit the cap of 6 detected partners, the gap is unchanged: 0.806 vs 0.736, p = 2.1e-13. Not a detection artefact.
+Note this is a DIFFERENT statement from slide 5. There, only the AP-1-losing class drops in absolute AP-1 dependence. Here, all Dynamic classes are modestly less AP-1-centric in relative terms.
+The equivalent tile-scan measure (motif share vs a 10-50 bp collar) does NOT survive accessibility matching (p = 0.11); the collar is mostly noise at low-accessibility sites. This version is better powered because it only scores footprinted motifs.</a:t>
             </a:r>
             <a:endParaRPr lang="en-US" dirty="0"/>
           </a:p>
@@ -1000,6 +1013,277 @@
             <a:fld id="{F7021451-1387-4CA6-816F-3879F97B5CBC}" type="slidenum">
               <a:rPr lang="en-US"/>
               <a:t>14</a:t>
+            </a:fld>
+            <a:endParaRPr lang="en-US"/>
+          </a:p>
+        </p:txBody>
+      </p:sp>
+    </p:spTree>
+    <p:extLst>
+      <p:ext uri="{BB962C8B-B14F-4D97-AF65-F5344CB8AC3E}">
+        <p14:creationId xmlns:p14="http://schemas.microsoft.com/office/powerpoint/2010/main" val="1024086991"/>
+      </p:ext>
+    </p:extLst>
+  </p:cSld>
+  <p:clrMapOvr>
+    <a:masterClrMapping/>
+  </p:clrMapOvr>
+</p:notes>
+</file>
+
+<file path=ppt/notesSlides/notesSlide15.xml><?xml version="1.0" encoding="utf-8"?>
+<p:notes xmlns:a="http://schemas.openxmlformats.org/drawingml/2006/main" xmlns:r="http://schemas.openxmlformats.org/officeDocument/2006/relationships" xmlns:p="http://schemas.openxmlformats.org/presentationml/2006/main">
+  <p:cSld>
+    <p:spTree>
+      <p:nvGrpSpPr>
+        <p:cNvPr id="1" name=""/>
+        <p:cNvGrpSpPr/>
+        <p:nvPr/>
+      </p:nvGrpSpPr>
+      <p:grpSpPr>
+        <a:xfrm>
+          <a:off x="0" y="0"/>
+          <a:ext cx="0" cy="0"/>
+          <a:chOff x="0" y="0"/>
+          <a:chExt cx="0" cy="0"/>
+        </a:xfrm>
+      </p:grpSpPr>
+      <p:sp>
+        <p:nvSpPr>
+          <p:cNvPr id="2" name="Slide Image Placeholder 1"/>
+          <p:cNvSpPr>
+            <a:spLocks noGrp="1" noRot="1" noChangeAspect="1"/>
+          </p:cNvSpPr>
+          <p:nvPr>
+            <p:ph type="sldImg"/>
+          </p:nvPr>
+        </p:nvSpPr>
+        <p:spPr/>
+      </p:sp>
+      <p:sp>
+        <p:nvSpPr>
+          <p:cNvPr id="3" name="Notes Placeholder 2"/>
+          <p:cNvSpPr>
+            <a:spLocks noGrp="1"/>
+          </p:cNvSpPr>
+          <p:nvPr>
+            <p:ph type="body" idx="1"/>
+          </p:nvPr>
+        </p:nvSpPr>
+        <p:spPr/>
+        <p:txBody>
+          <a:bodyPr/>
+          <a:lstStyle/>
+          <a:p>
+            <a:r>
+              <a:rPr lang="en-US" dirty="0"/>
+              <a:t>This is where the next slide's numbers come from. 2,359 sites; 860 accessibility-matched pairs at caliper 0.1 log10.
+The ladder (1 to 7 bases of the core) is what gives a dose-response rather than a single on/off contrast - it is how we can say the Dynamic curve is SHALLOWER rather than just lower.
+Two controls worth naming if asked:
+  - the second copy is paired with a scrambled insert of the same width at the same distance, so the comparison is 'a motif there' against 'that much sequence there'
+  - moving the motif is paired with moving it to a spot that has no footprint
+The reverse complement is the sanity check on the head: a TRE is a near-palindrome, only 5 of the 11 bases actually move, and the predicted cost is -0.03 log2 (p = 0.89). If that had come out large, nothing else here would be trustworthy.</a:t>
+            </a:r>
+            <a:endParaRPr lang="en-US" dirty="0"/>
+          </a:p>
+        </p:txBody>
+      </p:sp>
+      <p:sp>
+        <p:nvSpPr>
+          <p:cNvPr id="4" name="Slide Number Placeholder 3"/>
+          <p:cNvSpPr>
+            <a:spLocks noGrp="1"/>
+          </p:cNvSpPr>
+          <p:nvPr>
+            <p:ph type="sldNum" sz="quarter" idx="10"/>
+          </p:nvPr>
+        </p:nvSpPr>
+        <p:spPr/>
+        <p:txBody>
+          <a:bodyPr/>
+          <a:lstStyle/>
+          <a:p>
+            <a:fld id="{F7021451-1387-4CA6-816F-3879F97B5CBC}" type="slidenum">
+              <a:rPr lang="en-US"/>
+              <a:t>15</a:t>
+            </a:fld>
+            <a:endParaRPr lang="en-US"/>
+          </a:p>
+        </p:txBody>
+      </p:sp>
+    </p:spTree>
+    <p:extLst>
+      <p:ext uri="{BB962C8B-B14F-4D97-AF65-F5344CB8AC3E}">
+        <p14:creationId xmlns:p14="http://schemas.microsoft.com/office/powerpoint/2010/main" val="1024086991"/>
+      </p:ext>
+    </p:extLst>
+  </p:cSld>
+  <p:clrMapOvr>
+    <a:masterClrMapping/>
+  </p:clrMapOvr>
+</p:notes>
+</file>
+
+<file path=ppt/notesSlides/notesSlide16.xml><?xml version="1.0" encoding="utf-8"?>
+<p:notes xmlns:a="http://schemas.openxmlformats.org/drawingml/2006/main" xmlns:r="http://schemas.openxmlformats.org/officeDocument/2006/relationships" xmlns:p="http://schemas.openxmlformats.org/presentationml/2006/main">
+  <p:cSld>
+    <p:spTree>
+      <p:nvGrpSpPr>
+        <p:cNvPr id="1" name=""/>
+        <p:cNvGrpSpPr/>
+        <p:nvPr/>
+      </p:nvGrpSpPr>
+      <p:grpSpPr>
+        <a:xfrm>
+          <a:off x="0" y="0"/>
+          <a:ext cx="0" cy="0"/>
+          <a:chOff x="0" y="0"/>
+          <a:chExt cx="0" cy="0"/>
+        </a:xfrm>
+      </p:grpSpPr>
+      <p:sp>
+        <p:nvSpPr>
+          <p:cNvPr id="2" name="Slide Image Placeholder 1"/>
+          <p:cNvSpPr>
+            <a:spLocks noGrp="1" noRot="1" noChangeAspect="1"/>
+          </p:cNvSpPr>
+          <p:nvPr>
+            <p:ph type="sldImg"/>
+          </p:nvPr>
+        </p:nvSpPr>
+        <p:spPr/>
+      </p:sp>
+      <p:sp>
+        <p:nvSpPr>
+          <p:cNvPr id="3" name="Notes Placeholder 2"/>
+          <p:cNvSpPr>
+            <a:spLocks noGrp="1"/>
+          </p:cNvSpPr>
+          <p:nvPr>
+            <p:ph type="body" idx="1"/>
+          </p:nvPr>
+        </p:nvSpPr>
+        <p:spPr/>
+        <p:txBody>
+          <a:bodyPr/>
+          <a:lstStyle/>
+          <a:p>
+            <a:r>
+              <a:rPr lang="en-US" dirty="0"/>
+              <a:t>From the fibroblast titration, 2,359 sites, 860 accessibility-matched pairs (caliper 0.1 log10). This slide is the argument for why the matched analysis is worth doing - two of the five largest raw class differences in the titration were entirely explained by the accessibility gap.
+Age Down is the outlier again, consistently with the other arms: one base of the core changed -0.62 vs Stable -0.83; motif gone -0.72 vs -1.07.</a:t>
+            </a:r>
+            <a:endParaRPr lang="en-US" dirty="0"/>
+          </a:p>
+        </p:txBody>
+      </p:sp>
+      <p:sp>
+        <p:nvSpPr>
+          <p:cNvPr id="4" name="Slide Number Placeholder 3"/>
+          <p:cNvSpPr>
+            <a:spLocks noGrp="1"/>
+          </p:cNvSpPr>
+          <p:nvPr>
+            <p:ph type="sldNum" sz="quarter" idx="10"/>
+          </p:nvPr>
+        </p:nvSpPr>
+        <p:spPr/>
+        <p:txBody>
+          <a:bodyPr/>
+          <a:lstStyle/>
+          <a:p>
+            <a:fld id="{F7021451-1387-4CA6-816F-3879F97B5CBC}" type="slidenum">
+              <a:rPr lang="en-US"/>
+              <a:t>16</a:t>
+            </a:fld>
+            <a:endParaRPr lang="en-US"/>
+          </a:p>
+        </p:txBody>
+      </p:sp>
+    </p:spTree>
+    <p:extLst>
+      <p:ext uri="{BB962C8B-B14F-4D97-AF65-F5344CB8AC3E}">
+        <p14:creationId xmlns:p14="http://schemas.microsoft.com/office/powerpoint/2010/main" val="1024086991"/>
+      </p:ext>
+    </p:extLst>
+  </p:cSld>
+  <p:clrMapOvr>
+    <a:masterClrMapping/>
+  </p:clrMapOvr>
+</p:notes>
+</file>
+
+<file path=ppt/notesSlides/notesSlide17.xml><?xml version="1.0" encoding="utf-8"?>
+<p:notes xmlns:a="http://schemas.openxmlformats.org/drawingml/2006/main" xmlns:r="http://schemas.openxmlformats.org/officeDocument/2006/relationships" xmlns:p="http://schemas.openxmlformats.org/presentationml/2006/main">
+  <p:cSld>
+    <p:spTree>
+      <p:nvGrpSpPr>
+        <p:cNvPr id="1" name=""/>
+        <p:cNvGrpSpPr/>
+        <p:nvPr/>
+      </p:nvGrpSpPr>
+      <p:grpSpPr>
+        <a:xfrm>
+          <a:off x="0" y="0"/>
+          <a:ext cx="0" cy="0"/>
+          <a:chOff x="0" y="0"/>
+          <a:chExt cx="0" cy="0"/>
+        </a:xfrm>
+      </p:grpSpPr>
+      <p:sp>
+        <p:nvSpPr>
+          <p:cNvPr id="2" name="Slide Image Placeholder 1"/>
+          <p:cNvSpPr>
+            <a:spLocks noGrp="1" noRot="1" noChangeAspect="1"/>
+          </p:cNvSpPr>
+          <p:nvPr>
+            <p:ph type="sldImg"/>
+          </p:nvPr>
+        </p:nvSpPr>
+        <p:spPr/>
+      </p:sp>
+      <p:sp>
+        <p:nvSpPr>
+          <p:cNvPr id="3" name="Notes Placeholder 2"/>
+          <p:cNvSpPr>
+            <a:spLocks noGrp="1"/>
+          </p:cNvSpPr>
+          <p:nvPr>
+            <p:ph type="body" idx="1"/>
+          </p:nvPr>
+        </p:nvSpPr>
+        <p:spPr/>
+        <p:txBody>
+          <a:bodyPr/>
+          <a:lstStyle/>
+          <a:p>
+            <a:r>
+              <a:rPr lang="en-US" dirty="0"/>
+              <a:t>If the flank question comes up: the MPRA destroys the flanks of a 170 bp fragment on a plasmid and reads transcription; we move an intact ~0.8 kb element into closed chromatin and read accessibility. There is no chromatin to open in the MPRA. The honest shared conclusion is that neither assay finds much class information in 170 bp.
+Everything here is predicted accessibility from a model fine-tuned on our own fibroblast ATAC, not a measurement, and not the MPRA-trained probe used in the manuscript.</a:t>
+            </a:r>
+            <a:endParaRPr lang="en-US" dirty="0"/>
+          </a:p>
+        </p:txBody>
+      </p:sp>
+      <p:sp>
+        <p:nvSpPr>
+          <p:cNvPr id="4" name="Slide Number Placeholder 3"/>
+          <p:cNvSpPr>
+            <a:spLocks noGrp="1"/>
+          </p:cNvSpPr>
+          <p:nvPr>
+            <p:ph type="sldNum" sz="quarter" idx="10"/>
+          </p:nvPr>
+        </p:nvSpPr>
+        <p:spPr/>
+        <p:txBody>
+          <a:bodyPr/>
+          <a:lstStyle/>
+          <a:p>
+            <a:fld id="{F7021451-1387-4CA6-816F-3879F97B5CBC}" type="slidenum">
+              <a:rPr lang="en-US"/>
+              <a:t>17</a:t>
             </a:fld>
             <a:endParaRPr lang="en-US"/>
           </a:p>
@@ -2949,7 +3233,7 @@
                   <a:schemeClr val="tx1"/>
                 </a:solidFill>
               </a:rPr>
-              <a:t>Dynamic sites hand more of the load to the partner motifs</a:t>
+              <a:t>Stable sites keep half their dependence within 41 bp, Dynamic 48</a:t>
             </a:r>
             <a:endParaRPr lang="en-US" sz="2800" dirty="0"/>
           </a:p>
@@ -2985,7 +3269,7 @@
                   <a:srgbClr val="595959"/>
                 </a:solidFill>
               </a:rPr>
-              <a:t>Per site: |own AP-1| / (|own AP-1| + |partner motifs|), the share of its motif dependence that sits inside the AP-1 motif rather than outside it. Both terms are AlphaGenome shuffle effects measured inside the same window, so accessibility cannot drive the comparison. Median per site; error bar, bootstrap 95% CI; Mann–Whitney.</a:t>
+              <a:t>ALTERNATIVE VIEW OF THE PREVIOUS SLIDE — same measurement, keep one.  Cumulative share of a site's importance within ±x bp, against x. Median per site, band a bootstrap 95% CI. The value at ±20 bp is the 33.8% / 30.7% quoted on the previous slide, so the two readings cannot disagree.</a:t>
             </a:r>
             <a:endParaRPr lang="en-US" sz="1250" dirty="0"/>
           </a:p>
@@ -2993,7 +3277,7 @@
       </p:sp>
       <p:pic>
         <p:nvPicPr>
-          <p:cNvPr id="4" name="Image 0" descr="/Users/z5162865/WongLab/AlphaGenome_Ap1/Analysis/slide_figures/r_fb_share.png">    </p:cNvPr>
+          <p:cNvPr id="4" name="Image 0" descr="/Users/z5162865/WongLab/AlphaGenome_Ap1/Analysis/slide_figures/r_fb_density_cumulative.png">    </p:cNvPr>
           <p:cNvPicPr>
             <a:picLocks noChangeAspect="1"/>
           </p:cNvPicPr>
@@ -3007,8 +3291,8 @@
         </p:blipFill>
         <p:spPr>
           <a:xfrm>
-            <a:off x="1414343" y="1335024"/>
-            <a:ext cx="9332834" cy="3858768"/>
+            <a:off x="2271453" y="1335024"/>
+            <a:ext cx="7618615" cy="3566160"/>
           </a:xfrm>
           <a:prstGeom prst="rect">
             <a:avLst/>
@@ -3023,8 +3307,8 @@
         </p:nvSpPr>
         <p:spPr>
           <a:xfrm>
-            <a:off x="502920" y="5303520"/>
-            <a:ext cx="50292" cy="868680"/>
+            <a:off x="502920" y="5047488"/>
+            <a:ext cx="50292" cy="731520"/>
           </a:xfrm>
           <a:prstGeom prst="rect">
             <a:avLst/>
@@ -3048,8 +3332,8 @@
         </p:nvSpPr>
         <p:spPr>
           <a:xfrm>
-            <a:off x="749808" y="5303520"/>
-            <a:ext cx="10881360" cy="868680"/>
+            <a:off x="749808" y="5047488"/>
+            <a:ext cx="10881360" cy="731520"/>
           </a:xfrm>
           <a:prstGeom prst="rect">
             <a:avLst/>
@@ -3070,9 +3354,45 @@
                   <a:srgbClr val="111111"/>
                 </a:solidFill>
               </a:rPr>
-              <a:t>Outside the motif is where every class differs: a Stable site leaves 20% of its motif dependence to partners, each of the four Dynamic classes 25–27% — about a third more — and all four sit on the same side, gaining and losing alike. AP-1 still leads everywhere; it just carries less of the load.</a:t>
+              <a:t>Per-position differences of a point each add up: by ±60 bp the two curves are 5.3 points apart. Half of a Stable site's dependence sits within ±41 bp of the motif, against ±48 bp for a Dynamic one — the same result as the previous slide, said as a distance rather than a percentage.</a:t>
             </a:r>
             <a:endParaRPr lang="en-US" sz="1700" dirty="0"/>
+          </a:p>
+        </p:txBody>
+      </p:sp>
+      <p:sp>
+        <p:nvSpPr>
+          <p:cNvPr id="7" name="Text 4"/>
+          <p:cNvSpPr txBox="1"/>
+          <p:nvPr/>
+        </p:nvSpPr>
+        <p:spPr>
+          <a:xfrm>
+            <a:off x="749808" y="5852160"/>
+            <a:ext cx="10881360" cy="603504"/>
+          </a:xfrm>
+          <a:prstGeom prst="rect">
+            <a:avLst/>
+          </a:prstGeom>
+          <a:noFill/>
+          <a:ln/>
+        </p:spPr>
+        <p:txBody>
+          <a:bodyPr wrap="square" lIns="0" tIns="0" rIns="0" bIns="0" rtlCol="0" anchor="t"/>
+          <a:lstStyle/>
+          <a:p>
+            <a:pPr indent="0" marL="0">
+              <a:buNone/>
+            </a:pPr>
+            <a:r>
+              <a:rPr lang="en-US" sz="1300" dirty="0">
+                <a:solidFill>
+                  <a:srgbClr val="595959"/>
+                </a:solidFill>
+              </a:rPr>
+              <a:t>Nothing is rescaled: the axis runs 0 to 100% and both curves end at 1. The half-radii are read off a profile sampled every 10 bp, so quote them as about 40 against about 50 bp until the sliding scan lands.</a:t>
+            </a:r>
+            <a:endParaRPr lang="en-US" sz="1300" dirty="0"/>
           </a:p>
         </p:txBody>
       </p:sp>
@@ -3178,7 +3498,7 @@
                   <a:schemeClr val="tx1"/>
                 </a:solidFill>
               </a:rPr>
-              <a:t>The AP-1 ladder, and the spacing experiments</a:t>
+              <a:t>The classes differ on the motif and nowhere else</a:t>
             </a:r>
             <a:endParaRPr lang="en-US" sz="2800" dirty="0"/>
           </a:p>
@@ -3192,8 +3512,8 @@
         </p:nvSpPr>
         <p:spPr>
           <a:xfrm>
-            <a:off x="644901" y="1679254"/>
-            <a:ext cx="5273594" cy="202831"/>
+            <a:off x="502920" y="969264"/>
+            <a:ext cx="11155680" cy="310896"/>
           </a:xfrm>
           <a:prstGeom prst="rect">
             <a:avLst/>
@@ -3205,1794 +3525,55 @@
           <a:bodyPr wrap="square" lIns="0" tIns="0" rIns="0" bIns="0" rtlCol="0" anchor="ctr"/>
           <a:lstStyle/>
           <a:p>
-            <a:pPr algn="l" indent="0" marL="0">
-              <a:lnSpc>
-                <a:spcPct val="95000"/>
-              </a:lnSpc>
+            <a:pPr indent="0" marL="0">
               <a:buNone/>
             </a:pPr>
             <a:r>
-              <a:rPr lang="en-US" sz="1300" b="1" dirty="0">
-                <a:solidFill>
-                  <a:srgbClr val="15181C"/>
-                </a:solidFill>
-                <a:latin typeface="Arial" pitchFamily="34" charset="0"/>
-                <a:ea typeface="Arial" pitchFamily="34" charset="-122"/>
-                <a:cs typeface="Arial" pitchFamily="34" charset="-120"/>
-              </a:rPr>
-              <a:t>WEAKEN THE MOTIF, ONE BASE AT A TIME</a:t>
-            </a:r>
-            <a:endParaRPr lang="en-US" sz="1300" dirty="0"/>
+              <a:rPr lang="en-US" sz="1250" i="1" dirty="0">
+                <a:solidFill>
+                  <a:srgbClr val="595959"/>
+                </a:solidFill>
+              </a:rPr>
+              <a:t>ALTERNATIVE VIEW OF THE PREVIOUS SLIDE — same measurement, keep one.  Stable minus Dynamic at each position, on its own axis. Band from resampling sites within each class; filled points are FDR &lt; 0.05, Mann–Whitney with BH across the 60 tiles.</a:t>
+            </a:r>
+            <a:endParaRPr lang="en-US" sz="1250" dirty="0"/>
           </a:p>
         </p:txBody>
       </p:sp>
-      <p:sp>
-        <p:nvSpPr>
-          <p:cNvPr id="4" name="Shape 2"/>
+      <p:pic>
+        <p:nvPicPr>
+          <p:cNvPr id="4" name="Image 0" descr="/Users/z5162865/WongLab/AlphaGenome_Ap1/Analysis/slide_figures/r_fb_density_diff.png">    </p:cNvPr>
+          <p:cNvPicPr>
+            <a:picLocks noChangeAspect="1"/>
+          </p:cNvPicPr>
+          <p:nvPr/>
+        </p:nvPicPr>
+        <p:blipFill>
+          <a:blip r:embed="rId1"/>
+          <a:stretch>
+            <a:fillRect/>
+          </a:stretch>
+        </p:blipFill>
+        <p:spPr>
+          <a:xfrm>
+            <a:off x="1762615" y="1335024"/>
+            <a:ext cx="8636290" cy="3858768"/>
+          </a:xfrm>
+          <a:prstGeom prst="rect">
+            <a:avLst/>
+          </a:prstGeom>
+        </p:spPr>
+      </p:pic>
+      <p:sp>
+        <p:nvSpPr>
+          <p:cNvPr id="5" name="Shape 2"/>
           <p:cNvSpPr/>
           <p:nvPr/>
         </p:nvSpPr>
         <p:spPr>
           <a:xfrm>
-            <a:off x="2693490" y="2105198"/>
-            <a:ext cx="4583970" cy="0"/>
-          </a:xfrm>
-          <a:prstGeom prst="line">
-            <a:avLst/>
-          </a:prstGeom>
-          <a:noFill/>
-          <a:ln w="13970">
-            <a:solidFill>
-              <a:srgbClr val="5A6471">
-                <a:alpha val="45000"/>
-              </a:srgbClr>
-            </a:solidFill>
-            <a:prstDash val="solid"/>
-            <a:tailEnd type="triangle"/>
-          </a:ln>
-        </p:spPr>
-      </p:sp>
-      <p:sp>
-        <p:nvSpPr>
-          <p:cNvPr id="5" name="Text 3"/>
-          <p:cNvSpPr txBox="1"/>
-          <p:nvPr/>
-        </p:nvSpPr>
-        <p:spPr>
-          <a:xfrm>
-            <a:off x="3971322" y="1841518"/>
-            <a:ext cx="2028305" cy="202831"/>
-          </a:xfrm>
-          <a:prstGeom prst="rect">
-            <a:avLst/>
-          </a:prstGeom>
-          <a:noFill/>
-          <a:ln/>
-        </p:spPr>
-        <p:txBody>
-          <a:bodyPr wrap="square" lIns="0" tIns="0" rIns="0" bIns="0" rtlCol="0" anchor="ctr"/>
-          <a:lstStyle/>
-          <a:p>
-            <a:pPr algn="ctr" indent="0" marL="0">
-              <a:lnSpc>
-                <a:spcPct val="95000"/>
-              </a:lnSpc>
-              <a:buNone/>
-            </a:pPr>
-            <a:r>
-              <a:rPr lang="en-US" sz="1100" dirty="0">
-                <a:solidFill>
-                  <a:srgbClr val="5A6471"/>
-                </a:solidFill>
-                <a:latin typeface="Arial" pitchFamily="34" charset="0"/>
-                <a:ea typeface="Arial" pitchFamily="34" charset="-122"/>
-                <a:cs typeface="Arial" pitchFamily="34" charset="-120"/>
-              </a:rPr>
-              <a:t>weaker grip</a:t>
-            </a:r>
-            <a:endParaRPr lang="en-US" sz="1100" dirty="0"/>
-          </a:p>
-        </p:txBody>
-      </p:sp>
-      <p:sp>
-        <p:nvSpPr>
-          <p:cNvPr id="6" name="Shape 4"/>
-          <p:cNvSpPr/>
-          <p:nvPr/>
-        </p:nvSpPr>
-        <p:spPr>
-          <a:xfrm>
-            <a:off x="989713" y="2652841"/>
-            <a:ext cx="1541512" cy="0"/>
-          </a:xfrm>
-          <a:prstGeom prst="line">
-            <a:avLst/>
-          </a:prstGeom>
-          <a:noFill/>
-          <a:ln w="20320">
-            <a:solidFill>
-              <a:srgbClr val="15181C">
-                <a:alpha val="55000"/>
-              </a:srgbClr>
-            </a:solidFill>
-            <a:prstDash val="solid"/>
-          </a:ln>
-        </p:spPr>
-      </p:sp>
-      <p:sp>
-        <p:nvSpPr>
-          <p:cNvPr id="7" name="Shape 5"/>
-          <p:cNvSpPr/>
-          <p:nvPr/>
-        </p:nvSpPr>
-        <p:spPr>
-          <a:xfrm>
-            <a:off x="1517073" y="2597062"/>
-            <a:ext cx="486793" cy="111557"/>
-          </a:xfrm>
-          <a:prstGeom prst="roundRect">
-            <a:avLst>
-              <a:gd name="adj" fmla="val 16393"/>
-            </a:avLst>
-          </a:prstGeom>
-          <a:solidFill>
-            <a:srgbClr val="D9A32B">
-              <a:alpha val="80000"/>
-            </a:srgbClr>
-          </a:solidFill>
-          <a:ln w="13970">
-            <a:solidFill>
-              <a:srgbClr val="D9A32B"/>
-            </a:solidFill>
-            <a:prstDash val="solid"/>
-          </a:ln>
-        </p:spPr>
-      </p:sp>
-      <p:sp>
-        <p:nvSpPr>
-          <p:cNvPr id="8" name="Text 6"/>
-          <p:cNvSpPr txBox="1"/>
-          <p:nvPr/>
-        </p:nvSpPr>
-        <p:spPr>
-          <a:xfrm>
-            <a:off x="949147" y="2794822"/>
-            <a:ext cx="1622644" cy="283963"/>
-          </a:xfrm>
-          <a:prstGeom prst="rect">
-            <a:avLst/>
-          </a:prstGeom>
-          <a:noFill/>
-          <a:ln/>
-        </p:spPr>
-        <p:txBody>
-          <a:bodyPr wrap="square" lIns="0" tIns="0" rIns="0" bIns="0" rtlCol="0" anchor="ctr"/>
-          <a:lstStyle/>
-          <a:p>
-            <a:pPr algn="ctr" indent="0" marL="0">
-              <a:buNone/>
-            </a:pPr>
-            <a:r>
-              <a:rPr lang="en-US" sz="1250" spc="150" kern="0" dirty="0">
-                <a:solidFill>
-                  <a:srgbClr val="15181C"/>
-                </a:solidFill>
-                <a:latin typeface="Arial" pitchFamily="34" charset="0"/>
-                <a:ea typeface="Arial" pitchFamily="34" charset="-122"/>
-                <a:cs typeface="Arial" pitchFamily="34" charset="-120"/>
-              </a:rPr>
-              <a:t>T </a:t>
-            </a:r>
-            <a:pPr algn="ctr" indent="0" marL="0">
-              <a:buNone/>
-            </a:pPr>
-            <a:r>
-              <a:rPr lang="en-US" sz="1250" spc="150" kern="0" dirty="0">
-                <a:solidFill>
-                  <a:srgbClr val="15181C"/>
-                </a:solidFill>
-                <a:latin typeface="Arial" pitchFamily="34" charset="0"/>
-                <a:ea typeface="Arial" pitchFamily="34" charset="-122"/>
-                <a:cs typeface="Arial" pitchFamily="34" charset="-120"/>
-              </a:rPr>
-              <a:t>G </a:t>
-            </a:r>
-            <a:pPr algn="ctr" indent="0" marL="0">
-              <a:buNone/>
-            </a:pPr>
-            <a:r>
-              <a:rPr lang="en-US" sz="1250" spc="150" kern="0" dirty="0">
-                <a:solidFill>
-                  <a:srgbClr val="15181C"/>
-                </a:solidFill>
-                <a:latin typeface="Arial" pitchFamily="34" charset="0"/>
-                <a:ea typeface="Arial" pitchFamily="34" charset="-122"/>
-                <a:cs typeface="Arial" pitchFamily="34" charset="-120"/>
-              </a:rPr>
-              <a:t>A </a:t>
-            </a:r>
-            <a:pPr algn="ctr" indent="0" marL="0">
-              <a:buNone/>
-            </a:pPr>
-            <a:r>
-              <a:rPr lang="en-US" sz="1250" spc="150" kern="0" dirty="0">
-                <a:solidFill>
-                  <a:srgbClr val="15181C"/>
-                </a:solidFill>
-                <a:latin typeface="Arial" pitchFamily="34" charset="0"/>
-                <a:ea typeface="Arial" pitchFamily="34" charset="-122"/>
-                <a:cs typeface="Arial" pitchFamily="34" charset="-120"/>
-              </a:rPr>
-              <a:t>G </a:t>
-            </a:r>
-            <a:pPr algn="ctr" indent="0" marL="0">
-              <a:buNone/>
-            </a:pPr>
-            <a:r>
-              <a:rPr lang="en-US" sz="1250" spc="150" kern="0" dirty="0">
-                <a:solidFill>
-                  <a:srgbClr val="15181C"/>
-                </a:solidFill>
-                <a:latin typeface="Arial" pitchFamily="34" charset="0"/>
-                <a:ea typeface="Arial" pitchFamily="34" charset="-122"/>
-                <a:cs typeface="Arial" pitchFamily="34" charset="-120"/>
-              </a:rPr>
-              <a:t>T </a:t>
-            </a:r>
-            <a:pPr algn="ctr" indent="0" marL="0">
-              <a:buNone/>
-            </a:pPr>
-            <a:r>
-              <a:rPr lang="en-US" sz="1250" spc="150" kern="0" dirty="0">
-                <a:solidFill>
-                  <a:srgbClr val="15181C"/>
-                </a:solidFill>
-                <a:latin typeface="Arial" pitchFamily="34" charset="0"/>
-                <a:ea typeface="Arial" pitchFamily="34" charset="-122"/>
-                <a:cs typeface="Arial" pitchFamily="34" charset="-120"/>
-              </a:rPr>
-              <a:t>C </a:t>
-            </a:r>
-            <a:pPr algn="ctr" indent="0" marL="0">
-              <a:buNone/>
-            </a:pPr>
-            <a:r>
-              <a:rPr lang="en-US" sz="1250" spc="150" kern="0" dirty="0">
-                <a:solidFill>
-                  <a:srgbClr val="15181C"/>
-                </a:solidFill>
-                <a:latin typeface="Arial" pitchFamily="34" charset="0"/>
-                <a:ea typeface="Arial" pitchFamily="34" charset="-122"/>
-                <a:cs typeface="Arial" pitchFamily="34" charset="-120"/>
-              </a:rPr>
-              <a:t>A</a:t>
-            </a:r>
-            <a:endParaRPr lang="en-US" sz="1250" dirty="0"/>
-          </a:p>
-        </p:txBody>
-      </p:sp>
-      <p:sp>
-        <p:nvSpPr>
-          <p:cNvPr id="9" name="Text 7"/>
-          <p:cNvSpPr txBox="1"/>
-          <p:nvPr/>
-        </p:nvSpPr>
-        <p:spPr>
-          <a:xfrm>
-            <a:off x="644901" y="3099068"/>
-            <a:ext cx="2231136" cy="202831"/>
-          </a:xfrm>
-          <a:prstGeom prst="rect">
-            <a:avLst/>
-          </a:prstGeom>
-          <a:noFill/>
-          <a:ln/>
-        </p:spPr>
-        <p:txBody>
-          <a:bodyPr wrap="square" lIns="0" tIns="0" rIns="0" bIns="0" rtlCol="0" anchor="ctr"/>
-          <a:lstStyle/>
-          <a:p>
-            <a:pPr algn="ctr" indent="0" marL="0">
-              <a:lnSpc>
-                <a:spcPct val="95000"/>
-              </a:lnSpc>
-              <a:buNone/>
-            </a:pPr>
-            <a:r>
-              <a:rPr lang="en-US" sz="1100" dirty="0">
-                <a:solidFill>
-                  <a:srgbClr val="5A6471"/>
-                </a:solidFill>
-                <a:latin typeface="Arial" pitchFamily="34" charset="0"/>
-                <a:ea typeface="Arial" pitchFamily="34" charset="-122"/>
-                <a:cs typeface="Arial" pitchFamily="34" charset="-120"/>
-              </a:rPr>
-              <a:t>perfect core</a:t>
-            </a:r>
-            <a:endParaRPr lang="en-US" sz="1100" dirty="0"/>
-          </a:p>
-        </p:txBody>
-      </p:sp>
-      <p:sp>
-        <p:nvSpPr>
-          <p:cNvPr id="10" name="Shape 8"/>
-          <p:cNvSpPr/>
-          <p:nvPr/>
-        </p:nvSpPr>
-        <p:spPr>
-          <a:xfrm>
-            <a:off x="3139717" y="2652841"/>
-            <a:ext cx="1541512" cy="0"/>
-          </a:xfrm>
-          <a:prstGeom prst="line">
-            <a:avLst/>
-          </a:prstGeom>
-          <a:noFill/>
-          <a:ln w="20320">
-            <a:solidFill>
-              <a:srgbClr val="15181C">
-                <a:alpha val="55000"/>
-              </a:srgbClr>
-            </a:solidFill>
-            <a:prstDash val="solid"/>
-          </a:ln>
-        </p:spPr>
-      </p:sp>
-      <p:sp>
-        <p:nvSpPr>
-          <p:cNvPr id="11" name="Shape 9"/>
-          <p:cNvSpPr/>
-          <p:nvPr/>
-        </p:nvSpPr>
-        <p:spPr>
-          <a:xfrm>
-            <a:off x="3667077" y="2597062"/>
-            <a:ext cx="486793" cy="111557"/>
-          </a:xfrm>
-          <a:prstGeom prst="roundRect">
-            <a:avLst>
-              <a:gd name="adj" fmla="val 16393"/>
-            </a:avLst>
-          </a:prstGeom>
-          <a:solidFill>
-            <a:srgbClr val="D9A32B">
-              <a:alpha val="58000"/>
-            </a:srgbClr>
-          </a:solidFill>
-          <a:ln w="13970">
-            <a:solidFill>
-              <a:srgbClr val="D9A32B"/>
-            </a:solidFill>
-            <a:prstDash val="solid"/>
-          </a:ln>
-        </p:spPr>
-      </p:sp>
-      <p:sp>
-        <p:nvSpPr>
-          <p:cNvPr id="12" name="Text 10"/>
-          <p:cNvSpPr txBox="1"/>
-          <p:nvPr/>
-        </p:nvSpPr>
-        <p:spPr>
-          <a:xfrm>
-            <a:off x="3099151" y="2794822"/>
-            <a:ext cx="1622644" cy="283963"/>
-          </a:xfrm>
-          <a:prstGeom prst="rect">
-            <a:avLst/>
-          </a:prstGeom>
-          <a:noFill/>
-          <a:ln/>
-        </p:spPr>
-        <p:txBody>
-          <a:bodyPr wrap="square" lIns="0" tIns="0" rIns="0" bIns="0" rtlCol="0" anchor="ctr"/>
-          <a:lstStyle/>
-          <a:p>
-            <a:pPr algn="ctr" indent="0" marL="0">
-              <a:buNone/>
-            </a:pPr>
-            <a:r>
-              <a:rPr lang="en-US" sz="1250" spc="150" kern="0" dirty="0">
-                <a:solidFill>
-                  <a:srgbClr val="15181C"/>
-                </a:solidFill>
-                <a:latin typeface="Arial" pitchFamily="34" charset="0"/>
-                <a:ea typeface="Arial" pitchFamily="34" charset="-122"/>
-                <a:cs typeface="Arial" pitchFamily="34" charset="-120"/>
-              </a:rPr>
-              <a:t>T </a:t>
-            </a:r>
-            <a:pPr algn="ctr" indent="0" marL="0">
-              <a:buNone/>
-            </a:pPr>
-            <a:r>
-              <a:rPr lang="en-US" sz="1250" spc="150" kern="0" dirty="0">
-                <a:solidFill>
-                  <a:srgbClr val="15181C"/>
-                </a:solidFill>
-                <a:latin typeface="Arial" pitchFamily="34" charset="0"/>
-                <a:ea typeface="Arial" pitchFamily="34" charset="-122"/>
-                <a:cs typeface="Arial" pitchFamily="34" charset="-120"/>
-              </a:rPr>
-              <a:t>G </a:t>
-            </a:r>
-            <a:pPr algn="ctr" indent="0" marL="0">
-              <a:buNone/>
-            </a:pPr>
-            <a:r>
-              <a:rPr lang="en-US" sz="1250" spc="150" kern="0" dirty="0">
-                <a:solidFill>
-                  <a:srgbClr val="15181C"/>
-                </a:solidFill>
-                <a:latin typeface="Arial" pitchFamily="34" charset="0"/>
-                <a:ea typeface="Arial" pitchFamily="34" charset="-122"/>
-                <a:cs typeface="Arial" pitchFamily="34" charset="-120"/>
-              </a:rPr>
-              <a:t>A </a:t>
-            </a:r>
-            <a:pPr algn="ctr" indent="0" marL="0">
-              <a:buNone/>
-            </a:pPr>
-            <a:r>
-              <a:rPr lang="en-US" sz="1250" b="1" spc="150" kern="0" dirty="0">
-                <a:solidFill>
-                  <a:srgbClr val="A2380F"/>
-                </a:solidFill>
-                <a:latin typeface="Arial" pitchFamily="34" charset="0"/>
-                <a:ea typeface="Arial" pitchFamily="34" charset="-122"/>
-                <a:cs typeface="Arial" pitchFamily="34" charset="-120"/>
-              </a:rPr>
-              <a:t>C </a:t>
-            </a:r>
-            <a:pPr algn="ctr" indent="0" marL="0">
-              <a:buNone/>
-            </a:pPr>
-            <a:r>
-              <a:rPr lang="en-US" sz="1250" spc="150" kern="0" dirty="0">
-                <a:solidFill>
-                  <a:srgbClr val="15181C"/>
-                </a:solidFill>
-                <a:latin typeface="Arial" pitchFamily="34" charset="0"/>
-                <a:ea typeface="Arial" pitchFamily="34" charset="-122"/>
-                <a:cs typeface="Arial" pitchFamily="34" charset="-120"/>
-              </a:rPr>
-              <a:t>T </a:t>
-            </a:r>
-            <a:pPr algn="ctr" indent="0" marL="0">
-              <a:buNone/>
-            </a:pPr>
-            <a:r>
-              <a:rPr lang="en-US" sz="1250" spc="150" kern="0" dirty="0">
-                <a:solidFill>
-                  <a:srgbClr val="15181C"/>
-                </a:solidFill>
-                <a:latin typeface="Arial" pitchFamily="34" charset="0"/>
-                <a:ea typeface="Arial" pitchFamily="34" charset="-122"/>
-                <a:cs typeface="Arial" pitchFamily="34" charset="-120"/>
-              </a:rPr>
-              <a:t>C </a:t>
-            </a:r>
-            <a:pPr algn="ctr" indent="0" marL="0">
-              <a:buNone/>
-            </a:pPr>
-            <a:r>
-              <a:rPr lang="en-US" sz="1250" spc="150" kern="0" dirty="0">
-                <a:solidFill>
-                  <a:srgbClr val="15181C"/>
-                </a:solidFill>
-                <a:latin typeface="Arial" pitchFamily="34" charset="0"/>
-                <a:ea typeface="Arial" pitchFamily="34" charset="-122"/>
-                <a:cs typeface="Arial" pitchFamily="34" charset="-120"/>
-              </a:rPr>
-              <a:t>A</a:t>
-            </a:r>
-            <a:endParaRPr lang="en-US" sz="1250" dirty="0"/>
-          </a:p>
-        </p:txBody>
-      </p:sp>
-      <p:sp>
-        <p:nvSpPr>
-          <p:cNvPr id="13" name="Text 11"/>
-          <p:cNvSpPr txBox="1"/>
-          <p:nvPr/>
-        </p:nvSpPr>
-        <p:spPr>
-          <a:xfrm>
-            <a:off x="2794905" y="3099068"/>
-            <a:ext cx="2231136" cy="202831"/>
-          </a:xfrm>
-          <a:prstGeom prst="rect">
-            <a:avLst/>
-          </a:prstGeom>
-          <a:noFill/>
-          <a:ln/>
-        </p:spPr>
-        <p:txBody>
-          <a:bodyPr wrap="square" lIns="0" tIns="0" rIns="0" bIns="0" rtlCol="0" anchor="ctr"/>
-          <a:lstStyle/>
-          <a:p>
-            <a:pPr algn="ctr" indent="0" marL="0">
-              <a:lnSpc>
-                <a:spcPct val="95000"/>
-              </a:lnSpc>
-              <a:buNone/>
-            </a:pPr>
-            <a:r>
-              <a:rPr lang="en-US" sz="1100" dirty="0">
-                <a:solidFill>
-                  <a:srgbClr val="5A6471"/>
-                </a:solidFill>
-                <a:latin typeface="Arial" pitchFamily="34" charset="0"/>
-                <a:ea typeface="Arial" pitchFamily="34" charset="-122"/>
-                <a:cs typeface="Arial" pitchFamily="34" charset="-120"/>
-              </a:rPr>
-              <a:t>1 base changed</a:t>
-            </a:r>
-            <a:endParaRPr lang="en-US" sz="1100" dirty="0"/>
-          </a:p>
-        </p:txBody>
-      </p:sp>
-      <p:sp>
-        <p:nvSpPr>
-          <p:cNvPr id="14" name="Shape 12"/>
-          <p:cNvSpPr/>
-          <p:nvPr/>
-        </p:nvSpPr>
-        <p:spPr>
-          <a:xfrm>
-            <a:off x="5289721" y="2652841"/>
-            <a:ext cx="1541512" cy="0"/>
-          </a:xfrm>
-          <a:prstGeom prst="line">
-            <a:avLst/>
-          </a:prstGeom>
-          <a:noFill/>
-          <a:ln w="20320">
-            <a:solidFill>
-              <a:srgbClr val="15181C">
-                <a:alpha val="55000"/>
-              </a:srgbClr>
-            </a:solidFill>
-            <a:prstDash val="solid"/>
-          </a:ln>
-        </p:spPr>
-      </p:sp>
-      <p:sp>
-        <p:nvSpPr>
-          <p:cNvPr id="15" name="Shape 13"/>
-          <p:cNvSpPr/>
-          <p:nvPr/>
-        </p:nvSpPr>
-        <p:spPr>
-          <a:xfrm>
-            <a:off x="5817080" y="2597062"/>
-            <a:ext cx="486793" cy="111557"/>
-          </a:xfrm>
-          <a:prstGeom prst="roundRect">
-            <a:avLst>
-              <a:gd name="adj" fmla="val 16393"/>
-            </a:avLst>
-          </a:prstGeom>
-          <a:solidFill>
-            <a:srgbClr val="D9A32B">
-              <a:alpha val="36000"/>
-            </a:srgbClr>
-          </a:solidFill>
-          <a:ln w="13970">
-            <a:solidFill>
-              <a:srgbClr val="D9A32B"/>
-            </a:solidFill>
-            <a:prstDash val="solid"/>
-          </a:ln>
-        </p:spPr>
-      </p:sp>
-      <p:sp>
-        <p:nvSpPr>
-          <p:cNvPr id="16" name="Text 14"/>
-          <p:cNvSpPr txBox="1"/>
-          <p:nvPr/>
-        </p:nvSpPr>
-        <p:spPr>
-          <a:xfrm>
-            <a:off x="5249155" y="2794822"/>
-            <a:ext cx="1622644" cy="283963"/>
-          </a:xfrm>
-          <a:prstGeom prst="rect">
-            <a:avLst/>
-          </a:prstGeom>
-          <a:noFill/>
-          <a:ln/>
-        </p:spPr>
-        <p:txBody>
-          <a:bodyPr wrap="square" lIns="0" tIns="0" rIns="0" bIns="0" rtlCol="0" anchor="ctr"/>
-          <a:lstStyle/>
-          <a:p>
-            <a:pPr algn="ctr" indent="0" marL="0">
-              <a:buNone/>
-            </a:pPr>
-            <a:r>
-              <a:rPr lang="en-US" sz="1250" spc="150" kern="0" dirty="0">
-                <a:solidFill>
-                  <a:srgbClr val="15181C"/>
-                </a:solidFill>
-                <a:latin typeface="Arial" pitchFamily="34" charset="0"/>
-                <a:ea typeface="Arial" pitchFamily="34" charset="-122"/>
-                <a:cs typeface="Arial" pitchFamily="34" charset="-120"/>
-              </a:rPr>
-              <a:t>T </a:t>
-            </a:r>
-            <a:pPr algn="ctr" indent="0" marL="0">
-              <a:buNone/>
-            </a:pPr>
-            <a:r>
-              <a:rPr lang="en-US" sz="1250" b="1" spc="150" kern="0" dirty="0">
-                <a:solidFill>
-                  <a:srgbClr val="A2380F"/>
-                </a:solidFill>
-                <a:latin typeface="Arial" pitchFamily="34" charset="0"/>
-                <a:ea typeface="Arial" pitchFamily="34" charset="-122"/>
-                <a:cs typeface="Arial" pitchFamily="34" charset="-120"/>
-              </a:rPr>
-              <a:t>C </a:t>
-            </a:r>
-            <a:pPr algn="ctr" indent="0" marL="0">
-              <a:buNone/>
-            </a:pPr>
-            <a:r>
-              <a:rPr lang="en-US" sz="1250" spc="150" kern="0" dirty="0">
-                <a:solidFill>
-                  <a:srgbClr val="15181C"/>
-                </a:solidFill>
-                <a:latin typeface="Arial" pitchFamily="34" charset="0"/>
-                <a:ea typeface="Arial" pitchFamily="34" charset="-122"/>
-                <a:cs typeface="Arial" pitchFamily="34" charset="-120"/>
-              </a:rPr>
-              <a:t>A </a:t>
-            </a:r>
-            <a:pPr algn="ctr" indent="0" marL="0">
-              <a:buNone/>
-            </a:pPr>
-            <a:r>
-              <a:rPr lang="en-US" sz="1250" b="1" spc="150" kern="0" dirty="0">
-                <a:solidFill>
-                  <a:srgbClr val="A2380F"/>
-                </a:solidFill>
-                <a:latin typeface="Arial" pitchFamily="34" charset="0"/>
-                <a:ea typeface="Arial" pitchFamily="34" charset="-122"/>
-                <a:cs typeface="Arial" pitchFamily="34" charset="-120"/>
-              </a:rPr>
-              <a:t>C </a:t>
-            </a:r>
-            <a:pPr algn="ctr" indent="0" marL="0">
-              <a:buNone/>
-            </a:pPr>
-            <a:r>
-              <a:rPr lang="en-US" sz="1250" spc="150" kern="0" dirty="0">
-                <a:solidFill>
-                  <a:srgbClr val="15181C"/>
-                </a:solidFill>
-                <a:latin typeface="Arial" pitchFamily="34" charset="0"/>
-                <a:ea typeface="Arial" pitchFamily="34" charset="-122"/>
-                <a:cs typeface="Arial" pitchFamily="34" charset="-120"/>
-              </a:rPr>
-              <a:t>T </a:t>
-            </a:r>
-            <a:pPr algn="ctr" indent="0" marL="0">
-              <a:buNone/>
-            </a:pPr>
-            <a:r>
-              <a:rPr lang="en-US" sz="1250" b="1" spc="150" kern="0" dirty="0">
-                <a:solidFill>
-                  <a:srgbClr val="A2380F"/>
-                </a:solidFill>
-                <a:latin typeface="Arial" pitchFamily="34" charset="0"/>
-                <a:ea typeface="Arial" pitchFamily="34" charset="-122"/>
-                <a:cs typeface="Arial" pitchFamily="34" charset="-120"/>
-              </a:rPr>
-              <a:t>T </a:t>
-            </a:r>
-            <a:pPr algn="ctr" indent="0" marL="0">
-              <a:buNone/>
-            </a:pPr>
-            <a:r>
-              <a:rPr lang="en-US" sz="1250" spc="150" kern="0" dirty="0">
-                <a:solidFill>
-                  <a:srgbClr val="15181C"/>
-                </a:solidFill>
-                <a:latin typeface="Arial" pitchFamily="34" charset="0"/>
-                <a:ea typeface="Arial" pitchFamily="34" charset="-122"/>
-                <a:cs typeface="Arial" pitchFamily="34" charset="-120"/>
-              </a:rPr>
-              <a:t>A</a:t>
-            </a:r>
-            <a:endParaRPr lang="en-US" sz="1250" dirty="0"/>
-          </a:p>
-        </p:txBody>
-      </p:sp>
-      <p:sp>
-        <p:nvSpPr>
-          <p:cNvPr id="17" name="Text 15"/>
-          <p:cNvSpPr txBox="1"/>
-          <p:nvPr/>
-        </p:nvSpPr>
-        <p:spPr>
-          <a:xfrm>
-            <a:off x="4944909" y="3099068"/>
-            <a:ext cx="2231136" cy="202831"/>
-          </a:xfrm>
-          <a:prstGeom prst="rect">
-            <a:avLst/>
-          </a:prstGeom>
-          <a:noFill/>
-          <a:ln/>
-        </p:spPr>
-        <p:txBody>
-          <a:bodyPr wrap="square" lIns="0" tIns="0" rIns="0" bIns="0" rtlCol="0" anchor="ctr"/>
-          <a:lstStyle/>
-          <a:p>
-            <a:pPr algn="ctr" indent="0" marL="0">
-              <a:lnSpc>
-                <a:spcPct val="95000"/>
-              </a:lnSpc>
-              <a:buNone/>
-            </a:pPr>
-            <a:r>
-              <a:rPr lang="en-US" sz="1100" dirty="0">
-                <a:solidFill>
-                  <a:srgbClr val="5A6471"/>
-                </a:solidFill>
-                <a:latin typeface="Arial" pitchFamily="34" charset="0"/>
-                <a:ea typeface="Arial" pitchFamily="34" charset="-122"/>
-                <a:cs typeface="Arial" pitchFamily="34" charset="-120"/>
-              </a:rPr>
-              <a:t>3 bases changed</a:t>
-            </a:r>
-            <a:endParaRPr lang="en-US" sz="1100" dirty="0"/>
-          </a:p>
-        </p:txBody>
-      </p:sp>
-      <p:sp>
-        <p:nvSpPr>
-          <p:cNvPr id="18" name="Shape 16"/>
-          <p:cNvSpPr/>
-          <p:nvPr/>
-        </p:nvSpPr>
-        <p:spPr>
-          <a:xfrm>
-            <a:off x="7439725" y="2652841"/>
-            <a:ext cx="1541512" cy="0"/>
-          </a:xfrm>
-          <a:prstGeom prst="line">
-            <a:avLst/>
-          </a:prstGeom>
-          <a:noFill/>
-          <a:ln w="20320">
-            <a:solidFill>
-              <a:srgbClr val="15181C">
-                <a:alpha val="55000"/>
-              </a:srgbClr>
-            </a:solidFill>
-            <a:prstDash val="solid"/>
-          </a:ln>
-        </p:spPr>
-      </p:sp>
-      <p:sp>
-        <p:nvSpPr>
-          <p:cNvPr id="19" name="Shape 17"/>
-          <p:cNvSpPr/>
-          <p:nvPr/>
-        </p:nvSpPr>
-        <p:spPr>
-          <a:xfrm>
-            <a:off x="7967084" y="2586921"/>
-            <a:ext cx="486793" cy="131840"/>
-          </a:xfrm>
-          <a:prstGeom prst="roundRect">
-            <a:avLst>
-              <a:gd name="adj" fmla="val 13871"/>
-            </a:avLst>
-          </a:prstGeom>
-          <a:solidFill>
-            <a:srgbClr val="E2622F">
-              <a:alpha val="14000"/>
-            </a:srgbClr>
-          </a:solidFill>
-          <a:ln w="9525">
-            <a:solidFill>
-              <a:srgbClr val="E2622F"/>
-            </a:solidFill>
-            <a:prstDash val="solid"/>
-          </a:ln>
-        </p:spPr>
-      </p:sp>
-      <p:sp>
-        <p:nvSpPr>
-          <p:cNvPr id="20" name="Shape 18"/>
-          <p:cNvSpPr/>
-          <p:nvPr/>
-        </p:nvSpPr>
-        <p:spPr>
-          <a:xfrm>
-            <a:off x="7967084" y="2602133"/>
-            <a:ext cx="486793" cy="101415"/>
-          </a:xfrm>
-          <a:custGeom>
-            <a:avLst/>
-            <a:gdLst/>
-            <a:ahLst/>
-            <a:cxnLst/>
-            <a:rect l="l" t="t" r="r" b="b"/>
-            <a:pathLst>
-              <a:path w="486793" h="101415">
-                <a:moveTo>
-                  <a:pt x="0" y="10142"/>
-                </a:moveTo>
-                <a:lnTo>
-                  <a:pt x="48679" y="91274"/>
-                </a:lnTo>
-                <a:lnTo>
-                  <a:pt x="97359" y="10142"/>
-                </a:lnTo>
-                <a:lnTo>
-                  <a:pt x="146038" y="91274"/>
-                </a:lnTo>
-                <a:lnTo>
-                  <a:pt x="194717" y="10142"/>
-                </a:lnTo>
-                <a:lnTo>
-                  <a:pt x="243397" y="91274"/>
-                </a:lnTo>
-                <a:lnTo>
-                  <a:pt x="292076" y="10142"/>
-                </a:lnTo>
-                <a:lnTo>
-                  <a:pt x="340755" y="91274"/>
-                </a:lnTo>
-                <a:lnTo>
-                  <a:pt x="389435" y="10142"/>
-                </a:lnTo>
-                <a:lnTo>
-                  <a:pt x="438114" y="91274"/>
-                </a:lnTo>
-                <a:lnTo>
-                  <a:pt x="486793" y="10142"/>
-                </a:lnTo>
-              </a:path>
-            </a:pathLst>
-          </a:custGeom>
-          <a:ln w="17780">
-            <a:solidFill>
-              <a:srgbClr val="E2622F"/>
-            </a:solidFill>
-            <a:prstDash val="solid"/>
-          </a:ln>
-        </p:spPr>
-      </p:sp>
-      <p:sp>
-        <p:nvSpPr>
-          <p:cNvPr id="21" name="Text 19"/>
-          <p:cNvSpPr txBox="1"/>
-          <p:nvPr/>
-        </p:nvSpPr>
-        <p:spPr>
-          <a:xfrm>
-            <a:off x="7399159" y="2794822"/>
-            <a:ext cx="1622644" cy="283963"/>
-          </a:xfrm>
-          <a:prstGeom prst="rect">
-            <a:avLst/>
-          </a:prstGeom>
-          <a:noFill/>
-          <a:ln/>
-        </p:spPr>
-        <p:txBody>
-          <a:bodyPr wrap="square" lIns="0" tIns="0" rIns="0" bIns="0" rtlCol="0" anchor="ctr"/>
-          <a:lstStyle/>
-          <a:p>
-            <a:pPr algn="ctr" indent="0" marL="0">
-              <a:buNone/>
-            </a:pPr>
-            <a:r>
-              <a:rPr lang="en-US" sz="1250" b="1" spc="150" kern="0" dirty="0">
-                <a:solidFill>
-                  <a:srgbClr val="A2380F"/>
-                </a:solidFill>
-                <a:latin typeface="Arial" pitchFamily="34" charset="0"/>
-                <a:ea typeface="Arial" pitchFamily="34" charset="-122"/>
-                <a:cs typeface="Arial" pitchFamily="34" charset="-120"/>
-              </a:rPr>
-              <a:t>C </a:t>
-            </a:r>
-            <a:pPr algn="ctr" indent="0" marL="0">
-              <a:buNone/>
-            </a:pPr>
-            <a:r>
-              <a:rPr lang="en-US" sz="1250" b="1" spc="150" kern="0" dirty="0">
-                <a:solidFill>
-                  <a:srgbClr val="A2380F"/>
-                </a:solidFill>
-                <a:latin typeface="Arial" pitchFamily="34" charset="0"/>
-                <a:ea typeface="Arial" pitchFamily="34" charset="-122"/>
-                <a:cs typeface="Arial" pitchFamily="34" charset="-120"/>
-              </a:rPr>
-              <a:t>A </a:t>
-            </a:r>
-            <a:pPr algn="ctr" indent="0" marL="0">
-              <a:buNone/>
-            </a:pPr>
-            <a:r>
-              <a:rPr lang="en-US" sz="1250" b="1" spc="150" kern="0" dirty="0">
-                <a:solidFill>
-                  <a:srgbClr val="A2380F"/>
-                </a:solidFill>
-                <a:latin typeface="Arial" pitchFamily="34" charset="0"/>
-                <a:ea typeface="Arial" pitchFamily="34" charset="-122"/>
-                <a:cs typeface="Arial" pitchFamily="34" charset="-120"/>
-              </a:rPr>
-              <a:t>T </a:t>
-            </a:r>
-            <a:pPr algn="ctr" indent="0" marL="0">
-              <a:buNone/>
-            </a:pPr>
-            <a:r>
-              <a:rPr lang="en-US" sz="1250" b="1" spc="150" kern="0" dirty="0">
-                <a:solidFill>
-                  <a:srgbClr val="A2380F"/>
-                </a:solidFill>
-                <a:latin typeface="Arial" pitchFamily="34" charset="0"/>
-                <a:ea typeface="Arial" pitchFamily="34" charset="-122"/>
-                <a:cs typeface="Arial" pitchFamily="34" charset="-120"/>
-              </a:rPr>
-              <a:t>C </a:t>
-            </a:r>
-            <a:pPr algn="ctr" indent="0" marL="0">
-              <a:buNone/>
-            </a:pPr>
-            <a:r>
-              <a:rPr lang="en-US" sz="1250" b="1" spc="150" kern="0" dirty="0">
-                <a:solidFill>
-                  <a:srgbClr val="A2380F"/>
-                </a:solidFill>
-                <a:latin typeface="Arial" pitchFamily="34" charset="0"/>
-                <a:ea typeface="Arial" pitchFamily="34" charset="-122"/>
-                <a:cs typeface="Arial" pitchFamily="34" charset="-120"/>
-              </a:rPr>
-              <a:t>A </a:t>
-            </a:r>
-            <a:pPr algn="ctr" indent="0" marL="0">
-              <a:buNone/>
-            </a:pPr>
-            <a:r>
-              <a:rPr lang="en-US" sz="1250" b="1" spc="150" kern="0" dirty="0">
-                <a:solidFill>
-                  <a:srgbClr val="A2380F"/>
-                </a:solidFill>
-                <a:latin typeface="Arial" pitchFamily="34" charset="0"/>
-                <a:ea typeface="Arial" pitchFamily="34" charset="-122"/>
-                <a:cs typeface="Arial" pitchFamily="34" charset="-120"/>
-              </a:rPr>
-              <a:t>G </a:t>
-            </a:r>
-            <a:pPr algn="ctr" indent="0" marL="0">
-              <a:buNone/>
-            </a:pPr>
-            <a:r>
-              <a:rPr lang="en-US" sz="1250" b="1" spc="150" kern="0" dirty="0">
-                <a:solidFill>
-                  <a:srgbClr val="A2380F"/>
-                </a:solidFill>
-                <a:latin typeface="Arial" pitchFamily="34" charset="0"/>
-                <a:ea typeface="Arial" pitchFamily="34" charset="-122"/>
-                <a:cs typeface="Arial" pitchFamily="34" charset="-120"/>
-              </a:rPr>
-              <a:t>G</a:t>
-            </a:r>
-            <a:endParaRPr lang="en-US" sz="1250" dirty="0"/>
-          </a:p>
-        </p:txBody>
-      </p:sp>
-      <p:sp>
-        <p:nvSpPr>
-          <p:cNvPr id="22" name="Text 20"/>
-          <p:cNvSpPr txBox="1"/>
-          <p:nvPr/>
-        </p:nvSpPr>
-        <p:spPr>
-          <a:xfrm>
-            <a:off x="7094913" y="3099068"/>
-            <a:ext cx="2231136" cy="202831"/>
-          </a:xfrm>
-          <a:prstGeom prst="rect">
-            <a:avLst/>
-          </a:prstGeom>
-          <a:noFill/>
-          <a:ln/>
-        </p:spPr>
-        <p:txBody>
-          <a:bodyPr wrap="square" lIns="0" tIns="0" rIns="0" bIns="0" rtlCol="0" anchor="ctr"/>
-          <a:lstStyle/>
-          <a:p>
-            <a:pPr algn="ctr" indent="0" marL="0">
-              <a:lnSpc>
-                <a:spcPct val="95000"/>
-              </a:lnSpc>
-              <a:buNone/>
-            </a:pPr>
-            <a:r>
-              <a:rPr lang="en-US" sz="1100" dirty="0">
-                <a:solidFill>
-                  <a:srgbClr val="5A6471"/>
-                </a:solidFill>
-                <a:latin typeface="Arial" pitchFamily="34" charset="0"/>
-                <a:ea typeface="Arial" pitchFamily="34" charset="-122"/>
-                <a:cs typeface="Arial" pitchFamily="34" charset="-120"/>
-              </a:rPr>
-              <a:t>core gone</a:t>
-            </a:r>
-            <a:endParaRPr lang="en-US" sz="1100" dirty="0"/>
-          </a:p>
-        </p:txBody>
-      </p:sp>
-      <p:sp>
-        <p:nvSpPr>
-          <p:cNvPr id="23" name="Text 21"/>
-          <p:cNvSpPr txBox="1"/>
-          <p:nvPr/>
-        </p:nvSpPr>
-        <p:spPr>
-          <a:xfrm>
-            <a:off x="9751993" y="2368878"/>
-            <a:ext cx="2028305" cy="202831"/>
-          </a:xfrm>
-          <a:prstGeom prst="rect">
-            <a:avLst/>
-          </a:prstGeom>
-          <a:noFill/>
-          <a:ln/>
-        </p:spPr>
-        <p:txBody>
-          <a:bodyPr wrap="square" lIns="0" tIns="0" rIns="0" bIns="0" rtlCol="0" anchor="ctr"/>
-          <a:lstStyle/>
-          <a:p>
-            <a:pPr algn="l" indent="0" marL="0">
-              <a:lnSpc>
-                <a:spcPct val="95000"/>
-              </a:lnSpc>
-              <a:buNone/>
-            </a:pPr>
-            <a:r>
-              <a:rPr lang="en-US" sz="1100" dirty="0">
-                <a:solidFill>
-                  <a:srgbClr val="5A6471"/>
-                </a:solidFill>
-                <a:latin typeface="Arial" pitchFamily="34" charset="0"/>
-                <a:ea typeface="Arial" pitchFamily="34" charset="-122"/>
-                <a:cs typeface="Arial" pitchFamily="34" charset="-120"/>
-              </a:rPr>
-              <a:t>also run</a:t>
-            </a:r>
-            <a:endParaRPr lang="en-US" sz="1100" dirty="0"/>
-          </a:p>
-        </p:txBody>
-      </p:sp>
-      <p:sp>
-        <p:nvSpPr>
-          <p:cNvPr id="24" name="Text 22"/>
-          <p:cNvSpPr txBox="1"/>
-          <p:nvPr/>
-        </p:nvSpPr>
-        <p:spPr>
-          <a:xfrm>
-            <a:off x="9751993" y="2591991"/>
-            <a:ext cx="2332551" cy="202831"/>
-          </a:xfrm>
-          <a:prstGeom prst="rect">
-            <a:avLst/>
-          </a:prstGeom>
-          <a:noFill/>
-          <a:ln/>
-        </p:spPr>
-        <p:txBody>
-          <a:bodyPr wrap="square" lIns="0" tIns="0" rIns="0" bIns="0" rtlCol="0" anchor="ctr"/>
-          <a:lstStyle/>
-          <a:p>
-            <a:pPr algn="l" indent="0" marL="0">
-              <a:lnSpc>
-                <a:spcPct val="95000"/>
-              </a:lnSpc>
-              <a:buNone/>
-            </a:pPr>
-            <a:r>
-              <a:rPr lang="en-US" sz="1200" dirty="0">
-                <a:solidFill>
-                  <a:srgbClr val="15181C"/>
-                </a:solidFill>
-                <a:latin typeface="Arial" pitchFamily="34" charset="0"/>
-                <a:ea typeface="Arial" pitchFamily="34" charset="-122"/>
-                <a:cs typeface="Arial" pitchFamily="34" charset="-120"/>
-              </a:rPr>
-              <a:t>·  upgrade the core</a:t>
-            </a:r>
-            <a:endParaRPr lang="en-US" sz="1200" dirty="0"/>
-          </a:p>
-        </p:txBody>
-      </p:sp>
-      <p:sp>
-        <p:nvSpPr>
-          <p:cNvPr id="25" name="Text 23"/>
-          <p:cNvSpPr txBox="1"/>
-          <p:nvPr/>
-        </p:nvSpPr>
-        <p:spPr>
-          <a:xfrm>
-            <a:off x="9751993" y="2784681"/>
-            <a:ext cx="2332551" cy="202831"/>
-          </a:xfrm>
-          <a:prstGeom prst="rect">
-            <a:avLst/>
-          </a:prstGeom>
-          <a:noFill/>
-          <a:ln/>
-        </p:spPr>
-        <p:txBody>
-          <a:bodyPr wrap="square" lIns="0" tIns="0" rIns="0" bIns="0" rtlCol="0" anchor="ctr"/>
-          <a:lstStyle/>
-          <a:p>
-            <a:pPr algn="l" indent="0" marL="0">
-              <a:lnSpc>
-                <a:spcPct val="95000"/>
-              </a:lnSpc>
-              <a:buNone/>
-            </a:pPr>
-            <a:r>
-              <a:rPr lang="en-US" sz="1200" dirty="0">
-                <a:solidFill>
-                  <a:srgbClr val="15181C"/>
-                </a:solidFill>
-                <a:latin typeface="Arial" pitchFamily="34" charset="0"/>
-                <a:ea typeface="Arial" pitchFamily="34" charset="-122"/>
-                <a:cs typeface="Arial" pitchFamily="34" charset="-120"/>
-              </a:rPr>
-              <a:t>·  half site</a:t>
-            </a:r>
-            <a:endParaRPr lang="en-US" sz="1200" dirty="0"/>
-          </a:p>
-        </p:txBody>
-      </p:sp>
-      <p:sp>
-        <p:nvSpPr>
-          <p:cNvPr id="26" name="Text 24"/>
-          <p:cNvSpPr txBox="1"/>
-          <p:nvPr/>
-        </p:nvSpPr>
-        <p:spPr>
-          <a:xfrm>
-            <a:off x="9751993" y="2977370"/>
-            <a:ext cx="2332551" cy="202831"/>
-          </a:xfrm>
-          <a:prstGeom prst="rect">
-            <a:avLst/>
-          </a:prstGeom>
-          <a:noFill/>
-          <a:ln/>
-        </p:spPr>
-        <p:txBody>
-          <a:bodyPr wrap="square" lIns="0" tIns="0" rIns="0" bIns="0" rtlCol="0" anchor="ctr"/>
-          <a:lstStyle/>
-          <a:p>
-            <a:pPr algn="l" indent="0" marL="0">
-              <a:lnSpc>
-                <a:spcPct val="95000"/>
-              </a:lnSpc>
-              <a:buNone/>
-            </a:pPr>
-            <a:r>
-              <a:rPr lang="en-US" sz="1200" dirty="0">
-                <a:solidFill>
-                  <a:srgbClr val="15181C"/>
-                </a:solidFill>
-                <a:latin typeface="Arial" pitchFamily="34" charset="0"/>
-                <a:ea typeface="Arial" pitchFamily="34" charset="-122"/>
-                <a:cs typeface="Arial" pitchFamily="34" charset="-120"/>
-              </a:rPr>
-              <a:t>·  reverse complement</a:t>
-            </a:r>
-            <a:endParaRPr lang="en-US" sz="1200" dirty="0"/>
-          </a:p>
-        </p:txBody>
-      </p:sp>
-      <p:sp>
-        <p:nvSpPr>
-          <p:cNvPr id="27" name="Shape 25"/>
-          <p:cNvSpPr/>
-          <p:nvPr/>
-        </p:nvSpPr>
-        <p:spPr>
-          <a:xfrm>
-            <a:off x="644901" y="3545295"/>
-            <a:ext cx="10871717" cy="0"/>
-          </a:xfrm>
-          <a:prstGeom prst="line">
-            <a:avLst/>
-          </a:prstGeom>
-          <a:noFill/>
-          <a:ln w="12700">
-            <a:solidFill>
-              <a:srgbClr val="AFB5BD"/>
-            </a:solidFill>
-            <a:prstDash val="dash"/>
-          </a:ln>
-        </p:spPr>
-      </p:sp>
-      <p:sp>
-        <p:nvSpPr>
-          <p:cNvPr id="28" name="Text 26"/>
-          <p:cNvSpPr txBox="1"/>
-          <p:nvPr/>
-        </p:nvSpPr>
-        <p:spPr>
-          <a:xfrm>
-            <a:off x="644901" y="3808975"/>
-            <a:ext cx="5679255" cy="202831"/>
-          </a:xfrm>
-          <a:prstGeom prst="rect">
-            <a:avLst/>
-          </a:prstGeom>
-          <a:noFill/>
-          <a:ln/>
-        </p:spPr>
-        <p:txBody>
-          <a:bodyPr wrap="square" lIns="0" tIns="0" rIns="0" bIns="0" rtlCol="0" anchor="ctr"/>
-          <a:lstStyle/>
-          <a:p>
-            <a:pPr algn="l" indent="0" marL="0">
-              <a:lnSpc>
-                <a:spcPct val="95000"/>
-              </a:lnSpc>
-              <a:buNone/>
-            </a:pPr>
-            <a:r>
-              <a:rPr lang="en-US" sz="1300" b="1" dirty="0">
-                <a:solidFill>
-                  <a:srgbClr val="15181C"/>
-                </a:solidFill>
-                <a:latin typeface="Arial" pitchFamily="34" charset="0"/>
-                <a:ea typeface="Arial" pitchFamily="34" charset="-122"/>
-                <a:cs typeface="Arial" pitchFamily="34" charset="-120"/>
-              </a:rPr>
-              <a:t>OR ADD A SECOND COPY AT A SET DISTANCE</a:t>
-            </a:r>
-            <a:endParaRPr lang="en-US" sz="1300" dirty="0"/>
-          </a:p>
-        </p:txBody>
-      </p:sp>
-      <p:sp>
-        <p:nvSpPr>
-          <p:cNvPr id="29" name="Shape 27"/>
-          <p:cNvSpPr/>
-          <p:nvPr/>
-        </p:nvSpPr>
-        <p:spPr>
-          <a:xfrm>
-            <a:off x="2896320" y="4376900"/>
-            <a:ext cx="5273594" cy="0"/>
-          </a:xfrm>
-          <a:prstGeom prst="line">
-            <a:avLst/>
-          </a:prstGeom>
-          <a:noFill/>
-          <a:ln w="20320">
-            <a:solidFill>
-              <a:srgbClr val="15181C">
-                <a:alpha val="55000"/>
-              </a:srgbClr>
-            </a:solidFill>
-            <a:prstDash val="solid"/>
-          </a:ln>
-        </p:spPr>
-      </p:sp>
-      <p:sp>
-        <p:nvSpPr>
-          <p:cNvPr id="30" name="Shape 28"/>
-          <p:cNvSpPr/>
-          <p:nvPr/>
-        </p:nvSpPr>
-        <p:spPr>
-          <a:xfrm>
-            <a:off x="4285710" y="4321122"/>
-            <a:ext cx="263680" cy="111557"/>
-          </a:xfrm>
-          <a:prstGeom prst="roundRect">
-            <a:avLst>
-              <a:gd name="adj" fmla="val 16393"/>
-            </a:avLst>
-          </a:prstGeom>
-          <a:solidFill>
-            <a:srgbClr val="D9A32B">
-              <a:alpha val="80000"/>
-            </a:srgbClr>
-          </a:solidFill>
-          <a:ln w="13970">
-            <a:solidFill>
-              <a:srgbClr val="D9A32B"/>
-            </a:solidFill>
-            <a:prstDash val="solid"/>
-          </a:ln>
-        </p:spPr>
-      </p:sp>
-      <p:sp>
-        <p:nvSpPr>
-          <p:cNvPr id="31" name="Shape 29"/>
-          <p:cNvSpPr/>
-          <p:nvPr/>
-        </p:nvSpPr>
-        <p:spPr>
-          <a:xfrm>
-            <a:off x="6314015" y="4321122"/>
-            <a:ext cx="263680" cy="111557"/>
-          </a:xfrm>
-          <a:prstGeom prst="roundRect">
-            <a:avLst>
-              <a:gd name="adj" fmla="val 16393"/>
-            </a:avLst>
-          </a:prstGeom>
-          <a:solidFill>
-            <a:srgbClr val="D9A32B">
-              <a:alpha val="80000"/>
-            </a:srgbClr>
-          </a:solidFill>
-          <a:ln w="13970">
-            <a:solidFill>
-              <a:srgbClr val="D9A32B"/>
-            </a:solidFill>
-            <a:prstDash val="solid"/>
-          </a:ln>
-        </p:spPr>
-      </p:sp>
-      <p:sp>
-        <p:nvSpPr>
-          <p:cNvPr id="32" name="Shape 30"/>
-          <p:cNvSpPr/>
-          <p:nvPr/>
-        </p:nvSpPr>
-        <p:spPr>
-          <a:xfrm>
-            <a:off x="4417550" y="4620297"/>
-            <a:ext cx="2028305" cy="0"/>
-          </a:xfrm>
-          <a:prstGeom prst="line">
-            <a:avLst/>
-          </a:prstGeom>
-          <a:noFill/>
-          <a:ln w="13970">
-            <a:solidFill>
-              <a:srgbClr val="5A6471"/>
-            </a:solidFill>
-            <a:prstDash val="solid"/>
-          </a:ln>
-        </p:spPr>
-      </p:sp>
-      <p:sp>
-        <p:nvSpPr>
-          <p:cNvPr id="33" name="Shape 31"/>
-          <p:cNvSpPr/>
-          <p:nvPr/>
-        </p:nvSpPr>
-        <p:spPr>
-          <a:xfrm>
-            <a:off x="4417550" y="4569589"/>
-            <a:ext cx="0" cy="101415"/>
-          </a:xfrm>
-          <a:prstGeom prst="line">
-            <a:avLst/>
-          </a:prstGeom>
-          <a:noFill/>
-          <a:ln w="13970">
-            <a:solidFill>
-              <a:srgbClr val="5A6471"/>
-            </a:solidFill>
-            <a:prstDash val="solid"/>
-          </a:ln>
-        </p:spPr>
-      </p:sp>
-      <p:sp>
-        <p:nvSpPr>
-          <p:cNvPr id="34" name="Shape 32"/>
-          <p:cNvSpPr/>
-          <p:nvPr/>
-        </p:nvSpPr>
-        <p:spPr>
-          <a:xfrm>
-            <a:off x="6445855" y="4569589"/>
-            <a:ext cx="0" cy="101415"/>
-          </a:xfrm>
-          <a:prstGeom prst="line">
-            <a:avLst/>
-          </a:prstGeom>
-          <a:noFill/>
-          <a:ln w="13970">
-            <a:solidFill>
-              <a:srgbClr val="5A6471"/>
-            </a:solidFill>
-            <a:prstDash val="solid"/>
-          </a:ln>
-        </p:spPr>
-      </p:sp>
-      <p:sp>
-        <p:nvSpPr>
-          <p:cNvPr id="35" name="Text 33"/>
-          <p:cNvSpPr txBox="1"/>
-          <p:nvPr/>
-        </p:nvSpPr>
-        <p:spPr>
-          <a:xfrm>
-            <a:off x="5127456" y="4458033"/>
-            <a:ext cx="608492" cy="202831"/>
-          </a:xfrm>
-          <a:prstGeom prst="rect">
-            <a:avLst/>
-          </a:prstGeom>
-          <a:noFill/>
-          <a:ln/>
-        </p:spPr>
-        <p:txBody>
-          <a:bodyPr wrap="square" lIns="0" tIns="0" rIns="0" bIns="0" rtlCol="0" anchor="ctr"/>
-          <a:lstStyle/>
-          <a:p>
-            <a:pPr algn="ctr" indent="0" marL="0">
-              <a:lnSpc>
-                <a:spcPct val="95000"/>
-              </a:lnSpc>
-              <a:buNone/>
-            </a:pPr>
-            <a:r>
-              <a:rPr lang="en-US" sz="1200" b="1" dirty="0">
-                <a:solidFill>
-                  <a:srgbClr val="5A6471"/>
-                </a:solidFill>
-                <a:latin typeface="Arial" pitchFamily="34" charset="0"/>
-                <a:ea typeface="Arial" pitchFamily="34" charset="-122"/>
-                <a:cs typeface="Arial" pitchFamily="34" charset="-120"/>
-              </a:rPr>
-              <a:t>d</a:t>
-            </a:r>
-            <a:endParaRPr lang="en-US" sz="1200" dirty="0"/>
-          </a:p>
-        </p:txBody>
-      </p:sp>
-      <p:sp>
-        <p:nvSpPr>
-          <p:cNvPr id="36" name="Text 34"/>
-          <p:cNvSpPr txBox="1"/>
-          <p:nvPr/>
-        </p:nvSpPr>
-        <p:spPr>
-          <a:xfrm>
-            <a:off x="8393028" y="4275485"/>
-            <a:ext cx="2433967" cy="202831"/>
-          </a:xfrm>
-          <a:prstGeom prst="rect">
-            <a:avLst/>
-          </a:prstGeom>
-          <a:noFill/>
-          <a:ln/>
-        </p:spPr>
-        <p:txBody>
-          <a:bodyPr wrap="square" lIns="0" tIns="0" rIns="0" bIns="0" rtlCol="0" anchor="ctr"/>
-          <a:lstStyle/>
-          <a:p>
-            <a:pPr algn="l" indent="0" marL="0">
-              <a:lnSpc>
-                <a:spcPct val="95000"/>
-              </a:lnSpc>
-              <a:buNone/>
-            </a:pPr>
-            <a:r>
-              <a:rPr lang="en-US" sz="1200" b="1" dirty="0">
-                <a:solidFill>
-                  <a:srgbClr val="8A6400"/>
-                </a:solidFill>
-                <a:latin typeface="Arial" pitchFamily="34" charset="0"/>
-                <a:ea typeface="Arial" pitchFamily="34" charset="-122"/>
-                <a:cs typeface="Arial" pitchFamily="34" charset="-120"/>
-              </a:rPr>
-              <a:t>a second AP-1</a:t>
-            </a:r>
-            <a:endParaRPr lang="en-US" sz="1200" dirty="0"/>
-          </a:p>
-        </p:txBody>
-      </p:sp>
-      <p:sp>
-        <p:nvSpPr>
-          <p:cNvPr id="37" name="Shape 35"/>
-          <p:cNvSpPr/>
-          <p:nvPr/>
-        </p:nvSpPr>
-        <p:spPr>
-          <a:xfrm>
-            <a:off x="2896320" y="5127373"/>
-            <a:ext cx="5273594" cy="0"/>
-          </a:xfrm>
-          <a:prstGeom prst="line">
-            <a:avLst/>
-          </a:prstGeom>
-          <a:noFill/>
-          <a:ln w="20320">
-            <a:solidFill>
-              <a:srgbClr val="15181C">
-                <a:alpha val="55000"/>
-              </a:srgbClr>
-            </a:solidFill>
-            <a:prstDash val="solid"/>
-          </a:ln>
-        </p:spPr>
-      </p:sp>
-      <p:sp>
-        <p:nvSpPr>
-          <p:cNvPr id="38" name="Shape 36"/>
-          <p:cNvSpPr/>
-          <p:nvPr/>
-        </p:nvSpPr>
-        <p:spPr>
-          <a:xfrm>
-            <a:off x="4285710" y="5071595"/>
-            <a:ext cx="263680" cy="111557"/>
-          </a:xfrm>
-          <a:prstGeom prst="roundRect">
-            <a:avLst>
-              <a:gd name="adj" fmla="val 16393"/>
-            </a:avLst>
-          </a:prstGeom>
-          <a:solidFill>
-            <a:srgbClr val="D9A32B">
-              <a:alpha val="80000"/>
-            </a:srgbClr>
-          </a:solidFill>
-          <a:ln w="13970">
-            <a:solidFill>
-              <a:srgbClr val="D9A32B"/>
-            </a:solidFill>
-            <a:prstDash val="solid"/>
-          </a:ln>
-        </p:spPr>
-      </p:sp>
-      <p:sp>
-        <p:nvSpPr>
-          <p:cNvPr id="39" name="Shape 37"/>
-          <p:cNvSpPr/>
-          <p:nvPr/>
-        </p:nvSpPr>
-        <p:spPr>
-          <a:xfrm>
-            <a:off x="6314015" y="5061453"/>
-            <a:ext cx="263680" cy="131840"/>
-          </a:xfrm>
-          <a:prstGeom prst="roundRect">
-            <a:avLst>
-              <a:gd name="adj" fmla="val 13871"/>
-            </a:avLst>
-          </a:prstGeom>
-          <a:solidFill>
-            <a:srgbClr val="5A6471">
-              <a:alpha val="14000"/>
-            </a:srgbClr>
-          </a:solidFill>
-          <a:ln w="9525">
-            <a:solidFill>
-              <a:srgbClr val="5A6471"/>
-            </a:solidFill>
-            <a:prstDash val="solid"/>
-          </a:ln>
-        </p:spPr>
-      </p:sp>
-      <p:sp>
-        <p:nvSpPr>
-          <p:cNvPr id="40" name="Shape 38"/>
-          <p:cNvSpPr/>
-          <p:nvPr/>
-        </p:nvSpPr>
-        <p:spPr>
-          <a:xfrm>
-            <a:off x="6314015" y="5076666"/>
-            <a:ext cx="263680" cy="101415"/>
-          </a:xfrm>
-          <a:custGeom>
-            <a:avLst/>
-            <a:gdLst/>
-            <a:ahLst/>
-            <a:cxnLst/>
-            <a:rect l="l" t="t" r="r" b="b"/>
-            <a:pathLst>
-              <a:path w="263680" h="101415">
-                <a:moveTo>
-                  <a:pt x="0" y="10142"/>
-                </a:moveTo>
-                <a:lnTo>
-                  <a:pt x="52736" y="91274"/>
-                </a:lnTo>
-                <a:lnTo>
-                  <a:pt x="105472" y="10142"/>
-                </a:lnTo>
-                <a:lnTo>
-                  <a:pt x="158208" y="91274"/>
-                </a:lnTo>
-                <a:lnTo>
-                  <a:pt x="210944" y="10142"/>
-                </a:lnTo>
-                <a:lnTo>
-                  <a:pt x="263680" y="91274"/>
-                </a:lnTo>
-              </a:path>
-            </a:pathLst>
-          </a:custGeom>
-          <a:ln w="17780">
-            <a:solidFill>
-              <a:srgbClr val="5A6471"/>
-            </a:solidFill>
-            <a:prstDash val="solid"/>
-          </a:ln>
-        </p:spPr>
-      </p:sp>
-      <p:sp>
-        <p:nvSpPr>
-          <p:cNvPr id="41" name="Shape 39"/>
-          <p:cNvSpPr/>
-          <p:nvPr/>
-        </p:nvSpPr>
-        <p:spPr>
-          <a:xfrm>
-            <a:off x="6273449" y="5036100"/>
-            <a:ext cx="344812" cy="182547"/>
-          </a:xfrm>
-          <a:prstGeom prst="roundRect">
-            <a:avLst>
-              <a:gd name="adj" fmla="val 10018"/>
-            </a:avLst>
-          </a:prstGeom>
-          <a:ln w="13970">
-            <a:solidFill>
-              <a:srgbClr val="5A6471"/>
-            </a:solidFill>
-            <a:prstDash val="dash"/>
-          </a:ln>
-        </p:spPr>
-      </p:sp>
-      <p:sp>
-        <p:nvSpPr>
-          <p:cNvPr id="42" name="Text 40"/>
-          <p:cNvSpPr txBox="1"/>
-          <p:nvPr/>
-        </p:nvSpPr>
-        <p:spPr>
-          <a:xfrm>
-            <a:off x="644901" y="5025958"/>
-            <a:ext cx="1521229" cy="202831"/>
-          </a:xfrm>
-          <a:prstGeom prst="rect">
-            <a:avLst/>
-          </a:prstGeom>
-          <a:noFill/>
-          <a:ln/>
-        </p:spPr>
-        <p:txBody>
-          <a:bodyPr wrap="square" lIns="0" tIns="0" rIns="0" bIns="0" rtlCol="0" anchor="ctr"/>
-          <a:lstStyle/>
-          <a:p>
-            <a:pPr algn="l" indent="0" marL="0">
-              <a:lnSpc>
-                <a:spcPct val="95000"/>
-              </a:lnSpc>
-              <a:buNone/>
-            </a:pPr>
-            <a:r>
-              <a:rPr lang="en-US" sz="1100" dirty="0">
-                <a:solidFill>
-                  <a:srgbClr val="5A6471"/>
-                </a:solidFill>
-                <a:latin typeface="Arial" pitchFamily="34" charset="0"/>
-                <a:ea typeface="Arial" pitchFamily="34" charset="-122"/>
-                <a:cs typeface="Arial" pitchFamily="34" charset="-120"/>
-              </a:rPr>
-              <a:t>control</a:t>
-            </a:r>
-            <a:endParaRPr lang="en-US" sz="1100" dirty="0"/>
-          </a:p>
-        </p:txBody>
-      </p:sp>
-      <p:sp>
-        <p:nvSpPr>
-          <p:cNvPr id="43" name="Text 41"/>
-          <p:cNvSpPr txBox="1"/>
-          <p:nvPr/>
-        </p:nvSpPr>
-        <p:spPr>
-          <a:xfrm>
-            <a:off x="8393028" y="5025958"/>
-            <a:ext cx="3042458" cy="202831"/>
-          </a:xfrm>
-          <a:prstGeom prst="rect">
-            <a:avLst/>
-          </a:prstGeom>
-          <a:noFill/>
-          <a:ln/>
-        </p:spPr>
-        <p:txBody>
-          <a:bodyPr wrap="square" lIns="0" tIns="0" rIns="0" bIns="0" rtlCol="0" anchor="ctr"/>
-          <a:lstStyle/>
-          <a:p>
-            <a:pPr algn="l" indent="0" marL="0">
-              <a:lnSpc>
-                <a:spcPct val="95000"/>
-              </a:lnSpc>
-              <a:buNone/>
-            </a:pPr>
-            <a:r>
-              <a:rPr lang="en-US" sz="1100" dirty="0">
-                <a:solidFill>
-                  <a:srgbClr val="5A6471"/>
-                </a:solidFill>
-                <a:latin typeface="Arial" pitchFamily="34" charset="0"/>
-                <a:ea typeface="Arial" pitchFamily="34" charset="-122"/>
-                <a:cs typeface="Arial" pitchFamily="34" charset="-120"/>
-              </a:rPr>
-              <a:t>or the same width of scramble</a:t>
-            </a:r>
-            <a:endParaRPr lang="en-US" sz="1100" dirty="0"/>
-          </a:p>
-        </p:txBody>
-      </p:sp>
-      <p:sp>
-        <p:nvSpPr>
-          <p:cNvPr id="44" name="Text 42"/>
-          <p:cNvSpPr txBox="1"/>
-          <p:nvPr/>
-        </p:nvSpPr>
-        <p:spPr>
-          <a:xfrm>
-            <a:off x="3809058" y="5370770"/>
-            <a:ext cx="3245289" cy="202831"/>
-          </a:xfrm>
-          <a:prstGeom prst="rect">
-            <a:avLst/>
-          </a:prstGeom>
-          <a:noFill/>
-          <a:ln/>
-        </p:spPr>
-        <p:txBody>
-          <a:bodyPr wrap="square" lIns="0" tIns="0" rIns="0" bIns="0" rtlCol="0" anchor="ctr"/>
-          <a:lstStyle/>
-          <a:p>
-            <a:pPr algn="ctr" indent="0" marL="0">
-              <a:lnSpc>
-                <a:spcPct val="95000"/>
-              </a:lnSpc>
-              <a:buNone/>
-            </a:pPr>
-            <a:r>
-              <a:rPr lang="en-US" sz="1100" dirty="0">
-                <a:solidFill>
-                  <a:srgbClr val="5A6471"/>
-                </a:solidFill>
-                <a:latin typeface="Arial" pitchFamily="34" charset="0"/>
-                <a:ea typeface="Arial" pitchFamily="34" charset="-122"/>
-                <a:cs typeface="Arial" pitchFamily="34" charset="-120"/>
-              </a:rPr>
-              <a:t>d = 20 to 150 bp, either side</a:t>
-            </a:r>
-            <a:endParaRPr lang="en-US" sz="1100" dirty="0"/>
-          </a:p>
-        </p:txBody>
-      </p:sp>
-      <p:sp>
-        <p:nvSpPr>
-          <p:cNvPr id="45" name="Shape 43"/>
-          <p:cNvSpPr/>
-          <p:nvPr/>
-        </p:nvSpPr>
-        <p:spPr>
-          <a:xfrm>
-            <a:off x="502920" y="5989320"/>
-            <a:ext cx="50292" cy="566928"/>
+            <a:off x="502920" y="5303520"/>
+            <a:ext cx="50292" cy="868680"/>
           </a:xfrm>
           <a:prstGeom prst="rect">
             <a:avLst/>
@@ -5010,14 +3591,14 @@
       </p:sp>
       <p:sp>
         <p:nvSpPr>
-          <p:cNvPr id="46" name="Text 44"/>
+          <p:cNvPr id="6" name="Text 3"/>
           <p:cNvSpPr txBox="1"/>
           <p:nvPr/>
         </p:nvSpPr>
         <p:spPr>
           <a:xfrm>
-            <a:off x="749808" y="5989320"/>
-            <a:ext cx="10881360" cy="566928"/>
+            <a:off x="749808" y="5303520"/>
+            <a:ext cx="10881360" cy="868680"/>
           </a:xfrm>
           <a:prstGeom prst="rect">
             <a:avLst/>
@@ -5033,14 +3614,14 @@
               <a:buNone/>
             </a:pPr>
             <a:r>
-              <a:rPr lang="en-US" sz="1550" dirty="0">
+              <a:rPr lang="en-US" sz="1700" dirty="0">
                 <a:solidFill>
                   <a:srgbClr val="111111"/>
                 </a:solidFill>
               </a:rPr>
-              <a:t>Rather than only destroying the motif, weaken it one base at a time, strengthen it, flip it, duplicate it or move it — each against a control that changes the same amount of sequence but no motif.</a:t>
-            </a:r>
-            <a:endParaRPr lang="en-US" sz="1550" dirty="0"/>
+              <a:t>One curve instead of two overlapping ones. It is flat across the entire 600 bp except for a single spike of +0.94 points on the tile covering the AP-1 core — the difference between the classes is not spread along the element, it is on the motif itself.</a:t>
+            </a:r>
+            <a:endParaRPr lang="en-US" sz="1700" dirty="0"/>
           </a:p>
         </p:txBody>
       </p:sp>
@@ -5146,7 +3727,7 @@
                   <a:schemeClr val="tx1"/>
                 </a:solidFill>
               </a:rPr>
-              <a:t>Two differences that turned out to be accessibility</a:t>
+              <a:t>The two classes that lose AP-1 spread their dependence furthest</a:t>
             </a:r>
             <a:endParaRPr lang="en-US" sz="2800" dirty="0"/>
           </a:p>
@@ -5154,199 +3735,158 @@
       </p:sp>
       <p:sp>
         <p:nvSpPr>
-          <p:cNvPr id="3" name="Text 0"/>
+          <p:cNvPr id="3" name="Text 1"/>
+          <p:cNvSpPr txBox="1"/>
+          <p:nvPr/>
+        </p:nvSpPr>
+        <p:spPr>
+          <a:xfrm>
+            <a:off x="502920" y="969264"/>
+            <a:ext cx="11155680" cy="310896"/>
+          </a:xfrm>
+          <a:prstGeom prst="rect">
+            <a:avLst/>
+          </a:prstGeom>
+          <a:noFill/>
+          <a:ln/>
+        </p:spPr>
+        <p:txBody>
+          <a:bodyPr wrap="square" lIns="0" tIns="0" rIns="0" bIns="0" rtlCol="0" anchor="ctr"/>
+          <a:lstStyle/>
+          <a:p>
+            <a:pPr indent="0" marL="0">
+              <a:buNone/>
+            </a:pPr>
+            <a:r>
+              <a:rPr lang="en-US" sz="1250" i="1" dirty="0">
+                <a:solidFill>
+                  <a:srgbClr val="595959"/>
+                </a:solidFill>
+              </a:rPr>
+              <a:t>ALTERNATIVE VIEW OF THE PREVIOUS SLIDE — same measurement, keep one.  Share of a site's importance within ±25 bp of the motif, by class. Point, median per site; bar, bootstrap 95% CI; Mann–Whitney against Stable, BH across the four comparisons.</a:t>
+            </a:r>
+            <a:endParaRPr lang="en-US" sz="1250" dirty="0"/>
+          </a:p>
+        </p:txBody>
+      </p:sp>
+      <p:pic>
+        <p:nvPicPr>
+          <p:cNvPr id="4" name="Image 0" descr="/Users/z5162865/WongLab/AlphaGenome_Ap1/Analysis/slide_figures/r_fb_density_classes.png">    </p:cNvPr>
+          <p:cNvPicPr>
+            <a:picLocks noChangeAspect="1"/>
+          </p:cNvPicPr>
+          <p:nvPr/>
+        </p:nvPicPr>
+        <p:blipFill>
+          <a:blip r:embed="rId1"/>
+          <a:stretch>
+            <a:fillRect/>
+          </a:stretch>
+        </p:blipFill>
+        <p:spPr>
+          <a:xfrm>
+            <a:off x="2271453" y="1335024"/>
+            <a:ext cx="7618615" cy="3566160"/>
+          </a:xfrm>
+          <a:prstGeom prst="rect">
+            <a:avLst/>
+          </a:prstGeom>
+        </p:spPr>
+      </p:pic>
+      <p:sp>
+        <p:nvSpPr>
+          <p:cNvPr id="5" name="Shape 2"/>
           <p:cNvSpPr/>
-          <p:nvPr>
-            <p:ph idx="101" type="body" hasCustomPrompt="1"/>
-          </p:nvPr>
-        </p:nvSpPr>
-        <p:spPr>
-          <a:xfrm>
-            <a:off x="502920" y="1234440"/>
-            <a:ext cx="11155680" cy="5029200"/>
+          <p:nvPr/>
+        </p:nvSpPr>
+        <p:spPr>
+          <a:xfrm>
+            <a:off x="502920" y="5047488"/>
+            <a:ext cx="50292" cy="731520"/>
           </a:xfrm>
           <a:prstGeom prst="rect">
             <a:avLst/>
           </a:prstGeom>
+          <a:solidFill>
+            <a:srgbClr val="3F3F3F"/>
+          </a:solidFill>
+          <a:ln w="12700">
+            <a:solidFill>
+              <a:srgbClr val="333333"/>
+            </a:solidFill>
+            <a:prstDash val="solid"/>
+          </a:ln>
+        </p:spPr>
+      </p:sp>
+      <p:sp>
+        <p:nvSpPr>
+          <p:cNvPr id="6" name="Text 3"/>
+          <p:cNvSpPr txBox="1"/>
+          <p:nvPr/>
+        </p:nvSpPr>
+        <p:spPr>
+          <a:xfrm>
+            <a:off x="749808" y="5047488"/>
+            <a:ext cx="10881360" cy="731520"/>
+          </a:xfrm>
+          <a:prstGeom prst="rect">
+            <a:avLst/>
+          </a:prstGeom>
           <a:noFill/>
           <a:ln/>
         </p:spPr>
         <p:txBody>
-          <a:bodyPr wrap="square" rtlCol="0" anchor="t"/>
+          <a:bodyPr wrap="square" lIns="0" tIns="0" rIns="0" bIns="0" rtlCol="0" anchor="ctr"/>
           <a:lstStyle/>
           <a:p>
-            <a:pPr algn="l" marL="342900" indent="-342900">
-              <a:spcBef>
-                <a:spcPts val="1100"/>
-              </a:spcBef>
-              <a:spcAft>
-                <a:spcPts val="300"/>
-              </a:spcAft>
-              <a:buSzPct val="100000"/>
-              <a:buChar char="•"/>
-            </a:pPr>
-            <a:r>
-              <a:rPr lang="en-US" sz="1700" b="1" dirty="0">
+            <a:pPr indent="0" marL="0">
+              <a:buNone/>
+            </a:pPr>
+            <a:r>
+              <a:rPr lang="en-US" sz="1700" dirty="0">
                 <a:solidFill>
                   <a:srgbClr val="111111"/>
                 </a:solidFill>
               </a:rPr>
-              <a:t>A second AP-1 copy looked worth more to Dynamic sites</a:t>
+              <a:t>All four Dynamic classes are less motif-centred than Stable, and they order the same way the motif-shuffle slide did: the two AP-1-losing classes (28.3%, 28.6%) sit below the two gaining ones (31.3%, 31.5%), which sit below Stable at 33.8%. Two independent measures, the same split.</a:t>
             </a:r>
             <a:endParaRPr lang="en-US" sz="1700" dirty="0"/>
           </a:p>
-          <a:p>
-            <a:pPr algn="l" lvl="1" marL="685800" indent="-342900">
-              <a:spcAft>
-                <a:spcPts val="400"/>
-              </a:spcAft>
-              <a:buSzPct val="100000"/>
-              <a:buChar char="▪"/>
-            </a:pPr>
-            <a:r>
-              <a:rPr lang="en-US" sz="1450" dirty="0">
+        </p:txBody>
+      </p:sp>
+      <p:sp>
+        <p:nvSpPr>
+          <p:cNvPr id="7" name="Text 4"/>
+          <p:cNvSpPr txBox="1"/>
+          <p:nvPr/>
+        </p:nvSpPr>
+        <p:spPr>
+          <a:xfrm>
+            <a:off x="749808" y="5852160"/>
+            <a:ext cx="10881360" cy="603504"/>
+          </a:xfrm>
+          <a:prstGeom prst="rect">
+            <a:avLst/>
+          </a:prstGeom>
+          <a:noFill/>
+          <a:ln/>
+        </p:spPr>
+        <p:txBody>
+          <a:bodyPr wrap="square" lIns="0" tIns="0" rIns="0" bIns="0" rtlCol="0" anchor="t"/>
+          <a:lstStyle/>
+          <a:p>
+            <a:pPr indent="0" marL="0">
+              <a:buNone/>
+            </a:pPr>
+            <a:r>
+              <a:rPr lang="en-US" sz="1300" dirty="0">
                 <a:solidFill>
                   <a:srgbClr val="595959"/>
                 </a:solidFill>
               </a:rPr>
-              <a:t>+0.72 vs +0.60 log2, p &lt; 1e-4 — matched on accessibility, p = 0.93. Gone.</a:t>
-            </a:r>
-            <a:endParaRPr lang="en-US" sz="1700" dirty="0"/>
-          </a:p>
-          <a:p>
-            <a:pPr algn="l" marL="342900" indent="-342900">
-              <a:spcBef>
-                <a:spcPts val="1100"/>
-              </a:spcBef>
-              <a:spcAft>
-                <a:spcPts val="300"/>
-              </a:spcAft>
-              <a:buSzPct val="100000"/>
-              <a:buChar char="•"/>
-            </a:pPr>
-            <a:r>
-              <a:rPr lang="en-US" sz="1700" b="1" dirty="0">
-                <a:solidFill>
-                  <a:srgbClr val="111111"/>
-                </a:solidFill>
-              </a:rPr>
-              <a:t>Upgrading an imperfect core to a perfect TGAGTCA looked worth more to Dynamic sites</a:t>
-            </a:r>
-            <a:endParaRPr lang="en-US" sz="1700" dirty="0"/>
-          </a:p>
-          <a:p>
-            <a:pPr algn="l" lvl="1" marL="685800" indent="-342900">
-              <a:spcAft>
-                <a:spcPts val="400"/>
-              </a:spcAft>
-              <a:buSzPct val="100000"/>
-              <a:buChar char="▪"/>
-            </a:pPr>
-            <a:r>
-              <a:rPr lang="en-US" sz="1450" dirty="0">
-                <a:solidFill>
-                  <a:srgbClr val="595959"/>
-                </a:solidFill>
-              </a:rPr>
-              <a:t>+0.66 vs +0.52, p &lt; 1e-4 — matched, p = 0.94. Gone.</a:t>
-            </a:r>
-            <a:endParaRPr lang="en-US" sz="1700" dirty="0"/>
-          </a:p>
-          <a:p>
-            <a:pPr algn="l" marL="342900" indent="-342900">
-              <a:spcBef>
-                <a:spcPts val="1100"/>
-              </a:spcBef>
-              <a:spcAft>
-                <a:spcPts val="300"/>
-              </a:spcAft>
-              <a:buSzPct val="100000"/>
-              <a:buChar char="•"/>
-            </a:pPr>
-            <a:r>
-              <a:rPr lang="en-US" sz="1700" b="1" dirty="0">
-                <a:solidFill>
-                  <a:srgbClr val="111111"/>
-                </a:solidFill>
-              </a:rPr>
-              <a:t>What did survive matching</a:t>
-            </a:r>
-            <a:endParaRPr lang="en-US" sz="1700" dirty="0"/>
-          </a:p>
-          <a:p>
-            <a:pPr algn="l" lvl="1" marL="685800" indent="-342900">
-              <a:spcAft>
-                <a:spcPts val="400"/>
-              </a:spcAft>
-              <a:buSzPct val="100000"/>
-              <a:buChar char="▪"/>
-            </a:pPr>
-            <a:r>
-              <a:rPr lang="en-US" sz="1450" dirty="0">
-                <a:solidFill>
-                  <a:srgbClr val="595959"/>
-                </a:solidFill>
-              </a:rPr>
-              <a:t>Destroying the motif costs Dynamic sites less (+0.16, p = 4e-4); the dose-response is shallower; relocating the motif helps them less.</a:t>
-            </a:r>
-            <a:endParaRPr lang="en-US" sz="1700" dirty="0"/>
-          </a:p>
-          <a:p>
-            <a:pPr algn="l" marL="342900" indent="-342900">
-              <a:spcBef>
-                <a:spcPts val="1100"/>
-              </a:spcBef>
-              <a:spcAft>
-                <a:spcPts val="300"/>
-              </a:spcAft>
-              <a:buSzPct val="100000"/>
-              <a:buChar char="•"/>
-            </a:pPr>
-            <a:r>
-              <a:rPr lang="en-US" sz="1700" b="1" dirty="0">
-                <a:solidFill>
-                  <a:srgbClr val="111111"/>
-                </a:solidFill>
-              </a:rPr>
-              <a:t>Two clean negatives worth having</a:t>
-            </a:r>
-            <a:endParaRPr lang="en-US" sz="1700" dirty="0"/>
-          </a:p>
-          <a:p>
-            <a:pPr algn="l" lvl="1" marL="685800" indent="-342900">
-              <a:spcAft>
-                <a:spcPts val="400"/>
-              </a:spcAft>
-              <a:buSzPct val="100000"/>
-              <a:buChar char="▪"/>
-            </a:pPr>
-            <a:r>
-              <a:rPr lang="en-US" sz="1450" dirty="0">
-                <a:solidFill>
-                  <a:srgbClr val="595959"/>
-                </a:solidFill>
-              </a:rPr>
-              <a:t>Reverse-complementing the whole motif costs nothing in either class (-0.03 log2, p = 0.89) — expected for a palindromic TRE, and a sanity check on the head.</a:t>
-            </a:r>
-            <a:endParaRPr lang="en-US" sz="1700" dirty="0"/>
-          </a:p>
-          <a:p>
-            <a:pPr algn="l" lvl="1" marL="685800" indent="-342900">
-              <a:spcAft>
-                <a:spcPts val="400"/>
-              </a:spcAft>
-              <a:buSzPct val="100000"/>
-              <a:buChar char="▪"/>
-            </a:pPr>
-            <a:r>
-              <a:rPr lang="en-US" sz="1450" dirty="0">
-                <a:solidFill>
-                  <a:srgbClr val="595959"/>
-                </a:solidFill>
-              </a:rPr>
-              <a:t>The spacing preference for a second copy is identical: best at ±20–40 bp, decaying by ±150 bp, with no class difference at any distance (all FDR &gt; 0.58).</a:t>
-            </a:r>
-            <a:endParaRPr lang="en-US" sz="1700" dirty="0"/>
+              <a:t>Exercise Down is 115 sites and its interval (24.2–32.2%) overlaps the gaining classes, so the ordering within Dynamic is suggestive, not established. Every class is below Stable, and that part is solid.</a:t>
+            </a:r>
+            <a:endParaRPr lang="en-US" sz="1300" dirty="0"/>
           </a:p>
         </p:txBody>
       </p:sp>
@@ -5452,7 +3992,2204 @@
                   <a:schemeClr val="tx1"/>
                 </a:solidFill>
               </a:rPr>
-              <a:t>How this sits with the MPRA work</a:t>
+              <a:t>Dynamic sites hand more of the load to the partner motifs</a:t>
+            </a:r>
+            <a:endParaRPr lang="en-US" sz="2800" dirty="0"/>
+          </a:p>
+        </p:txBody>
+      </p:sp>
+      <p:sp>
+        <p:nvSpPr>
+          <p:cNvPr id="3" name="Text 1"/>
+          <p:cNvSpPr txBox="1"/>
+          <p:nvPr/>
+        </p:nvSpPr>
+        <p:spPr>
+          <a:xfrm>
+            <a:off x="502920" y="969264"/>
+            <a:ext cx="11155680" cy="310896"/>
+          </a:xfrm>
+          <a:prstGeom prst="rect">
+            <a:avLst/>
+          </a:prstGeom>
+          <a:noFill/>
+          <a:ln/>
+        </p:spPr>
+        <p:txBody>
+          <a:bodyPr wrap="square" lIns="0" tIns="0" rIns="0" bIns="0" rtlCol="0" anchor="ctr"/>
+          <a:lstStyle/>
+          <a:p>
+            <a:pPr indent="0" marL="0">
+              <a:buNone/>
+            </a:pPr>
+            <a:r>
+              <a:rPr lang="en-US" sz="1250" i="1" dirty="0">
+                <a:solidFill>
+                  <a:srgbClr val="595959"/>
+                </a:solidFill>
+              </a:rPr>
+              <a:t>Per site: |own AP-1| / (|own AP-1| + |partner motifs|), the share of its motif dependence that sits inside the AP-1 motif rather than outside it. Both terms are AlphaGenome shuffle effects measured inside the same window, so accessibility cannot drive the comparison. Median per site; error bar, bootstrap 95% CI; Mann–Whitney.</a:t>
+            </a:r>
+            <a:endParaRPr lang="en-US" sz="1250" dirty="0"/>
+          </a:p>
+        </p:txBody>
+      </p:sp>
+      <p:pic>
+        <p:nvPicPr>
+          <p:cNvPr id="4" name="Image 0" descr="/Users/z5162865/WongLab/AlphaGenome_Ap1/Analysis/slide_figures/r_fb_share.png">    </p:cNvPr>
+          <p:cNvPicPr>
+            <a:picLocks noChangeAspect="1"/>
+          </p:cNvPicPr>
+          <p:nvPr/>
+        </p:nvPicPr>
+        <p:blipFill>
+          <a:blip r:embed="rId1"/>
+          <a:stretch>
+            <a:fillRect/>
+          </a:stretch>
+        </p:blipFill>
+        <p:spPr>
+          <a:xfrm>
+            <a:off x="1414343" y="1335024"/>
+            <a:ext cx="9332834" cy="3858768"/>
+          </a:xfrm>
+          <a:prstGeom prst="rect">
+            <a:avLst/>
+          </a:prstGeom>
+        </p:spPr>
+      </p:pic>
+      <p:sp>
+        <p:nvSpPr>
+          <p:cNvPr id="5" name="Shape 2"/>
+          <p:cNvSpPr/>
+          <p:nvPr/>
+        </p:nvSpPr>
+        <p:spPr>
+          <a:xfrm>
+            <a:off x="502920" y="5303520"/>
+            <a:ext cx="50292" cy="868680"/>
+          </a:xfrm>
+          <a:prstGeom prst="rect">
+            <a:avLst/>
+          </a:prstGeom>
+          <a:solidFill>
+            <a:srgbClr val="3F3F3F"/>
+          </a:solidFill>
+          <a:ln w="12700">
+            <a:solidFill>
+              <a:srgbClr val="333333"/>
+            </a:solidFill>
+            <a:prstDash val="solid"/>
+          </a:ln>
+        </p:spPr>
+      </p:sp>
+      <p:sp>
+        <p:nvSpPr>
+          <p:cNvPr id="6" name="Text 3"/>
+          <p:cNvSpPr txBox="1"/>
+          <p:nvPr/>
+        </p:nvSpPr>
+        <p:spPr>
+          <a:xfrm>
+            <a:off x="749808" y="5303520"/>
+            <a:ext cx="10881360" cy="868680"/>
+          </a:xfrm>
+          <a:prstGeom prst="rect">
+            <a:avLst/>
+          </a:prstGeom>
+          <a:noFill/>
+          <a:ln/>
+        </p:spPr>
+        <p:txBody>
+          <a:bodyPr wrap="square" lIns="0" tIns="0" rIns="0" bIns="0" rtlCol="0" anchor="ctr"/>
+          <a:lstStyle/>
+          <a:p>
+            <a:pPr indent="0" marL="0">
+              <a:buNone/>
+            </a:pPr>
+            <a:r>
+              <a:rPr lang="en-US" sz="1700" dirty="0">
+                <a:solidFill>
+                  <a:srgbClr val="111111"/>
+                </a:solidFill>
+              </a:rPr>
+              <a:t>Outside the motif is where every class differs: a Stable site leaves 20% of its motif dependence to partners, each of the four Dynamic classes 25–27% — about a third more — and all four sit on the same side, gaining and losing alike. AP-1 still leads everywhere; it just carries less of the load.</a:t>
+            </a:r>
+            <a:endParaRPr lang="en-US" sz="1700" dirty="0"/>
+          </a:p>
+        </p:txBody>
+      </p:sp>
+      <p:sp>
+        <p:nvSpPr>
+          <p:cNvPr id="25" name="Slide Number Placeholder 0"/>
+          <p:cNvSpPr>
+            <a:spLocks noGrp="1"/>
+          </p:cNvSpPr>
+          <p:nvPr>
+            <p:ph type="sldNum" sz="quarter" idx="4294967295"/>
+          </p:nvPr>
+        </p:nvSpPr>
+        <p:spPr>
+          <a:xfrm>
+            <a:off x="11658600" y="6446520"/>
+            <a:ext cx="800000" cy="300000"/>
+          </a:xfrm>
+          <a:prstGeom prst="rect">
+            <a:avLst/>
+          </a:prstGeom>
+          <a:extLst>
+            <a:ext uri="{C572A759-6A51-4108-AA02-DFA0A04FC94B}">
+              <ma14:wrappingTextBoxFlag xmlns:ma14="http://schemas.microsoft.com/office/mac/drawingml/2011/main" val="0"/>
+            </a:ext>
+          </a:extLst>
+        </p:spPr>
+        <p:txBody>
+          <a:bodyPr/>
+          <a:lstStyle>
+            <a:lvl1pPr>
+              <a:defRPr sz="1000">
+                <a:solidFill>
+                  <a:srgbClr val="A6A6A6"/>
+                </a:solidFill>
+              </a:defRPr>
+            </a:lvl1pPr>
+          </a:lstStyle>
+          <a:p>
+            <a:pPr algn="l"/>
+            <a:fld id="{F7021451-1387-4CA6-816F-3879F97B5CBC}" type="slidenum">
+              <a:rPr b="0" lang="en-US"/>
+              <a:t>14</a:t>
+            </a:fld>
+            <a:endParaRPr lang="en-US"/>
+          </a:p>
+        </p:txBody>
+      </p:sp>
+    </p:spTree>
+  </p:cSld>
+  <p:clrMapOvr>
+    <a:masterClrMapping/>
+  </p:clrMapOvr>
+</p:sld>
+</file>
+
+<file path=ppt/slides/slide15.xml><?xml version="1.0" encoding="utf-8"?>
+<p:sld xmlns:a="http://schemas.openxmlformats.org/drawingml/2006/main" xmlns:r="http://schemas.openxmlformats.org/officeDocument/2006/relationships" xmlns:p="http://schemas.openxmlformats.org/presentationml/2006/main">
+  <p:cSld name="Slide 15">
+    <p:spTree>
+      <p:nvGrpSpPr>
+        <p:cNvPr id="1" name=""/>
+        <p:cNvGrpSpPr/>
+        <p:nvPr/>
+      </p:nvGrpSpPr>
+      <p:grpSpPr>
+        <a:xfrm>
+          <a:off x="0" y="0"/>
+          <a:ext cx="0" cy="0"/>
+          <a:chOff x="0" y="0"/>
+          <a:chExt cx="0" cy="0"/>
+        </a:xfrm>
+      </p:grpSpPr>
+      <p:sp>
+        <p:nvSpPr>
+          <p:cNvPr id="2" name="Text 0"/>
+          <p:cNvSpPr/>
+          <p:nvPr>
+            <p:ph idx="100" type="title" hasCustomPrompt="1"/>
+          </p:nvPr>
+        </p:nvSpPr>
+        <p:spPr>
+          <a:xfrm>
+            <a:off x="502920" y="274320"/>
+            <a:ext cx="11155680" cy="731520"/>
+          </a:xfrm>
+          <a:prstGeom prst="rect">
+            <a:avLst/>
+          </a:prstGeom>
+          <a:noFill/>
+          <a:ln/>
+        </p:spPr>
+        <p:txBody>
+          <a:bodyPr wrap="square" rtlCol="0" anchor="ctr"/>
+          <a:lstStyle/>
+          <a:p>
+            <a:pPr algn="l" indent="0" marL="0">
+              <a:buNone/>
+            </a:pPr>
+            <a:r>
+              <a:rPr lang="en-US" sz="2800" b="1" dirty="0">
+                <a:solidFill>
+                  <a:schemeClr val="tx1"/>
+                </a:solidFill>
+              </a:rPr>
+              <a:t>The AP-1 ladder, and the spacing experiments</a:t>
+            </a:r>
+            <a:endParaRPr lang="en-US" sz="2800" dirty="0"/>
+          </a:p>
+        </p:txBody>
+      </p:sp>
+      <p:sp>
+        <p:nvSpPr>
+          <p:cNvPr id="3" name="Text 1"/>
+          <p:cNvSpPr txBox="1"/>
+          <p:nvPr/>
+        </p:nvSpPr>
+        <p:spPr>
+          <a:xfrm>
+            <a:off x="644901" y="1679254"/>
+            <a:ext cx="5273594" cy="202831"/>
+          </a:xfrm>
+          <a:prstGeom prst="rect">
+            <a:avLst/>
+          </a:prstGeom>
+          <a:noFill/>
+          <a:ln/>
+        </p:spPr>
+        <p:txBody>
+          <a:bodyPr wrap="square" lIns="0" tIns="0" rIns="0" bIns="0" rtlCol="0" anchor="ctr"/>
+          <a:lstStyle/>
+          <a:p>
+            <a:pPr algn="l" indent="0" marL="0">
+              <a:lnSpc>
+                <a:spcPct val="95000"/>
+              </a:lnSpc>
+              <a:buNone/>
+            </a:pPr>
+            <a:r>
+              <a:rPr lang="en-US" sz="1300" b="1" dirty="0">
+                <a:solidFill>
+                  <a:srgbClr val="15181C"/>
+                </a:solidFill>
+                <a:latin typeface="Arial" pitchFamily="34" charset="0"/>
+                <a:ea typeface="Arial" pitchFamily="34" charset="-122"/>
+                <a:cs typeface="Arial" pitchFamily="34" charset="-120"/>
+              </a:rPr>
+              <a:t>WEAKEN THE MOTIF, ONE BASE AT A TIME</a:t>
+            </a:r>
+            <a:endParaRPr lang="en-US" sz="1300" dirty="0"/>
+          </a:p>
+        </p:txBody>
+      </p:sp>
+      <p:sp>
+        <p:nvSpPr>
+          <p:cNvPr id="4" name="Shape 2"/>
+          <p:cNvSpPr/>
+          <p:nvPr/>
+        </p:nvSpPr>
+        <p:spPr>
+          <a:xfrm>
+            <a:off x="2693490" y="2105198"/>
+            <a:ext cx="4583970" cy="0"/>
+          </a:xfrm>
+          <a:prstGeom prst="line">
+            <a:avLst/>
+          </a:prstGeom>
+          <a:noFill/>
+          <a:ln w="13970">
+            <a:solidFill>
+              <a:srgbClr val="5A6471">
+                <a:alpha val="45000"/>
+              </a:srgbClr>
+            </a:solidFill>
+            <a:prstDash val="solid"/>
+            <a:tailEnd type="triangle"/>
+          </a:ln>
+        </p:spPr>
+      </p:sp>
+      <p:sp>
+        <p:nvSpPr>
+          <p:cNvPr id="5" name="Text 3"/>
+          <p:cNvSpPr txBox="1"/>
+          <p:nvPr/>
+        </p:nvSpPr>
+        <p:spPr>
+          <a:xfrm>
+            <a:off x="3971322" y="1841518"/>
+            <a:ext cx="2028305" cy="202831"/>
+          </a:xfrm>
+          <a:prstGeom prst="rect">
+            <a:avLst/>
+          </a:prstGeom>
+          <a:noFill/>
+          <a:ln/>
+        </p:spPr>
+        <p:txBody>
+          <a:bodyPr wrap="square" lIns="0" tIns="0" rIns="0" bIns="0" rtlCol="0" anchor="ctr"/>
+          <a:lstStyle/>
+          <a:p>
+            <a:pPr algn="ctr" indent="0" marL="0">
+              <a:lnSpc>
+                <a:spcPct val="95000"/>
+              </a:lnSpc>
+              <a:buNone/>
+            </a:pPr>
+            <a:r>
+              <a:rPr lang="en-US" sz="1100" dirty="0">
+                <a:solidFill>
+                  <a:srgbClr val="5A6471"/>
+                </a:solidFill>
+                <a:latin typeface="Arial" pitchFamily="34" charset="0"/>
+                <a:ea typeface="Arial" pitchFamily="34" charset="-122"/>
+                <a:cs typeface="Arial" pitchFamily="34" charset="-120"/>
+              </a:rPr>
+              <a:t>weaker grip</a:t>
+            </a:r>
+            <a:endParaRPr lang="en-US" sz="1100" dirty="0"/>
+          </a:p>
+        </p:txBody>
+      </p:sp>
+      <p:sp>
+        <p:nvSpPr>
+          <p:cNvPr id="6" name="Shape 4"/>
+          <p:cNvSpPr/>
+          <p:nvPr/>
+        </p:nvSpPr>
+        <p:spPr>
+          <a:xfrm>
+            <a:off x="989713" y="2652841"/>
+            <a:ext cx="1541512" cy="0"/>
+          </a:xfrm>
+          <a:prstGeom prst="line">
+            <a:avLst/>
+          </a:prstGeom>
+          <a:noFill/>
+          <a:ln w="20320">
+            <a:solidFill>
+              <a:srgbClr val="15181C">
+                <a:alpha val="55000"/>
+              </a:srgbClr>
+            </a:solidFill>
+            <a:prstDash val="solid"/>
+          </a:ln>
+        </p:spPr>
+      </p:sp>
+      <p:sp>
+        <p:nvSpPr>
+          <p:cNvPr id="7" name="Shape 5"/>
+          <p:cNvSpPr/>
+          <p:nvPr/>
+        </p:nvSpPr>
+        <p:spPr>
+          <a:xfrm>
+            <a:off x="1517073" y="2597062"/>
+            <a:ext cx="486793" cy="111557"/>
+          </a:xfrm>
+          <a:prstGeom prst="roundRect">
+            <a:avLst>
+              <a:gd name="adj" fmla="val 16393"/>
+            </a:avLst>
+          </a:prstGeom>
+          <a:solidFill>
+            <a:srgbClr val="D9A32B">
+              <a:alpha val="80000"/>
+            </a:srgbClr>
+          </a:solidFill>
+          <a:ln w="13970">
+            <a:solidFill>
+              <a:srgbClr val="D9A32B"/>
+            </a:solidFill>
+            <a:prstDash val="solid"/>
+          </a:ln>
+        </p:spPr>
+      </p:sp>
+      <p:sp>
+        <p:nvSpPr>
+          <p:cNvPr id="8" name="Text 6"/>
+          <p:cNvSpPr txBox="1"/>
+          <p:nvPr/>
+        </p:nvSpPr>
+        <p:spPr>
+          <a:xfrm>
+            <a:off x="949147" y="2794822"/>
+            <a:ext cx="1622644" cy="283963"/>
+          </a:xfrm>
+          <a:prstGeom prst="rect">
+            <a:avLst/>
+          </a:prstGeom>
+          <a:noFill/>
+          <a:ln/>
+        </p:spPr>
+        <p:txBody>
+          <a:bodyPr wrap="square" lIns="0" tIns="0" rIns="0" bIns="0" rtlCol="0" anchor="ctr"/>
+          <a:lstStyle/>
+          <a:p>
+            <a:pPr algn="ctr" indent="0" marL="0">
+              <a:buNone/>
+            </a:pPr>
+            <a:r>
+              <a:rPr lang="en-US" sz="1250" spc="150" kern="0" dirty="0">
+                <a:solidFill>
+                  <a:srgbClr val="15181C"/>
+                </a:solidFill>
+                <a:latin typeface="Arial" pitchFamily="34" charset="0"/>
+                <a:ea typeface="Arial" pitchFamily="34" charset="-122"/>
+                <a:cs typeface="Arial" pitchFamily="34" charset="-120"/>
+              </a:rPr>
+              <a:t>T </a:t>
+            </a:r>
+            <a:pPr algn="ctr" indent="0" marL="0">
+              <a:buNone/>
+            </a:pPr>
+            <a:r>
+              <a:rPr lang="en-US" sz="1250" spc="150" kern="0" dirty="0">
+                <a:solidFill>
+                  <a:srgbClr val="15181C"/>
+                </a:solidFill>
+                <a:latin typeface="Arial" pitchFamily="34" charset="0"/>
+                <a:ea typeface="Arial" pitchFamily="34" charset="-122"/>
+                <a:cs typeface="Arial" pitchFamily="34" charset="-120"/>
+              </a:rPr>
+              <a:t>G </a:t>
+            </a:r>
+            <a:pPr algn="ctr" indent="0" marL="0">
+              <a:buNone/>
+            </a:pPr>
+            <a:r>
+              <a:rPr lang="en-US" sz="1250" spc="150" kern="0" dirty="0">
+                <a:solidFill>
+                  <a:srgbClr val="15181C"/>
+                </a:solidFill>
+                <a:latin typeface="Arial" pitchFamily="34" charset="0"/>
+                <a:ea typeface="Arial" pitchFamily="34" charset="-122"/>
+                <a:cs typeface="Arial" pitchFamily="34" charset="-120"/>
+              </a:rPr>
+              <a:t>A </a:t>
+            </a:r>
+            <a:pPr algn="ctr" indent="0" marL="0">
+              <a:buNone/>
+            </a:pPr>
+            <a:r>
+              <a:rPr lang="en-US" sz="1250" spc="150" kern="0" dirty="0">
+                <a:solidFill>
+                  <a:srgbClr val="15181C"/>
+                </a:solidFill>
+                <a:latin typeface="Arial" pitchFamily="34" charset="0"/>
+                <a:ea typeface="Arial" pitchFamily="34" charset="-122"/>
+                <a:cs typeface="Arial" pitchFamily="34" charset="-120"/>
+              </a:rPr>
+              <a:t>G </a:t>
+            </a:r>
+            <a:pPr algn="ctr" indent="0" marL="0">
+              <a:buNone/>
+            </a:pPr>
+            <a:r>
+              <a:rPr lang="en-US" sz="1250" spc="150" kern="0" dirty="0">
+                <a:solidFill>
+                  <a:srgbClr val="15181C"/>
+                </a:solidFill>
+                <a:latin typeface="Arial" pitchFamily="34" charset="0"/>
+                <a:ea typeface="Arial" pitchFamily="34" charset="-122"/>
+                <a:cs typeface="Arial" pitchFamily="34" charset="-120"/>
+              </a:rPr>
+              <a:t>T </a:t>
+            </a:r>
+            <a:pPr algn="ctr" indent="0" marL="0">
+              <a:buNone/>
+            </a:pPr>
+            <a:r>
+              <a:rPr lang="en-US" sz="1250" spc="150" kern="0" dirty="0">
+                <a:solidFill>
+                  <a:srgbClr val="15181C"/>
+                </a:solidFill>
+                <a:latin typeface="Arial" pitchFamily="34" charset="0"/>
+                <a:ea typeface="Arial" pitchFamily="34" charset="-122"/>
+                <a:cs typeface="Arial" pitchFamily="34" charset="-120"/>
+              </a:rPr>
+              <a:t>C </a:t>
+            </a:r>
+            <a:pPr algn="ctr" indent="0" marL="0">
+              <a:buNone/>
+            </a:pPr>
+            <a:r>
+              <a:rPr lang="en-US" sz="1250" spc="150" kern="0" dirty="0">
+                <a:solidFill>
+                  <a:srgbClr val="15181C"/>
+                </a:solidFill>
+                <a:latin typeface="Arial" pitchFamily="34" charset="0"/>
+                <a:ea typeface="Arial" pitchFamily="34" charset="-122"/>
+                <a:cs typeface="Arial" pitchFamily="34" charset="-120"/>
+              </a:rPr>
+              <a:t>A</a:t>
+            </a:r>
+            <a:endParaRPr lang="en-US" sz="1250" dirty="0"/>
+          </a:p>
+        </p:txBody>
+      </p:sp>
+      <p:sp>
+        <p:nvSpPr>
+          <p:cNvPr id="9" name="Text 7"/>
+          <p:cNvSpPr txBox="1"/>
+          <p:nvPr/>
+        </p:nvSpPr>
+        <p:spPr>
+          <a:xfrm>
+            <a:off x="644901" y="3099068"/>
+            <a:ext cx="2231136" cy="202831"/>
+          </a:xfrm>
+          <a:prstGeom prst="rect">
+            <a:avLst/>
+          </a:prstGeom>
+          <a:noFill/>
+          <a:ln/>
+        </p:spPr>
+        <p:txBody>
+          <a:bodyPr wrap="square" lIns="0" tIns="0" rIns="0" bIns="0" rtlCol="0" anchor="ctr"/>
+          <a:lstStyle/>
+          <a:p>
+            <a:pPr algn="ctr" indent="0" marL="0">
+              <a:lnSpc>
+                <a:spcPct val="95000"/>
+              </a:lnSpc>
+              <a:buNone/>
+            </a:pPr>
+            <a:r>
+              <a:rPr lang="en-US" sz="1100" dirty="0">
+                <a:solidFill>
+                  <a:srgbClr val="5A6471"/>
+                </a:solidFill>
+                <a:latin typeface="Arial" pitchFamily="34" charset="0"/>
+                <a:ea typeface="Arial" pitchFamily="34" charset="-122"/>
+                <a:cs typeface="Arial" pitchFamily="34" charset="-120"/>
+              </a:rPr>
+              <a:t>perfect core</a:t>
+            </a:r>
+            <a:endParaRPr lang="en-US" sz="1100" dirty="0"/>
+          </a:p>
+        </p:txBody>
+      </p:sp>
+      <p:sp>
+        <p:nvSpPr>
+          <p:cNvPr id="10" name="Shape 8"/>
+          <p:cNvSpPr/>
+          <p:nvPr/>
+        </p:nvSpPr>
+        <p:spPr>
+          <a:xfrm>
+            <a:off x="3139717" y="2652841"/>
+            <a:ext cx="1541512" cy="0"/>
+          </a:xfrm>
+          <a:prstGeom prst="line">
+            <a:avLst/>
+          </a:prstGeom>
+          <a:noFill/>
+          <a:ln w="20320">
+            <a:solidFill>
+              <a:srgbClr val="15181C">
+                <a:alpha val="55000"/>
+              </a:srgbClr>
+            </a:solidFill>
+            <a:prstDash val="solid"/>
+          </a:ln>
+        </p:spPr>
+      </p:sp>
+      <p:sp>
+        <p:nvSpPr>
+          <p:cNvPr id="11" name="Shape 9"/>
+          <p:cNvSpPr/>
+          <p:nvPr/>
+        </p:nvSpPr>
+        <p:spPr>
+          <a:xfrm>
+            <a:off x="3667077" y="2597062"/>
+            <a:ext cx="486793" cy="111557"/>
+          </a:xfrm>
+          <a:prstGeom prst="roundRect">
+            <a:avLst>
+              <a:gd name="adj" fmla="val 16393"/>
+            </a:avLst>
+          </a:prstGeom>
+          <a:solidFill>
+            <a:srgbClr val="D9A32B">
+              <a:alpha val="58000"/>
+            </a:srgbClr>
+          </a:solidFill>
+          <a:ln w="13970">
+            <a:solidFill>
+              <a:srgbClr val="D9A32B"/>
+            </a:solidFill>
+            <a:prstDash val="solid"/>
+          </a:ln>
+        </p:spPr>
+      </p:sp>
+      <p:sp>
+        <p:nvSpPr>
+          <p:cNvPr id="12" name="Text 10"/>
+          <p:cNvSpPr txBox="1"/>
+          <p:nvPr/>
+        </p:nvSpPr>
+        <p:spPr>
+          <a:xfrm>
+            <a:off x="3099151" y="2794822"/>
+            <a:ext cx="1622644" cy="283963"/>
+          </a:xfrm>
+          <a:prstGeom prst="rect">
+            <a:avLst/>
+          </a:prstGeom>
+          <a:noFill/>
+          <a:ln/>
+        </p:spPr>
+        <p:txBody>
+          <a:bodyPr wrap="square" lIns="0" tIns="0" rIns="0" bIns="0" rtlCol="0" anchor="ctr"/>
+          <a:lstStyle/>
+          <a:p>
+            <a:pPr algn="ctr" indent="0" marL="0">
+              <a:buNone/>
+            </a:pPr>
+            <a:r>
+              <a:rPr lang="en-US" sz="1250" spc="150" kern="0" dirty="0">
+                <a:solidFill>
+                  <a:srgbClr val="15181C"/>
+                </a:solidFill>
+                <a:latin typeface="Arial" pitchFamily="34" charset="0"/>
+                <a:ea typeface="Arial" pitchFamily="34" charset="-122"/>
+                <a:cs typeface="Arial" pitchFamily="34" charset="-120"/>
+              </a:rPr>
+              <a:t>T </a:t>
+            </a:r>
+            <a:pPr algn="ctr" indent="0" marL="0">
+              <a:buNone/>
+            </a:pPr>
+            <a:r>
+              <a:rPr lang="en-US" sz="1250" spc="150" kern="0" dirty="0">
+                <a:solidFill>
+                  <a:srgbClr val="15181C"/>
+                </a:solidFill>
+                <a:latin typeface="Arial" pitchFamily="34" charset="0"/>
+                <a:ea typeface="Arial" pitchFamily="34" charset="-122"/>
+                <a:cs typeface="Arial" pitchFamily="34" charset="-120"/>
+              </a:rPr>
+              <a:t>G </a:t>
+            </a:r>
+            <a:pPr algn="ctr" indent="0" marL="0">
+              <a:buNone/>
+            </a:pPr>
+            <a:r>
+              <a:rPr lang="en-US" sz="1250" spc="150" kern="0" dirty="0">
+                <a:solidFill>
+                  <a:srgbClr val="15181C"/>
+                </a:solidFill>
+                <a:latin typeface="Arial" pitchFamily="34" charset="0"/>
+                <a:ea typeface="Arial" pitchFamily="34" charset="-122"/>
+                <a:cs typeface="Arial" pitchFamily="34" charset="-120"/>
+              </a:rPr>
+              <a:t>A </a:t>
+            </a:r>
+            <a:pPr algn="ctr" indent="0" marL="0">
+              <a:buNone/>
+            </a:pPr>
+            <a:r>
+              <a:rPr lang="en-US" sz="1250" b="1" spc="150" kern="0" dirty="0">
+                <a:solidFill>
+                  <a:srgbClr val="A2380F"/>
+                </a:solidFill>
+                <a:latin typeface="Arial" pitchFamily="34" charset="0"/>
+                <a:ea typeface="Arial" pitchFamily="34" charset="-122"/>
+                <a:cs typeface="Arial" pitchFamily="34" charset="-120"/>
+              </a:rPr>
+              <a:t>C </a:t>
+            </a:r>
+            <a:pPr algn="ctr" indent="0" marL="0">
+              <a:buNone/>
+            </a:pPr>
+            <a:r>
+              <a:rPr lang="en-US" sz="1250" spc="150" kern="0" dirty="0">
+                <a:solidFill>
+                  <a:srgbClr val="15181C"/>
+                </a:solidFill>
+                <a:latin typeface="Arial" pitchFamily="34" charset="0"/>
+                <a:ea typeface="Arial" pitchFamily="34" charset="-122"/>
+                <a:cs typeface="Arial" pitchFamily="34" charset="-120"/>
+              </a:rPr>
+              <a:t>T </a:t>
+            </a:r>
+            <a:pPr algn="ctr" indent="0" marL="0">
+              <a:buNone/>
+            </a:pPr>
+            <a:r>
+              <a:rPr lang="en-US" sz="1250" spc="150" kern="0" dirty="0">
+                <a:solidFill>
+                  <a:srgbClr val="15181C"/>
+                </a:solidFill>
+                <a:latin typeface="Arial" pitchFamily="34" charset="0"/>
+                <a:ea typeface="Arial" pitchFamily="34" charset="-122"/>
+                <a:cs typeface="Arial" pitchFamily="34" charset="-120"/>
+              </a:rPr>
+              <a:t>C </a:t>
+            </a:r>
+            <a:pPr algn="ctr" indent="0" marL="0">
+              <a:buNone/>
+            </a:pPr>
+            <a:r>
+              <a:rPr lang="en-US" sz="1250" spc="150" kern="0" dirty="0">
+                <a:solidFill>
+                  <a:srgbClr val="15181C"/>
+                </a:solidFill>
+                <a:latin typeface="Arial" pitchFamily="34" charset="0"/>
+                <a:ea typeface="Arial" pitchFamily="34" charset="-122"/>
+                <a:cs typeface="Arial" pitchFamily="34" charset="-120"/>
+              </a:rPr>
+              <a:t>A</a:t>
+            </a:r>
+            <a:endParaRPr lang="en-US" sz="1250" dirty="0"/>
+          </a:p>
+        </p:txBody>
+      </p:sp>
+      <p:sp>
+        <p:nvSpPr>
+          <p:cNvPr id="13" name="Text 11"/>
+          <p:cNvSpPr txBox="1"/>
+          <p:nvPr/>
+        </p:nvSpPr>
+        <p:spPr>
+          <a:xfrm>
+            <a:off x="2794905" y="3099068"/>
+            <a:ext cx="2231136" cy="202831"/>
+          </a:xfrm>
+          <a:prstGeom prst="rect">
+            <a:avLst/>
+          </a:prstGeom>
+          <a:noFill/>
+          <a:ln/>
+        </p:spPr>
+        <p:txBody>
+          <a:bodyPr wrap="square" lIns="0" tIns="0" rIns="0" bIns="0" rtlCol="0" anchor="ctr"/>
+          <a:lstStyle/>
+          <a:p>
+            <a:pPr algn="ctr" indent="0" marL="0">
+              <a:lnSpc>
+                <a:spcPct val="95000"/>
+              </a:lnSpc>
+              <a:buNone/>
+            </a:pPr>
+            <a:r>
+              <a:rPr lang="en-US" sz="1100" dirty="0">
+                <a:solidFill>
+                  <a:srgbClr val="5A6471"/>
+                </a:solidFill>
+                <a:latin typeface="Arial" pitchFamily="34" charset="0"/>
+                <a:ea typeface="Arial" pitchFamily="34" charset="-122"/>
+                <a:cs typeface="Arial" pitchFamily="34" charset="-120"/>
+              </a:rPr>
+              <a:t>1 base changed</a:t>
+            </a:r>
+            <a:endParaRPr lang="en-US" sz="1100" dirty="0"/>
+          </a:p>
+        </p:txBody>
+      </p:sp>
+      <p:sp>
+        <p:nvSpPr>
+          <p:cNvPr id="14" name="Shape 12"/>
+          <p:cNvSpPr/>
+          <p:nvPr/>
+        </p:nvSpPr>
+        <p:spPr>
+          <a:xfrm>
+            <a:off x="5289721" y="2652841"/>
+            <a:ext cx="1541512" cy="0"/>
+          </a:xfrm>
+          <a:prstGeom prst="line">
+            <a:avLst/>
+          </a:prstGeom>
+          <a:noFill/>
+          <a:ln w="20320">
+            <a:solidFill>
+              <a:srgbClr val="15181C">
+                <a:alpha val="55000"/>
+              </a:srgbClr>
+            </a:solidFill>
+            <a:prstDash val="solid"/>
+          </a:ln>
+        </p:spPr>
+      </p:sp>
+      <p:sp>
+        <p:nvSpPr>
+          <p:cNvPr id="15" name="Shape 13"/>
+          <p:cNvSpPr/>
+          <p:nvPr/>
+        </p:nvSpPr>
+        <p:spPr>
+          <a:xfrm>
+            <a:off x="5817080" y="2597062"/>
+            <a:ext cx="486793" cy="111557"/>
+          </a:xfrm>
+          <a:prstGeom prst="roundRect">
+            <a:avLst>
+              <a:gd name="adj" fmla="val 16393"/>
+            </a:avLst>
+          </a:prstGeom>
+          <a:solidFill>
+            <a:srgbClr val="D9A32B">
+              <a:alpha val="36000"/>
+            </a:srgbClr>
+          </a:solidFill>
+          <a:ln w="13970">
+            <a:solidFill>
+              <a:srgbClr val="D9A32B"/>
+            </a:solidFill>
+            <a:prstDash val="solid"/>
+          </a:ln>
+        </p:spPr>
+      </p:sp>
+      <p:sp>
+        <p:nvSpPr>
+          <p:cNvPr id="16" name="Text 14"/>
+          <p:cNvSpPr txBox="1"/>
+          <p:nvPr/>
+        </p:nvSpPr>
+        <p:spPr>
+          <a:xfrm>
+            <a:off x="5249155" y="2794822"/>
+            <a:ext cx="1622644" cy="283963"/>
+          </a:xfrm>
+          <a:prstGeom prst="rect">
+            <a:avLst/>
+          </a:prstGeom>
+          <a:noFill/>
+          <a:ln/>
+        </p:spPr>
+        <p:txBody>
+          <a:bodyPr wrap="square" lIns="0" tIns="0" rIns="0" bIns="0" rtlCol="0" anchor="ctr"/>
+          <a:lstStyle/>
+          <a:p>
+            <a:pPr algn="ctr" indent="0" marL="0">
+              <a:buNone/>
+            </a:pPr>
+            <a:r>
+              <a:rPr lang="en-US" sz="1250" spc="150" kern="0" dirty="0">
+                <a:solidFill>
+                  <a:srgbClr val="15181C"/>
+                </a:solidFill>
+                <a:latin typeface="Arial" pitchFamily="34" charset="0"/>
+                <a:ea typeface="Arial" pitchFamily="34" charset="-122"/>
+                <a:cs typeface="Arial" pitchFamily="34" charset="-120"/>
+              </a:rPr>
+              <a:t>T </a:t>
+            </a:r>
+            <a:pPr algn="ctr" indent="0" marL="0">
+              <a:buNone/>
+            </a:pPr>
+            <a:r>
+              <a:rPr lang="en-US" sz="1250" b="1" spc="150" kern="0" dirty="0">
+                <a:solidFill>
+                  <a:srgbClr val="A2380F"/>
+                </a:solidFill>
+                <a:latin typeface="Arial" pitchFamily="34" charset="0"/>
+                <a:ea typeface="Arial" pitchFamily="34" charset="-122"/>
+                <a:cs typeface="Arial" pitchFamily="34" charset="-120"/>
+              </a:rPr>
+              <a:t>C </a:t>
+            </a:r>
+            <a:pPr algn="ctr" indent="0" marL="0">
+              <a:buNone/>
+            </a:pPr>
+            <a:r>
+              <a:rPr lang="en-US" sz="1250" spc="150" kern="0" dirty="0">
+                <a:solidFill>
+                  <a:srgbClr val="15181C"/>
+                </a:solidFill>
+                <a:latin typeface="Arial" pitchFamily="34" charset="0"/>
+                <a:ea typeface="Arial" pitchFamily="34" charset="-122"/>
+                <a:cs typeface="Arial" pitchFamily="34" charset="-120"/>
+              </a:rPr>
+              <a:t>A </a:t>
+            </a:r>
+            <a:pPr algn="ctr" indent="0" marL="0">
+              <a:buNone/>
+            </a:pPr>
+            <a:r>
+              <a:rPr lang="en-US" sz="1250" b="1" spc="150" kern="0" dirty="0">
+                <a:solidFill>
+                  <a:srgbClr val="A2380F"/>
+                </a:solidFill>
+                <a:latin typeface="Arial" pitchFamily="34" charset="0"/>
+                <a:ea typeface="Arial" pitchFamily="34" charset="-122"/>
+                <a:cs typeface="Arial" pitchFamily="34" charset="-120"/>
+              </a:rPr>
+              <a:t>C </a:t>
+            </a:r>
+            <a:pPr algn="ctr" indent="0" marL="0">
+              <a:buNone/>
+            </a:pPr>
+            <a:r>
+              <a:rPr lang="en-US" sz="1250" spc="150" kern="0" dirty="0">
+                <a:solidFill>
+                  <a:srgbClr val="15181C"/>
+                </a:solidFill>
+                <a:latin typeface="Arial" pitchFamily="34" charset="0"/>
+                <a:ea typeface="Arial" pitchFamily="34" charset="-122"/>
+                <a:cs typeface="Arial" pitchFamily="34" charset="-120"/>
+              </a:rPr>
+              <a:t>T </a:t>
+            </a:r>
+            <a:pPr algn="ctr" indent="0" marL="0">
+              <a:buNone/>
+            </a:pPr>
+            <a:r>
+              <a:rPr lang="en-US" sz="1250" b="1" spc="150" kern="0" dirty="0">
+                <a:solidFill>
+                  <a:srgbClr val="A2380F"/>
+                </a:solidFill>
+                <a:latin typeface="Arial" pitchFamily="34" charset="0"/>
+                <a:ea typeface="Arial" pitchFamily="34" charset="-122"/>
+                <a:cs typeface="Arial" pitchFamily="34" charset="-120"/>
+              </a:rPr>
+              <a:t>T </a:t>
+            </a:r>
+            <a:pPr algn="ctr" indent="0" marL="0">
+              <a:buNone/>
+            </a:pPr>
+            <a:r>
+              <a:rPr lang="en-US" sz="1250" spc="150" kern="0" dirty="0">
+                <a:solidFill>
+                  <a:srgbClr val="15181C"/>
+                </a:solidFill>
+                <a:latin typeface="Arial" pitchFamily="34" charset="0"/>
+                <a:ea typeface="Arial" pitchFamily="34" charset="-122"/>
+                <a:cs typeface="Arial" pitchFamily="34" charset="-120"/>
+              </a:rPr>
+              <a:t>A</a:t>
+            </a:r>
+            <a:endParaRPr lang="en-US" sz="1250" dirty="0"/>
+          </a:p>
+        </p:txBody>
+      </p:sp>
+      <p:sp>
+        <p:nvSpPr>
+          <p:cNvPr id="17" name="Text 15"/>
+          <p:cNvSpPr txBox="1"/>
+          <p:nvPr/>
+        </p:nvSpPr>
+        <p:spPr>
+          <a:xfrm>
+            <a:off x="4944909" y="3099068"/>
+            <a:ext cx="2231136" cy="202831"/>
+          </a:xfrm>
+          <a:prstGeom prst="rect">
+            <a:avLst/>
+          </a:prstGeom>
+          <a:noFill/>
+          <a:ln/>
+        </p:spPr>
+        <p:txBody>
+          <a:bodyPr wrap="square" lIns="0" tIns="0" rIns="0" bIns="0" rtlCol="0" anchor="ctr"/>
+          <a:lstStyle/>
+          <a:p>
+            <a:pPr algn="ctr" indent="0" marL="0">
+              <a:lnSpc>
+                <a:spcPct val="95000"/>
+              </a:lnSpc>
+              <a:buNone/>
+            </a:pPr>
+            <a:r>
+              <a:rPr lang="en-US" sz="1100" dirty="0">
+                <a:solidFill>
+                  <a:srgbClr val="5A6471"/>
+                </a:solidFill>
+                <a:latin typeface="Arial" pitchFamily="34" charset="0"/>
+                <a:ea typeface="Arial" pitchFamily="34" charset="-122"/>
+                <a:cs typeface="Arial" pitchFamily="34" charset="-120"/>
+              </a:rPr>
+              <a:t>3 bases changed</a:t>
+            </a:r>
+            <a:endParaRPr lang="en-US" sz="1100" dirty="0"/>
+          </a:p>
+        </p:txBody>
+      </p:sp>
+      <p:sp>
+        <p:nvSpPr>
+          <p:cNvPr id="18" name="Shape 16"/>
+          <p:cNvSpPr/>
+          <p:nvPr/>
+        </p:nvSpPr>
+        <p:spPr>
+          <a:xfrm>
+            <a:off x="7439725" y="2652841"/>
+            <a:ext cx="1541512" cy="0"/>
+          </a:xfrm>
+          <a:prstGeom prst="line">
+            <a:avLst/>
+          </a:prstGeom>
+          <a:noFill/>
+          <a:ln w="20320">
+            <a:solidFill>
+              <a:srgbClr val="15181C">
+                <a:alpha val="55000"/>
+              </a:srgbClr>
+            </a:solidFill>
+            <a:prstDash val="solid"/>
+          </a:ln>
+        </p:spPr>
+      </p:sp>
+      <p:sp>
+        <p:nvSpPr>
+          <p:cNvPr id="19" name="Shape 17"/>
+          <p:cNvSpPr/>
+          <p:nvPr/>
+        </p:nvSpPr>
+        <p:spPr>
+          <a:xfrm>
+            <a:off x="7967084" y="2586921"/>
+            <a:ext cx="486793" cy="131840"/>
+          </a:xfrm>
+          <a:prstGeom prst="roundRect">
+            <a:avLst>
+              <a:gd name="adj" fmla="val 13871"/>
+            </a:avLst>
+          </a:prstGeom>
+          <a:solidFill>
+            <a:srgbClr val="E2622F">
+              <a:alpha val="14000"/>
+            </a:srgbClr>
+          </a:solidFill>
+          <a:ln w="9525">
+            <a:solidFill>
+              <a:srgbClr val="E2622F"/>
+            </a:solidFill>
+            <a:prstDash val="solid"/>
+          </a:ln>
+        </p:spPr>
+      </p:sp>
+      <p:sp>
+        <p:nvSpPr>
+          <p:cNvPr id="20" name="Shape 18"/>
+          <p:cNvSpPr/>
+          <p:nvPr/>
+        </p:nvSpPr>
+        <p:spPr>
+          <a:xfrm>
+            <a:off x="7967084" y="2602133"/>
+            <a:ext cx="486793" cy="101415"/>
+          </a:xfrm>
+          <a:custGeom>
+            <a:avLst/>
+            <a:gdLst/>
+            <a:ahLst/>
+            <a:cxnLst/>
+            <a:rect l="l" t="t" r="r" b="b"/>
+            <a:pathLst>
+              <a:path w="486793" h="101415">
+                <a:moveTo>
+                  <a:pt x="0" y="10142"/>
+                </a:moveTo>
+                <a:lnTo>
+                  <a:pt x="48679" y="91274"/>
+                </a:lnTo>
+                <a:lnTo>
+                  <a:pt x="97359" y="10142"/>
+                </a:lnTo>
+                <a:lnTo>
+                  <a:pt x="146038" y="91274"/>
+                </a:lnTo>
+                <a:lnTo>
+                  <a:pt x="194717" y="10142"/>
+                </a:lnTo>
+                <a:lnTo>
+                  <a:pt x="243397" y="91274"/>
+                </a:lnTo>
+                <a:lnTo>
+                  <a:pt x="292076" y="10142"/>
+                </a:lnTo>
+                <a:lnTo>
+                  <a:pt x="340755" y="91274"/>
+                </a:lnTo>
+                <a:lnTo>
+                  <a:pt x="389435" y="10142"/>
+                </a:lnTo>
+                <a:lnTo>
+                  <a:pt x="438114" y="91274"/>
+                </a:lnTo>
+                <a:lnTo>
+                  <a:pt x="486793" y="10142"/>
+                </a:lnTo>
+              </a:path>
+            </a:pathLst>
+          </a:custGeom>
+          <a:ln w="17780">
+            <a:solidFill>
+              <a:srgbClr val="E2622F"/>
+            </a:solidFill>
+            <a:prstDash val="solid"/>
+          </a:ln>
+        </p:spPr>
+      </p:sp>
+      <p:sp>
+        <p:nvSpPr>
+          <p:cNvPr id="21" name="Text 19"/>
+          <p:cNvSpPr txBox="1"/>
+          <p:nvPr/>
+        </p:nvSpPr>
+        <p:spPr>
+          <a:xfrm>
+            <a:off x="7399159" y="2794822"/>
+            <a:ext cx="1622644" cy="283963"/>
+          </a:xfrm>
+          <a:prstGeom prst="rect">
+            <a:avLst/>
+          </a:prstGeom>
+          <a:noFill/>
+          <a:ln/>
+        </p:spPr>
+        <p:txBody>
+          <a:bodyPr wrap="square" lIns="0" tIns="0" rIns="0" bIns="0" rtlCol="0" anchor="ctr"/>
+          <a:lstStyle/>
+          <a:p>
+            <a:pPr algn="ctr" indent="0" marL="0">
+              <a:buNone/>
+            </a:pPr>
+            <a:r>
+              <a:rPr lang="en-US" sz="1250" b="1" spc="150" kern="0" dirty="0">
+                <a:solidFill>
+                  <a:srgbClr val="A2380F"/>
+                </a:solidFill>
+                <a:latin typeface="Arial" pitchFamily="34" charset="0"/>
+                <a:ea typeface="Arial" pitchFamily="34" charset="-122"/>
+                <a:cs typeface="Arial" pitchFamily="34" charset="-120"/>
+              </a:rPr>
+              <a:t>C </a:t>
+            </a:r>
+            <a:pPr algn="ctr" indent="0" marL="0">
+              <a:buNone/>
+            </a:pPr>
+            <a:r>
+              <a:rPr lang="en-US" sz="1250" b="1" spc="150" kern="0" dirty="0">
+                <a:solidFill>
+                  <a:srgbClr val="A2380F"/>
+                </a:solidFill>
+                <a:latin typeface="Arial" pitchFamily="34" charset="0"/>
+                <a:ea typeface="Arial" pitchFamily="34" charset="-122"/>
+                <a:cs typeface="Arial" pitchFamily="34" charset="-120"/>
+              </a:rPr>
+              <a:t>A </a:t>
+            </a:r>
+            <a:pPr algn="ctr" indent="0" marL="0">
+              <a:buNone/>
+            </a:pPr>
+            <a:r>
+              <a:rPr lang="en-US" sz="1250" b="1" spc="150" kern="0" dirty="0">
+                <a:solidFill>
+                  <a:srgbClr val="A2380F"/>
+                </a:solidFill>
+                <a:latin typeface="Arial" pitchFamily="34" charset="0"/>
+                <a:ea typeface="Arial" pitchFamily="34" charset="-122"/>
+                <a:cs typeface="Arial" pitchFamily="34" charset="-120"/>
+              </a:rPr>
+              <a:t>T </a:t>
+            </a:r>
+            <a:pPr algn="ctr" indent="0" marL="0">
+              <a:buNone/>
+            </a:pPr>
+            <a:r>
+              <a:rPr lang="en-US" sz="1250" b="1" spc="150" kern="0" dirty="0">
+                <a:solidFill>
+                  <a:srgbClr val="A2380F"/>
+                </a:solidFill>
+                <a:latin typeface="Arial" pitchFamily="34" charset="0"/>
+                <a:ea typeface="Arial" pitchFamily="34" charset="-122"/>
+                <a:cs typeface="Arial" pitchFamily="34" charset="-120"/>
+              </a:rPr>
+              <a:t>C </a:t>
+            </a:r>
+            <a:pPr algn="ctr" indent="0" marL="0">
+              <a:buNone/>
+            </a:pPr>
+            <a:r>
+              <a:rPr lang="en-US" sz="1250" b="1" spc="150" kern="0" dirty="0">
+                <a:solidFill>
+                  <a:srgbClr val="A2380F"/>
+                </a:solidFill>
+                <a:latin typeface="Arial" pitchFamily="34" charset="0"/>
+                <a:ea typeface="Arial" pitchFamily="34" charset="-122"/>
+                <a:cs typeface="Arial" pitchFamily="34" charset="-120"/>
+              </a:rPr>
+              <a:t>A </a:t>
+            </a:r>
+            <a:pPr algn="ctr" indent="0" marL="0">
+              <a:buNone/>
+            </a:pPr>
+            <a:r>
+              <a:rPr lang="en-US" sz="1250" b="1" spc="150" kern="0" dirty="0">
+                <a:solidFill>
+                  <a:srgbClr val="A2380F"/>
+                </a:solidFill>
+                <a:latin typeface="Arial" pitchFamily="34" charset="0"/>
+                <a:ea typeface="Arial" pitchFamily="34" charset="-122"/>
+                <a:cs typeface="Arial" pitchFamily="34" charset="-120"/>
+              </a:rPr>
+              <a:t>G </a:t>
+            </a:r>
+            <a:pPr algn="ctr" indent="0" marL="0">
+              <a:buNone/>
+            </a:pPr>
+            <a:r>
+              <a:rPr lang="en-US" sz="1250" b="1" spc="150" kern="0" dirty="0">
+                <a:solidFill>
+                  <a:srgbClr val="A2380F"/>
+                </a:solidFill>
+                <a:latin typeface="Arial" pitchFamily="34" charset="0"/>
+                <a:ea typeface="Arial" pitchFamily="34" charset="-122"/>
+                <a:cs typeface="Arial" pitchFamily="34" charset="-120"/>
+              </a:rPr>
+              <a:t>G</a:t>
+            </a:r>
+            <a:endParaRPr lang="en-US" sz="1250" dirty="0"/>
+          </a:p>
+        </p:txBody>
+      </p:sp>
+      <p:sp>
+        <p:nvSpPr>
+          <p:cNvPr id="22" name="Text 20"/>
+          <p:cNvSpPr txBox="1"/>
+          <p:nvPr/>
+        </p:nvSpPr>
+        <p:spPr>
+          <a:xfrm>
+            <a:off x="7094913" y="3099068"/>
+            <a:ext cx="2231136" cy="202831"/>
+          </a:xfrm>
+          <a:prstGeom prst="rect">
+            <a:avLst/>
+          </a:prstGeom>
+          <a:noFill/>
+          <a:ln/>
+        </p:spPr>
+        <p:txBody>
+          <a:bodyPr wrap="square" lIns="0" tIns="0" rIns="0" bIns="0" rtlCol="0" anchor="ctr"/>
+          <a:lstStyle/>
+          <a:p>
+            <a:pPr algn="ctr" indent="0" marL="0">
+              <a:lnSpc>
+                <a:spcPct val="95000"/>
+              </a:lnSpc>
+              <a:buNone/>
+            </a:pPr>
+            <a:r>
+              <a:rPr lang="en-US" sz="1100" dirty="0">
+                <a:solidFill>
+                  <a:srgbClr val="5A6471"/>
+                </a:solidFill>
+                <a:latin typeface="Arial" pitchFamily="34" charset="0"/>
+                <a:ea typeface="Arial" pitchFamily="34" charset="-122"/>
+                <a:cs typeface="Arial" pitchFamily="34" charset="-120"/>
+              </a:rPr>
+              <a:t>core gone</a:t>
+            </a:r>
+            <a:endParaRPr lang="en-US" sz="1100" dirty="0"/>
+          </a:p>
+        </p:txBody>
+      </p:sp>
+      <p:sp>
+        <p:nvSpPr>
+          <p:cNvPr id="23" name="Text 21"/>
+          <p:cNvSpPr txBox="1"/>
+          <p:nvPr/>
+        </p:nvSpPr>
+        <p:spPr>
+          <a:xfrm>
+            <a:off x="9751993" y="2368878"/>
+            <a:ext cx="2028305" cy="202831"/>
+          </a:xfrm>
+          <a:prstGeom prst="rect">
+            <a:avLst/>
+          </a:prstGeom>
+          <a:noFill/>
+          <a:ln/>
+        </p:spPr>
+        <p:txBody>
+          <a:bodyPr wrap="square" lIns="0" tIns="0" rIns="0" bIns="0" rtlCol="0" anchor="ctr"/>
+          <a:lstStyle/>
+          <a:p>
+            <a:pPr algn="l" indent="0" marL="0">
+              <a:lnSpc>
+                <a:spcPct val="95000"/>
+              </a:lnSpc>
+              <a:buNone/>
+            </a:pPr>
+            <a:r>
+              <a:rPr lang="en-US" sz="1100" dirty="0">
+                <a:solidFill>
+                  <a:srgbClr val="5A6471"/>
+                </a:solidFill>
+                <a:latin typeface="Arial" pitchFamily="34" charset="0"/>
+                <a:ea typeface="Arial" pitchFamily="34" charset="-122"/>
+                <a:cs typeface="Arial" pitchFamily="34" charset="-120"/>
+              </a:rPr>
+              <a:t>also run</a:t>
+            </a:r>
+            <a:endParaRPr lang="en-US" sz="1100" dirty="0"/>
+          </a:p>
+        </p:txBody>
+      </p:sp>
+      <p:sp>
+        <p:nvSpPr>
+          <p:cNvPr id="24" name="Text 22"/>
+          <p:cNvSpPr txBox="1"/>
+          <p:nvPr/>
+        </p:nvSpPr>
+        <p:spPr>
+          <a:xfrm>
+            <a:off x="9751993" y="2591991"/>
+            <a:ext cx="2332551" cy="202831"/>
+          </a:xfrm>
+          <a:prstGeom prst="rect">
+            <a:avLst/>
+          </a:prstGeom>
+          <a:noFill/>
+          <a:ln/>
+        </p:spPr>
+        <p:txBody>
+          <a:bodyPr wrap="square" lIns="0" tIns="0" rIns="0" bIns="0" rtlCol="0" anchor="ctr"/>
+          <a:lstStyle/>
+          <a:p>
+            <a:pPr algn="l" indent="0" marL="0">
+              <a:lnSpc>
+                <a:spcPct val="95000"/>
+              </a:lnSpc>
+              <a:buNone/>
+            </a:pPr>
+            <a:r>
+              <a:rPr lang="en-US" sz="1200" dirty="0">
+                <a:solidFill>
+                  <a:srgbClr val="15181C"/>
+                </a:solidFill>
+                <a:latin typeface="Arial" pitchFamily="34" charset="0"/>
+                <a:ea typeface="Arial" pitchFamily="34" charset="-122"/>
+                <a:cs typeface="Arial" pitchFamily="34" charset="-120"/>
+              </a:rPr>
+              <a:t>·  upgrade the core</a:t>
+            </a:r>
+            <a:endParaRPr lang="en-US" sz="1200" dirty="0"/>
+          </a:p>
+        </p:txBody>
+      </p:sp>
+      <p:sp>
+        <p:nvSpPr>
+          <p:cNvPr id="25" name="Text 23"/>
+          <p:cNvSpPr txBox="1"/>
+          <p:nvPr/>
+        </p:nvSpPr>
+        <p:spPr>
+          <a:xfrm>
+            <a:off x="9751993" y="2784681"/>
+            <a:ext cx="2332551" cy="202831"/>
+          </a:xfrm>
+          <a:prstGeom prst="rect">
+            <a:avLst/>
+          </a:prstGeom>
+          <a:noFill/>
+          <a:ln/>
+        </p:spPr>
+        <p:txBody>
+          <a:bodyPr wrap="square" lIns="0" tIns="0" rIns="0" bIns="0" rtlCol="0" anchor="ctr"/>
+          <a:lstStyle/>
+          <a:p>
+            <a:pPr algn="l" indent="0" marL="0">
+              <a:lnSpc>
+                <a:spcPct val="95000"/>
+              </a:lnSpc>
+              <a:buNone/>
+            </a:pPr>
+            <a:r>
+              <a:rPr lang="en-US" sz="1200" dirty="0">
+                <a:solidFill>
+                  <a:srgbClr val="15181C"/>
+                </a:solidFill>
+                <a:latin typeface="Arial" pitchFamily="34" charset="0"/>
+                <a:ea typeface="Arial" pitchFamily="34" charset="-122"/>
+                <a:cs typeface="Arial" pitchFamily="34" charset="-120"/>
+              </a:rPr>
+              <a:t>·  half site</a:t>
+            </a:r>
+            <a:endParaRPr lang="en-US" sz="1200" dirty="0"/>
+          </a:p>
+        </p:txBody>
+      </p:sp>
+      <p:sp>
+        <p:nvSpPr>
+          <p:cNvPr id="26" name="Text 24"/>
+          <p:cNvSpPr txBox="1"/>
+          <p:nvPr/>
+        </p:nvSpPr>
+        <p:spPr>
+          <a:xfrm>
+            <a:off x="9751993" y="2977370"/>
+            <a:ext cx="2332551" cy="202831"/>
+          </a:xfrm>
+          <a:prstGeom prst="rect">
+            <a:avLst/>
+          </a:prstGeom>
+          <a:noFill/>
+          <a:ln/>
+        </p:spPr>
+        <p:txBody>
+          <a:bodyPr wrap="square" lIns="0" tIns="0" rIns="0" bIns="0" rtlCol="0" anchor="ctr"/>
+          <a:lstStyle/>
+          <a:p>
+            <a:pPr algn="l" indent="0" marL="0">
+              <a:lnSpc>
+                <a:spcPct val="95000"/>
+              </a:lnSpc>
+              <a:buNone/>
+            </a:pPr>
+            <a:r>
+              <a:rPr lang="en-US" sz="1200" dirty="0">
+                <a:solidFill>
+                  <a:srgbClr val="15181C"/>
+                </a:solidFill>
+                <a:latin typeface="Arial" pitchFamily="34" charset="0"/>
+                <a:ea typeface="Arial" pitchFamily="34" charset="-122"/>
+                <a:cs typeface="Arial" pitchFamily="34" charset="-120"/>
+              </a:rPr>
+              <a:t>·  reverse complement</a:t>
+            </a:r>
+            <a:endParaRPr lang="en-US" sz="1200" dirty="0"/>
+          </a:p>
+        </p:txBody>
+      </p:sp>
+      <p:sp>
+        <p:nvSpPr>
+          <p:cNvPr id="27" name="Shape 25"/>
+          <p:cNvSpPr/>
+          <p:nvPr/>
+        </p:nvSpPr>
+        <p:spPr>
+          <a:xfrm>
+            <a:off x="644901" y="3545295"/>
+            <a:ext cx="10871717" cy="0"/>
+          </a:xfrm>
+          <a:prstGeom prst="line">
+            <a:avLst/>
+          </a:prstGeom>
+          <a:noFill/>
+          <a:ln w="12700">
+            <a:solidFill>
+              <a:srgbClr val="AFB5BD"/>
+            </a:solidFill>
+            <a:prstDash val="dash"/>
+          </a:ln>
+        </p:spPr>
+      </p:sp>
+      <p:sp>
+        <p:nvSpPr>
+          <p:cNvPr id="28" name="Text 26"/>
+          <p:cNvSpPr txBox="1"/>
+          <p:nvPr/>
+        </p:nvSpPr>
+        <p:spPr>
+          <a:xfrm>
+            <a:off x="644901" y="3808975"/>
+            <a:ext cx="5679255" cy="202831"/>
+          </a:xfrm>
+          <a:prstGeom prst="rect">
+            <a:avLst/>
+          </a:prstGeom>
+          <a:noFill/>
+          <a:ln/>
+        </p:spPr>
+        <p:txBody>
+          <a:bodyPr wrap="square" lIns="0" tIns="0" rIns="0" bIns="0" rtlCol="0" anchor="ctr"/>
+          <a:lstStyle/>
+          <a:p>
+            <a:pPr algn="l" indent="0" marL="0">
+              <a:lnSpc>
+                <a:spcPct val="95000"/>
+              </a:lnSpc>
+              <a:buNone/>
+            </a:pPr>
+            <a:r>
+              <a:rPr lang="en-US" sz="1300" b="1" dirty="0">
+                <a:solidFill>
+                  <a:srgbClr val="15181C"/>
+                </a:solidFill>
+                <a:latin typeface="Arial" pitchFamily="34" charset="0"/>
+                <a:ea typeface="Arial" pitchFamily="34" charset="-122"/>
+                <a:cs typeface="Arial" pitchFamily="34" charset="-120"/>
+              </a:rPr>
+              <a:t>OR ADD A SECOND COPY AT A SET DISTANCE</a:t>
+            </a:r>
+            <a:endParaRPr lang="en-US" sz="1300" dirty="0"/>
+          </a:p>
+        </p:txBody>
+      </p:sp>
+      <p:sp>
+        <p:nvSpPr>
+          <p:cNvPr id="29" name="Shape 27"/>
+          <p:cNvSpPr/>
+          <p:nvPr/>
+        </p:nvSpPr>
+        <p:spPr>
+          <a:xfrm>
+            <a:off x="2896320" y="4376900"/>
+            <a:ext cx="5273594" cy="0"/>
+          </a:xfrm>
+          <a:prstGeom prst="line">
+            <a:avLst/>
+          </a:prstGeom>
+          <a:noFill/>
+          <a:ln w="20320">
+            <a:solidFill>
+              <a:srgbClr val="15181C">
+                <a:alpha val="55000"/>
+              </a:srgbClr>
+            </a:solidFill>
+            <a:prstDash val="solid"/>
+          </a:ln>
+        </p:spPr>
+      </p:sp>
+      <p:sp>
+        <p:nvSpPr>
+          <p:cNvPr id="30" name="Shape 28"/>
+          <p:cNvSpPr/>
+          <p:nvPr/>
+        </p:nvSpPr>
+        <p:spPr>
+          <a:xfrm>
+            <a:off x="4285710" y="4321122"/>
+            <a:ext cx="263680" cy="111557"/>
+          </a:xfrm>
+          <a:prstGeom prst="roundRect">
+            <a:avLst>
+              <a:gd name="adj" fmla="val 16393"/>
+            </a:avLst>
+          </a:prstGeom>
+          <a:solidFill>
+            <a:srgbClr val="D9A32B">
+              <a:alpha val="80000"/>
+            </a:srgbClr>
+          </a:solidFill>
+          <a:ln w="13970">
+            <a:solidFill>
+              <a:srgbClr val="D9A32B"/>
+            </a:solidFill>
+            <a:prstDash val="solid"/>
+          </a:ln>
+        </p:spPr>
+      </p:sp>
+      <p:sp>
+        <p:nvSpPr>
+          <p:cNvPr id="31" name="Shape 29"/>
+          <p:cNvSpPr/>
+          <p:nvPr/>
+        </p:nvSpPr>
+        <p:spPr>
+          <a:xfrm>
+            <a:off x="6314015" y="4321122"/>
+            <a:ext cx="263680" cy="111557"/>
+          </a:xfrm>
+          <a:prstGeom prst="roundRect">
+            <a:avLst>
+              <a:gd name="adj" fmla="val 16393"/>
+            </a:avLst>
+          </a:prstGeom>
+          <a:solidFill>
+            <a:srgbClr val="D9A32B">
+              <a:alpha val="80000"/>
+            </a:srgbClr>
+          </a:solidFill>
+          <a:ln w="13970">
+            <a:solidFill>
+              <a:srgbClr val="D9A32B"/>
+            </a:solidFill>
+            <a:prstDash val="solid"/>
+          </a:ln>
+        </p:spPr>
+      </p:sp>
+      <p:sp>
+        <p:nvSpPr>
+          <p:cNvPr id="32" name="Shape 30"/>
+          <p:cNvSpPr/>
+          <p:nvPr/>
+        </p:nvSpPr>
+        <p:spPr>
+          <a:xfrm>
+            <a:off x="4417550" y="4620297"/>
+            <a:ext cx="2028305" cy="0"/>
+          </a:xfrm>
+          <a:prstGeom prst="line">
+            <a:avLst/>
+          </a:prstGeom>
+          <a:noFill/>
+          <a:ln w="13970">
+            <a:solidFill>
+              <a:srgbClr val="5A6471"/>
+            </a:solidFill>
+            <a:prstDash val="solid"/>
+          </a:ln>
+        </p:spPr>
+      </p:sp>
+      <p:sp>
+        <p:nvSpPr>
+          <p:cNvPr id="33" name="Shape 31"/>
+          <p:cNvSpPr/>
+          <p:nvPr/>
+        </p:nvSpPr>
+        <p:spPr>
+          <a:xfrm>
+            <a:off x="4417550" y="4569589"/>
+            <a:ext cx="0" cy="101415"/>
+          </a:xfrm>
+          <a:prstGeom prst="line">
+            <a:avLst/>
+          </a:prstGeom>
+          <a:noFill/>
+          <a:ln w="13970">
+            <a:solidFill>
+              <a:srgbClr val="5A6471"/>
+            </a:solidFill>
+            <a:prstDash val="solid"/>
+          </a:ln>
+        </p:spPr>
+      </p:sp>
+      <p:sp>
+        <p:nvSpPr>
+          <p:cNvPr id="34" name="Shape 32"/>
+          <p:cNvSpPr/>
+          <p:nvPr/>
+        </p:nvSpPr>
+        <p:spPr>
+          <a:xfrm>
+            <a:off x="6445855" y="4569589"/>
+            <a:ext cx="0" cy="101415"/>
+          </a:xfrm>
+          <a:prstGeom prst="line">
+            <a:avLst/>
+          </a:prstGeom>
+          <a:noFill/>
+          <a:ln w="13970">
+            <a:solidFill>
+              <a:srgbClr val="5A6471"/>
+            </a:solidFill>
+            <a:prstDash val="solid"/>
+          </a:ln>
+        </p:spPr>
+      </p:sp>
+      <p:sp>
+        <p:nvSpPr>
+          <p:cNvPr id="35" name="Text 33"/>
+          <p:cNvSpPr txBox="1"/>
+          <p:nvPr/>
+        </p:nvSpPr>
+        <p:spPr>
+          <a:xfrm>
+            <a:off x="5127456" y="4458033"/>
+            <a:ext cx="608492" cy="202831"/>
+          </a:xfrm>
+          <a:prstGeom prst="rect">
+            <a:avLst/>
+          </a:prstGeom>
+          <a:noFill/>
+          <a:ln/>
+        </p:spPr>
+        <p:txBody>
+          <a:bodyPr wrap="square" lIns="0" tIns="0" rIns="0" bIns="0" rtlCol="0" anchor="ctr"/>
+          <a:lstStyle/>
+          <a:p>
+            <a:pPr algn="ctr" indent="0" marL="0">
+              <a:lnSpc>
+                <a:spcPct val="95000"/>
+              </a:lnSpc>
+              <a:buNone/>
+            </a:pPr>
+            <a:r>
+              <a:rPr lang="en-US" sz="1200" b="1" dirty="0">
+                <a:solidFill>
+                  <a:srgbClr val="5A6471"/>
+                </a:solidFill>
+                <a:latin typeface="Arial" pitchFamily="34" charset="0"/>
+                <a:ea typeface="Arial" pitchFamily="34" charset="-122"/>
+                <a:cs typeface="Arial" pitchFamily="34" charset="-120"/>
+              </a:rPr>
+              <a:t>d</a:t>
+            </a:r>
+            <a:endParaRPr lang="en-US" sz="1200" dirty="0"/>
+          </a:p>
+        </p:txBody>
+      </p:sp>
+      <p:sp>
+        <p:nvSpPr>
+          <p:cNvPr id="36" name="Text 34"/>
+          <p:cNvSpPr txBox="1"/>
+          <p:nvPr/>
+        </p:nvSpPr>
+        <p:spPr>
+          <a:xfrm>
+            <a:off x="8393028" y="4275485"/>
+            <a:ext cx="2433967" cy="202831"/>
+          </a:xfrm>
+          <a:prstGeom prst="rect">
+            <a:avLst/>
+          </a:prstGeom>
+          <a:noFill/>
+          <a:ln/>
+        </p:spPr>
+        <p:txBody>
+          <a:bodyPr wrap="square" lIns="0" tIns="0" rIns="0" bIns="0" rtlCol="0" anchor="ctr"/>
+          <a:lstStyle/>
+          <a:p>
+            <a:pPr algn="l" indent="0" marL="0">
+              <a:lnSpc>
+                <a:spcPct val="95000"/>
+              </a:lnSpc>
+              <a:buNone/>
+            </a:pPr>
+            <a:r>
+              <a:rPr lang="en-US" sz="1200" b="1" dirty="0">
+                <a:solidFill>
+                  <a:srgbClr val="8A6400"/>
+                </a:solidFill>
+                <a:latin typeface="Arial" pitchFamily="34" charset="0"/>
+                <a:ea typeface="Arial" pitchFamily="34" charset="-122"/>
+                <a:cs typeface="Arial" pitchFamily="34" charset="-120"/>
+              </a:rPr>
+              <a:t>a second AP-1</a:t>
+            </a:r>
+            <a:endParaRPr lang="en-US" sz="1200" dirty="0"/>
+          </a:p>
+        </p:txBody>
+      </p:sp>
+      <p:sp>
+        <p:nvSpPr>
+          <p:cNvPr id="37" name="Shape 35"/>
+          <p:cNvSpPr/>
+          <p:nvPr/>
+        </p:nvSpPr>
+        <p:spPr>
+          <a:xfrm>
+            <a:off x="2896320" y="5127373"/>
+            <a:ext cx="5273594" cy="0"/>
+          </a:xfrm>
+          <a:prstGeom prst="line">
+            <a:avLst/>
+          </a:prstGeom>
+          <a:noFill/>
+          <a:ln w="20320">
+            <a:solidFill>
+              <a:srgbClr val="15181C">
+                <a:alpha val="55000"/>
+              </a:srgbClr>
+            </a:solidFill>
+            <a:prstDash val="solid"/>
+          </a:ln>
+        </p:spPr>
+      </p:sp>
+      <p:sp>
+        <p:nvSpPr>
+          <p:cNvPr id="38" name="Shape 36"/>
+          <p:cNvSpPr/>
+          <p:nvPr/>
+        </p:nvSpPr>
+        <p:spPr>
+          <a:xfrm>
+            <a:off x="4285710" y="5071595"/>
+            <a:ext cx="263680" cy="111557"/>
+          </a:xfrm>
+          <a:prstGeom prst="roundRect">
+            <a:avLst>
+              <a:gd name="adj" fmla="val 16393"/>
+            </a:avLst>
+          </a:prstGeom>
+          <a:solidFill>
+            <a:srgbClr val="D9A32B">
+              <a:alpha val="80000"/>
+            </a:srgbClr>
+          </a:solidFill>
+          <a:ln w="13970">
+            <a:solidFill>
+              <a:srgbClr val="D9A32B"/>
+            </a:solidFill>
+            <a:prstDash val="solid"/>
+          </a:ln>
+        </p:spPr>
+      </p:sp>
+      <p:sp>
+        <p:nvSpPr>
+          <p:cNvPr id="39" name="Shape 37"/>
+          <p:cNvSpPr/>
+          <p:nvPr/>
+        </p:nvSpPr>
+        <p:spPr>
+          <a:xfrm>
+            <a:off x="6314015" y="5061453"/>
+            <a:ext cx="263680" cy="131840"/>
+          </a:xfrm>
+          <a:prstGeom prst="roundRect">
+            <a:avLst>
+              <a:gd name="adj" fmla="val 13871"/>
+            </a:avLst>
+          </a:prstGeom>
+          <a:solidFill>
+            <a:srgbClr val="5A6471">
+              <a:alpha val="14000"/>
+            </a:srgbClr>
+          </a:solidFill>
+          <a:ln w="9525">
+            <a:solidFill>
+              <a:srgbClr val="5A6471"/>
+            </a:solidFill>
+            <a:prstDash val="solid"/>
+          </a:ln>
+        </p:spPr>
+      </p:sp>
+      <p:sp>
+        <p:nvSpPr>
+          <p:cNvPr id="40" name="Shape 38"/>
+          <p:cNvSpPr/>
+          <p:nvPr/>
+        </p:nvSpPr>
+        <p:spPr>
+          <a:xfrm>
+            <a:off x="6314015" y="5076666"/>
+            <a:ext cx="263680" cy="101415"/>
+          </a:xfrm>
+          <a:custGeom>
+            <a:avLst/>
+            <a:gdLst/>
+            <a:ahLst/>
+            <a:cxnLst/>
+            <a:rect l="l" t="t" r="r" b="b"/>
+            <a:pathLst>
+              <a:path w="263680" h="101415">
+                <a:moveTo>
+                  <a:pt x="0" y="10142"/>
+                </a:moveTo>
+                <a:lnTo>
+                  <a:pt x="52736" y="91274"/>
+                </a:lnTo>
+                <a:lnTo>
+                  <a:pt x="105472" y="10142"/>
+                </a:lnTo>
+                <a:lnTo>
+                  <a:pt x="158208" y="91274"/>
+                </a:lnTo>
+                <a:lnTo>
+                  <a:pt x="210944" y="10142"/>
+                </a:lnTo>
+                <a:lnTo>
+                  <a:pt x="263680" y="91274"/>
+                </a:lnTo>
+              </a:path>
+            </a:pathLst>
+          </a:custGeom>
+          <a:ln w="17780">
+            <a:solidFill>
+              <a:srgbClr val="5A6471"/>
+            </a:solidFill>
+            <a:prstDash val="solid"/>
+          </a:ln>
+        </p:spPr>
+      </p:sp>
+      <p:sp>
+        <p:nvSpPr>
+          <p:cNvPr id="41" name="Shape 39"/>
+          <p:cNvSpPr/>
+          <p:nvPr/>
+        </p:nvSpPr>
+        <p:spPr>
+          <a:xfrm>
+            <a:off x="6273449" y="5036100"/>
+            <a:ext cx="344812" cy="182547"/>
+          </a:xfrm>
+          <a:prstGeom prst="roundRect">
+            <a:avLst>
+              <a:gd name="adj" fmla="val 10018"/>
+            </a:avLst>
+          </a:prstGeom>
+          <a:ln w="13970">
+            <a:solidFill>
+              <a:srgbClr val="5A6471"/>
+            </a:solidFill>
+            <a:prstDash val="dash"/>
+          </a:ln>
+        </p:spPr>
+      </p:sp>
+      <p:sp>
+        <p:nvSpPr>
+          <p:cNvPr id="42" name="Text 40"/>
+          <p:cNvSpPr txBox="1"/>
+          <p:nvPr/>
+        </p:nvSpPr>
+        <p:spPr>
+          <a:xfrm>
+            <a:off x="644901" y="5025958"/>
+            <a:ext cx="1521229" cy="202831"/>
+          </a:xfrm>
+          <a:prstGeom prst="rect">
+            <a:avLst/>
+          </a:prstGeom>
+          <a:noFill/>
+          <a:ln/>
+        </p:spPr>
+        <p:txBody>
+          <a:bodyPr wrap="square" lIns="0" tIns="0" rIns="0" bIns="0" rtlCol="0" anchor="ctr"/>
+          <a:lstStyle/>
+          <a:p>
+            <a:pPr algn="l" indent="0" marL="0">
+              <a:lnSpc>
+                <a:spcPct val="95000"/>
+              </a:lnSpc>
+              <a:buNone/>
+            </a:pPr>
+            <a:r>
+              <a:rPr lang="en-US" sz="1100" dirty="0">
+                <a:solidFill>
+                  <a:srgbClr val="5A6471"/>
+                </a:solidFill>
+                <a:latin typeface="Arial" pitchFamily="34" charset="0"/>
+                <a:ea typeface="Arial" pitchFamily="34" charset="-122"/>
+                <a:cs typeface="Arial" pitchFamily="34" charset="-120"/>
+              </a:rPr>
+              <a:t>control</a:t>
+            </a:r>
+            <a:endParaRPr lang="en-US" sz="1100" dirty="0"/>
+          </a:p>
+        </p:txBody>
+      </p:sp>
+      <p:sp>
+        <p:nvSpPr>
+          <p:cNvPr id="43" name="Text 41"/>
+          <p:cNvSpPr txBox="1"/>
+          <p:nvPr/>
+        </p:nvSpPr>
+        <p:spPr>
+          <a:xfrm>
+            <a:off x="8393028" y="5025958"/>
+            <a:ext cx="3042458" cy="202831"/>
+          </a:xfrm>
+          <a:prstGeom prst="rect">
+            <a:avLst/>
+          </a:prstGeom>
+          <a:noFill/>
+          <a:ln/>
+        </p:spPr>
+        <p:txBody>
+          <a:bodyPr wrap="square" lIns="0" tIns="0" rIns="0" bIns="0" rtlCol="0" anchor="ctr"/>
+          <a:lstStyle/>
+          <a:p>
+            <a:pPr algn="l" indent="0" marL="0">
+              <a:lnSpc>
+                <a:spcPct val="95000"/>
+              </a:lnSpc>
+              <a:buNone/>
+            </a:pPr>
+            <a:r>
+              <a:rPr lang="en-US" sz="1100" dirty="0">
+                <a:solidFill>
+                  <a:srgbClr val="5A6471"/>
+                </a:solidFill>
+                <a:latin typeface="Arial" pitchFamily="34" charset="0"/>
+                <a:ea typeface="Arial" pitchFamily="34" charset="-122"/>
+                <a:cs typeface="Arial" pitchFamily="34" charset="-120"/>
+              </a:rPr>
+              <a:t>or the same width of scramble</a:t>
+            </a:r>
+            <a:endParaRPr lang="en-US" sz="1100" dirty="0"/>
+          </a:p>
+        </p:txBody>
+      </p:sp>
+      <p:sp>
+        <p:nvSpPr>
+          <p:cNvPr id="44" name="Text 42"/>
+          <p:cNvSpPr txBox="1"/>
+          <p:nvPr/>
+        </p:nvSpPr>
+        <p:spPr>
+          <a:xfrm>
+            <a:off x="3809058" y="5370770"/>
+            <a:ext cx="3245289" cy="202831"/>
+          </a:xfrm>
+          <a:prstGeom prst="rect">
+            <a:avLst/>
+          </a:prstGeom>
+          <a:noFill/>
+          <a:ln/>
+        </p:spPr>
+        <p:txBody>
+          <a:bodyPr wrap="square" lIns="0" tIns="0" rIns="0" bIns="0" rtlCol="0" anchor="ctr"/>
+          <a:lstStyle/>
+          <a:p>
+            <a:pPr algn="ctr" indent="0" marL="0">
+              <a:lnSpc>
+                <a:spcPct val="95000"/>
+              </a:lnSpc>
+              <a:buNone/>
+            </a:pPr>
+            <a:r>
+              <a:rPr lang="en-US" sz="1100" dirty="0">
+                <a:solidFill>
+                  <a:srgbClr val="5A6471"/>
+                </a:solidFill>
+                <a:latin typeface="Arial" pitchFamily="34" charset="0"/>
+                <a:ea typeface="Arial" pitchFamily="34" charset="-122"/>
+                <a:cs typeface="Arial" pitchFamily="34" charset="-120"/>
+              </a:rPr>
+              <a:t>d = 20 to 150 bp, either side</a:t>
+            </a:r>
+            <a:endParaRPr lang="en-US" sz="1100" dirty="0"/>
+          </a:p>
+        </p:txBody>
+      </p:sp>
+      <p:sp>
+        <p:nvSpPr>
+          <p:cNvPr id="45" name="Shape 43"/>
+          <p:cNvSpPr/>
+          <p:nvPr/>
+        </p:nvSpPr>
+        <p:spPr>
+          <a:xfrm>
+            <a:off x="502920" y="5989320"/>
+            <a:ext cx="50292" cy="566928"/>
+          </a:xfrm>
+          <a:prstGeom prst="rect">
+            <a:avLst/>
+          </a:prstGeom>
+          <a:solidFill>
+            <a:srgbClr val="3F3F3F"/>
+          </a:solidFill>
+          <a:ln w="12700">
+            <a:solidFill>
+              <a:srgbClr val="333333"/>
+            </a:solidFill>
+            <a:prstDash val="solid"/>
+          </a:ln>
+        </p:spPr>
+      </p:sp>
+      <p:sp>
+        <p:nvSpPr>
+          <p:cNvPr id="46" name="Text 44"/>
+          <p:cNvSpPr txBox="1"/>
+          <p:nvPr/>
+        </p:nvSpPr>
+        <p:spPr>
+          <a:xfrm>
+            <a:off x="749808" y="5989320"/>
+            <a:ext cx="10881360" cy="566928"/>
+          </a:xfrm>
+          <a:prstGeom prst="rect">
+            <a:avLst/>
+          </a:prstGeom>
+          <a:noFill/>
+          <a:ln/>
+        </p:spPr>
+        <p:txBody>
+          <a:bodyPr wrap="square" lIns="0" tIns="0" rIns="0" bIns="0" rtlCol="0" anchor="ctr"/>
+          <a:lstStyle/>
+          <a:p>
+            <a:pPr indent="0" marL="0">
+              <a:buNone/>
+            </a:pPr>
+            <a:r>
+              <a:rPr lang="en-US" sz="1550" dirty="0">
+                <a:solidFill>
+                  <a:srgbClr val="111111"/>
+                </a:solidFill>
+              </a:rPr>
+              <a:t>Rather than only destroying the motif, weaken it one base at a time, strengthen it, flip it, duplicate it or move it — each against a control that changes the same amount of sequence but no motif.</a:t>
+            </a:r>
+            <a:endParaRPr lang="en-US" sz="1550" dirty="0"/>
+          </a:p>
+        </p:txBody>
+      </p:sp>
+      <p:sp>
+        <p:nvSpPr>
+          <p:cNvPr id="25" name="Slide Number Placeholder 0"/>
+          <p:cNvSpPr>
+            <a:spLocks noGrp="1"/>
+          </p:cNvSpPr>
+          <p:nvPr>
+            <p:ph type="sldNum" sz="quarter" idx="4294967295"/>
+          </p:nvPr>
+        </p:nvSpPr>
+        <p:spPr>
+          <a:xfrm>
+            <a:off x="11658600" y="6446520"/>
+            <a:ext cx="800000" cy="300000"/>
+          </a:xfrm>
+          <a:prstGeom prst="rect">
+            <a:avLst/>
+          </a:prstGeom>
+          <a:extLst>
+            <a:ext uri="{C572A759-6A51-4108-AA02-DFA0A04FC94B}">
+              <ma14:wrappingTextBoxFlag xmlns:ma14="http://schemas.microsoft.com/office/mac/drawingml/2011/main" val="0"/>
+            </a:ext>
+          </a:extLst>
+        </p:spPr>
+        <p:txBody>
+          <a:bodyPr/>
+          <a:lstStyle>
+            <a:lvl1pPr>
+              <a:defRPr sz="1000">
+                <a:solidFill>
+                  <a:srgbClr val="A6A6A6"/>
+                </a:solidFill>
+              </a:defRPr>
+            </a:lvl1pPr>
+          </a:lstStyle>
+          <a:p>
+            <a:pPr algn="l"/>
+            <a:fld id="{F7021451-1387-4CA6-816F-3879F97B5CBC}" type="slidenum">
+              <a:rPr b="0" lang="en-US"/>
+              <a:t>15</a:t>
+            </a:fld>
+            <a:endParaRPr lang="en-US"/>
+          </a:p>
+        </p:txBody>
+      </p:sp>
+    </p:spTree>
+  </p:cSld>
+  <p:clrMapOvr>
+    <a:masterClrMapping/>
+  </p:clrMapOvr>
+</p:sld>
+</file>
+
+<file path=ppt/slides/slide16.xml><?xml version="1.0" encoding="utf-8"?>
+<p:sld xmlns:a="http://schemas.openxmlformats.org/drawingml/2006/main" xmlns:r="http://schemas.openxmlformats.org/officeDocument/2006/relationships" xmlns:p="http://schemas.openxmlformats.org/presentationml/2006/main">
+  <p:cSld name="Slide 16">
+    <p:spTree>
+      <p:nvGrpSpPr>
+        <p:cNvPr id="1" name=""/>
+        <p:cNvGrpSpPr/>
+        <p:nvPr/>
+      </p:nvGrpSpPr>
+      <p:grpSpPr>
+        <a:xfrm>
+          <a:off x="0" y="0"/>
+          <a:ext cx="0" cy="0"/>
+          <a:chOff x="0" y="0"/>
+          <a:chExt cx="0" cy="0"/>
+        </a:xfrm>
+      </p:grpSpPr>
+      <p:sp>
+        <p:nvSpPr>
+          <p:cNvPr id="2" name="Text 0"/>
+          <p:cNvSpPr/>
+          <p:nvPr>
+            <p:ph idx="100" type="title" hasCustomPrompt="1"/>
+          </p:nvPr>
+        </p:nvSpPr>
+        <p:spPr>
+          <a:xfrm>
+            <a:off x="502920" y="274320"/>
+            <a:ext cx="11155680" cy="731520"/>
+          </a:xfrm>
+          <a:prstGeom prst="rect">
+            <a:avLst/>
+          </a:prstGeom>
+          <a:noFill/>
+          <a:ln/>
+        </p:spPr>
+        <p:txBody>
+          <a:bodyPr wrap="square" rtlCol="0" anchor="ctr"/>
+          <a:lstStyle/>
+          <a:p>
+            <a:pPr algn="l" indent="0" marL="0">
+              <a:buNone/>
+            </a:pPr>
+            <a:r>
+              <a:rPr lang="en-US" sz="2800" b="1" dirty="0">
+                <a:solidFill>
+                  <a:schemeClr val="tx1"/>
+                </a:solidFill>
+              </a:rPr>
+              <a:t>Two differences that turned out to be accessibility</a:t>
             </a:r>
             <a:endParaRPr lang="en-US" sz="2800" dirty="0"/>
           </a:p>
@@ -5497,7 +6234,7 @@
                   <a:srgbClr val="111111"/>
                 </a:solidFill>
               </a:rPr>
-              <a:t>Agrees</a:t>
+              <a:t>A second AP-1 copy looked worth more to Dynamic sites</a:t>
             </a:r>
             <a:endParaRPr lang="en-US" sz="1700" dirty="0"/>
           </a:p>
@@ -5515,61 +6252,7 @@
                   <a:srgbClr val="595959"/>
                 </a:solidFill>
               </a:rPr>
-              <a:t>Dynamic elements have weaker endogenous chromatin, and depend on context rather than being sequence-autonomous.</a:t>
-            </a:r>
-            <a:endParaRPr lang="en-US" sz="1700" dirty="0"/>
-          </a:p>
-          <a:p>
-            <a:pPr algn="l" lvl="1" marL="685800" indent="-342900">
-              <a:spcAft>
-                <a:spcPts val="400"/>
-              </a:spcAft>
-              <a:buSzPct val="100000"/>
-              <a:buChar char="▪"/>
-            </a:pPr>
-            <a:r>
-              <a:rPr lang="en-US" sz="1450" dirty="0">
-                <a:solidFill>
-                  <a:srgbClr val="595959"/>
-                </a:solidFill>
-              </a:rPr>
-              <a:t>Shuffling the AP-1 core alone does not separate pooled Stable from pooled Dynamic.</a:t>
-            </a:r>
-            <a:endParaRPr lang="en-US" sz="1700" dirty="0"/>
-          </a:p>
-          <a:p>
-            <a:pPr algn="l" lvl="1" marL="685800" indent="-342900">
-              <a:spcAft>
-                <a:spcPts val="400"/>
-              </a:spcAft>
-              <a:buSzPct val="100000"/>
-              <a:buChar char="▪"/>
-            </a:pPr>
-            <a:r>
-              <a:rPr lang="en-US" sz="1450" dirty="0">
-                <a:solidFill>
-                  <a:srgbClr val="595959"/>
-                </a:solidFill>
-              </a:rPr>
-              <a:t>Age-gained elements behave like Stable ones — here, at their own AP-1 motif.</a:t>
-            </a:r>
-            <a:endParaRPr lang="en-US" sz="1700" dirty="0"/>
-          </a:p>
-          <a:p>
-            <a:pPr algn="l" lvl="1" marL="685800" indent="-342900">
-              <a:spcAft>
-                <a:spcPts val="400"/>
-              </a:spcAft>
-              <a:buSzPct val="100000"/>
-              <a:buChar char="▪"/>
-            </a:pPr>
-            <a:r>
-              <a:rPr lang="en-US" sz="1450" dirty="0">
-                <a:solidFill>
-                  <a:srgbClr val="595959"/>
-                </a:solidFill>
-              </a:rPr>
-              <a:t>C/EBP is the strongest partner motif at fibroblast AP-1 sites (net −0.71 log2, ahead of MEF2 and NFI).</a:t>
+              <a:t>+0.72 vs +0.60 log2, p &lt; 1e-4 — matched on accessibility, p = 0.93. Gone.</a:t>
             </a:r>
             <a:endParaRPr lang="en-US" sz="1700" dirty="0"/>
           </a:p>
@@ -5590,7 +6273,7 @@
                   <a:srgbClr val="111111"/>
                 </a:solidFill>
               </a:rPr>
-              <a:t>Adds</a:t>
+              <a:t>Upgrading an imperfect core to a perfect TGAGTCA looked worth more to Dynamic sites</a:t>
             </a:r>
             <a:endParaRPr lang="en-US" sz="1700" dirty="0"/>
           </a:p>
@@ -5608,61 +6291,7 @@
                   <a:srgbClr val="595959"/>
                 </a:solidFill>
               </a:rPr>
-              <a:t>The class difference is a whole-peak property, not a 170 bp one.</a:t>
-            </a:r>
-            <a:endParaRPr lang="en-US" sz="1700" dirty="0"/>
-          </a:p>
-          <a:p>
-            <a:pPr algn="l" lvl="1" marL="685800" indent="-342900">
-              <a:spcAft>
-                <a:spcPts val="400"/>
-              </a:spcAft>
-              <a:buSzPct val="100000"/>
-              <a:buChar char="▪"/>
-            </a:pPr>
-            <a:r>
-              <a:rPr lang="en-US" sz="1450" dirty="0">
-                <a:solidFill>
-                  <a:srgbClr val="595959"/>
-                </a:solidFill>
-              </a:rPr>
-              <a:t>Within Dynamic, the AP-1-LOSING sites are the ones that are sequence-different, with age and with exercise alike; the gaining ones look like Stable. Direction, not stimulus.</a:t>
-            </a:r>
-            <a:endParaRPr lang="en-US" sz="1700" dirty="0"/>
-          </a:p>
-          <a:p>
-            <a:pPr algn="l" lvl="1" marL="685800" indent="-342900">
-              <a:spcAft>
-                <a:spcPts val="400"/>
-              </a:spcAft>
-              <a:buSzPct val="100000"/>
-              <a:buChar char="▪"/>
-            </a:pPr>
-            <a:r>
-              <a:rPr lang="en-US" sz="1450" dirty="0">
-                <a:solidFill>
-                  <a:srgbClr val="595959"/>
-                </a:solidFill>
-              </a:rPr>
-              <a:t>Unprompted, AlphaGenome makes the AP-1 core the most important 10 bp in over half of all sites — equally in both classes. The classes differ in how much of the dependence sits there, not in whether AP-1 leads.</a:t>
-            </a:r>
-            <a:endParaRPr lang="en-US" sz="1700" dirty="0"/>
-          </a:p>
-          <a:p>
-            <a:pPr algn="l" lvl="1" marL="685800" indent="-342900">
-              <a:spcAft>
-                <a:spcPts val="400"/>
-              </a:spcAft>
-              <a:buSzPct val="100000"/>
-              <a:buChar char="▪"/>
-            </a:pPr>
-            <a:r>
-              <a:rPr lang="en-US" sz="1450" dirty="0">
-                <a:solidFill>
-                  <a:srgbClr val="595959"/>
-                </a:solidFill>
-              </a:rPr>
-              <a:t>Dynamic sites spread their dependence slightly wider, and it survives accessibility matching (33.1% vs 31.3% within ±25 bp, P = 0.006) — the sequence-model version of “attention is more distributed at dynamic enhancers”.</a:t>
+              <a:t>+0.66 vs +0.52, p &lt; 1e-4 — matched, p = 0.94. Gone.</a:t>
             </a:r>
             <a:endParaRPr lang="en-US" sz="1700" dirty="0"/>
           </a:p>
@@ -5683,7 +6312,7 @@
                   <a:srgbClr val="111111"/>
                 </a:solidFill>
               </a:rPr>
-              <a:t>Keep off the slides</a:t>
+              <a:t>What did survive matching</a:t>
             </a:r>
             <a:endParaRPr lang="en-US" sz="1700" dirty="0"/>
           </a:p>
@@ -5701,7 +6330,64 @@
                   <a:srgbClr val="595959"/>
                 </a:solidFill>
               </a:rPr>
-              <a:t>Our in-situ 170 bp shuffle costs Stable sites more (−2.51 vs −1.96, p = 4e-40), the opposite of the MPRA flank result. Different assay — episomal activity vs chromatin accessibility — but it reads as a contradiction.</a:t>
+              <a:t>Destroying the motif costs Dynamic sites less (+0.16, p = 4e-4); the dose-response is shallower; relocating the motif helps them less.</a:t>
+            </a:r>
+            <a:endParaRPr lang="en-US" sz="1700" dirty="0"/>
+          </a:p>
+          <a:p>
+            <a:pPr algn="l" marL="342900" indent="-342900">
+              <a:spcBef>
+                <a:spcPts val="1100"/>
+              </a:spcBef>
+              <a:spcAft>
+                <a:spcPts val="300"/>
+              </a:spcAft>
+              <a:buSzPct val="100000"/>
+              <a:buChar char="•"/>
+            </a:pPr>
+            <a:r>
+              <a:rPr lang="en-US" sz="1700" b="1" dirty="0">
+                <a:solidFill>
+                  <a:srgbClr val="111111"/>
+                </a:solidFill>
+              </a:rPr>
+              <a:t>Two clean negatives worth having</a:t>
+            </a:r>
+            <a:endParaRPr lang="en-US" sz="1700" dirty="0"/>
+          </a:p>
+          <a:p>
+            <a:pPr algn="l" lvl="1" marL="685800" indent="-342900">
+              <a:spcAft>
+                <a:spcPts val="400"/>
+              </a:spcAft>
+              <a:buSzPct val="100000"/>
+              <a:buChar char="▪"/>
+            </a:pPr>
+            <a:r>
+              <a:rPr lang="en-US" sz="1450" dirty="0">
+                <a:solidFill>
+                  <a:srgbClr val="595959"/>
+                </a:solidFill>
+              </a:rPr>
+              <a:t>Reverse-complementing the whole motif costs nothing in either class (-0.03 log2, p = 0.89) — expected for a palindromic TRE, and a sanity check on the head.</a:t>
+            </a:r>
+            <a:endParaRPr lang="en-US" sz="1700" dirty="0"/>
+          </a:p>
+          <a:p>
+            <a:pPr algn="l" lvl="1" marL="685800" indent="-342900">
+              <a:spcAft>
+                <a:spcPts val="400"/>
+              </a:spcAft>
+              <a:buSzPct val="100000"/>
+              <a:buChar char="▪"/>
+            </a:pPr>
+            <a:r>
+              <a:rPr lang="en-US" sz="1450" dirty="0">
+                <a:solidFill>
+                  <a:srgbClr val="595959"/>
+                </a:solidFill>
+              </a:rPr>
+              <a:t>The spacing preference for a second copy is identical: best at ±20–40 bp, decaying by ±150 bp, with no class difference at any distance (all FDR &gt; 0.58).</a:t>
             </a:r>
             <a:endParaRPr lang="en-US" sz="1700" dirty="0"/>
           </a:p>
@@ -5746,7 +6432,364 @@
             <a:pPr algn="l"/>
             <a:fld id="{F7021451-1387-4CA6-816F-3879F97B5CBC}" type="slidenum">
               <a:rPr b="0" lang="en-US"/>
-              <a:t>14</a:t>
+              <a:t>16</a:t>
+            </a:fld>
+            <a:endParaRPr lang="en-US"/>
+          </a:p>
+        </p:txBody>
+      </p:sp>
+    </p:spTree>
+  </p:cSld>
+  <p:clrMapOvr>
+    <a:masterClrMapping/>
+  </p:clrMapOvr>
+</p:sld>
+</file>
+
+<file path=ppt/slides/slide17.xml><?xml version="1.0" encoding="utf-8"?>
+<p:sld xmlns:a="http://schemas.openxmlformats.org/drawingml/2006/main" xmlns:r="http://schemas.openxmlformats.org/officeDocument/2006/relationships" xmlns:p="http://schemas.openxmlformats.org/presentationml/2006/main">
+  <p:cSld name="Slide 17">
+    <p:spTree>
+      <p:nvGrpSpPr>
+        <p:cNvPr id="1" name=""/>
+        <p:cNvGrpSpPr/>
+        <p:nvPr/>
+      </p:nvGrpSpPr>
+      <p:grpSpPr>
+        <a:xfrm>
+          <a:off x="0" y="0"/>
+          <a:ext cx="0" cy="0"/>
+          <a:chOff x="0" y="0"/>
+          <a:chExt cx="0" cy="0"/>
+        </a:xfrm>
+      </p:grpSpPr>
+      <p:sp>
+        <p:nvSpPr>
+          <p:cNvPr id="2" name="Text 0"/>
+          <p:cNvSpPr/>
+          <p:nvPr>
+            <p:ph idx="100" type="title" hasCustomPrompt="1"/>
+          </p:nvPr>
+        </p:nvSpPr>
+        <p:spPr>
+          <a:xfrm>
+            <a:off x="502920" y="274320"/>
+            <a:ext cx="11155680" cy="731520"/>
+          </a:xfrm>
+          <a:prstGeom prst="rect">
+            <a:avLst/>
+          </a:prstGeom>
+          <a:noFill/>
+          <a:ln/>
+        </p:spPr>
+        <p:txBody>
+          <a:bodyPr wrap="square" rtlCol="0" anchor="ctr"/>
+          <a:lstStyle/>
+          <a:p>
+            <a:pPr algn="l" indent="0" marL="0">
+              <a:buNone/>
+            </a:pPr>
+            <a:r>
+              <a:rPr lang="en-US" sz="2800" b="1" dirty="0">
+                <a:solidFill>
+                  <a:schemeClr val="tx1"/>
+                </a:solidFill>
+              </a:rPr>
+              <a:t>How this sits with the MPRA work</a:t>
+            </a:r>
+            <a:endParaRPr lang="en-US" sz="2800" dirty="0"/>
+          </a:p>
+        </p:txBody>
+      </p:sp>
+      <p:sp>
+        <p:nvSpPr>
+          <p:cNvPr id="3" name="Text 0"/>
+          <p:cNvSpPr/>
+          <p:nvPr>
+            <p:ph idx="101" type="body" hasCustomPrompt="1"/>
+          </p:nvPr>
+        </p:nvSpPr>
+        <p:spPr>
+          <a:xfrm>
+            <a:off x="502920" y="1234440"/>
+            <a:ext cx="11155680" cy="5029200"/>
+          </a:xfrm>
+          <a:prstGeom prst="rect">
+            <a:avLst/>
+          </a:prstGeom>
+          <a:noFill/>
+          <a:ln/>
+        </p:spPr>
+        <p:txBody>
+          <a:bodyPr wrap="square" rtlCol="0" anchor="t"/>
+          <a:lstStyle/>
+          <a:p>
+            <a:pPr algn="l" marL="342900" indent="-342900">
+              <a:spcBef>
+                <a:spcPts val="1100"/>
+              </a:spcBef>
+              <a:spcAft>
+                <a:spcPts val="300"/>
+              </a:spcAft>
+              <a:buSzPct val="100000"/>
+              <a:buChar char="•"/>
+            </a:pPr>
+            <a:r>
+              <a:rPr lang="en-US" sz="1700" b="1" dirty="0">
+                <a:solidFill>
+                  <a:srgbClr val="111111"/>
+                </a:solidFill>
+              </a:rPr>
+              <a:t>Agrees</a:t>
+            </a:r>
+            <a:endParaRPr lang="en-US" sz="1700" dirty="0"/>
+          </a:p>
+          <a:p>
+            <a:pPr algn="l" lvl="1" marL="685800" indent="-342900">
+              <a:spcAft>
+                <a:spcPts val="400"/>
+              </a:spcAft>
+              <a:buSzPct val="100000"/>
+              <a:buChar char="▪"/>
+            </a:pPr>
+            <a:r>
+              <a:rPr lang="en-US" sz="1450" dirty="0">
+                <a:solidFill>
+                  <a:srgbClr val="595959"/>
+                </a:solidFill>
+              </a:rPr>
+              <a:t>Dynamic elements have weaker endogenous chromatin, and depend on context rather than being sequence-autonomous.</a:t>
+            </a:r>
+            <a:endParaRPr lang="en-US" sz="1700" dirty="0"/>
+          </a:p>
+          <a:p>
+            <a:pPr algn="l" lvl="1" marL="685800" indent="-342900">
+              <a:spcAft>
+                <a:spcPts val="400"/>
+              </a:spcAft>
+              <a:buSzPct val="100000"/>
+              <a:buChar char="▪"/>
+            </a:pPr>
+            <a:r>
+              <a:rPr lang="en-US" sz="1450" dirty="0">
+                <a:solidFill>
+                  <a:srgbClr val="595959"/>
+                </a:solidFill>
+              </a:rPr>
+              <a:t>Shuffling the AP-1 core alone does not separate pooled Stable from pooled Dynamic.</a:t>
+            </a:r>
+            <a:endParaRPr lang="en-US" sz="1700" dirty="0"/>
+          </a:p>
+          <a:p>
+            <a:pPr algn="l" lvl="1" marL="685800" indent="-342900">
+              <a:spcAft>
+                <a:spcPts val="400"/>
+              </a:spcAft>
+              <a:buSzPct val="100000"/>
+              <a:buChar char="▪"/>
+            </a:pPr>
+            <a:r>
+              <a:rPr lang="en-US" sz="1450" dirty="0">
+                <a:solidFill>
+                  <a:srgbClr val="595959"/>
+                </a:solidFill>
+              </a:rPr>
+              <a:t>Age-gained elements behave like Stable ones — here, at their own AP-1 motif.</a:t>
+            </a:r>
+            <a:endParaRPr lang="en-US" sz="1700" dirty="0"/>
+          </a:p>
+          <a:p>
+            <a:pPr algn="l" lvl="1" marL="685800" indent="-342900">
+              <a:spcAft>
+                <a:spcPts val="400"/>
+              </a:spcAft>
+              <a:buSzPct val="100000"/>
+              <a:buChar char="▪"/>
+            </a:pPr>
+            <a:r>
+              <a:rPr lang="en-US" sz="1450" dirty="0">
+                <a:solidFill>
+                  <a:srgbClr val="595959"/>
+                </a:solidFill>
+              </a:rPr>
+              <a:t>C/EBP is the strongest partner motif at fibroblast AP-1 sites (net −0.71 log2, ahead of MEF2 and NFI).</a:t>
+            </a:r>
+            <a:endParaRPr lang="en-US" sz="1700" dirty="0"/>
+          </a:p>
+          <a:p>
+            <a:pPr algn="l" marL="342900" indent="-342900">
+              <a:spcBef>
+                <a:spcPts val="1100"/>
+              </a:spcBef>
+              <a:spcAft>
+                <a:spcPts val="300"/>
+              </a:spcAft>
+              <a:buSzPct val="100000"/>
+              <a:buChar char="•"/>
+            </a:pPr>
+            <a:r>
+              <a:rPr lang="en-US" sz="1700" b="1" dirty="0">
+                <a:solidFill>
+                  <a:srgbClr val="111111"/>
+                </a:solidFill>
+              </a:rPr>
+              <a:t>Adds</a:t>
+            </a:r>
+            <a:endParaRPr lang="en-US" sz="1700" dirty="0"/>
+          </a:p>
+          <a:p>
+            <a:pPr algn="l" lvl="1" marL="685800" indent="-342900">
+              <a:spcAft>
+                <a:spcPts val="400"/>
+              </a:spcAft>
+              <a:buSzPct val="100000"/>
+              <a:buChar char="▪"/>
+            </a:pPr>
+            <a:r>
+              <a:rPr lang="en-US" sz="1450" dirty="0">
+                <a:solidFill>
+                  <a:srgbClr val="595959"/>
+                </a:solidFill>
+              </a:rPr>
+              <a:t>The class difference is a whole-peak property, not a 170 bp one.</a:t>
+            </a:r>
+            <a:endParaRPr lang="en-US" sz="1700" dirty="0"/>
+          </a:p>
+          <a:p>
+            <a:pPr algn="l" lvl="1" marL="685800" indent="-342900">
+              <a:spcAft>
+                <a:spcPts val="400"/>
+              </a:spcAft>
+              <a:buSzPct val="100000"/>
+              <a:buChar char="▪"/>
+            </a:pPr>
+            <a:r>
+              <a:rPr lang="en-US" sz="1450" dirty="0">
+                <a:solidFill>
+                  <a:srgbClr val="595959"/>
+                </a:solidFill>
+              </a:rPr>
+              <a:t>Within Dynamic, the AP-1-LOSING sites are the ones that are sequence-different, with age and with exercise alike; the gaining ones look like Stable. Direction, not stimulus.</a:t>
+            </a:r>
+            <a:endParaRPr lang="en-US" sz="1700" dirty="0"/>
+          </a:p>
+          <a:p>
+            <a:pPr algn="l" lvl="1" marL="685800" indent="-342900">
+              <a:spcAft>
+                <a:spcPts val="400"/>
+              </a:spcAft>
+              <a:buSzPct val="100000"/>
+              <a:buChar char="▪"/>
+            </a:pPr>
+            <a:r>
+              <a:rPr lang="en-US" sz="1450" dirty="0">
+                <a:solidFill>
+                  <a:srgbClr val="595959"/>
+                </a:solidFill>
+              </a:rPr>
+              <a:t>Unprompted, AlphaGenome makes the AP-1 core the most important 10 bp in over half of all sites — equally in both classes. The classes differ in how much of the dependence sits there, not in whether AP-1 leads.</a:t>
+            </a:r>
+            <a:endParaRPr lang="en-US" sz="1700" dirty="0"/>
+          </a:p>
+          <a:p>
+            <a:pPr algn="l" lvl="1" marL="685800" indent="-342900">
+              <a:spcAft>
+                <a:spcPts val="400"/>
+              </a:spcAft>
+              <a:buSzPct val="100000"/>
+              <a:buChar char="▪"/>
+            </a:pPr>
+            <a:r>
+              <a:rPr lang="en-US" sz="1450" dirty="0">
+                <a:solidFill>
+                  <a:srgbClr val="595959"/>
+                </a:solidFill>
+              </a:rPr>
+              <a:t>Dynamic sites spread their dependence slightly wider, and it survives accessibility matching (33.1% vs 31.3% within ±25 bp, P = 0.006) — the sequence-model version of “attention is more distributed at dynamic enhancers”.</a:t>
+            </a:r>
+            <a:endParaRPr lang="en-US" sz="1700" dirty="0"/>
+          </a:p>
+          <a:p>
+            <a:pPr algn="l" marL="342900" indent="-342900">
+              <a:spcBef>
+                <a:spcPts val="1100"/>
+              </a:spcBef>
+              <a:spcAft>
+                <a:spcPts val="300"/>
+              </a:spcAft>
+              <a:buSzPct val="100000"/>
+              <a:buChar char="•"/>
+            </a:pPr>
+            <a:r>
+              <a:rPr lang="en-US" sz="1700" b="1" dirty="0">
+                <a:solidFill>
+                  <a:srgbClr val="111111"/>
+                </a:solidFill>
+              </a:rPr>
+              <a:t>Keep off the slides</a:t>
+            </a:r>
+            <a:endParaRPr lang="en-US" sz="1700" dirty="0"/>
+          </a:p>
+          <a:p>
+            <a:pPr algn="l" lvl="1" marL="685800" indent="-342900">
+              <a:spcAft>
+                <a:spcPts val="400"/>
+              </a:spcAft>
+              <a:buSzPct val="100000"/>
+              <a:buChar char="▪"/>
+            </a:pPr>
+            <a:r>
+              <a:rPr lang="en-US" sz="1450" dirty="0">
+                <a:solidFill>
+                  <a:srgbClr val="595959"/>
+                </a:solidFill>
+              </a:rPr>
+              <a:t>Our in-situ 170 bp shuffle costs Stable sites more (−2.51 vs −1.96, p = 4e-40), the opposite of the MPRA flank result. Different assay — episomal activity vs chromatin accessibility — but it reads as a contradiction.</a:t>
+            </a:r>
+            <a:endParaRPr lang="en-US" sz="1700" dirty="0"/>
+          </a:p>
+        </p:txBody>
+      </p:sp>
+      <p:sp>
+        <p:nvSpPr>
+          <p:cNvPr id="25" name="Slide Number Placeholder 0"/>
+          <p:cNvSpPr>
+            <a:spLocks noGrp="1"/>
+          </p:cNvSpPr>
+          <p:nvPr>
+            <p:ph type="sldNum" sz="quarter" idx="4294967295"/>
+          </p:nvPr>
+        </p:nvSpPr>
+        <p:spPr>
+          <a:xfrm>
+            <a:off x="11658600" y="6446520"/>
+            <a:ext cx="800000" cy="300000"/>
+          </a:xfrm>
+          <a:prstGeom prst="rect">
+            <a:avLst/>
+          </a:prstGeom>
+          <a:extLst>
+            <a:ext uri="{C572A759-6A51-4108-AA02-DFA0A04FC94B}">
+              <ma14:wrappingTextBoxFlag xmlns:ma14="http://schemas.microsoft.com/office/mac/drawingml/2011/main" val="0"/>
+            </a:ext>
+          </a:extLst>
+        </p:spPr>
+        <p:txBody>
+          <a:bodyPr/>
+          <a:lstStyle>
+            <a:lvl1pPr>
+              <a:defRPr sz="1000">
+                <a:solidFill>
+                  <a:srgbClr val="A6A6A6"/>
+                </a:solidFill>
+              </a:defRPr>
+            </a:lvl1pPr>
+          </a:lstStyle>
+          <a:p>
+            <a:pPr algn="l"/>
+            <a:fld id="{F7021451-1387-4CA6-816F-3879F97B5CBC}" type="slidenum">
+              <a:rPr b="0" lang="en-US"/>
+              <a:t>17</a:t>
             </a:fld>
             <a:endParaRPr lang="en-US"/>
           </a:p>

--- a/Analysis/AP1_fibroblast_lab_meeting.pptx
+++ b/Analysis/AP1_fibroblast_lab_meeting.pptx
@@ -19587,7 +19587,7 @@
                   <a:srgbClr val="595959"/>
                 </a:solidFill>
               </a:rPr>
-              <a:t>Every element swapped into every other site's location: the swapped site's accessibility regressed on the donor element and on the recipient location. The two weights are drawn pulling against each other from a common zero. 62,250 swaps; 95% CI from a cluster bootstrap over the 250 donors.</a:t>
+              <a:t>Every element written into every other site's location; the accessibility that results regressed on the donor element's own level and on the recipient location's. Both weights are positive, drawn apart only so the pair can be compared. 62,250 swaps; 95% CI from a cluster bootstrap over 250 donors.</a:t>
             </a:r>
             <a:endParaRPr lang="en-US" sz="1250" dirty="0"/>
           </a:p>
@@ -19609,8 +19609,8 @@
         </p:blipFill>
         <p:spPr>
           <a:xfrm>
-            <a:off x="1064362" y="1335024"/>
-            <a:ext cx="10032797" cy="3858768"/>
+            <a:off x="1444752" y="1335024"/>
+            <a:ext cx="9272016" cy="3566160"/>
           </a:xfrm>
           <a:prstGeom prst="rect">
             <a:avLst/>
@@ -19625,8 +19625,8 @@
         </p:nvSpPr>
         <p:spPr>
           <a:xfrm>
-            <a:off x="502920" y="5303520"/>
-            <a:ext cx="50292" cy="868680"/>
+            <a:off x="502920" y="5047488"/>
+            <a:ext cx="50292" cy="731520"/>
           </a:xfrm>
           <a:prstGeom prst="rect">
             <a:avLst/>
@@ -19650,8 +19650,8 @@
         </p:nvSpPr>
         <p:spPr>
           <a:xfrm>
-            <a:off x="749808" y="5303520"/>
-            <a:ext cx="10881360" cy="868680"/>
+            <a:off x="749808" y="5047488"/>
+            <a:ext cx="10881360" cy="731520"/>
           </a:xfrm>
           <a:prstGeom prst="rect">
             <a:avLst/>
@@ -19675,6 +19675,42 @@
               <a:t>At 170 bp an element mostly takes on the level of wherever you put it; at full peak width it imposes its own. The information that opens chromatin is spread over the whole peak — which is why a 170 bp assay cannot see it.</a:t>
             </a:r>
             <a:endParaRPr lang="en-US" sz="1700" dirty="0"/>
+          </a:p>
+        </p:txBody>
+      </p:sp>
+      <p:sp>
+        <p:nvSpPr>
+          <p:cNvPr id="7" name="Text 4"/>
+          <p:cNvSpPr txBox="1"/>
+          <p:nvPr/>
+        </p:nvSpPr>
+        <p:spPr>
+          <a:xfrm>
+            <a:off x="749808" y="5852160"/>
+            <a:ext cx="10881360" cy="603504"/>
+          </a:xfrm>
+          <a:prstGeom prst="rect">
+            <a:avLst/>
+          </a:prstGeom>
+          <a:noFill/>
+          <a:ln/>
+        </p:spPr>
+        <p:txBody>
+          <a:bodyPr wrap="square" lIns="0" tIns="0" rIns="0" bIns="0" rtlCol="0" anchor="t"/>
+          <a:lstStyle/>
+          <a:p>
+            <a:pPr indent="0" marL="0">
+              <a:buNone/>
+            </a:pPr>
+            <a:r>
+              <a:rPr lang="en-US" sz="1300" dirty="0">
+                <a:solidFill>
+                  <a:srgbClr val="595959"/>
+                </a:solidFill>
+              </a:rPr>
+              <a:t>Read it as a transplant: take a strong element, put it somewhere weak. At 170 bp it comes out weak — the location carries most of the weight (0.61 against 0.24). At full peak width it stays strong — the element now carries most of it (0.71 against 0.20). Nothing about the element changed, only how much of it we moved. P tests the two weights against each other.</a:t>
+            </a:r>
+            <a:endParaRPr lang="en-US" sz="1300" dirty="0"/>
           </a:p>
         </p:txBody>
       </p:sp>
@@ -22748,6 +22784,368 @@
         </p:nvSpPr>
         <p:spPr>
           <a:xfrm>
+            <a:off x="6283142" y="1544898"/>
+            <a:ext cx="137160" cy="137160"/>
+          </a:xfrm>
+          <a:prstGeom prst="rect">
+            <a:avLst/>
+          </a:prstGeom>
+          <a:solidFill>
+            <a:srgbClr val="D6D6D6"/>
+          </a:solidFill>
+          <a:ln w="11430">
+            <a:solidFill>
+              <a:srgbClr val="111111"/>
+            </a:solidFill>
+            <a:prstDash val="solid"/>
+          </a:ln>
+        </p:spPr>
+      </p:sp>
+      <p:sp>
+        <p:nvSpPr>
+          <p:cNvPr id="6" name="Shape 3"/>
+          <p:cNvSpPr/>
+          <p:nvPr/>
+        </p:nvSpPr>
+        <p:spPr>
+          <a:xfrm>
+            <a:off x="6283142" y="1743113"/>
+            <a:ext cx="137160" cy="137160"/>
+          </a:xfrm>
+          <a:prstGeom prst="rect">
+            <a:avLst/>
+          </a:prstGeom>
+          <a:solidFill>
+            <a:srgbClr val="FFFFFF"/>
+          </a:solidFill>
+          <a:ln w="11430">
+            <a:solidFill>
+              <a:srgbClr val="111111"/>
+            </a:solidFill>
+            <a:prstDash val="solid"/>
+          </a:ln>
+        </p:spPr>
+      </p:sp>
+      <p:sp>
+        <p:nvSpPr>
+          <p:cNvPr id="7" name="Text 4"/>
+          <p:cNvSpPr txBox="1"/>
+          <p:nvPr/>
+        </p:nvSpPr>
+        <p:spPr>
+          <a:xfrm>
+            <a:off x="2010934" y="1613535"/>
+            <a:ext cx="5277917" cy="237744"/>
+          </a:xfrm>
+          <a:prstGeom prst="rect">
+            <a:avLst/>
+          </a:prstGeom>
+          <a:noFill/>
+          <a:ln/>
+        </p:spPr>
+        <p:txBody>
+          <a:bodyPr wrap="none" lIns="0" tIns="0" rIns="0" bIns="0" rtlCol="0" anchor="ctr"/>
+          <a:lstStyle/>
+          <a:p>
+            <a:pPr algn="l" indent="0" marL="0">
+              <a:buNone/>
+            </a:pPr>
+            <a:r>
+              <a:rPr lang="en-US" sz="1233" dirty="0">
+                <a:solidFill>
+                  <a:srgbClr val="4D4D4D"/>
+                </a:solidFill>
+                <a:latin typeface="Arial" pitchFamily="34" charset="0"/>
+                <a:ea typeface="Arial" pitchFamily="34" charset="-122"/>
+                <a:cs typeface="Arial" pitchFamily="34" charset="-120"/>
+              </a:rPr>
+              <a:t>vs Stable, at the site's own AP-1 motif (BH across the four)</a:t>
+            </a:r>
+            <a:endParaRPr lang="en-US" sz="1233" dirty="0"/>
+          </a:p>
+        </p:txBody>
+      </p:sp>
+      <p:sp>
+        <p:nvSpPr>
+          <p:cNvPr id="8" name="Text 5"/>
+          <p:cNvSpPr txBox="1"/>
+          <p:nvPr/>
+        </p:nvSpPr>
+        <p:spPr>
+          <a:xfrm>
+            <a:off x="1654682" y="2009965"/>
+            <a:ext cx="914400" cy="237744"/>
+          </a:xfrm>
+          <a:prstGeom prst="rect">
+            <a:avLst/>
+          </a:prstGeom>
+          <a:noFill/>
+          <a:ln/>
+        </p:spPr>
+        <p:txBody>
+          <a:bodyPr wrap="none" lIns="0" tIns="0" rIns="0" bIns="0" rtlCol="0" anchor="ctr"/>
+          <a:lstStyle/>
+          <a:p>
+            <a:pPr algn="ctr" indent="0" marL="0">
+              <a:buNone/>
+            </a:pPr>
+            <a:r>
+              <a:rPr lang="en-US" sz="1233" dirty="0">
+                <a:solidFill>
+                  <a:srgbClr val="4D4D4D"/>
+                </a:solidFill>
+                <a:latin typeface="Arial" pitchFamily="34" charset="0"/>
+                <a:ea typeface="Arial" pitchFamily="34" charset="-122"/>
+                <a:cs typeface="Arial" pitchFamily="34" charset="-120"/>
+              </a:rPr>
+              <a:t>reference</a:t>
+            </a:r>
+            <a:endParaRPr lang="en-US" sz="1233" dirty="0"/>
+          </a:p>
+        </p:txBody>
+      </p:sp>
+      <p:sp>
+        <p:nvSpPr>
+          <p:cNvPr id="9" name="Text 6"/>
+          <p:cNvSpPr txBox="1"/>
+          <p:nvPr/>
+        </p:nvSpPr>
+        <p:spPr>
+          <a:xfrm>
+            <a:off x="3673654" y="2009965"/>
+            <a:ext cx="914400" cy="237744"/>
+          </a:xfrm>
+          <a:prstGeom prst="rect">
+            <a:avLst/>
+          </a:prstGeom>
+          <a:noFill/>
+          <a:ln/>
+        </p:spPr>
+        <p:txBody>
+          <a:bodyPr wrap="none" lIns="0" tIns="0" rIns="0" bIns="0" rtlCol="0" anchor="ctr"/>
+          <a:lstStyle/>
+          <a:p>
+            <a:pPr algn="ctr" indent="0" marL="0">
+              <a:buNone/>
+            </a:pPr>
+            <a:r>
+              <a:rPr lang="en-US" sz="1233" dirty="0">
+                <a:solidFill>
+                  <a:srgbClr val="4D4D4D"/>
+                </a:solidFill>
+                <a:latin typeface="Arial" pitchFamily="34" charset="0"/>
+                <a:ea typeface="Arial" pitchFamily="34" charset="-122"/>
+                <a:cs typeface="Arial" pitchFamily="34" charset="-120"/>
+              </a:rPr>
+              <a:t>FDR = 0.93</a:t>
+            </a:r>
+            <a:endParaRPr lang="en-US" sz="1233" dirty="0"/>
+          </a:p>
+        </p:txBody>
+      </p:sp>
+      <p:sp>
+        <p:nvSpPr>
+          <p:cNvPr id="10" name="Text 7"/>
+          <p:cNvSpPr txBox="1"/>
+          <p:nvPr/>
+        </p:nvSpPr>
+        <p:spPr>
+          <a:xfrm>
+            <a:off x="5446103" y="2009965"/>
+            <a:ext cx="1407444" cy="237744"/>
+          </a:xfrm>
+          <a:prstGeom prst="rect">
+            <a:avLst/>
+          </a:prstGeom>
+          <a:noFill/>
+          <a:ln/>
+        </p:spPr>
+        <p:txBody>
+          <a:bodyPr wrap="none" lIns="0" tIns="0" rIns="0" bIns="0" rtlCol="0" anchor="ctr"/>
+          <a:lstStyle/>
+          <a:p>
+            <a:pPr algn="ctr" indent="0" marL="0">
+              <a:buNone/>
+            </a:pPr>
+            <a:r>
+              <a:rPr lang="en-US" sz="1233" dirty="0">
+                <a:solidFill>
+                  <a:srgbClr val="4D4D4D"/>
+                </a:solidFill>
+                <a:latin typeface="Arial" pitchFamily="34" charset="0"/>
+                <a:ea typeface="Arial" pitchFamily="34" charset="-122"/>
+                <a:cs typeface="Arial" pitchFamily="34" charset="-120"/>
+              </a:rPr>
+              <a:t>FDR = 9.1 × 10⁻⁵</a:t>
+            </a:r>
+            <a:endParaRPr lang="en-US" sz="1233" dirty="0"/>
+          </a:p>
+        </p:txBody>
+      </p:sp>
+      <p:sp>
+        <p:nvSpPr>
+          <p:cNvPr id="11" name="Text 8"/>
+          <p:cNvSpPr txBox="1"/>
+          <p:nvPr/>
+        </p:nvSpPr>
+        <p:spPr>
+          <a:xfrm>
+            <a:off x="7711596" y="2009965"/>
+            <a:ext cx="914400" cy="237744"/>
+          </a:xfrm>
+          <a:prstGeom prst="rect">
+            <a:avLst/>
+          </a:prstGeom>
+          <a:noFill/>
+          <a:ln/>
+        </p:spPr>
+        <p:txBody>
+          <a:bodyPr wrap="none" lIns="0" tIns="0" rIns="0" bIns="0" rtlCol="0" anchor="ctr"/>
+          <a:lstStyle/>
+          <a:p>
+            <a:pPr algn="ctr" indent="0" marL="0">
+              <a:buNone/>
+            </a:pPr>
+            <a:r>
+              <a:rPr lang="en-US" sz="1233" dirty="0">
+                <a:solidFill>
+                  <a:srgbClr val="4D4D4D"/>
+                </a:solidFill>
+                <a:latin typeface="Arial" pitchFamily="34" charset="0"/>
+                <a:ea typeface="Arial" pitchFamily="34" charset="-122"/>
+                <a:cs typeface="Arial" pitchFamily="34" charset="-120"/>
+              </a:rPr>
+              <a:t>FDR = 0.49</a:t>
+            </a:r>
+            <a:endParaRPr lang="en-US" sz="1233" dirty="0"/>
+          </a:p>
+        </p:txBody>
+      </p:sp>
+      <p:sp>
+        <p:nvSpPr>
+          <p:cNvPr id="12" name="Text 9"/>
+          <p:cNvSpPr txBox="1"/>
+          <p:nvPr/>
+        </p:nvSpPr>
+        <p:spPr>
+          <a:xfrm>
+            <a:off x="9703958" y="2009965"/>
+            <a:ext cx="967618" cy="237744"/>
+          </a:xfrm>
+          <a:prstGeom prst="rect">
+            <a:avLst/>
+          </a:prstGeom>
+          <a:noFill/>
+          <a:ln/>
+        </p:spPr>
+        <p:txBody>
+          <a:bodyPr wrap="none" lIns="0" tIns="0" rIns="0" bIns="0" rtlCol="0" anchor="ctr"/>
+          <a:lstStyle/>
+          <a:p>
+            <a:pPr algn="ctr" indent="0" marL="0">
+              <a:buNone/>
+            </a:pPr>
+            <a:r>
+              <a:rPr lang="en-US" sz="1233" dirty="0">
+                <a:solidFill>
+                  <a:srgbClr val="4D4D4D"/>
+                </a:solidFill>
+                <a:latin typeface="Arial" pitchFamily="34" charset="0"/>
+                <a:ea typeface="Arial" pitchFamily="34" charset="-122"/>
+                <a:cs typeface="Arial" pitchFamily="34" charset="-120"/>
+              </a:rPr>
+              <a:t>FDR = 0.043</a:t>
+            </a:r>
+            <a:endParaRPr lang="en-US" sz="1233" dirty="0"/>
+          </a:p>
+        </p:txBody>
+      </p:sp>
+      <p:sp>
+        <p:nvSpPr>
+          <p:cNvPr id="13" name="Text 10"/>
+          <p:cNvSpPr txBox="1"/>
+          <p:nvPr/>
+        </p:nvSpPr>
+        <p:spPr>
+          <a:xfrm>
+            <a:off x="6513240" y="1494606"/>
+            <a:ext cx="1649349" cy="237744"/>
+          </a:xfrm>
+          <a:prstGeom prst="rect">
+            <a:avLst/>
+          </a:prstGeom>
+          <a:noFill/>
+          <a:ln/>
+        </p:spPr>
+        <p:txBody>
+          <a:bodyPr wrap="none" lIns="0" tIns="0" rIns="0" bIns="0" rtlCol="0" anchor="ctr"/>
+          <a:lstStyle/>
+          <a:p>
+            <a:pPr algn="l" indent="0" marL="0">
+              <a:buNone/>
+            </a:pPr>
+            <a:r>
+              <a:rPr lang="en-US" sz="1285" dirty="0">
+                <a:solidFill>
+                  <a:srgbClr val="111111"/>
+                </a:solidFill>
+                <a:latin typeface="Arial" pitchFamily="34" charset="0"/>
+                <a:ea typeface="Arial" pitchFamily="34" charset="-122"/>
+                <a:cs typeface="Arial" pitchFamily="34" charset="-120"/>
+              </a:rPr>
+              <a:t>its own AP-1 motif</a:t>
+            </a:r>
+            <a:endParaRPr lang="en-US" sz="1285" dirty="0"/>
+          </a:p>
+        </p:txBody>
+      </p:sp>
+      <p:sp>
+        <p:nvSpPr>
+          <p:cNvPr id="14" name="Text 11"/>
+          <p:cNvSpPr txBox="1"/>
+          <p:nvPr/>
+        </p:nvSpPr>
+        <p:spPr>
+          <a:xfrm>
+            <a:off x="6513240" y="1692821"/>
+            <a:ext cx="4031742" cy="237744"/>
+          </a:xfrm>
+          <a:prstGeom prst="rect">
+            <a:avLst/>
+          </a:prstGeom>
+          <a:noFill/>
+          <a:ln/>
+        </p:spPr>
+        <p:txBody>
+          <a:bodyPr wrap="none" lIns="0" tIns="0" rIns="0" bIns="0" rtlCol="0" anchor="ctr"/>
+          <a:lstStyle/>
+          <a:p>
+            <a:pPr algn="l" indent="0" marL="0">
+              <a:buNone/>
+            </a:pPr>
+            <a:r>
+              <a:rPr lang="en-US" sz="1285" dirty="0">
+                <a:solidFill>
+                  <a:srgbClr val="111111"/>
+                </a:solidFill>
+                <a:latin typeface="Arial" pitchFamily="34" charset="0"/>
+                <a:ea typeface="Arial" pitchFamily="34" charset="-122"/>
+                <a:cs typeface="Arial" pitchFamily="34" charset="-120"/>
+              </a:rPr>
+              <a:t>its partner motifs, net of a matched control</a:t>
+            </a:r>
+            <a:endParaRPr lang="en-US" sz="1285" dirty="0"/>
+          </a:p>
+        </p:txBody>
+      </p:sp>
+      <p:sp>
+        <p:nvSpPr>
+          <p:cNvPr id="15" name="Shape 12"/>
+          <p:cNvSpPr/>
+          <p:nvPr/>
+        </p:nvSpPr>
+        <p:spPr>
+          <a:xfrm>
             <a:off x="502920" y="5303520"/>
             <a:ext cx="50292" cy="868680"/>
           </a:xfrm>
@@ -22767,7 +23165,7 @@
       </p:sp>
       <p:sp>
         <p:nvSpPr>
-          <p:cNvPr id="6" name="Text 3"/>
+          <p:cNvPr id="16" name="Text 13"/>
           <p:cNvSpPr txBox="1"/>
           <p:nvPr/>
         </p:nvSpPr>

--- a/Analysis/AP1_fibroblast_lab_meeting.pptx
+++ b/Analysis/AP1_fibroblast_lab_meeting.pptx
@@ -1893,7 +1893,13 @@
           <a:p>
             <a:r>
               <a:rPr lang="en-US" dirty="0"/>
-              <a:t>62,250 swaps. 170 bp: beta(element) 0.24 vs beta(location) 0.61, R2 = 0.20. Whole peak: 0.71 vs 0.20, R2 = 0.46. Transfer fraction 0.29 at 170 bp, 0.83 at peak.
+              <a:t>THE CLASS RESULT, whole peak, element's share of its own level ('carried'), BH across the four:
+  Stable 84.1% [80.9-87.0] (reference) · Age Up 77.8% [73.4-81.4] FDR 0.020 · Age Down 78.6% [72.6-83.2] FDR 0.063 · Exercise Up 76.0% [69.7-80.5] FDR 0.010 · Exercise Down 72.7% [62.3-79.2] FDR 0.004
+Underlying weights, element vs location: Stable 0.79/0.15, Age Up 0.72/0.21, Age Down 0.67/0.18, Exercise Up 0.69/0.22, Exercise Down 0.60/0.23. R2 0.65 for Stable, 0.27-0.50 for the Dynamic classes.
+Age Down at FDR 0.063 is the one that does not clear the line. Say 'three of four' rather than 'all four'; the direction is the same in every class and the ordering is monotone, but one of them is not significant.
+Every interval resamples DONORS, not swaps: each donor appears in ~250 rows, so a row-level standard error would be far too small and all five classes would look certain.
+170 bp, for contrast: Stable carries 39.8% [23.7-51.0]; Age Up 11.9%, Age Down 11.0%, Exercise Up -0.9%, Exercise Down 33.6%, three of four below Stable at FDR &lt; 0.05. The Dynamic intervals there cross zero, so treat the 170 bp row as 'almost nothing transfers' rather than as a clean ranking.
+Pooled over all classes, which is what this slide used to show: 170 bp 0.24 vs 0.61, whole peak 0.71 vs 0.20.
 Link to the MPRA, if asked: the MPRA library is 170 bp, and its class difference there is tiny (flank shuffle 0.128 vs 0.016 log2, d = 0.14). Both assays agree that 170 bp is a poor window for this question. They are NOT the same measurement - the MPRA is episomal activity, this is chromatin accessibility in genomic context.
 AVOID on a slide: our in-situ 170 bp shuffle has Stable sites losing more (-2.51 vs -1.96, p = 4e-40), which is the opposite direction to the MPRA flank result. Different assay, but it reads as a contradiction. Keep it off unless someone asks.</a:t>
             </a:r>
@@ -19551,7 +19557,7 @@
                   <a:schemeClr val="tx1"/>
                 </a:solidFill>
               </a:rPr>
-              <a:t>The element's identity lives at peak scale, not in 170 bp</a:t>
+              <a:t>A Stable element carries more of itself into a new location</a:t>
             </a:r>
             <a:endParaRPr lang="en-US" sz="2800" dirty="0"/>
           </a:p>
@@ -19587,7 +19593,7 @@
                   <a:srgbClr val="595959"/>
                 </a:solidFill>
               </a:rPr>
-              <a:t>Every element written into every other site's location; the accessibility that results regressed on the donor element's own level and on the recipient location's. Both weights are positive, drawn apart only so the pair can be compared. 62,250 swaps; 95% CI from a cluster bootstrap over 250 donors.</a:t>
+              <a:t>Every element written into every other site's location, at whole-peak width; the resulting accessibility regressed on the donor element's own level and the recipient location's, within each class. 'Carried' is the element's share of the two. Cluster bootstrap over 50 donors per class, BH across four.</a:t>
             </a:r>
             <a:endParaRPr lang="en-US" sz="1250" dirty="0"/>
           </a:p>
@@ -19609,8 +19615,8 @@
         </p:blipFill>
         <p:spPr>
           <a:xfrm>
-            <a:off x="1444752" y="1335024"/>
-            <a:ext cx="9272016" cy="3566160"/>
+            <a:off x="1602327" y="1335024"/>
+            <a:ext cx="8956867" cy="3566160"/>
           </a:xfrm>
           <a:prstGeom prst="rect">
             <a:avLst/>
@@ -19672,7 +19678,7 @@
                   <a:srgbClr val="111111"/>
                 </a:solidFill>
               </a:rPr>
-              <a:t>At 170 bp an element mostly takes on the level of wherever you put it; at full peak width it imposes its own. The information that opens chromatin is spread over the whole peak — which is why a 170 bp assay cannot see it.</a:t>
+              <a:t>Move an element somewhere else and a Stable one brings 84% of its own level with it; every Dynamic class brings less, 73–79%, and three of the four differ from Stable. A Dynamic element is more a product of where it sits — the same conclusion the transplant reached, from a design with no closed background in it.</a:t>
             </a:r>
             <a:endParaRPr lang="en-US" sz="1700" dirty="0"/>
           </a:p>
@@ -19708,7 +19714,7 @@
                   <a:srgbClr val="595959"/>
                 </a:solidFill>
               </a:rPr>
-              <a:t>Read it as a transplant: take a strong element, put it somewhere weak. At 170 bp it comes out weak — the location carries most of the weight (0.61 against 0.24). At full peak width it stays strong — the element now carries most of it (0.71 against 0.20). Nothing about the element changed, only how much of it we moved. P tests the two weights against each other.</a:t>
+              <a:t>Width matters as much as class: at the 170 bp MPRA window a Stable element carries only 40% and the Dynamic classes essentially nothing (−1% to 34%, intervals crossing zero). The information that opens chromatin is spread over the whole peak, which is why a 170 bp assay struggles to see any of this.</a:t>
             </a:r>
             <a:endParaRPr lang="en-US" sz="1300" dirty="0"/>
           </a:p>

--- a/Analysis/AP1_fibroblast_lab_meeting.pptx
+++ b/Analysis/AP1_fibroblast_lab_meeting.pptx
@@ -23,9 +23,10 @@
     <p:sldId id="271" r:id="rId17"/>
     <p:sldId id="272" r:id="rId18"/>
     <p:sldId id="273" r:id="rId19"/>
+    <p:sldId id="274" r:id="rId20"/>
   </p:sldIdLst>
   <p:notesMasterIdLst>
-    <p:notesMasterId r:id="rId20"/>
+    <p:notesMasterId r:id="rId21"/>
   </p:notesMasterIdLst>
   <p:sldSz cx="12192000" cy="6858000"/>
   <p:notesSz cx="6858000" cy="12192000"/>
@@ -1260,8 +1261,11 @@
           <a:p>
             <a:r>
               <a:rPr lang="en-US" dirty="0"/>
-              <a:t>From the fibroblast titration, 2,359 sites, 860 accessibility-matched pairs (caliper 0.1 log10). This slide is the argument for why the matched analysis is worth doing - two of the five largest raw class differences in the titration were entirely explained by the accessibility gap.
-Age Down is the outlier again, consistently with the other arms: one base of the core changed -0.62 vs Stable -0.83; motif gone -0.72 vs -1.07.</a:t>
+              <a:t>Keep this one in the back pocket; it is the first question any of these results gets.
+The size of the confound: Stable sites are about twice as accessible as Dynamic ones (measured native 32.2 vs 18.0 in the swap donors; predicted 10.5 vs 8.5 across the scan sites).
+Two different things are matched on in different places, and it is worth being straight about it: the transplant matches on MEASURED native accessibility, the density and top-tile analyses on PREDICTED. Matching on predicted is the more conservative choice for a prediction-based readout, because it removes the thing the model itself would key on.
+Not matched, and said so on the slides: the three alternative density readings. The pooled Stable-vs-Dynamic contrast they re-draw is the one that survives matching; the five-class split has not been matched, because Exercise Down has 115 sites and would not support it.
+Why 1:1 matching keeps coming out underpowered: a caliper of 0.1 log10 on populations that differ roughly two-fold throws most of the Dynamic sites away. Where the n allows it (860 pairs in the scan) it is the better test; where it does not (47 donor pairs in the transplant) the covariate adjustment uses every site and is the one to quote.</a:t>
             </a:r>
             <a:endParaRPr lang="en-US" dirty="0"/>
           </a:p>
@@ -1349,8 +1353,8 @@
           <a:p>
             <a:r>
               <a:rPr lang="en-US" dirty="0"/>
-              <a:t>If the flank question comes up: the MPRA destroys the flanks of a 170 bp fragment on a plasmid and reads transcription; we move an intact ~0.8 kb element into closed chromatin and read accessibility. There is no chromatin to open in the MPRA. The honest shared conclusion is that neither assay finds much class information in 170 bp.
-Everything here is predicted accessibility from a model fine-tuned on our own fibroblast ATAC, not a measurement, and not the MPRA-trained probe used in the manuscript.</a:t>
+              <a:t>From the fibroblast titration, 2,359 sites, 860 accessibility-matched pairs (caliper 0.1 log10). This slide is the argument for why the matched analysis is worth doing - two of the five largest raw class differences in the titration were entirely explained by the accessibility gap.
+Age Down is the outlier again, consistently with the other arms: one base of the core changed -0.62 vs Stable -0.83; motif gone -0.72 vs -1.07.</a:t>
             </a:r>
             <a:endParaRPr lang="en-US" dirty="0"/>
           </a:p>
@@ -1374,6 +1378,95 @@
             <a:fld id="{F7021451-1387-4CA6-816F-3879F97B5CBC}" type="slidenum">
               <a:rPr lang="en-US"/>
               <a:t>18</a:t>
+            </a:fld>
+            <a:endParaRPr lang="en-US"/>
+          </a:p>
+        </p:txBody>
+      </p:sp>
+    </p:spTree>
+    <p:extLst>
+      <p:ext uri="{BB962C8B-B14F-4D97-AF65-F5344CB8AC3E}">
+        <p14:creationId xmlns:p14="http://schemas.microsoft.com/office/powerpoint/2010/main" val="1024086991"/>
+      </p:ext>
+    </p:extLst>
+  </p:cSld>
+  <p:clrMapOvr>
+    <a:masterClrMapping/>
+  </p:clrMapOvr>
+</p:notes>
+</file>
+
+<file path=ppt/notesSlides/notesSlide19.xml><?xml version="1.0" encoding="utf-8"?>
+<p:notes xmlns:a="http://schemas.openxmlformats.org/drawingml/2006/main" xmlns:r="http://schemas.openxmlformats.org/officeDocument/2006/relationships" xmlns:p="http://schemas.openxmlformats.org/presentationml/2006/main">
+  <p:cSld>
+    <p:spTree>
+      <p:nvGrpSpPr>
+        <p:cNvPr id="1" name=""/>
+        <p:cNvGrpSpPr/>
+        <p:nvPr/>
+      </p:nvGrpSpPr>
+      <p:grpSpPr>
+        <a:xfrm>
+          <a:off x="0" y="0"/>
+          <a:ext cx="0" cy="0"/>
+          <a:chOff x="0" y="0"/>
+          <a:chExt cx="0" cy="0"/>
+        </a:xfrm>
+      </p:grpSpPr>
+      <p:sp>
+        <p:nvSpPr>
+          <p:cNvPr id="2" name="Slide Image Placeholder 1"/>
+          <p:cNvSpPr>
+            <a:spLocks noGrp="1" noRot="1" noChangeAspect="1"/>
+          </p:cNvSpPr>
+          <p:nvPr>
+            <p:ph type="sldImg"/>
+          </p:nvPr>
+        </p:nvSpPr>
+        <p:spPr/>
+      </p:sp>
+      <p:sp>
+        <p:nvSpPr>
+          <p:cNvPr id="3" name="Notes Placeholder 2"/>
+          <p:cNvSpPr>
+            <a:spLocks noGrp="1"/>
+          </p:cNvSpPr>
+          <p:nvPr>
+            <p:ph type="body" idx="1"/>
+          </p:nvPr>
+        </p:nvSpPr>
+        <p:spPr/>
+        <p:txBody>
+          <a:bodyPr/>
+          <a:lstStyle/>
+          <a:p>
+            <a:r>
+              <a:rPr lang="en-US" dirty="0"/>
+              <a:t>If the flank question comes up: the MPRA destroys the flanks of a 170 bp fragment on a plasmid and reads transcription; we move an intact ~0.8 kb element into closed chromatin and read accessibility. There is no chromatin to open in the MPRA. The honest shared conclusion is that neither assay finds much class information in 170 bp.
+Everything here is predicted accessibility from a model fine-tuned on our own fibroblast ATAC, not a measurement, and not the MPRA-trained probe used in the manuscript.</a:t>
+            </a:r>
+            <a:endParaRPr lang="en-US" dirty="0"/>
+          </a:p>
+        </p:txBody>
+      </p:sp>
+      <p:sp>
+        <p:nvSpPr>
+          <p:cNvPr id="4" name="Slide Number Placeholder 3"/>
+          <p:cNvSpPr>
+            <a:spLocks noGrp="1"/>
+          </p:cNvSpPr>
+          <p:nvPr>
+            <p:ph type="sldNum" sz="quarter" idx="10"/>
+          </p:nvPr>
+        </p:nvSpPr>
+        <p:spPr/>
+        <p:txBody>
+          <a:bodyPr/>
+          <a:lstStyle/>
+          <a:p>
+            <a:fld id="{F7021451-1387-4CA6-816F-3879F97B5CBC}" type="slidenum">
+              <a:rPr lang="en-US"/>
+              <a:t>19</a:t>
             </a:fld>
             <a:endParaRPr lang="en-US"/>
           </a:p>
@@ -8760,7 +8853,7 @@
                   <a:schemeClr val="tx1"/>
                 </a:solidFill>
               </a:rPr>
-              <a:t>Two differences that turned out to be accessibility</a:t>
+              <a:t>Is it just that Dynamic sites are less accessible?</a:t>
             </a:r>
             <a:endParaRPr lang="en-US" sz="2800" dirty="0"/>
           </a:p>
@@ -8805,7 +8898,7 @@
                   <a:srgbClr val="111111"/>
                 </a:solidFill>
               </a:rPr>
-              <a:t>A second AP-1 copy looked worth more to Dynamic sites</a:t>
+              <a:t>Immune by design — both numbers come from the same window of the same site, so accessibility cancels</a:t>
             </a:r>
             <a:endParaRPr lang="en-US" sz="1700" dirty="0"/>
           </a:p>
@@ -8823,7 +8916,7 @@
                   <a:srgbClr val="595959"/>
                 </a:solidFill>
               </a:rPr>
-              <a:t>+0.72 vs +0.60 log2, p &lt; 1e-4 — matched on accessibility, p = 0.93. Gone.</a:t>
+              <a:t>Motif specificity · partner share. Partners are also net of a width- and distance-matched footprint-free control at the mirrored distance. No between-class matching needed, and none done.</a:t>
             </a:r>
             <a:endParaRPr lang="en-US" sz="1700" dirty="0"/>
           </a:p>
@@ -8844,7 +8937,7 @@
                   <a:srgbClr val="111111"/>
                 </a:solidFill>
               </a:rPr>
-              <a:t>Upgrading an imperfect core to a perfect TGAGTCA looked worth more to Dynamic sites</a:t>
+              <a:t>Accessibility is in the model, not matched out</a:t>
             </a:r>
             <a:endParaRPr lang="en-US" sz="1700" dirty="0"/>
           </a:p>
@@ -8862,7 +8955,7 @@
                   <a:srgbClr val="595959"/>
                 </a:solidFill>
               </a:rPr>
-              <a:t>+0.66 vs +0.52, p &lt; 1e-4 — matched, p = 0.94. Gone.</a:t>
+              <a:t>The swap: each class's regression conditions on both the donor's and the recipient's own native level, so the carried share is already net of the gap.</a:t>
             </a:r>
             <a:endParaRPr lang="en-US" sz="1700" dirty="0"/>
           </a:p>
@@ -8883,7 +8976,7 @@
                   <a:srgbClr val="111111"/>
                 </a:solidFill>
               </a:rPr>
-              <a:t>What did survive matching</a:t>
+              <a:t>Matched explicitly, and survived</a:t>
             </a:r>
             <a:endParaRPr lang="en-US" sz="1700" dirty="0"/>
           </a:p>
@@ -8901,7 +8994,7 @@
                   <a:srgbClr val="595959"/>
                 </a:solidFill>
               </a:rPr>
-              <a:t>Destroying the motif costs Dynamic sites less (+0.16, p = 4e-4); the dose-response is shallower; relocating the motif helps them less.</a:t>
+              <a:t>Importance density: 33.8% vs 30.7% unmatched, and 33.1% vs 31.3% over 860 pairs matched on predicted accessibility (caliper 0.1 log10), +1.5 points, P = 0.006.</a:t>
             </a:r>
             <a:endParaRPr lang="en-US" sz="1700" dirty="0"/>
           </a:p>
@@ -8922,7 +9015,7 @@
                   <a:srgbClr val="111111"/>
                 </a:solidFill>
               </a:rPr>
-              <a:t>Two clean negatives worth having</a:t>
+              <a:t>Checked, and only survives as a covariate adjustment</a:t>
             </a:r>
             <a:endParaRPr lang="en-US" sz="1700" dirty="0"/>
           </a:p>
@@ -8940,7 +9033,28 @@
                   <a:srgbClr val="595959"/>
                 </a:solidFill>
               </a:rPr>
-              <a:t>Reverse-complementing the whole motif costs nothing in either class (-0.03 log2, p = 0.89) — expected for a palindromic TRE, and a sanity check on the head.</a:t>
+              <a:t>Transplant: every element goes into the same 20 hosts, so the host cancels — but the donor classes are not matched. 1:1 matching leaves only 47 pairs and is not significant (P = 0.13). The covariate-adjusted gap is: +0.84 ± 0.30 log2, about 1.8x, P = 0.005. Quote that one.</a:t>
+            </a:r>
+            <a:endParaRPr lang="en-US" sz="1700" dirty="0"/>
+          </a:p>
+          <a:p>
+            <a:pPr algn="l" marL="342900" indent="-342900">
+              <a:spcBef>
+                <a:spcPts val="1100"/>
+              </a:spcBef>
+              <a:spcAft>
+                <a:spcPts val="300"/>
+              </a:spcAft>
+              <a:buSzPct val="100000"/>
+              <a:buChar char="•"/>
+            </a:pPr>
+            <a:r>
+              <a:rPr lang="en-US" sz="1700" b="1" dirty="0">
+                <a:solidFill>
+                  <a:srgbClr val="111111"/>
+                </a:solidFill>
+              </a:rPr>
+              <a:t>Checked, and did not survive</a:t>
             </a:r>
             <a:endParaRPr lang="en-US" sz="1700" dirty="0"/>
           </a:p>
@@ -8958,7 +9072,7 @@
                   <a:srgbClr val="595959"/>
                 </a:solidFill>
               </a:rPr>
-              <a:t>The spacing preference for a second copy is identical: best at ±20–40 bp, decaying by ±150 bp, with no class difference at any distance (all FDR &gt; 0.58).</a:t>
+              <a:t>Top tile is a core tile: 56% vs 52% raw, matched McNemar P = 0.21 — reported as a shared fact, not a class difference. Plus the two titration results on the next slide.</a:t>
             </a:r>
             <a:endParaRPr lang="en-US" sz="1700" dirty="0"/>
           </a:p>
@@ -9066,7 +9180,7 @@
                   <a:schemeClr val="tx1"/>
                 </a:solidFill>
               </a:rPr>
-              <a:t>How this sits with the MPRA work</a:t>
+              <a:t>Two differences that turned out to be accessibility</a:t>
             </a:r>
             <a:endParaRPr lang="en-US" sz="2800" dirty="0"/>
           </a:p>
@@ -9111,7 +9225,7 @@
                   <a:srgbClr val="111111"/>
                 </a:solidFill>
               </a:rPr>
-              <a:t>Agrees</a:t>
+              <a:t>A second AP-1 copy looked worth more to Dynamic sites</a:t>
             </a:r>
             <a:endParaRPr lang="en-US" sz="1700" dirty="0"/>
           </a:p>
@@ -9129,61 +9243,7 @@
                   <a:srgbClr val="595959"/>
                 </a:solidFill>
               </a:rPr>
-              <a:t>Dynamic elements have weaker endogenous chromatin, and depend on context rather than being sequence-autonomous.</a:t>
-            </a:r>
-            <a:endParaRPr lang="en-US" sz="1700" dirty="0"/>
-          </a:p>
-          <a:p>
-            <a:pPr algn="l" lvl="1" marL="685800" indent="-342900">
-              <a:spcAft>
-                <a:spcPts val="400"/>
-              </a:spcAft>
-              <a:buSzPct val="100000"/>
-              <a:buChar char="▪"/>
-            </a:pPr>
-            <a:r>
-              <a:rPr lang="en-US" sz="1450" dirty="0">
-                <a:solidFill>
-                  <a:srgbClr val="595959"/>
-                </a:solidFill>
-              </a:rPr>
-              <a:t>Shuffling the AP-1 core alone does not separate pooled Stable from pooled Dynamic.</a:t>
-            </a:r>
-            <a:endParaRPr lang="en-US" sz="1700" dirty="0"/>
-          </a:p>
-          <a:p>
-            <a:pPr algn="l" lvl="1" marL="685800" indent="-342900">
-              <a:spcAft>
-                <a:spcPts val="400"/>
-              </a:spcAft>
-              <a:buSzPct val="100000"/>
-              <a:buChar char="▪"/>
-            </a:pPr>
-            <a:r>
-              <a:rPr lang="en-US" sz="1450" dirty="0">
-                <a:solidFill>
-                  <a:srgbClr val="595959"/>
-                </a:solidFill>
-              </a:rPr>
-              <a:t>Age-gained elements behave like Stable ones — here, at their own AP-1 motif.</a:t>
-            </a:r>
-            <a:endParaRPr lang="en-US" sz="1700" dirty="0"/>
-          </a:p>
-          <a:p>
-            <a:pPr algn="l" lvl="1" marL="685800" indent="-342900">
-              <a:spcAft>
-                <a:spcPts val="400"/>
-              </a:spcAft>
-              <a:buSzPct val="100000"/>
-              <a:buChar char="▪"/>
-            </a:pPr>
-            <a:r>
-              <a:rPr lang="en-US" sz="1450" dirty="0">
-                <a:solidFill>
-                  <a:srgbClr val="595959"/>
-                </a:solidFill>
-              </a:rPr>
-              <a:t>C/EBP is the strongest partner motif at fibroblast AP-1 sites (net −0.71 log2, ahead of MEF2 and NFI).</a:t>
+              <a:t>+0.72 vs +0.60 log2, p &lt; 1e-4 — matched on accessibility, p = 0.93. Gone.</a:t>
             </a:r>
             <a:endParaRPr lang="en-US" sz="1700" dirty="0"/>
           </a:p>
@@ -9204,7 +9264,7 @@
                   <a:srgbClr val="111111"/>
                 </a:solidFill>
               </a:rPr>
-              <a:t>Adds</a:t>
+              <a:t>Upgrading an imperfect core to a perfect TGAGTCA looked worth more to Dynamic sites</a:t>
             </a:r>
             <a:endParaRPr lang="en-US" sz="1700" dirty="0"/>
           </a:p>
@@ -9222,61 +9282,7 @@
                   <a:srgbClr val="595959"/>
                 </a:solidFill>
               </a:rPr>
-              <a:t>The class difference is a whole-peak property, not a 170 bp one.</a:t>
-            </a:r>
-            <a:endParaRPr lang="en-US" sz="1700" dirty="0"/>
-          </a:p>
-          <a:p>
-            <a:pPr algn="l" lvl="1" marL="685800" indent="-342900">
-              <a:spcAft>
-                <a:spcPts val="400"/>
-              </a:spcAft>
-              <a:buSzPct val="100000"/>
-              <a:buChar char="▪"/>
-            </a:pPr>
-            <a:r>
-              <a:rPr lang="en-US" sz="1450" dirty="0">
-                <a:solidFill>
-                  <a:srgbClr val="595959"/>
-                </a:solidFill>
-              </a:rPr>
-              <a:t>Within Dynamic, the AP-1-LOSING sites are the ones that are sequence-different, with age and with exercise alike; the gaining ones look like Stable. Direction, not stimulus.</a:t>
-            </a:r>
-            <a:endParaRPr lang="en-US" sz="1700" dirty="0"/>
-          </a:p>
-          <a:p>
-            <a:pPr algn="l" lvl="1" marL="685800" indent="-342900">
-              <a:spcAft>
-                <a:spcPts val="400"/>
-              </a:spcAft>
-              <a:buSzPct val="100000"/>
-              <a:buChar char="▪"/>
-            </a:pPr>
-            <a:r>
-              <a:rPr lang="en-US" sz="1450" dirty="0">
-                <a:solidFill>
-                  <a:srgbClr val="595959"/>
-                </a:solidFill>
-              </a:rPr>
-              <a:t>Unprompted, AlphaGenome makes the AP-1 core the most important 10 bp in over half of all sites — equally in both classes. The classes differ in how much of the dependence sits there, not in whether AP-1 leads.</a:t>
-            </a:r>
-            <a:endParaRPr lang="en-US" sz="1700" dirty="0"/>
-          </a:p>
-          <a:p>
-            <a:pPr algn="l" lvl="1" marL="685800" indent="-342900">
-              <a:spcAft>
-                <a:spcPts val="400"/>
-              </a:spcAft>
-              <a:buSzPct val="100000"/>
-              <a:buChar char="▪"/>
-            </a:pPr>
-            <a:r>
-              <a:rPr lang="en-US" sz="1450" dirty="0">
-                <a:solidFill>
-                  <a:srgbClr val="595959"/>
-                </a:solidFill>
-              </a:rPr>
-              <a:t>Dynamic sites spread their dependence slightly wider, and it survives accessibility matching (33.1% vs 31.3% within ±25 bp, P = 0.006) — the sequence-model version of “attention is more distributed at dynamic enhancers”.</a:t>
+              <a:t>+0.66 vs +0.52, p &lt; 1e-4 — matched, p = 0.94. Gone.</a:t>
             </a:r>
             <a:endParaRPr lang="en-US" sz="1700" dirty="0"/>
           </a:p>
@@ -9297,7 +9303,7 @@
                   <a:srgbClr val="111111"/>
                 </a:solidFill>
               </a:rPr>
-              <a:t>Keep off the slides</a:t>
+              <a:t>What did survive matching</a:t>
             </a:r>
             <a:endParaRPr lang="en-US" sz="1700" dirty="0"/>
           </a:p>
@@ -9315,7 +9321,64 @@
                   <a:srgbClr val="595959"/>
                 </a:solidFill>
               </a:rPr>
-              <a:t>Our in-situ 170 bp shuffle costs Stable sites more (−2.51 vs −1.96, p = 4e-40), the opposite of the MPRA flank result. Different assay — episomal activity vs chromatin accessibility — but it reads as a contradiction.</a:t>
+              <a:t>Destroying the motif costs Dynamic sites less (+0.16, p = 4e-4); the dose-response is shallower; relocating the motif helps them less.</a:t>
+            </a:r>
+            <a:endParaRPr lang="en-US" sz="1700" dirty="0"/>
+          </a:p>
+          <a:p>
+            <a:pPr algn="l" marL="342900" indent="-342900">
+              <a:spcBef>
+                <a:spcPts val="1100"/>
+              </a:spcBef>
+              <a:spcAft>
+                <a:spcPts val="300"/>
+              </a:spcAft>
+              <a:buSzPct val="100000"/>
+              <a:buChar char="•"/>
+            </a:pPr>
+            <a:r>
+              <a:rPr lang="en-US" sz="1700" b="1" dirty="0">
+                <a:solidFill>
+                  <a:srgbClr val="111111"/>
+                </a:solidFill>
+              </a:rPr>
+              <a:t>Two clean negatives worth having</a:t>
+            </a:r>
+            <a:endParaRPr lang="en-US" sz="1700" dirty="0"/>
+          </a:p>
+          <a:p>
+            <a:pPr algn="l" lvl="1" marL="685800" indent="-342900">
+              <a:spcAft>
+                <a:spcPts val="400"/>
+              </a:spcAft>
+              <a:buSzPct val="100000"/>
+              <a:buChar char="▪"/>
+            </a:pPr>
+            <a:r>
+              <a:rPr lang="en-US" sz="1450" dirty="0">
+                <a:solidFill>
+                  <a:srgbClr val="595959"/>
+                </a:solidFill>
+              </a:rPr>
+              <a:t>Reverse-complementing the whole motif costs nothing in either class (-0.03 log2, p = 0.89) — expected for a palindromic TRE, and a sanity check on the head.</a:t>
+            </a:r>
+            <a:endParaRPr lang="en-US" sz="1700" dirty="0"/>
+          </a:p>
+          <a:p>
+            <a:pPr algn="l" lvl="1" marL="685800" indent="-342900">
+              <a:spcAft>
+                <a:spcPts val="400"/>
+              </a:spcAft>
+              <a:buSzPct val="100000"/>
+              <a:buChar char="▪"/>
+            </a:pPr>
+            <a:r>
+              <a:rPr lang="en-US" sz="1450" dirty="0">
+                <a:solidFill>
+                  <a:srgbClr val="595959"/>
+                </a:solidFill>
+              </a:rPr>
+              <a:t>The spacing preference for a second copy is identical: best at ±20–40 bp, decaying by ±150 bp, with no class difference at any distance (all FDR &gt; 0.58).</a:t>
             </a:r>
             <a:endParaRPr lang="en-US" sz="1700" dirty="0"/>
           </a:p>
@@ -9361,6 +9424,363 @@
             <a:fld id="{F7021451-1387-4CA6-816F-3879F97B5CBC}" type="slidenum">
               <a:rPr b="0" lang="en-US"/>
               <a:t>18</a:t>
+            </a:fld>
+            <a:endParaRPr lang="en-US"/>
+          </a:p>
+        </p:txBody>
+      </p:sp>
+    </p:spTree>
+  </p:cSld>
+  <p:clrMapOvr>
+    <a:masterClrMapping/>
+  </p:clrMapOvr>
+</p:sld>
+</file>
+
+<file path=ppt/slides/slide19.xml><?xml version="1.0" encoding="utf-8"?>
+<p:sld xmlns:a="http://schemas.openxmlformats.org/drawingml/2006/main" xmlns:r="http://schemas.openxmlformats.org/officeDocument/2006/relationships" xmlns:p="http://schemas.openxmlformats.org/presentationml/2006/main">
+  <p:cSld name="Slide 19">
+    <p:spTree>
+      <p:nvGrpSpPr>
+        <p:cNvPr id="1" name=""/>
+        <p:cNvGrpSpPr/>
+        <p:nvPr/>
+      </p:nvGrpSpPr>
+      <p:grpSpPr>
+        <a:xfrm>
+          <a:off x="0" y="0"/>
+          <a:ext cx="0" cy="0"/>
+          <a:chOff x="0" y="0"/>
+          <a:chExt cx="0" cy="0"/>
+        </a:xfrm>
+      </p:grpSpPr>
+      <p:sp>
+        <p:nvSpPr>
+          <p:cNvPr id="2" name="Text 0"/>
+          <p:cNvSpPr/>
+          <p:nvPr>
+            <p:ph idx="100" type="title" hasCustomPrompt="1"/>
+          </p:nvPr>
+        </p:nvSpPr>
+        <p:spPr>
+          <a:xfrm>
+            <a:off x="502920" y="274320"/>
+            <a:ext cx="11155680" cy="731520"/>
+          </a:xfrm>
+          <a:prstGeom prst="rect">
+            <a:avLst/>
+          </a:prstGeom>
+          <a:noFill/>
+          <a:ln/>
+        </p:spPr>
+        <p:txBody>
+          <a:bodyPr wrap="square" rtlCol="0" anchor="ctr"/>
+          <a:lstStyle/>
+          <a:p>
+            <a:pPr algn="l" indent="0" marL="0">
+              <a:buNone/>
+            </a:pPr>
+            <a:r>
+              <a:rPr lang="en-US" sz="2800" b="1" dirty="0">
+                <a:solidFill>
+                  <a:schemeClr val="tx1"/>
+                </a:solidFill>
+              </a:rPr>
+              <a:t>How this sits with the MPRA work</a:t>
+            </a:r>
+            <a:endParaRPr lang="en-US" sz="2800" dirty="0"/>
+          </a:p>
+        </p:txBody>
+      </p:sp>
+      <p:sp>
+        <p:nvSpPr>
+          <p:cNvPr id="3" name="Text 0"/>
+          <p:cNvSpPr/>
+          <p:nvPr>
+            <p:ph idx="101" type="body" hasCustomPrompt="1"/>
+          </p:nvPr>
+        </p:nvSpPr>
+        <p:spPr>
+          <a:xfrm>
+            <a:off x="502920" y="1234440"/>
+            <a:ext cx="11155680" cy="5029200"/>
+          </a:xfrm>
+          <a:prstGeom prst="rect">
+            <a:avLst/>
+          </a:prstGeom>
+          <a:noFill/>
+          <a:ln/>
+        </p:spPr>
+        <p:txBody>
+          <a:bodyPr wrap="square" rtlCol="0" anchor="t"/>
+          <a:lstStyle/>
+          <a:p>
+            <a:pPr algn="l" marL="342900" indent="-342900">
+              <a:spcBef>
+                <a:spcPts val="1100"/>
+              </a:spcBef>
+              <a:spcAft>
+                <a:spcPts val="300"/>
+              </a:spcAft>
+              <a:buSzPct val="100000"/>
+              <a:buChar char="•"/>
+            </a:pPr>
+            <a:r>
+              <a:rPr lang="en-US" sz="1700" b="1" dirty="0">
+                <a:solidFill>
+                  <a:srgbClr val="111111"/>
+                </a:solidFill>
+              </a:rPr>
+              <a:t>Agrees</a:t>
+            </a:r>
+            <a:endParaRPr lang="en-US" sz="1700" dirty="0"/>
+          </a:p>
+          <a:p>
+            <a:pPr algn="l" lvl="1" marL="685800" indent="-342900">
+              <a:spcAft>
+                <a:spcPts val="400"/>
+              </a:spcAft>
+              <a:buSzPct val="100000"/>
+              <a:buChar char="▪"/>
+            </a:pPr>
+            <a:r>
+              <a:rPr lang="en-US" sz="1450" dirty="0">
+                <a:solidFill>
+                  <a:srgbClr val="595959"/>
+                </a:solidFill>
+              </a:rPr>
+              <a:t>Dynamic elements have weaker endogenous chromatin, and depend on context rather than being sequence-autonomous.</a:t>
+            </a:r>
+            <a:endParaRPr lang="en-US" sz="1700" dirty="0"/>
+          </a:p>
+          <a:p>
+            <a:pPr algn="l" lvl="1" marL="685800" indent="-342900">
+              <a:spcAft>
+                <a:spcPts val="400"/>
+              </a:spcAft>
+              <a:buSzPct val="100000"/>
+              <a:buChar char="▪"/>
+            </a:pPr>
+            <a:r>
+              <a:rPr lang="en-US" sz="1450" dirty="0">
+                <a:solidFill>
+                  <a:srgbClr val="595959"/>
+                </a:solidFill>
+              </a:rPr>
+              <a:t>Shuffling the AP-1 core alone does not separate pooled Stable from pooled Dynamic.</a:t>
+            </a:r>
+            <a:endParaRPr lang="en-US" sz="1700" dirty="0"/>
+          </a:p>
+          <a:p>
+            <a:pPr algn="l" lvl="1" marL="685800" indent="-342900">
+              <a:spcAft>
+                <a:spcPts val="400"/>
+              </a:spcAft>
+              <a:buSzPct val="100000"/>
+              <a:buChar char="▪"/>
+            </a:pPr>
+            <a:r>
+              <a:rPr lang="en-US" sz="1450" dirty="0">
+                <a:solidFill>
+                  <a:srgbClr val="595959"/>
+                </a:solidFill>
+              </a:rPr>
+              <a:t>Age-gained elements behave like Stable ones — here, at their own AP-1 motif.</a:t>
+            </a:r>
+            <a:endParaRPr lang="en-US" sz="1700" dirty="0"/>
+          </a:p>
+          <a:p>
+            <a:pPr algn="l" lvl="1" marL="685800" indent="-342900">
+              <a:spcAft>
+                <a:spcPts val="400"/>
+              </a:spcAft>
+              <a:buSzPct val="100000"/>
+              <a:buChar char="▪"/>
+            </a:pPr>
+            <a:r>
+              <a:rPr lang="en-US" sz="1450" dirty="0">
+                <a:solidFill>
+                  <a:srgbClr val="595959"/>
+                </a:solidFill>
+              </a:rPr>
+              <a:t>C/EBP is the strongest partner motif at fibroblast AP-1 sites (net −0.71 log2, ahead of MEF2 and NFI).</a:t>
+            </a:r>
+            <a:endParaRPr lang="en-US" sz="1700" dirty="0"/>
+          </a:p>
+          <a:p>
+            <a:pPr algn="l" marL="342900" indent="-342900">
+              <a:spcBef>
+                <a:spcPts val="1100"/>
+              </a:spcBef>
+              <a:spcAft>
+                <a:spcPts val="300"/>
+              </a:spcAft>
+              <a:buSzPct val="100000"/>
+              <a:buChar char="•"/>
+            </a:pPr>
+            <a:r>
+              <a:rPr lang="en-US" sz="1700" b="1" dirty="0">
+                <a:solidFill>
+                  <a:srgbClr val="111111"/>
+                </a:solidFill>
+              </a:rPr>
+              <a:t>Adds</a:t>
+            </a:r>
+            <a:endParaRPr lang="en-US" sz="1700" dirty="0"/>
+          </a:p>
+          <a:p>
+            <a:pPr algn="l" lvl="1" marL="685800" indent="-342900">
+              <a:spcAft>
+                <a:spcPts val="400"/>
+              </a:spcAft>
+              <a:buSzPct val="100000"/>
+              <a:buChar char="▪"/>
+            </a:pPr>
+            <a:r>
+              <a:rPr lang="en-US" sz="1450" dirty="0">
+                <a:solidFill>
+                  <a:srgbClr val="595959"/>
+                </a:solidFill>
+              </a:rPr>
+              <a:t>The class difference is a whole-peak property, not a 170 bp one.</a:t>
+            </a:r>
+            <a:endParaRPr lang="en-US" sz="1700" dirty="0"/>
+          </a:p>
+          <a:p>
+            <a:pPr algn="l" lvl="1" marL="685800" indent="-342900">
+              <a:spcAft>
+                <a:spcPts val="400"/>
+              </a:spcAft>
+              <a:buSzPct val="100000"/>
+              <a:buChar char="▪"/>
+            </a:pPr>
+            <a:r>
+              <a:rPr lang="en-US" sz="1450" dirty="0">
+                <a:solidFill>
+                  <a:srgbClr val="595959"/>
+                </a:solidFill>
+              </a:rPr>
+              <a:t>Within Dynamic, the AP-1-LOSING sites are the ones that are sequence-different, with age and with exercise alike; the gaining ones look like Stable. Direction, not stimulus.</a:t>
+            </a:r>
+            <a:endParaRPr lang="en-US" sz="1700" dirty="0"/>
+          </a:p>
+          <a:p>
+            <a:pPr algn="l" lvl="1" marL="685800" indent="-342900">
+              <a:spcAft>
+                <a:spcPts val="400"/>
+              </a:spcAft>
+              <a:buSzPct val="100000"/>
+              <a:buChar char="▪"/>
+            </a:pPr>
+            <a:r>
+              <a:rPr lang="en-US" sz="1450" dirty="0">
+                <a:solidFill>
+                  <a:srgbClr val="595959"/>
+                </a:solidFill>
+              </a:rPr>
+              <a:t>Unprompted, AlphaGenome makes the AP-1 core the most important 10 bp in over half of all sites — equally in both classes. The classes differ in how much of the dependence sits there, not in whether AP-1 leads.</a:t>
+            </a:r>
+            <a:endParaRPr lang="en-US" sz="1700" dirty="0"/>
+          </a:p>
+          <a:p>
+            <a:pPr algn="l" lvl="1" marL="685800" indent="-342900">
+              <a:spcAft>
+                <a:spcPts val="400"/>
+              </a:spcAft>
+              <a:buSzPct val="100000"/>
+              <a:buChar char="▪"/>
+            </a:pPr>
+            <a:r>
+              <a:rPr lang="en-US" sz="1450" dirty="0">
+                <a:solidFill>
+                  <a:srgbClr val="595959"/>
+                </a:solidFill>
+              </a:rPr>
+              <a:t>Dynamic sites spread their dependence slightly wider, and it survives accessibility matching (33.1% vs 31.3% within ±25 bp, P = 0.006) — the sequence-model version of “attention is more distributed at dynamic enhancers”.</a:t>
+            </a:r>
+            <a:endParaRPr lang="en-US" sz="1700" dirty="0"/>
+          </a:p>
+          <a:p>
+            <a:pPr algn="l" marL="342900" indent="-342900">
+              <a:spcBef>
+                <a:spcPts val="1100"/>
+              </a:spcBef>
+              <a:spcAft>
+                <a:spcPts val="300"/>
+              </a:spcAft>
+              <a:buSzPct val="100000"/>
+              <a:buChar char="•"/>
+            </a:pPr>
+            <a:r>
+              <a:rPr lang="en-US" sz="1700" b="1" dirty="0">
+                <a:solidFill>
+                  <a:srgbClr val="111111"/>
+                </a:solidFill>
+              </a:rPr>
+              <a:t>Keep off the slides</a:t>
+            </a:r>
+            <a:endParaRPr lang="en-US" sz="1700" dirty="0"/>
+          </a:p>
+          <a:p>
+            <a:pPr algn="l" lvl="1" marL="685800" indent="-342900">
+              <a:spcAft>
+                <a:spcPts val="400"/>
+              </a:spcAft>
+              <a:buSzPct val="100000"/>
+              <a:buChar char="▪"/>
+            </a:pPr>
+            <a:r>
+              <a:rPr lang="en-US" sz="1450" dirty="0">
+                <a:solidFill>
+                  <a:srgbClr val="595959"/>
+                </a:solidFill>
+              </a:rPr>
+              <a:t>Our in-situ 170 bp shuffle costs Stable sites more (−2.51 vs −1.96, p = 4e-40), the opposite of the MPRA flank result. Different assay — episomal activity vs chromatin accessibility — but it reads as a contradiction.</a:t>
+            </a:r>
+            <a:endParaRPr lang="en-US" sz="1700" dirty="0"/>
+          </a:p>
+        </p:txBody>
+      </p:sp>
+      <p:sp>
+        <p:nvSpPr>
+          <p:cNvPr id="25" name="Slide Number Placeholder 0"/>
+          <p:cNvSpPr>
+            <a:spLocks noGrp="1"/>
+          </p:cNvSpPr>
+          <p:nvPr>
+            <p:ph type="sldNum" sz="quarter" idx="4294967295"/>
+          </p:nvPr>
+        </p:nvSpPr>
+        <p:spPr>
+          <a:xfrm>
+            <a:off x="11658600" y="6446520"/>
+            <a:ext cx="800000" cy="300000"/>
+          </a:xfrm>
+          <a:prstGeom prst="rect">
+            <a:avLst/>
+          </a:prstGeom>
+          <a:extLst>
+            <a:ext uri="{C572A759-6A51-4108-AA02-DFA0A04FC94B}">
+              <ma14:wrappingTextBoxFlag xmlns:ma14="http://schemas.microsoft.com/office/mac/drawingml/2011/main" val="0"/>
+            </a:ext>
+          </a:extLst>
+        </p:spPr>
+        <p:txBody>
+          <a:bodyPr/>
+          <a:lstStyle>
+            <a:lvl1pPr>
+              <a:defRPr sz="1000">
+                <a:solidFill>
+                  <a:srgbClr val="A6A6A6"/>
+                </a:solidFill>
+              </a:defRPr>
+            </a:lvl1pPr>
+          </a:lstStyle>
+          <a:p>
+            <a:pPr algn="l"/>
+            <a:fld id="{F7021451-1387-4CA6-816F-3879F97B5CBC}" type="slidenum">
+              <a:rPr b="0" lang="en-US"/>
+              <a:t>19</a:t>
             </a:fld>
             <a:endParaRPr lang="en-US"/>
           </a:p>

--- a/Analysis/AP1_fibroblast_lab_meeting.pptx
+++ b/Analysis/AP1_fibroblast_lab_meeting.pptx
@@ -1806,9 +1806,19 @@
           <a:p>
             <a:r>
               <a:rPr lang="en-US" dirty="0"/>
-              <a:t>Per-donor medians over 20 hosts: Stable +4.65 log2 (25x), Dynamic pooled +2.35 (5.1x), p = 1.5e-5.
-By class, as plotted: Stable 25x, Age Up 6.3x, Age Down 6.1x, Exercise Down 4.6x, Exercise Up 4.4x. Every Dynamic class sits well below Stable and they are close to each other, which is why pooling them is fair here.
-IMPORTANT CAVEAT, be ready for this question: the donors are not matched on accessibility - Stable donors come from loci about 1.8x more accessible (measured ATAC: 32.2 vs 18.0 CPM/kb). Matching on MEASURED fibroblast ATAC (model-independent), the residual Stable advantage is +0.84 +- 0.30 log2, i.e. about 1.8x, p = 0.005 (covariance adjustment, 224 donors). The 47 matched pairs point the same way (+0.99) but are underpowered (p = 0.13). So: direction solid, magnitude about a third to a half of the raw gap. Do not defend 25x vs 5x as a sequence effect.
+              <a:t>THE BASELINE CHANGED, and it matters. This used to be scored against a dinucleotide-shuffled copy of the element in the same host. 20_host_native.py predicted the hosts empty for the first time and showed two things:
+  - the hosts really are closed: 0.0078 predicted accessibility, against 4.78 for a real AP-1 site in its own locus, about 600x lower. The 'closed background' assumption now has evidence behind it.
+  - a scrambled insert is NOT neutral: it opens these hosts about 3.3x on its own. So the old contrast understated what inserting an element does.
+The scramble effect is the same in every class (3.4x Stable vs 3.3x Dynamic, p = 0.46 at peak width), so the CLASS comparison barely moves: 4.7x apart against the scramble, 5.0x against the empty host. Only the absolute numbers change, and they roughly triple.
+NUMBERS, fold over the empty host:
+  170 bp   Stable 8.1x · Age Down 6.5x · Exercise Down 5.8x · Exercise Up 5.5x · Age Up 5.4x   (Stable vs Dynamic 1.4x, p = 0.002)
+  peak     Stable 64.7x · Age Up 18.8x · Age Down 16.6x · Exercise Down 11.6x · Exercise Up 10.8x   (5.0x, p = 0.00019)
+Scaling slope, per doubling of transplanted bp: Stable 1.17 in log2 (2.2x), Dynamic 0.48 (1.4x).
+Against the scramble, if anyone wants the conservative version: peak width Stable 22.8x vs Dynamic 4.9x, p = 1.7e-5.
+Two things to have ready:
+  - Stable peaks are slightly wider (median 1,000 vs 900 bp) so they do get marginally more sequence, but the difference is 11% and not significant (p = 0.16), nowhere near enough to make a 5-fold gap.
+  - at 170 bp the scramble control is itself class-dependent (3.7x vs 3.3x, p = 0.012), which it is not at peak width. Another reason the 170 bp row is the weaker readout, beyond being the smaller effect.
+This is the same conclusion the swap slide reaches from the other direction: at 170 bp almost nothing transfers, at peak width the element carries 73-84% of its own level. Two designs, one message - what opens the chromatin is spread across the whole peak, which is why a 170 bp assay struggles to see it.
 Also worth knowing: 0 of 50 Stable donors lack a measured ATAC peak, against 5-8 per Dynamic class.</a:t>
             </a:r>
             <a:endParaRPr lang="en-US" dirty="0"/>
@@ -17379,7 +17389,7 @@
                   <a:schemeClr val="tx1"/>
                 </a:solidFill>
               </a:rPr>
-              <a:t>A Stable element opens closed chromatin on its own</a:t>
+              <a:t>The more of a Stable element you move, the more it builds</a:t>
             </a:r>
             <a:endParaRPr lang="en-US" sz="2800" dirty="0"/>
           </a:p>
@@ -17415,7 +17425,7 @@
                   <a:srgbClr val="595959"/>
                 </a:solidFill>
               </a:rPr>
-              <a:t>Each element moved into 20 closed backgrounds and scored against the same sequence shuffled; one point per donor, whole-peak width. Box, median and IQR, whiskers 1.5 × IQR; 50 donors per class — Up = AP-1 gained, Down = AP-1 lost; Mann–Whitney, Stable against the four Dynamic classes pooled.</a:t>
+              <a:t>Each element written into the centre of the same 20 closed hosts, scored against that host left empty — a true no-insert baseline. Two widths: the 170 bp MPRA window and the whole peak (median 930 bp). Median over 20 hosts per donor, then over 50 donors per class; bars bootstrap 95% CI. Both axes log.</a:t>
             </a:r>
             <a:endParaRPr lang="en-US" sz="1250" dirty="0"/>
           </a:p>
@@ -17437,8 +17447,8 @@
         </p:blipFill>
         <p:spPr>
           <a:xfrm>
-            <a:off x="1171501" y="1335024"/>
-            <a:ext cx="9818518" cy="3566160"/>
+            <a:off x="1468033" y="1335024"/>
+            <a:ext cx="9225454" cy="3566160"/>
           </a:xfrm>
           <a:prstGeom prst="rect">
             <a:avLst/>
@@ -17500,7 +17510,7 @@
                   <a:srgbClr val="111111"/>
                 </a:solidFill>
               </a:rPr>
-              <a:t>Stable AP-1 elements carry enough sequence to build their own accessible site. Dynamic ones do not — they need the neighbourhood they came from. That is "context, not sequence autonomy", shown by moving the sequence.</a:t>
+              <a:t>It is not all-or-nothing, it scales — and the two classes scale differently. Every doubling of transplanted sequence multiplies a Stable element's effect by 2.2× but a Dynamic one's by only 1.4×. At 170 bp the classes are nearly the same (8× against 6×); give them their whole peak and they are five-fold apart.</a:t>
             </a:r>
             <a:endParaRPr lang="en-US" sz="1700" dirty="0"/>
           </a:p>
@@ -17536,7 +17546,7 @@
                   <a:srgbClr val="595959"/>
                 </a:solidFill>
               </a:rPr>
-              <a:t>Stable donors also come from more accessible loci. Holding that constant (measured ATAC, 224 donors) a Stable element still gains 1.8× more than a Dynamic one, P = 0.005 — the direction holds, but about a third of the gap above is accessibility rather than sequence.</a:t>
+              <a:t>Stable donors also come from more accessible loci. Holding that constant (measured ATAC, 224 donors) a Stable element still gains 1.8× more than a Dynamic one, P = 0.005; the 47 strictly matched pairs point the same way but are underpowered (P = 0.13). Direction solid, and about a third of the raw gap is accessibility rather than sequence.</a:t>
             </a:r>
             <a:endParaRPr lang="en-US" sz="1300" dirty="0"/>
           </a:p>

--- a/Analysis/AP1_fibroblast_lab_meeting.pptx
+++ b/Analysis/AP1_fibroblast_lab_meeting.pptx
@@ -24,9 +24,10 @@
     <p:sldId id="272" r:id="rId18"/>
     <p:sldId id="273" r:id="rId19"/>
     <p:sldId id="274" r:id="rId20"/>
+    <p:sldId id="275" r:id="rId21"/>
   </p:sldIdLst>
   <p:notesMasterIdLst>
-    <p:notesMasterId r:id="rId21"/>
+    <p:notesMasterId r:id="rId22"/>
   </p:notesMasterIdLst>
   <p:sldSz cx="12192000" cy="6858000"/>
   <p:notesSz cx="6858000" cy="12192000"/>
@@ -1261,11 +1262,17 @@
           <a:p>
             <a:r>
               <a:rPr lang="en-US" dirty="0"/>
-              <a:t>Keep this one in the back pocket; it is the first question any of these results gets.
-The size of the confound: Stable sites are about twice as accessible as Dynamic ones (measured native 32.2 vs 18.0 in the swap donors; predicted 10.5 vs 8.5 across the scan sites).
-Two different things are matched on in different places, and it is worth being straight about it: the transplant matches on MEASURED native accessibility, the density and top-tile analyses on PREDICTED. Matching on predicted is the more conservative choice for a prediction-based readout, because it removes the thing the model itself would key on.
-Not matched, and said so on the slides: the three alternative density readings. The pooled Stable-vs-Dynamic contrast they re-draw is the one that survives matching; the five-class split has not been matched, because Exercise Down has 115 sites and would not support it.
-Why 1:1 matching keeps coming out underpowered: a caliper of 0.1 log10 on populations that differ roughly two-fold throws most of the Dynamic sites away. Where the n allows it (860 pairs in the scan) it is the better test; where it does not (47 donor pairs in the transplant) the covariate adjustment uses every site and is the one to quote.</a:t>
+              <a:t>Source: Scripts/62_fb_partner_families_by_class.py, from the per-site per-family net effects. AP-1 itself is excluded - it has its own slide. A family needs 25 sites in a class to be ranked there.
+FULL TOP-FIVE BY CLASS (net log2, share of that class's sites carrying the footprint):
+  Stable (1180): CEBP -0.69 (11.0%) · NFI -0.36 (28.0%) · E-box -0.27 (49.0%) · heat shock -0.19 (33.4%) · TEAD -0.16 (14.7%)
+  Age Up (613): CEBP -1.25 (4.2%) · NFI -0.89 (15.2%) · E-box -0.39 (33.0%) · TALE homeodomain -0.33 (4.2%) · heat shock -0.28 (18.9%)
+  Age Down (212): CTCF/cohesin -0.56 (15.1%) · NFI -0.38 (14.2%) · E-box -0.34 (30.7%) · heat shock -0.27 (26.4%) · ETS -0.20 (21.7%)
+  Exercise Up (240): NFI -0.70 (15.4%) · E-box -0.44 (21.2%) · heat shock -0.23 (17.1%) · NF-kB/Rel -0.22 (12.1%) · NFAT -0.20 (10.8%)
+  Exercise Down (115): heat shock -0.69 (24.3%) · E-box -0.51 (38.3%) · KLF/SP -0.10 (62.6%) · Other -0.09 (73.9%) · Zn finger -0.07 (66.1%)
+DO NOT quote CTCF/cohesin topping Age Down as a result. n = 32 and the interval is [-2.14, -0.15] - the point estimate is unstable and it does not differ from Stable (FDR 0.059).
+How this sits with the specificity slide: that one says no class differs at its partner motifs, pooling all families into one number per site, and that remains true. Splitting by family is a finer and much more multiply-tested question, and it turns up three isolated hits. The two statements are consistent; the per-family one is the weaker evidence.
+The heat-shock result in Exercise Down is the one worth a sentence out loud: the sites that lose AP-1 with exercise are the ones whose remaining dependence sits on stress-response motifs. That is a hypothesis the bench could test, not something this analysis establishes.
+If someone asks what the SLIDING SCAN says about other motifs: nothing directly, and it is still running. Once it lands, the analysis that would answer it is to intersect the significant 10 bp windows with the TOBIAS footprint positions and ask which families sit under the secondary peaks. Worth doing, not yet done.</a:t>
             </a:r>
             <a:endParaRPr lang="en-US" dirty="0"/>
           </a:p>
@@ -1353,8 +1360,11 @@
           <a:p>
             <a:r>
               <a:rPr lang="en-US" dirty="0"/>
-              <a:t>From the fibroblast titration, 2,359 sites, 860 accessibility-matched pairs (caliper 0.1 log10). This slide is the argument for why the matched analysis is worth doing - two of the five largest raw class differences in the titration were entirely explained by the accessibility gap.
-Age Down is the outlier again, consistently with the other arms: one base of the core changed -0.62 vs Stable -0.83; motif gone -0.72 vs -1.07.</a:t>
+              <a:t>Keep this one in the back pocket; it is the first question any of these results gets.
+The size of the confound: Stable sites are about twice as accessible as Dynamic ones (measured native 32.2 vs 18.0 in the swap donors; predicted 10.5 vs 8.5 across the scan sites).
+Two different things are matched on in different places, and it is worth being straight about it: the transplant matches on MEASURED native accessibility, the density and top-tile analyses on PREDICTED. Matching on predicted is the more conservative choice for a prediction-based readout, because it removes the thing the model itself would key on.
+Not matched, and said so on the slides: the three alternative density readings. The pooled Stable-vs-Dynamic contrast they re-draw is the one that survives matching; the five-class split has not been matched, because Exercise Down has 115 sites and would not support it.
+Why 1:1 matching keeps coming out underpowered: a caliper of 0.1 log10 on populations that differ roughly two-fold throws most of the Dynamic sites away. Where the n allows it (860 pairs in the scan) it is the better test; where it does not (47 donor pairs in the transplant) the covariate adjustment uses every site and is the one to quote.</a:t>
             </a:r>
             <a:endParaRPr lang="en-US" dirty="0"/>
           </a:p>
@@ -1442,8 +1452,8 @@
           <a:p>
             <a:r>
               <a:rPr lang="en-US" dirty="0"/>
-              <a:t>If the flank question comes up: the MPRA destroys the flanks of a 170 bp fragment on a plasmid and reads transcription; we move an intact ~0.8 kb element into closed chromatin and read accessibility. There is no chromatin to open in the MPRA. The honest shared conclusion is that neither assay finds much class information in 170 bp.
-Everything here is predicted accessibility from a model fine-tuned on our own fibroblast ATAC, not a measurement, and not the MPRA-trained probe used in the manuscript.</a:t>
+              <a:t>From the fibroblast titration, 2,359 sites, 860 accessibility-matched pairs (caliper 0.1 log10). This slide is the argument for why the matched analysis is worth doing - two of the five largest raw class differences in the titration were entirely explained by the accessibility gap.
+Age Down is the outlier again, consistently with the other arms: one base of the core changed -0.62 vs Stable -0.83; motif gone -0.72 vs -1.07.</a:t>
             </a:r>
             <a:endParaRPr lang="en-US" dirty="0"/>
           </a:p>
@@ -1579,6 +1589,95 @@
 </p:notes>
 </file>
 
+<file path=ppt/notesSlides/notesSlide20.xml><?xml version="1.0" encoding="utf-8"?>
+<p:notes xmlns:a="http://schemas.openxmlformats.org/drawingml/2006/main" xmlns:r="http://schemas.openxmlformats.org/officeDocument/2006/relationships" xmlns:p="http://schemas.openxmlformats.org/presentationml/2006/main">
+  <p:cSld>
+    <p:spTree>
+      <p:nvGrpSpPr>
+        <p:cNvPr id="1" name=""/>
+        <p:cNvGrpSpPr/>
+        <p:nvPr/>
+      </p:nvGrpSpPr>
+      <p:grpSpPr>
+        <a:xfrm>
+          <a:off x="0" y="0"/>
+          <a:ext cx="0" cy="0"/>
+          <a:chOff x="0" y="0"/>
+          <a:chExt cx="0" cy="0"/>
+        </a:xfrm>
+      </p:grpSpPr>
+      <p:sp>
+        <p:nvSpPr>
+          <p:cNvPr id="2" name="Slide Image Placeholder 1"/>
+          <p:cNvSpPr>
+            <a:spLocks noGrp="1" noRot="1" noChangeAspect="1"/>
+          </p:cNvSpPr>
+          <p:nvPr>
+            <p:ph type="sldImg"/>
+          </p:nvPr>
+        </p:nvSpPr>
+        <p:spPr/>
+      </p:sp>
+      <p:sp>
+        <p:nvSpPr>
+          <p:cNvPr id="3" name="Notes Placeholder 2"/>
+          <p:cNvSpPr>
+            <a:spLocks noGrp="1"/>
+          </p:cNvSpPr>
+          <p:nvPr>
+            <p:ph type="body" idx="1"/>
+          </p:nvPr>
+        </p:nvSpPr>
+        <p:spPr/>
+        <p:txBody>
+          <a:bodyPr/>
+          <a:lstStyle/>
+          <a:p>
+            <a:r>
+              <a:rPr lang="en-US" dirty="0"/>
+              <a:t>If the flank question comes up: the MPRA destroys the flanks of a 170 bp fragment on a plasmid and reads transcription; we move an intact ~0.8 kb element into closed chromatin and read accessibility. There is no chromatin to open in the MPRA. The honest shared conclusion is that neither assay finds much class information in 170 bp.
+Everything here is predicted accessibility from a model fine-tuned on our own fibroblast ATAC, not a measurement, and not the MPRA-trained probe used in the manuscript.</a:t>
+            </a:r>
+            <a:endParaRPr lang="en-US" dirty="0"/>
+          </a:p>
+        </p:txBody>
+      </p:sp>
+      <p:sp>
+        <p:nvSpPr>
+          <p:cNvPr id="4" name="Slide Number Placeholder 3"/>
+          <p:cNvSpPr>
+            <a:spLocks noGrp="1"/>
+          </p:cNvSpPr>
+          <p:nvPr>
+            <p:ph type="sldNum" sz="quarter" idx="10"/>
+          </p:nvPr>
+        </p:nvSpPr>
+        <p:spPr/>
+        <p:txBody>
+          <a:bodyPr/>
+          <a:lstStyle/>
+          <a:p>
+            <a:fld id="{F7021451-1387-4CA6-816F-3879F97B5CBC}" type="slidenum">
+              <a:rPr lang="en-US"/>
+              <a:t>20</a:t>
+            </a:fld>
+            <a:endParaRPr lang="en-US"/>
+          </a:p>
+        </p:txBody>
+      </p:sp>
+    </p:spTree>
+    <p:extLst>
+      <p:ext uri="{BB962C8B-B14F-4D97-AF65-F5344CB8AC3E}">
+        <p14:creationId xmlns:p14="http://schemas.microsoft.com/office/powerpoint/2010/main" val="1024086991"/>
+      </p:ext>
+    </p:extLst>
+  </p:cSld>
+  <p:clrMapOvr>
+    <a:masterClrMapping/>
+  </p:clrMapOvr>
+</p:notes>
+</file>
+
 <file path=ppt/notesSlides/notesSlide3.xml><?xml version="1.0" encoding="utf-8"?>
 <p:notes xmlns:a="http://schemas.openxmlformats.org/drawingml/2006/main" xmlns:r="http://schemas.openxmlformats.org/officeDocument/2006/relationships" xmlns:p="http://schemas.openxmlformats.org/presentationml/2006/main">
   <p:cSld>
@@ -2184,7 +2283,7 @@
               <a:rPr lang="en-US" dirty="0"/>
               <a:t>2,340 sites. Own AP-1 motif, median log2, with BH-adjusted P against Stable:
   Stable -1.21 (n=1179, reference) · Age Up -1.19 (n=605, FDR 0.93) · Age Down -0.78 (n=209, FDR 9.1e-5) · Exercise Up -1.14 (n=233, FDR 0.49) · Exercise Down -0.96 (n=114, FDR 0.043)
-Partner motifs, net of control: -0.20 / -0.25 / -0.22 / -0.23 / -0.33. Nothing survives BH (smallest adjusted 0.20), so the deficit is AP-1-specific in both losing classes. So the deficit is AP-1-specific, not general weakness. No single partner family takes over: nothing survives FDR in the per-family split.
+Partner motifs, net of control: -0.20 / -0.25 / -0.22 / -0.23 / -0.33. Nothing survives BH (smallest adjusted 0.20), Split by FAMILY rather than pooled there is a backup slide: the same three families lead everywhere (C/EBP, NFI, E-box bHLH), and three isolated class differences appear, the solid one being heat-shock motifs in Exercise Down. That is a finer and far more multiply-tested question; it does not contradict the null here. so the deficit is AP-1-specific in both losing classes. So the deficit is AP-1-specific, not general weakness. No single partner family takes over: nothing survives FDR in the per-family split.
 Agreement: pooled Stable vs Dynamic at the motif is a null, which matches the manuscript's core-scramble result (no class difference). Age-gained being on par with Stable is the sequence-level version of 'age-gained reporter activity on par with stable'.
 Note on the split: a site that is dynamic with both age and exercise is counted under its age class, so the two exercise groups are the sites that are NOT also age-dynamic. Splitting them is what separated the old 'other Dynamic' group (p = 0.055, n = 347) into Exercise Up, which looks like Stable, and Exercise Down, which does not.
 Caveat: the own-AP-1 bar has no matched control, because one at distance 0 would overlap the motif. That inflates AP-1 relative to the partners in every class equally, so the class comparison is unaffected.</a:t>
@@ -8863,7 +8962,7 @@
                   <a:schemeClr val="tx1"/>
                 </a:solidFill>
               </a:rPr>
-              <a:t>Is it just that Dynamic sites are less accessible?</a:t>
+              <a:t>Besides AP-1, which partners do the sites lean on?</a:t>
             </a:r>
             <a:endParaRPr lang="en-US" sz="2800" dirty="0"/>
           </a:p>
@@ -8908,7 +9007,7 @@
                   <a:srgbClr val="111111"/>
                 </a:solidFill>
               </a:rPr>
-              <a:t>Immune by design — both numbers come from the same window of the same site, so accessibility cancels</a:t>
+              <a:t>The same three lead in every class — only how hard they are leaned on changes</a:t>
             </a:r>
             <a:endParaRPr lang="en-US" sz="1700" dirty="0"/>
           </a:p>
@@ -8926,7 +9025,25 @@
                   <a:srgbClr val="595959"/>
                 </a:solidFill>
               </a:rPr>
-              <a:t>Motif specificity · partner share. Partners are also net of a width- and distance-matched footprint-free control at the mirrored distance. No between-class matching needed, and none done.</a:t>
+              <a:t>Stable sites: C/EBP −0.69 (in 11% of them) · NFI −0.36 (28%) · E-box bHLH −0.27 (49%) · heat shock −0.19 (33%) · TEAD −0.16 (15%). Net log2 after subtracting a width- and distance-matched footprint-free control.</a:t>
+            </a:r>
+            <a:endParaRPr lang="en-US" sz="1700" dirty="0"/>
+          </a:p>
+          <a:p>
+            <a:pPr algn="l" lvl="1" marL="685800" indent="-342900">
+              <a:spcAft>
+                <a:spcPts val="400"/>
+              </a:spcAft>
+              <a:buSzPct val="100000"/>
+              <a:buChar char="▪"/>
+            </a:pPr>
+            <a:r>
+              <a:rPr lang="en-US" sz="1450" dirty="0">
+                <a:solidFill>
+                  <a:srgbClr val="595959"/>
+                </a:solidFill>
+              </a:rPr>
+              <a:t>C/EBP hits hardest where it is present; E-box bHLH is the one most sites actually carry.</a:t>
             </a:r>
             <a:endParaRPr lang="en-US" sz="1700" dirty="0"/>
           </a:p>
@@ -8947,7 +9064,7 @@
                   <a:srgbClr val="111111"/>
                 </a:solidFill>
               </a:rPr>
-              <a:t>Accessibility is in the model, not matched out</a:t>
+              <a:t>Three class differences clear BH, and only one of them convincingly</a:t>
             </a:r>
             <a:endParaRPr lang="en-US" sz="1700" dirty="0"/>
           </a:p>
@@ -8965,7 +9082,25 @@
                   <a:srgbClr val="595959"/>
                 </a:solidFill>
               </a:rPr>
-              <a:t>The swap: each class's regression conditions on both the donor's and the recipient's own native level, so the carried share is already net of the gap.</a:t>
+              <a:t>Exercise Down leans far harder on heat-shock / stress motifs: −0.69 against Stable's −0.19, FDR 0.005.</a:t>
+            </a:r>
+            <a:endParaRPr lang="en-US" sz="1700" dirty="0"/>
+          </a:p>
+          <a:p>
+            <a:pPr algn="l" lvl="1" marL="685800" indent="-342900">
+              <a:spcAft>
+                <a:spcPts val="400"/>
+              </a:spcAft>
+              <a:buSzPct val="100000"/>
+              <a:buChar char="▪"/>
+            </a:pPr>
+            <a:r>
+              <a:rPr lang="en-US" sz="1450" dirty="0">
+                <a:solidFill>
+                  <a:srgbClr val="595959"/>
+                </a:solidFill>
+              </a:rPr>
+              <a:t>Age Up leans harder on NFI (−0.89 against −0.36) and on KLF/SP, both FDR 0.045 — but see the caveat.</a:t>
             </a:r>
             <a:endParaRPr lang="en-US" sz="1700" dirty="0"/>
           </a:p>
@@ -8986,7 +9121,7 @@
                   <a:srgbClr val="111111"/>
                 </a:solidFill>
               </a:rPr>
-              <a:t>Matched explicitly, and survived</a:t>
+              <a:t>Read these as leads, not findings</a:t>
             </a:r>
             <a:endParaRPr lang="en-US" sz="1700" dirty="0"/>
           </a:p>
@@ -9004,28 +9139,7 @@
                   <a:srgbClr val="595959"/>
                 </a:solidFill>
               </a:rPr>
-              <a:t>Importance density: 33.8% vs 30.7% unmatched, and 33.1% vs 31.3% over 860 pairs matched on predicted accessibility (caliper 0.1 log10), +1.5 points, P = 0.006.</a:t>
-            </a:r>
-            <a:endParaRPr lang="en-US" sz="1700" dirty="0"/>
-          </a:p>
-          <a:p>
-            <a:pPr algn="l" marL="342900" indent="-342900">
-              <a:spcBef>
-                <a:spcPts val="1100"/>
-              </a:spcBef>
-              <a:spcAft>
-                <a:spcPts val="300"/>
-              </a:spcAft>
-              <a:buSzPct val="100000"/>
-              <a:buChar char="•"/>
-            </a:pPr>
-            <a:r>
-              <a:rPr lang="en-US" sz="1700" b="1" dirty="0">
-                <a:solidFill>
-                  <a:srgbClr val="111111"/>
-                </a:solidFill>
-              </a:rPr>
-              <a:t>Checked, and only survives as a covariate adjustment</a:t>
+              <a:t>BH is applied within each class. Across all four Dynamic classes and every family together, only the heat-shock result would survive; the two at 0.045 would not.</a:t>
             </a:r>
             <a:endParaRPr lang="en-US" sz="1700" dirty="0"/>
           </a:p>
@@ -9043,28 +9157,7 @@
                   <a:srgbClr val="595959"/>
                 </a:solidFill>
               </a:rPr>
-              <a:t>Transplant: every element goes into the same 20 hosts, so the host cancels — but the donor classes are not matched. 1:1 matching leaves only 47 pairs and is not significant (P = 0.13). The covariate-adjusted gap is: +0.84 ± 0.30 log2, about 1.8x, P = 0.005. Quote that one.</a:t>
-            </a:r>
-            <a:endParaRPr lang="en-US" sz="1700" dirty="0"/>
-          </a:p>
-          <a:p>
-            <a:pPr algn="l" marL="342900" indent="-342900">
-              <a:spcBef>
-                <a:spcPts val="1100"/>
-              </a:spcBef>
-              <a:spcAft>
-                <a:spcPts val="300"/>
-              </a:spcAft>
-              <a:buSzPct val="100000"/>
-              <a:buChar char="•"/>
-            </a:pPr>
-            <a:r>
-              <a:rPr lang="en-US" sz="1700" b="1" dirty="0">
-                <a:solidFill>
-                  <a:srgbClr val="111111"/>
-                </a:solidFill>
-              </a:rPr>
-              <a:t>Checked, and did not survive</a:t>
+              <a:t>Footprint detection needs signal, so a less accessible class yields fewer called partners — the share column moves with accessibility even where the net effect does not.</a:t>
             </a:r>
             <a:endParaRPr lang="en-US" sz="1700" dirty="0"/>
           </a:p>
@@ -9082,7 +9175,7 @@
                   <a:srgbClr val="595959"/>
                 </a:solidFill>
               </a:rPr>
-              <a:t>Top tile is a core tile: 56% vs 52% raw, matched McNemar P = 0.21 — reported as a shared fact, not a class difference. Plus the two titration results on the next slide.</a:t>
+              <a:t>This is the partner shuffle, not the scan. A tile or sliding scan says which 10 bp matter, never what is written there.</a:t>
             </a:r>
             <a:endParaRPr lang="en-US" sz="1700" dirty="0"/>
           </a:p>
@@ -9190,7 +9283,7 @@
                   <a:schemeClr val="tx1"/>
                 </a:solidFill>
               </a:rPr>
-              <a:t>Two differences that turned out to be accessibility</a:t>
+              <a:t>Is it just that Dynamic sites are less accessible?</a:t>
             </a:r>
             <a:endParaRPr lang="en-US" sz="2800" dirty="0"/>
           </a:p>
@@ -9235,7 +9328,7 @@
                   <a:srgbClr val="111111"/>
                 </a:solidFill>
               </a:rPr>
-              <a:t>A second AP-1 copy looked worth more to Dynamic sites</a:t>
+              <a:t>Immune by design — both numbers come from the same window of the same site, so accessibility cancels</a:t>
             </a:r>
             <a:endParaRPr lang="en-US" sz="1700" dirty="0"/>
           </a:p>
@@ -9253,7 +9346,7 @@
                   <a:srgbClr val="595959"/>
                 </a:solidFill>
               </a:rPr>
-              <a:t>+0.72 vs +0.60 log2, p &lt; 1e-4 — matched on accessibility, p = 0.93. Gone.</a:t>
+              <a:t>Motif specificity · partner share. Partners are also net of a width- and distance-matched footprint-free control at the mirrored distance. No between-class matching needed, and none done.</a:t>
             </a:r>
             <a:endParaRPr lang="en-US" sz="1700" dirty="0"/>
           </a:p>
@@ -9274,7 +9367,7 @@
                   <a:srgbClr val="111111"/>
                 </a:solidFill>
               </a:rPr>
-              <a:t>Upgrading an imperfect core to a perfect TGAGTCA looked worth more to Dynamic sites</a:t>
+              <a:t>Accessibility is in the model, not matched out</a:t>
             </a:r>
             <a:endParaRPr lang="en-US" sz="1700" dirty="0"/>
           </a:p>
@@ -9292,7 +9385,7 @@
                   <a:srgbClr val="595959"/>
                 </a:solidFill>
               </a:rPr>
-              <a:t>+0.66 vs +0.52, p &lt; 1e-4 — matched, p = 0.94. Gone.</a:t>
+              <a:t>The swap: each class's regression conditions on both the donor's and the recipient's own native level, so the carried share is already net of the gap.</a:t>
             </a:r>
             <a:endParaRPr lang="en-US" sz="1700" dirty="0"/>
           </a:p>
@@ -9313,7 +9406,7 @@
                   <a:srgbClr val="111111"/>
                 </a:solidFill>
               </a:rPr>
-              <a:t>What did survive matching</a:t>
+              <a:t>Matched explicitly, and survived</a:t>
             </a:r>
             <a:endParaRPr lang="en-US" sz="1700" dirty="0"/>
           </a:p>
@@ -9331,7 +9424,7 @@
                   <a:srgbClr val="595959"/>
                 </a:solidFill>
               </a:rPr>
-              <a:t>Destroying the motif costs Dynamic sites less (+0.16, p = 4e-4); the dose-response is shallower; relocating the motif helps them less.</a:t>
+              <a:t>Importance density: 33.8% vs 30.7% unmatched, and 33.1% vs 31.3% over 860 pairs matched on predicted accessibility (caliper 0.1 log10), +1.5 points, P = 0.006.</a:t>
             </a:r>
             <a:endParaRPr lang="en-US" sz="1700" dirty="0"/>
           </a:p>
@@ -9352,7 +9445,7 @@
                   <a:srgbClr val="111111"/>
                 </a:solidFill>
               </a:rPr>
-              <a:t>Two clean negatives worth having</a:t>
+              <a:t>Checked, and only survives as a covariate adjustment</a:t>
             </a:r>
             <a:endParaRPr lang="en-US" sz="1700" dirty="0"/>
           </a:p>
@@ -9370,7 +9463,28 @@
                   <a:srgbClr val="595959"/>
                 </a:solidFill>
               </a:rPr>
-              <a:t>Reverse-complementing the whole motif costs nothing in either class (-0.03 log2, p = 0.89) — expected for a palindromic TRE, and a sanity check on the head.</a:t>
+              <a:t>Transplant: every element goes into the same 20 hosts, so the host cancels — but the donor classes are not matched. 1:1 matching leaves only 47 pairs and is not significant (P = 0.13). The covariate-adjusted gap is: +0.84 ± 0.30 log2, about 1.8x, P = 0.005. Quote that one.</a:t>
+            </a:r>
+            <a:endParaRPr lang="en-US" sz="1700" dirty="0"/>
+          </a:p>
+          <a:p>
+            <a:pPr algn="l" marL="342900" indent="-342900">
+              <a:spcBef>
+                <a:spcPts val="1100"/>
+              </a:spcBef>
+              <a:spcAft>
+                <a:spcPts val="300"/>
+              </a:spcAft>
+              <a:buSzPct val="100000"/>
+              <a:buChar char="•"/>
+            </a:pPr>
+            <a:r>
+              <a:rPr lang="en-US" sz="1700" b="1" dirty="0">
+                <a:solidFill>
+                  <a:srgbClr val="111111"/>
+                </a:solidFill>
+              </a:rPr>
+              <a:t>Checked, and did not survive</a:t>
             </a:r>
             <a:endParaRPr lang="en-US" sz="1700" dirty="0"/>
           </a:p>
@@ -9388,7 +9502,7 @@
                   <a:srgbClr val="595959"/>
                 </a:solidFill>
               </a:rPr>
-              <a:t>The spacing preference for a second copy is identical: best at ±20–40 bp, decaying by ±150 bp, with no class difference at any distance (all FDR &gt; 0.58).</a:t>
+              <a:t>Top tile is a core tile: 56% vs 52% raw, matched McNemar P = 0.21 — reported as a shared fact, not a class difference. Plus the two titration results on the next slide.</a:t>
             </a:r>
             <a:endParaRPr lang="en-US" sz="1700" dirty="0"/>
           </a:p>
@@ -9496,7 +9610,7 @@
                   <a:schemeClr val="tx1"/>
                 </a:solidFill>
               </a:rPr>
-              <a:t>How this sits with the MPRA work</a:t>
+              <a:t>Two differences that turned out to be accessibility</a:t>
             </a:r>
             <a:endParaRPr lang="en-US" sz="2800" dirty="0"/>
           </a:p>
@@ -9541,7 +9655,7 @@
                   <a:srgbClr val="111111"/>
                 </a:solidFill>
               </a:rPr>
-              <a:t>Agrees</a:t>
+              <a:t>A second AP-1 copy looked worth more to Dynamic sites</a:t>
             </a:r>
             <a:endParaRPr lang="en-US" sz="1700" dirty="0"/>
           </a:p>
@@ -9559,61 +9673,7 @@
                   <a:srgbClr val="595959"/>
                 </a:solidFill>
               </a:rPr>
-              <a:t>Dynamic elements have weaker endogenous chromatin, and depend on context rather than being sequence-autonomous.</a:t>
-            </a:r>
-            <a:endParaRPr lang="en-US" sz="1700" dirty="0"/>
-          </a:p>
-          <a:p>
-            <a:pPr algn="l" lvl="1" marL="685800" indent="-342900">
-              <a:spcAft>
-                <a:spcPts val="400"/>
-              </a:spcAft>
-              <a:buSzPct val="100000"/>
-              <a:buChar char="▪"/>
-            </a:pPr>
-            <a:r>
-              <a:rPr lang="en-US" sz="1450" dirty="0">
-                <a:solidFill>
-                  <a:srgbClr val="595959"/>
-                </a:solidFill>
-              </a:rPr>
-              <a:t>Shuffling the AP-1 core alone does not separate pooled Stable from pooled Dynamic.</a:t>
-            </a:r>
-            <a:endParaRPr lang="en-US" sz="1700" dirty="0"/>
-          </a:p>
-          <a:p>
-            <a:pPr algn="l" lvl="1" marL="685800" indent="-342900">
-              <a:spcAft>
-                <a:spcPts val="400"/>
-              </a:spcAft>
-              <a:buSzPct val="100000"/>
-              <a:buChar char="▪"/>
-            </a:pPr>
-            <a:r>
-              <a:rPr lang="en-US" sz="1450" dirty="0">
-                <a:solidFill>
-                  <a:srgbClr val="595959"/>
-                </a:solidFill>
-              </a:rPr>
-              <a:t>Age-gained elements behave like Stable ones — here, at their own AP-1 motif.</a:t>
-            </a:r>
-            <a:endParaRPr lang="en-US" sz="1700" dirty="0"/>
-          </a:p>
-          <a:p>
-            <a:pPr algn="l" lvl="1" marL="685800" indent="-342900">
-              <a:spcAft>
-                <a:spcPts val="400"/>
-              </a:spcAft>
-              <a:buSzPct val="100000"/>
-              <a:buChar char="▪"/>
-            </a:pPr>
-            <a:r>
-              <a:rPr lang="en-US" sz="1450" dirty="0">
-                <a:solidFill>
-                  <a:srgbClr val="595959"/>
-                </a:solidFill>
-              </a:rPr>
-              <a:t>C/EBP is the strongest partner motif at fibroblast AP-1 sites (net −0.71 log2, ahead of MEF2 and NFI).</a:t>
+              <a:t>+0.72 vs +0.60 log2, p &lt; 1e-4 — matched on accessibility, p = 0.93. Gone.</a:t>
             </a:r>
             <a:endParaRPr lang="en-US" sz="1700" dirty="0"/>
           </a:p>
@@ -9634,7 +9694,7 @@
                   <a:srgbClr val="111111"/>
                 </a:solidFill>
               </a:rPr>
-              <a:t>Adds</a:t>
+              <a:t>Upgrading an imperfect core to a perfect TGAGTCA looked worth more to Dynamic sites</a:t>
             </a:r>
             <a:endParaRPr lang="en-US" sz="1700" dirty="0"/>
           </a:p>
@@ -9652,61 +9712,7 @@
                   <a:srgbClr val="595959"/>
                 </a:solidFill>
               </a:rPr>
-              <a:t>The class difference is a whole-peak property, not a 170 bp one.</a:t>
-            </a:r>
-            <a:endParaRPr lang="en-US" sz="1700" dirty="0"/>
-          </a:p>
-          <a:p>
-            <a:pPr algn="l" lvl="1" marL="685800" indent="-342900">
-              <a:spcAft>
-                <a:spcPts val="400"/>
-              </a:spcAft>
-              <a:buSzPct val="100000"/>
-              <a:buChar char="▪"/>
-            </a:pPr>
-            <a:r>
-              <a:rPr lang="en-US" sz="1450" dirty="0">
-                <a:solidFill>
-                  <a:srgbClr val="595959"/>
-                </a:solidFill>
-              </a:rPr>
-              <a:t>Within Dynamic, the AP-1-LOSING sites are the ones that are sequence-different, with age and with exercise alike; the gaining ones look like Stable. Direction, not stimulus.</a:t>
-            </a:r>
-            <a:endParaRPr lang="en-US" sz="1700" dirty="0"/>
-          </a:p>
-          <a:p>
-            <a:pPr algn="l" lvl="1" marL="685800" indent="-342900">
-              <a:spcAft>
-                <a:spcPts val="400"/>
-              </a:spcAft>
-              <a:buSzPct val="100000"/>
-              <a:buChar char="▪"/>
-            </a:pPr>
-            <a:r>
-              <a:rPr lang="en-US" sz="1450" dirty="0">
-                <a:solidFill>
-                  <a:srgbClr val="595959"/>
-                </a:solidFill>
-              </a:rPr>
-              <a:t>Unprompted, AlphaGenome makes the AP-1 core the most important 10 bp in over half of all sites — equally in both classes. The classes differ in how much of the dependence sits there, not in whether AP-1 leads.</a:t>
-            </a:r>
-            <a:endParaRPr lang="en-US" sz="1700" dirty="0"/>
-          </a:p>
-          <a:p>
-            <a:pPr algn="l" lvl="1" marL="685800" indent="-342900">
-              <a:spcAft>
-                <a:spcPts val="400"/>
-              </a:spcAft>
-              <a:buSzPct val="100000"/>
-              <a:buChar char="▪"/>
-            </a:pPr>
-            <a:r>
-              <a:rPr lang="en-US" sz="1450" dirty="0">
-                <a:solidFill>
-                  <a:srgbClr val="595959"/>
-                </a:solidFill>
-              </a:rPr>
-              <a:t>Dynamic sites spread their dependence slightly wider, and it survives accessibility matching (33.1% vs 31.3% within ±25 bp, P = 0.006) — the sequence-model version of “attention is more distributed at dynamic enhancers”.</a:t>
+              <a:t>+0.66 vs +0.52, p &lt; 1e-4 — matched, p = 0.94. Gone.</a:t>
             </a:r>
             <a:endParaRPr lang="en-US" sz="1700" dirty="0"/>
           </a:p>
@@ -9727,7 +9733,7 @@
                   <a:srgbClr val="111111"/>
                 </a:solidFill>
               </a:rPr>
-              <a:t>Keep off the slides</a:t>
+              <a:t>What did survive matching</a:t>
             </a:r>
             <a:endParaRPr lang="en-US" sz="1700" dirty="0"/>
           </a:p>
@@ -9745,7 +9751,64 @@
                   <a:srgbClr val="595959"/>
                 </a:solidFill>
               </a:rPr>
-              <a:t>Our in-situ 170 bp shuffle costs Stable sites more (−2.51 vs −1.96, p = 4e-40), the opposite of the MPRA flank result. Different assay — episomal activity vs chromatin accessibility — but it reads as a contradiction.</a:t>
+              <a:t>Destroying the motif costs Dynamic sites less (+0.16, p = 4e-4); the dose-response is shallower; relocating the motif helps them less.</a:t>
+            </a:r>
+            <a:endParaRPr lang="en-US" sz="1700" dirty="0"/>
+          </a:p>
+          <a:p>
+            <a:pPr algn="l" marL="342900" indent="-342900">
+              <a:spcBef>
+                <a:spcPts val="1100"/>
+              </a:spcBef>
+              <a:spcAft>
+                <a:spcPts val="300"/>
+              </a:spcAft>
+              <a:buSzPct val="100000"/>
+              <a:buChar char="•"/>
+            </a:pPr>
+            <a:r>
+              <a:rPr lang="en-US" sz="1700" b="1" dirty="0">
+                <a:solidFill>
+                  <a:srgbClr val="111111"/>
+                </a:solidFill>
+              </a:rPr>
+              <a:t>Two clean negatives worth having</a:t>
+            </a:r>
+            <a:endParaRPr lang="en-US" sz="1700" dirty="0"/>
+          </a:p>
+          <a:p>
+            <a:pPr algn="l" lvl="1" marL="685800" indent="-342900">
+              <a:spcAft>
+                <a:spcPts val="400"/>
+              </a:spcAft>
+              <a:buSzPct val="100000"/>
+              <a:buChar char="▪"/>
+            </a:pPr>
+            <a:r>
+              <a:rPr lang="en-US" sz="1450" dirty="0">
+                <a:solidFill>
+                  <a:srgbClr val="595959"/>
+                </a:solidFill>
+              </a:rPr>
+              <a:t>Reverse-complementing the whole motif costs nothing in either class (-0.03 log2, p = 0.89) — expected for a palindromic TRE, and a sanity check on the head.</a:t>
+            </a:r>
+            <a:endParaRPr lang="en-US" sz="1700" dirty="0"/>
+          </a:p>
+          <a:p>
+            <a:pPr algn="l" lvl="1" marL="685800" indent="-342900">
+              <a:spcAft>
+                <a:spcPts val="400"/>
+              </a:spcAft>
+              <a:buSzPct val="100000"/>
+              <a:buChar char="▪"/>
+            </a:pPr>
+            <a:r>
+              <a:rPr lang="en-US" sz="1450" dirty="0">
+                <a:solidFill>
+                  <a:srgbClr val="595959"/>
+                </a:solidFill>
+              </a:rPr>
+              <a:t>The spacing preference for a second copy is identical: best at ±20–40 bp, decaying by ±150 bp, with no class difference at any distance (all FDR &gt; 0.58).</a:t>
             </a:r>
             <a:endParaRPr lang="en-US" sz="1700" dirty="0"/>
           </a:p>
@@ -13065,6 +13128,363 @@
             <a:fld id="{F7021451-1387-4CA6-816F-3879F97B5CBC}" type="slidenum">
               <a:rPr b="0" lang="en-US"/>
               <a:t>2</a:t>
+            </a:fld>
+            <a:endParaRPr lang="en-US"/>
+          </a:p>
+        </p:txBody>
+      </p:sp>
+    </p:spTree>
+  </p:cSld>
+  <p:clrMapOvr>
+    <a:masterClrMapping/>
+  </p:clrMapOvr>
+</p:sld>
+</file>
+
+<file path=ppt/slides/slide20.xml><?xml version="1.0" encoding="utf-8"?>
+<p:sld xmlns:a="http://schemas.openxmlformats.org/drawingml/2006/main" xmlns:r="http://schemas.openxmlformats.org/officeDocument/2006/relationships" xmlns:p="http://schemas.openxmlformats.org/presentationml/2006/main">
+  <p:cSld name="Slide 20">
+    <p:spTree>
+      <p:nvGrpSpPr>
+        <p:cNvPr id="1" name=""/>
+        <p:cNvGrpSpPr/>
+        <p:nvPr/>
+      </p:nvGrpSpPr>
+      <p:grpSpPr>
+        <a:xfrm>
+          <a:off x="0" y="0"/>
+          <a:ext cx="0" cy="0"/>
+          <a:chOff x="0" y="0"/>
+          <a:chExt cx="0" cy="0"/>
+        </a:xfrm>
+      </p:grpSpPr>
+      <p:sp>
+        <p:nvSpPr>
+          <p:cNvPr id="2" name="Text 0"/>
+          <p:cNvSpPr/>
+          <p:nvPr>
+            <p:ph idx="100" type="title" hasCustomPrompt="1"/>
+          </p:nvPr>
+        </p:nvSpPr>
+        <p:spPr>
+          <a:xfrm>
+            <a:off x="502920" y="274320"/>
+            <a:ext cx="11155680" cy="731520"/>
+          </a:xfrm>
+          <a:prstGeom prst="rect">
+            <a:avLst/>
+          </a:prstGeom>
+          <a:noFill/>
+          <a:ln/>
+        </p:spPr>
+        <p:txBody>
+          <a:bodyPr wrap="square" rtlCol="0" anchor="ctr"/>
+          <a:lstStyle/>
+          <a:p>
+            <a:pPr algn="l" indent="0" marL="0">
+              <a:buNone/>
+            </a:pPr>
+            <a:r>
+              <a:rPr lang="en-US" sz="2800" b="1" dirty="0">
+                <a:solidFill>
+                  <a:schemeClr val="tx1"/>
+                </a:solidFill>
+              </a:rPr>
+              <a:t>How this sits with the MPRA work</a:t>
+            </a:r>
+            <a:endParaRPr lang="en-US" sz="2800" dirty="0"/>
+          </a:p>
+        </p:txBody>
+      </p:sp>
+      <p:sp>
+        <p:nvSpPr>
+          <p:cNvPr id="3" name="Text 0"/>
+          <p:cNvSpPr/>
+          <p:nvPr>
+            <p:ph idx="101" type="body" hasCustomPrompt="1"/>
+          </p:nvPr>
+        </p:nvSpPr>
+        <p:spPr>
+          <a:xfrm>
+            <a:off x="502920" y="1234440"/>
+            <a:ext cx="11155680" cy="5029200"/>
+          </a:xfrm>
+          <a:prstGeom prst="rect">
+            <a:avLst/>
+          </a:prstGeom>
+          <a:noFill/>
+          <a:ln/>
+        </p:spPr>
+        <p:txBody>
+          <a:bodyPr wrap="square" rtlCol="0" anchor="t"/>
+          <a:lstStyle/>
+          <a:p>
+            <a:pPr algn="l" marL="342900" indent="-342900">
+              <a:spcBef>
+                <a:spcPts val="1100"/>
+              </a:spcBef>
+              <a:spcAft>
+                <a:spcPts val="300"/>
+              </a:spcAft>
+              <a:buSzPct val="100000"/>
+              <a:buChar char="•"/>
+            </a:pPr>
+            <a:r>
+              <a:rPr lang="en-US" sz="1700" b="1" dirty="0">
+                <a:solidFill>
+                  <a:srgbClr val="111111"/>
+                </a:solidFill>
+              </a:rPr>
+              <a:t>Agrees</a:t>
+            </a:r>
+            <a:endParaRPr lang="en-US" sz="1700" dirty="0"/>
+          </a:p>
+          <a:p>
+            <a:pPr algn="l" lvl="1" marL="685800" indent="-342900">
+              <a:spcAft>
+                <a:spcPts val="400"/>
+              </a:spcAft>
+              <a:buSzPct val="100000"/>
+              <a:buChar char="▪"/>
+            </a:pPr>
+            <a:r>
+              <a:rPr lang="en-US" sz="1450" dirty="0">
+                <a:solidFill>
+                  <a:srgbClr val="595959"/>
+                </a:solidFill>
+              </a:rPr>
+              <a:t>Dynamic elements have weaker endogenous chromatin, and depend on context rather than being sequence-autonomous.</a:t>
+            </a:r>
+            <a:endParaRPr lang="en-US" sz="1700" dirty="0"/>
+          </a:p>
+          <a:p>
+            <a:pPr algn="l" lvl="1" marL="685800" indent="-342900">
+              <a:spcAft>
+                <a:spcPts val="400"/>
+              </a:spcAft>
+              <a:buSzPct val="100000"/>
+              <a:buChar char="▪"/>
+            </a:pPr>
+            <a:r>
+              <a:rPr lang="en-US" sz="1450" dirty="0">
+                <a:solidFill>
+                  <a:srgbClr val="595959"/>
+                </a:solidFill>
+              </a:rPr>
+              <a:t>Shuffling the AP-1 core alone does not separate pooled Stable from pooled Dynamic.</a:t>
+            </a:r>
+            <a:endParaRPr lang="en-US" sz="1700" dirty="0"/>
+          </a:p>
+          <a:p>
+            <a:pPr algn="l" lvl="1" marL="685800" indent="-342900">
+              <a:spcAft>
+                <a:spcPts val="400"/>
+              </a:spcAft>
+              <a:buSzPct val="100000"/>
+              <a:buChar char="▪"/>
+            </a:pPr>
+            <a:r>
+              <a:rPr lang="en-US" sz="1450" dirty="0">
+                <a:solidFill>
+                  <a:srgbClr val="595959"/>
+                </a:solidFill>
+              </a:rPr>
+              <a:t>Age-gained elements behave like Stable ones — here, at their own AP-1 motif.</a:t>
+            </a:r>
+            <a:endParaRPr lang="en-US" sz="1700" dirty="0"/>
+          </a:p>
+          <a:p>
+            <a:pPr algn="l" lvl="1" marL="685800" indent="-342900">
+              <a:spcAft>
+                <a:spcPts val="400"/>
+              </a:spcAft>
+              <a:buSzPct val="100000"/>
+              <a:buChar char="▪"/>
+            </a:pPr>
+            <a:r>
+              <a:rPr lang="en-US" sz="1450" dirty="0">
+                <a:solidFill>
+                  <a:srgbClr val="595959"/>
+                </a:solidFill>
+              </a:rPr>
+              <a:t>C/EBP is the strongest partner motif at fibroblast AP-1 sites (net −0.71 log2, ahead of MEF2 and NFI).</a:t>
+            </a:r>
+            <a:endParaRPr lang="en-US" sz="1700" dirty="0"/>
+          </a:p>
+          <a:p>
+            <a:pPr algn="l" marL="342900" indent="-342900">
+              <a:spcBef>
+                <a:spcPts val="1100"/>
+              </a:spcBef>
+              <a:spcAft>
+                <a:spcPts val="300"/>
+              </a:spcAft>
+              <a:buSzPct val="100000"/>
+              <a:buChar char="•"/>
+            </a:pPr>
+            <a:r>
+              <a:rPr lang="en-US" sz="1700" b="1" dirty="0">
+                <a:solidFill>
+                  <a:srgbClr val="111111"/>
+                </a:solidFill>
+              </a:rPr>
+              <a:t>Adds</a:t>
+            </a:r>
+            <a:endParaRPr lang="en-US" sz="1700" dirty="0"/>
+          </a:p>
+          <a:p>
+            <a:pPr algn="l" lvl="1" marL="685800" indent="-342900">
+              <a:spcAft>
+                <a:spcPts val="400"/>
+              </a:spcAft>
+              <a:buSzPct val="100000"/>
+              <a:buChar char="▪"/>
+            </a:pPr>
+            <a:r>
+              <a:rPr lang="en-US" sz="1450" dirty="0">
+                <a:solidFill>
+                  <a:srgbClr val="595959"/>
+                </a:solidFill>
+              </a:rPr>
+              <a:t>The class difference is a whole-peak property, not a 170 bp one.</a:t>
+            </a:r>
+            <a:endParaRPr lang="en-US" sz="1700" dirty="0"/>
+          </a:p>
+          <a:p>
+            <a:pPr algn="l" lvl="1" marL="685800" indent="-342900">
+              <a:spcAft>
+                <a:spcPts val="400"/>
+              </a:spcAft>
+              <a:buSzPct val="100000"/>
+              <a:buChar char="▪"/>
+            </a:pPr>
+            <a:r>
+              <a:rPr lang="en-US" sz="1450" dirty="0">
+                <a:solidFill>
+                  <a:srgbClr val="595959"/>
+                </a:solidFill>
+              </a:rPr>
+              <a:t>Within Dynamic, the AP-1-LOSING sites are the ones that are sequence-different, with age and with exercise alike; the gaining ones look like Stable. Direction, not stimulus.</a:t>
+            </a:r>
+            <a:endParaRPr lang="en-US" sz="1700" dirty="0"/>
+          </a:p>
+          <a:p>
+            <a:pPr algn="l" lvl="1" marL="685800" indent="-342900">
+              <a:spcAft>
+                <a:spcPts val="400"/>
+              </a:spcAft>
+              <a:buSzPct val="100000"/>
+              <a:buChar char="▪"/>
+            </a:pPr>
+            <a:r>
+              <a:rPr lang="en-US" sz="1450" dirty="0">
+                <a:solidFill>
+                  <a:srgbClr val="595959"/>
+                </a:solidFill>
+              </a:rPr>
+              <a:t>Unprompted, AlphaGenome makes the AP-1 core the most important 10 bp in over half of all sites — equally in both classes. The classes differ in how much of the dependence sits there, not in whether AP-1 leads.</a:t>
+            </a:r>
+            <a:endParaRPr lang="en-US" sz="1700" dirty="0"/>
+          </a:p>
+          <a:p>
+            <a:pPr algn="l" lvl="1" marL="685800" indent="-342900">
+              <a:spcAft>
+                <a:spcPts val="400"/>
+              </a:spcAft>
+              <a:buSzPct val="100000"/>
+              <a:buChar char="▪"/>
+            </a:pPr>
+            <a:r>
+              <a:rPr lang="en-US" sz="1450" dirty="0">
+                <a:solidFill>
+                  <a:srgbClr val="595959"/>
+                </a:solidFill>
+              </a:rPr>
+              <a:t>Dynamic sites spread their dependence slightly wider, and it survives accessibility matching (33.1% vs 31.3% within ±25 bp, P = 0.006) — the sequence-model version of “attention is more distributed at dynamic enhancers”.</a:t>
+            </a:r>
+            <a:endParaRPr lang="en-US" sz="1700" dirty="0"/>
+          </a:p>
+          <a:p>
+            <a:pPr algn="l" marL="342900" indent="-342900">
+              <a:spcBef>
+                <a:spcPts val="1100"/>
+              </a:spcBef>
+              <a:spcAft>
+                <a:spcPts val="300"/>
+              </a:spcAft>
+              <a:buSzPct val="100000"/>
+              <a:buChar char="•"/>
+            </a:pPr>
+            <a:r>
+              <a:rPr lang="en-US" sz="1700" b="1" dirty="0">
+                <a:solidFill>
+                  <a:srgbClr val="111111"/>
+                </a:solidFill>
+              </a:rPr>
+              <a:t>Keep off the slides</a:t>
+            </a:r>
+            <a:endParaRPr lang="en-US" sz="1700" dirty="0"/>
+          </a:p>
+          <a:p>
+            <a:pPr algn="l" lvl="1" marL="685800" indent="-342900">
+              <a:spcAft>
+                <a:spcPts val="400"/>
+              </a:spcAft>
+              <a:buSzPct val="100000"/>
+              <a:buChar char="▪"/>
+            </a:pPr>
+            <a:r>
+              <a:rPr lang="en-US" sz="1450" dirty="0">
+                <a:solidFill>
+                  <a:srgbClr val="595959"/>
+                </a:solidFill>
+              </a:rPr>
+              <a:t>Our in-situ 170 bp shuffle costs Stable sites more (−2.51 vs −1.96, p = 4e-40), the opposite of the MPRA flank result. Different assay — episomal activity vs chromatin accessibility — but it reads as a contradiction.</a:t>
+            </a:r>
+            <a:endParaRPr lang="en-US" sz="1700" dirty="0"/>
+          </a:p>
+        </p:txBody>
+      </p:sp>
+      <p:sp>
+        <p:nvSpPr>
+          <p:cNvPr id="25" name="Slide Number Placeholder 0"/>
+          <p:cNvSpPr>
+            <a:spLocks noGrp="1"/>
+          </p:cNvSpPr>
+          <p:nvPr>
+            <p:ph type="sldNum" sz="quarter" idx="4294967295"/>
+          </p:nvPr>
+        </p:nvSpPr>
+        <p:spPr>
+          <a:xfrm>
+            <a:off x="11658600" y="6446520"/>
+            <a:ext cx="800000" cy="300000"/>
+          </a:xfrm>
+          <a:prstGeom prst="rect">
+            <a:avLst/>
+          </a:prstGeom>
+          <a:extLst>
+            <a:ext uri="{C572A759-6A51-4108-AA02-DFA0A04FC94B}">
+              <ma14:wrappingTextBoxFlag xmlns:ma14="http://schemas.microsoft.com/office/mac/drawingml/2011/main" val="0"/>
+            </a:ext>
+          </a:extLst>
+        </p:spPr>
+        <p:txBody>
+          <a:bodyPr/>
+          <a:lstStyle>
+            <a:lvl1pPr>
+              <a:defRPr sz="1000">
+                <a:solidFill>
+                  <a:srgbClr val="A6A6A6"/>
+                </a:solidFill>
+              </a:defRPr>
+            </a:lvl1pPr>
+          </a:lstStyle>
+          <a:p>
+            <a:pPr algn="l"/>
+            <a:fld id="{F7021451-1387-4CA6-816F-3879F97B5CBC}" type="slidenum">
+              <a:rPr b="0" lang="en-US"/>
+              <a:t>20</a:t>
             </a:fld>
             <a:endParaRPr lang="en-US"/>
           </a:p>
